--- a/slides/One-Prompt-Many-Workers-Light.pptx
+++ b/slides/One-Prompt-Many-Workers-Light.pptx
@@ -1408,7 +1408,7 @@
           <a:p>
             <a:r>
               <a:rPr lang="en-US" dirty="0"/>
-              <a:t>Left to right. One prompt hits a planner. The planner decides who should work and hands back a typed crew. Each worker is the same model wearing a different hat. A synthesizer folds every answer into one plan. Fan out, fan in. Nobody hardcoded those roles.</a:t>
+              <a:t>This is the shape of tonight's crew, and it is not a line. Copy and design start together. Design finishes first, and instead of sitting idle it helps: it hands the copywriter a tone hint. Both feed the builder. The builder hands the page to the skeptic. And then the important edge, the dashed one: the skeptic's critique loops all the way back to the copywriter, who rewrites the headline. You will watch that happen on the screen in a minute. Output from one agent becoming input to another, including backwards. That is the web.</a:t>
             </a:r>
             <a:endParaRPr lang="en-US" dirty="0"/>
           </a:p>
@@ -9357,7 +9357,7 @@
                 <a:ea typeface="Calibri" pitchFamily="34" charset="-122"/>
                 <a:cs typeface="Calibri" pitchFamily="34" charset="-120"/>
               </a:rPr>
-              <a:t>The orchestrator-worker pattern. Then we run it, live.</a:t>
+              <a:t>Agents that help each other, and a critique that loops back. Then we run it, live.</a:t>
             </a:r>
             <a:endParaRPr lang="en-US" sz="1700" dirty="0"/>
           </a:p>
@@ -9442,7 +9442,7 @@
         </p:nvSpPr>
         <p:spPr>
           <a:xfrm>
-            <a:off x="841248" y="1051560"/>
+            <a:off x="841248" y="1005840"/>
             <a:ext cx="10058400" cy="822960"/>
           </a:xfrm>
           <a:prstGeom prst="rect">
@@ -9467,7 +9467,7 @@
                 <a:ea typeface="Arial" pitchFamily="34" charset="-122"/>
                 <a:cs typeface="Arial" pitchFamily="34" charset="-120"/>
               </a:rPr>
-              <a:t>Plan. Dispatch. </a:t>
+              <a:t>Not a pipeline. </a:t>
             </a:r>
             <a:pPr indent="0" marL="0">
               <a:buNone/>
@@ -9481,7 +9481,7 @@
                 <a:ea typeface="Arial" pitchFamily="34" charset="-122"/>
                 <a:cs typeface="Arial" pitchFamily="34" charset="-120"/>
               </a:rPr>
-              <a:t>Synthesize.</a:t>
+              <a:t>A web.</a:t>
             </a:r>
             <a:endParaRPr lang="en-US" sz="3200" dirty="0"/>
           </a:p>
@@ -9489,29 +9489,461 @@
       </p:sp>
       <p:sp>
         <p:nvSpPr>
-          <p:cNvPr id="4" name="Shape 2"/>
-          <p:cNvSpPr/>
-          <p:nvPr/>
-        </p:nvSpPr>
-        <p:spPr>
-          <a:xfrm>
-            <a:off x="841248" y="3017520"/>
-            <a:ext cx="1554480" cy="822960"/>
-          </a:xfrm>
-          <a:prstGeom prst="roundRect">
-            <a:avLst>
-              <a:gd name="adj" fmla="val 11111"/>
-            </a:avLst>
-          </a:prstGeom>
-          <a:solidFill>
-            <a:srgbClr val="F5F7FA"/>
-          </a:solidFill>
-          <a:ln w="16510">
+          <p:cNvPr id="4" name="Text 2"/>
+          <p:cNvSpPr/>
+          <p:nvPr/>
+        </p:nvSpPr>
+        <p:spPr>
+          <a:xfrm>
+            <a:off x="841248" y="1783080"/>
+            <a:ext cx="6766560" cy="457200"/>
+          </a:xfrm>
+          <a:prstGeom prst="rect">
+            <a:avLst/>
+          </a:prstGeom>
+          <a:noFill/>
+          <a:ln/>
+        </p:spPr>
+        <p:txBody>
+          <a:bodyPr wrap="square" rtlCol="0" anchor="ctr"/>
+          <a:lstStyle/>
+          <a:p>
+            <a:pPr indent="0" marL="0">
+              <a:buNone/>
+            </a:pPr>
+            <a:r>
+              <a:rPr lang="en-US" sz="1550" dirty="0">
+                <a:solidFill>
+                  <a:srgbClr val="666C7A"/>
+                </a:solidFill>
+                <a:latin typeface="Calibri" pitchFamily="34" charset="0"/>
+                <a:ea typeface="Calibri" pitchFamily="34" charset="-122"/>
+                <a:cs typeface="Calibri" pitchFamily="34" charset="-120"/>
+              </a:rPr>
+              <a:t>Agents run in parallel. The one that finishes first helps another. And the critique loops back.</a:t>
+            </a:r>
+            <a:endParaRPr lang="en-US" sz="1550" dirty="0"/>
+          </a:p>
+        </p:txBody>
+      </p:sp>
+      <p:sp>
+        <p:nvSpPr>
+          <p:cNvPr id="5" name="Shape 3"/>
+          <p:cNvSpPr/>
+          <p:nvPr/>
+        </p:nvSpPr>
+        <p:spPr>
+          <a:xfrm flipV="1">
+            <a:off x="3611880" y="2926080"/>
+            <a:ext cx="2148840" cy="1143000"/>
+          </a:xfrm>
+          <a:prstGeom prst="line">
+            <a:avLst/>
+          </a:prstGeom>
+          <a:noFill/>
+          <a:ln w="20320">
             <a:solidFill>
-              <a:srgbClr val="4F46E5"/>
+              <a:srgbClr val="7C3AED"/>
             </a:solidFill>
             <a:prstDash val="solid"/>
+            <a:tailEnd type="triangle"/>
           </a:ln>
+        </p:spPr>
+      </p:sp>
+      <p:sp>
+        <p:nvSpPr>
+          <p:cNvPr id="6" name="Shape 4"/>
+          <p:cNvSpPr/>
+          <p:nvPr/>
+        </p:nvSpPr>
+        <p:spPr>
+          <a:xfrm>
+            <a:off x="5760720" y="2926080"/>
+            <a:ext cx="2148840" cy="1143000"/>
+          </a:xfrm>
+          <a:prstGeom prst="line">
+            <a:avLst/>
+          </a:prstGeom>
+          <a:noFill/>
+          <a:ln w="20320">
+            <a:solidFill>
+              <a:srgbClr val="0F9E8E"/>
+            </a:solidFill>
+            <a:prstDash val="solid"/>
+            <a:tailEnd type="triangle"/>
+          </a:ln>
+        </p:spPr>
+      </p:sp>
+      <p:sp>
+        <p:nvSpPr>
+          <p:cNvPr id="7" name="Shape 5"/>
+          <p:cNvSpPr/>
+          <p:nvPr/>
+        </p:nvSpPr>
+        <p:spPr>
+          <a:xfrm>
+            <a:off x="3611880" y="4069080"/>
+            <a:ext cx="4297680" cy="0"/>
+          </a:xfrm>
+          <a:prstGeom prst="line">
+            <a:avLst/>
+          </a:prstGeom>
+          <a:noFill/>
+          <a:ln w="20320">
+            <a:solidFill>
+              <a:srgbClr val="7C3AED"/>
+            </a:solidFill>
+            <a:prstDash val="solid"/>
+            <a:tailEnd type="triangle"/>
+          </a:ln>
+        </p:spPr>
+      </p:sp>
+      <p:sp>
+        <p:nvSpPr>
+          <p:cNvPr id="8" name="Shape 6"/>
+          <p:cNvSpPr/>
+          <p:nvPr/>
+        </p:nvSpPr>
+        <p:spPr>
+          <a:xfrm flipH="1">
+            <a:off x="5760720" y="4069080"/>
+            <a:ext cx="2148840" cy="1188720"/>
+          </a:xfrm>
+          <a:prstGeom prst="line">
+            <a:avLst/>
+          </a:prstGeom>
+          <a:noFill/>
+          <a:ln w="20320">
+            <a:solidFill>
+              <a:srgbClr val="0284C7"/>
+            </a:solidFill>
+            <a:prstDash val="solid"/>
+            <a:tailEnd type="triangle"/>
+          </a:ln>
+        </p:spPr>
+      </p:sp>
+      <p:sp>
+        <p:nvSpPr>
+          <p:cNvPr id="9" name="Text 7"/>
+          <p:cNvSpPr/>
+          <p:nvPr/>
+        </p:nvSpPr>
+        <p:spPr>
+          <a:xfrm>
+            <a:off x="3447288" y="3218688"/>
+            <a:ext cx="1737360" cy="274320"/>
+          </a:xfrm>
+          <a:prstGeom prst="rect">
+            <a:avLst/>
+          </a:prstGeom>
+          <a:noFill/>
+          <a:ln/>
+        </p:spPr>
+        <p:txBody>
+          <a:bodyPr wrap="square" rtlCol="0" anchor="ctr"/>
+          <a:lstStyle/>
+          <a:p>
+            <a:pPr algn="ctr" indent="0" marL="0">
+              <a:buNone/>
+            </a:pPr>
+            <a:r>
+              <a:rPr lang="en-US" sz="950" spc="100" kern="0" dirty="0">
+                <a:solidFill>
+                  <a:srgbClr val="7C3AED"/>
+                </a:solidFill>
+                <a:latin typeface="Consolas" pitchFamily="34" charset="0"/>
+                <a:ea typeface="Consolas" pitchFamily="34" charset="-122"/>
+                <a:cs typeface="Consolas" pitchFamily="34" charset="-120"/>
+              </a:rPr>
+              <a:t>tone hint</a:t>
+            </a:r>
+            <a:endParaRPr lang="en-US" sz="950" dirty="0"/>
+          </a:p>
+        </p:txBody>
+      </p:sp>
+      <p:sp>
+        <p:nvSpPr>
+          <p:cNvPr id="10" name="Text 8"/>
+          <p:cNvSpPr/>
+          <p:nvPr/>
+        </p:nvSpPr>
+        <p:spPr>
+          <a:xfrm>
+            <a:off x="6510528" y="3218688"/>
+            <a:ext cx="1097280" cy="274320"/>
+          </a:xfrm>
+          <a:prstGeom prst="rect">
+            <a:avLst/>
+          </a:prstGeom>
+          <a:noFill/>
+          <a:ln/>
+        </p:spPr>
+        <p:txBody>
+          <a:bodyPr wrap="square" rtlCol="0" anchor="ctr"/>
+          <a:lstStyle/>
+          <a:p>
+            <a:pPr algn="ctr" indent="0" marL="0">
+              <a:buNone/>
+            </a:pPr>
+            <a:r>
+              <a:rPr lang="en-US" sz="950" spc="100" kern="0" dirty="0">
+                <a:solidFill>
+                  <a:srgbClr val="0F9E8E"/>
+                </a:solidFill>
+                <a:latin typeface="Consolas" pitchFamily="34" charset="0"/>
+                <a:ea typeface="Consolas" pitchFamily="34" charset="-122"/>
+                <a:cs typeface="Consolas" pitchFamily="34" charset="-120"/>
+              </a:rPr>
+              <a:t>copy</a:t>
+            </a:r>
+            <a:endParaRPr lang="en-US" sz="950" dirty="0"/>
+          </a:p>
+        </p:txBody>
+      </p:sp>
+      <p:sp>
+        <p:nvSpPr>
+          <p:cNvPr id="11" name="Text 9"/>
+          <p:cNvSpPr/>
+          <p:nvPr/>
+        </p:nvSpPr>
+        <p:spPr>
+          <a:xfrm>
+            <a:off x="5120640" y="4224528"/>
+            <a:ext cx="1280160" cy="274320"/>
+          </a:xfrm>
+          <a:prstGeom prst="rect">
+            <a:avLst/>
+          </a:prstGeom>
+          <a:noFill/>
+          <a:ln/>
+        </p:spPr>
+        <p:txBody>
+          <a:bodyPr wrap="square" rtlCol="0" anchor="ctr"/>
+          <a:lstStyle/>
+          <a:p>
+            <a:pPr algn="ctr" indent="0" marL="0">
+              <a:buNone/>
+            </a:pPr>
+            <a:r>
+              <a:rPr lang="en-US" sz="950" spc="100" kern="0" dirty="0">
+                <a:solidFill>
+                  <a:srgbClr val="7C3AED"/>
+                </a:solidFill>
+                <a:latin typeface="Consolas" pitchFamily="34" charset="0"/>
+                <a:ea typeface="Consolas" pitchFamily="34" charset="-122"/>
+                <a:cs typeface="Consolas" pitchFamily="34" charset="-120"/>
+              </a:rPr>
+              <a:t>palette</a:t>
+            </a:r>
+            <a:endParaRPr lang="en-US" sz="950" dirty="0"/>
+          </a:p>
+        </p:txBody>
+      </p:sp>
+      <p:sp>
+        <p:nvSpPr>
+          <p:cNvPr id="12" name="Text 10"/>
+          <p:cNvSpPr/>
+          <p:nvPr/>
+        </p:nvSpPr>
+        <p:spPr>
+          <a:xfrm>
+            <a:off x="6492240" y="4754880"/>
+            <a:ext cx="1371600" cy="274320"/>
+          </a:xfrm>
+          <a:prstGeom prst="rect">
+            <a:avLst/>
+          </a:prstGeom>
+          <a:noFill/>
+          <a:ln/>
+        </p:spPr>
+        <p:txBody>
+          <a:bodyPr wrap="square" rtlCol="0" anchor="ctr"/>
+          <a:lstStyle/>
+          <a:p>
+            <a:pPr algn="ctr" indent="0" marL="0">
+              <a:buNone/>
+            </a:pPr>
+            <a:r>
+              <a:rPr lang="en-US" sz="950" spc="100" kern="0" dirty="0">
+                <a:solidFill>
+                  <a:srgbClr val="0284C7"/>
+                </a:solidFill>
+                <a:latin typeface="Consolas" pitchFamily="34" charset="0"/>
+                <a:ea typeface="Consolas" pitchFamily="34" charset="-122"/>
+                <a:cs typeface="Consolas" pitchFamily="34" charset="-120"/>
+              </a:rPr>
+              <a:t>the page</a:t>
+            </a:r>
+            <a:endParaRPr lang="en-US" sz="950" dirty="0"/>
+          </a:p>
+        </p:txBody>
+      </p:sp>
+      <p:sp>
+        <p:nvSpPr>
+          <p:cNvPr id="13" name="Shape 11"/>
+          <p:cNvSpPr/>
+          <p:nvPr/>
+        </p:nvSpPr>
+        <p:spPr>
+          <a:xfrm>
+            <a:off x="5760720" y="5257800"/>
+            <a:ext cx="4434840" cy="0"/>
+          </a:xfrm>
+          <a:prstGeom prst="line">
+            <a:avLst/>
+          </a:prstGeom>
+          <a:noFill/>
+          <a:ln w="21590">
+            <a:solidFill>
+              <a:srgbClr val="E11D48"/>
+            </a:solidFill>
+            <a:prstDash val="dash"/>
+          </a:ln>
+        </p:spPr>
+      </p:sp>
+      <p:sp>
+        <p:nvSpPr>
+          <p:cNvPr id="14" name="Shape 12"/>
+          <p:cNvSpPr/>
+          <p:nvPr/>
+        </p:nvSpPr>
+        <p:spPr>
+          <a:xfrm flipV="1">
+            <a:off x="10195560" y="2926080"/>
+            <a:ext cx="0" cy="2331720"/>
+          </a:xfrm>
+          <a:prstGeom prst="line">
+            <a:avLst/>
+          </a:prstGeom>
+          <a:noFill/>
+          <a:ln w="21590">
+            <a:solidFill>
+              <a:srgbClr val="E11D48"/>
+            </a:solidFill>
+            <a:prstDash val="dash"/>
+          </a:ln>
+        </p:spPr>
+      </p:sp>
+      <p:sp>
+        <p:nvSpPr>
+          <p:cNvPr id="15" name="Shape 13"/>
+          <p:cNvSpPr/>
+          <p:nvPr/>
+        </p:nvSpPr>
+        <p:spPr>
+          <a:xfrm flipH="1">
+            <a:off x="5760720" y="2926080"/>
+            <a:ext cx="4434840" cy="0"/>
+          </a:xfrm>
+          <a:prstGeom prst="line">
+            <a:avLst/>
+          </a:prstGeom>
+          <a:noFill/>
+          <a:ln w="21590">
+            <a:solidFill>
+              <a:srgbClr val="E11D48"/>
+            </a:solidFill>
+            <a:prstDash val="dash"/>
+            <a:tailEnd type="triangle"/>
+          </a:ln>
+        </p:spPr>
+      </p:sp>
+      <p:sp>
+        <p:nvSpPr>
+          <p:cNvPr id="16" name="Text 14"/>
+          <p:cNvSpPr/>
+          <p:nvPr/>
+        </p:nvSpPr>
+        <p:spPr>
+          <a:xfrm>
+            <a:off x="10149840" y="3913632"/>
+            <a:ext cx="1463040" cy="274320"/>
+          </a:xfrm>
+          <a:prstGeom prst="rect">
+            <a:avLst/>
+          </a:prstGeom>
+          <a:noFill/>
+          <a:ln/>
+        </p:spPr>
+        <p:txBody>
+          <a:bodyPr wrap="square" rtlCol="0" anchor="ctr"/>
+          <a:lstStyle/>
+          <a:p>
+            <a:pPr indent="0" marL="0">
+              <a:buNone/>
+            </a:pPr>
+            <a:r>
+              <a:rPr lang="en-US" sz="950" spc="100" kern="0" dirty="0">
+                <a:solidFill>
+                  <a:srgbClr val="E11D48"/>
+                </a:solidFill>
+                <a:latin typeface="Consolas" pitchFamily="34" charset="0"/>
+                <a:ea typeface="Consolas" pitchFamily="34" charset="-122"/>
+                <a:cs typeface="Consolas" pitchFamily="34" charset="-120"/>
+              </a:rPr>
+              <a:t>critique</a:t>
+            </a:r>
+            <a:endParaRPr lang="en-US" sz="950" dirty="0"/>
+          </a:p>
+        </p:txBody>
+      </p:sp>
+      <p:sp>
+        <p:nvSpPr>
+          <p:cNvPr id="17" name="Text 15"/>
+          <p:cNvSpPr/>
+          <p:nvPr/>
+        </p:nvSpPr>
+        <p:spPr>
+          <a:xfrm>
+            <a:off x="6858000" y="2578608"/>
+            <a:ext cx="3200400" cy="274320"/>
+          </a:xfrm>
+          <a:prstGeom prst="rect">
+            <a:avLst/>
+          </a:prstGeom>
+          <a:noFill/>
+          <a:ln/>
+        </p:spPr>
+        <p:txBody>
+          <a:bodyPr wrap="square" rtlCol="0" anchor="ctr"/>
+          <a:lstStyle/>
+          <a:p>
+            <a:pPr algn="r" indent="0" marL="0">
+              <a:buNone/>
+            </a:pPr>
+            <a:r>
+              <a:rPr lang="en-US" sz="900" spc="50" kern="0" dirty="0">
+                <a:solidFill>
+                  <a:srgbClr val="E11D48"/>
+                </a:solidFill>
+                <a:latin typeface="Consolas" pitchFamily="34" charset="0"/>
+                <a:ea typeface="Consolas" pitchFamily="34" charset="-122"/>
+                <a:cs typeface="Consolas" pitchFamily="34" charset="-120"/>
+              </a:rPr>
+              <a:t>the copy is rewritten, live</a:t>
+            </a:r>
+            <a:endParaRPr lang="en-US" sz="900" dirty="0"/>
+          </a:p>
+        </p:txBody>
+      </p:sp>
+      <p:sp>
+        <p:nvSpPr>
+          <p:cNvPr id="18" name="Shape 16"/>
+          <p:cNvSpPr/>
+          <p:nvPr/>
+        </p:nvSpPr>
+        <p:spPr>
+          <a:xfrm>
+            <a:off x="5285232" y="2450592"/>
+            <a:ext cx="950976" cy="950976"/>
+          </a:xfrm>
+          <a:prstGeom prst="ellipse">
+            <a:avLst/>
+          </a:prstGeom>
+          <a:solidFill>
+            <a:srgbClr val="0F9E8E"/>
+          </a:solidFill>
+          <a:ln/>
           <a:effectLst>
             <a:outerShdw sx="100000" sy="100000" kx="0" ky="0" algn="bl" rotWithShape="0" blurRad="139700" dist="38100" dir="5400000">
               <a:srgbClr val="9AA6BC">
@@ -9523,14 +9955,14 @@
       </p:sp>
       <p:sp>
         <p:nvSpPr>
-          <p:cNvPr id="5" name="Text 3"/>
-          <p:cNvSpPr/>
-          <p:nvPr/>
-        </p:nvSpPr>
-        <p:spPr>
-          <a:xfrm>
-            <a:off x="841248" y="3127248"/>
-            <a:ext cx="1554480" cy="365760"/>
+          <p:cNvPr id="19" name="Text 17"/>
+          <p:cNvSpPr/>
+          <p:nvPr/>
+        </p:nvSpPr>
+        <p:spPr>
+          <a:xfrm>
+            <a:off x="5285232" y="2724912"/>
+            <a:ext cx="950976" cy="274320"/>
           </a:xfrm>
           <a:prstGeom prst="rect">
             <a:avLst/>
@@ -9546,30 +9978,30 @@
               <a:buNone/>
             </a:pPr>
             <a:r>
-              <a:rPr lang="en-US" sz="1300" b="1" dirty="0">
-                <a:solidFill>
-                  <a:srgbClr val="16181D"/>
+              <a:rPr lang="en-US" sz="1150" b="1" dirty="0">
+                <a:solidFill>
+                  <a:srgbClr val="FFFFFF"/>
                 </a:solidFill>
                 <a:latin typeface="Consolas" pitchFamily="34" charset="0"/>
                 <a:ea typeface="Consolas" pitchFamily="34" charset="-122"/>
                 <a:cs typeface="Consolas" pitchFamily="34" charset="-120"/>
               </a:rPr>
-              <a:t>one prompt</a:t>
-            </a:r>
-            <a:endParaRPr lang="en-US" sz="1300" dirty="0"/>
-          </a:p>
-        </p:txBody>
-      </p:sp>
-      <p:sp>
-        <p:nvSpPr>
-          <p:cNvPr id="6" name="Text 4"/>
-          <p:cNvSpPr/>
-          <p:nvPr/>
-        </p:nvSpPr>
-        <p:spPr>
-          <a:xfrm>
-            <a:off x="841248" y="3465576"/>
-            <a:ext cx="1554480" cy="274320"/>
+              <a:t>copy</a:t>
+            </a:r>
+            <a:endParaRPr lang="en-US" sz="1150" dirty="0"/>
+          </a:p>
+        </p:txBody>
+      </p:sp>
+      <p:sp>
+        <p:nvSpPr>
+          <p:cNvPr id="20" name="Text 18"/>
+          <p:cNvSpPr/>
+          <p:nvPr/>
+        </p:nvSpPr>
+        <p:spPr>
+          <a:xfrm>
+            <a:off x="5285232" y="2944368"/>
+            <a:ext cx="950976" cy="256032"/>
           </a:xfrm>
           <a:prstGeom prst="rect">
             <a:avLst/>
@@ -9585,69 +10017,38 @@
               <a:buNone/>
             </a:pPr>
             <a:r>
-              <a:rPr lang="en-US" sz="850" spc="150" kern="0" dirty="0">
-                <a:solidFill>
-                  <a:srgbClr val="666C7A"/>
+              <a:rPr lang="en-US" sz="800" dirty="0">
+                <a:solidFill>
+                  <a:srgbClr val="FFFFFF"/>
                 </a:solidFill>
                 <a:latin typeface="Consolas" pitchFamily="34" charset="0"/>
                 <a:ea typeface="Consolas" pitchFamily="34" charset="-122"/>
                 <a:cs typeface="Consolas" pitchFamily="34" charset="-120"/>
               </a:rPr>
-              <a:t>ENGLISH</a:t>
-            </a:r>
-            <a:endParaRPr lang="en-US" sz="850" dirty="0"/>
-          </a:p>
-        </p:txBody>
-      </p:sp>
-      <p:sp>
-        <p:nvSpPr>
-          <p:cNvPr id="7" name="Shape 5"/>
-          <p:cNvSpPr/>
-          <p:nvPr/>
-        </p:nvSpPr>
-        <p:spPr>
-          <a:xfrm>
-            <a:off x="2487168" y="3429000"/>
-            <a:ext cx="457200" cy="0"/>
-          </a:xfrm>
-          <a:prstGeom prst="line">
-            <a:avLst/>
-          </a:prstGeom>
-          <a:noFill/>
-          <a:ln w="22860">
-            <a:solidFill>
-              <a:srgbClr val="9AA1B0"/>
-            </a:solidFill>
-            <a:prstDash val="solid"/>
-            <a:tailEnd type="triangle"/>
-          </a:ln>
-        </p:spPr>
-      </p:sp>
-      <p:sp>
-        <p:nvSpPr>
-          <p:cNvPr id="8" name="Shape 6"/>
-          <p:cNvSpPr/>
-          <p:nvPr/>
-        </p:nvSpPr>
-        <p:spPr>
-          <a:xfrm>
-            <a:off x="3035808" y="3017520"/>
-            <a:ext cx="1737360" cy="822960"/>
-          </a:xfrm>
-          <a:prstGeom prst="roundRect">
-            <a:avLst>
-              <a:gd name="adj" fmla="val 11111"/>
-            </a:avLst>
+              <a:t>writes</a:t>
+            </a:r>
+            <a:endParaRPr lang="en-US" sz="800" dirty="0"/>
+          </a:p>
+        </p:txBody>
+      </p:sp>
+      <p:sp>
+        <p:nvSpPr>
+          <p:cNvPr id="21" name="Shape 19"/>
+          <p:cNvSpPr/>
+          <p:nvPr/>
+        </p:nvSpPr>
+        <p:spPr>
+          <a:xfrm>
+            <a:off x="3136392" y="3593592"/>
+            <a:ext cx="950976" cy="950976"/>
+          </a:xfrm>
+          <a:prstGeom prst="ellipse">
+            <a:avLst/>
           </a:prstGeom>
           <a:solidFill>
-            <a:srgbClr val="F5F7FA"/>
+            <a:srgbClr val="7C3AED"/>
           </a:solidFill>
-          <a:ln w="16510">
-            <a:solidFill>
-              <a:srgbClr val="4F46E5"/>
-            </a:solidFill>
-            <a:prstDash val="solid"/>
-          </a:ln>
+          <a:ln/>
           <a:effectLst>
             <a:outerShdw sx="100000" sy="100000" kx="0" ky="0" algn="bl" rotWithShape="0" blurRad="139700" dist="38100" dir="5400000">
               <a:srgbClr val="9AA6BC">
@@ -9659,14 +10060,14 @@
       </p:sp>
       <p:sp>
         <p:nvSpPr>
-          <p:cNvPr id="9" name="Text 7"/>
-          <p:cNvSpPr/>
-          <p:nvPr/>
-        </p:nvSpPr>
-        <p:spPr>
-          <a:xfrm>
-            <a:off x="3035808" y="3127248"/>
-            <a:ext cx="1737360" cy="365760"/>
+          <p:cNvPr id="22" name="Text 20"/>
+          <p:cNvSpPr/>
+          <p:nvPr/>
+        </p:nvSpPr>
+        <p:spPr>
+          <a:xfrm>
+            <a:off x="3136392" y="3867912"/>
+            <a:ext cx="950976" cy="274320"/>
           </a:xfrm>
           <a:prstGeom prst="rect">
             <a:avLst/>
@@ -9682,30 +10083,30 @@
               <a:buNone/>
             </a:pPr>
             <a:r>
-              <a:rPr lang="en-US" sz="1300" b="1" dirty="0">
-                <a:solidFill>
-                  <a:srgbClr val="16181D"/>
+              <a:rPr lang="en-US" sz="1150" b="1" dirty="0">
+                <a:solidFill>
+                  <a:srgbClr val="FFFFFF"/>
                 </a:solidFill>
                 <a:latin typeface="Consolas" pitchFamily="34" charset="0"/>
                 <a:ea typeface="Consolas" pitchFamily="34" charset="-122"/>
                 <a:cs typeface="Consolas" pitchFamily="34" charset="-120"/>
               </a:rPr>
-              <a:t>Planner</a:t>
-            </a:r>
-            <a:endParaRPr lang="en-US" sz="1300" dirty="0"/>
-          </a:p>
-        </p:txBody>
-      </p:sp>
-      <p:sp>
-        <p:nvSpPr>
-          <p:cNvPr id="10" name="Text 8"/>
-          <p:cNvSpPr/>
-          <p:nvPr/>
-        </p:nvSpPr>
-        <p:spPr>
-          <a:xfrm>
-            <a:off x="3035808" y="3465576"/>
-            <a:ext cx="1737360" cy="274320"/>
+              <a:t>design</a:t>
+            </a:r>
+            <a:endParaRPr lang="en-US" sz="1150" dirty="0"/>
+          </a:p>
+        </p:txBody>
+      </p:sp>
+      <p:sp>
+        <p:nvSpPr>
+          <p:cNvPr id="23" name="Text 21"/>
+          <p:cNvSpPr/>
+          <p:nvPr/>
+        </p:nvSpPr>
+        <p:spPr>
+          <a:xfrm>
+            <a:off x="3136392" y="4087368"/>
+            <a:ext cx="950976" cy="256032"/>
           </a:xfrm>
           <a:prstGeom prst="rect">
             <a:avLst/>
@@ -9721,69 +10122,38 @@
               <a:buNone/>
             </a:pPr>
             <a:r>
-              <a:rPr lang="en-US" sz="850" spc="150" kern="0" dirty="0">
-                <a:solidFill>
-                  <a:srgbClr val="666C7A"/>
+              <a:rPr lang="en-US" sz="800" dirty="0">
+                <a:solidFill>
+                  <a:srgbClr val="FFFFFF"/>
                 </a:solidFill>
                 <a:latin typeface="Consolas" pitchFamily="34" charset="0"/>
                 <a:ea typeface="Consolas" pitchFamily="34" charset="-122"/>
                 <a:cs typeface="Consolas" pitchFamily="34" charset="-120"/>
               </a:rPr>
-              <a:t>STRUCTURED</a:t>
-            </a:r>
-            <a:endParaRPr lang="en-US" sz="850" dirty="0"/>
-          </a:p>
-        </p:txBody>
-      </p:sp>
-      <p:sp>
-        <p:nvSpPr>
-          <p:cNvPr id="11" name="Shape 9"/>
-          <p:cNvSpPr/>
-          <p:nvPr/>
-        </p:nvSpPr>
-        <p:spPr>
-          <a:xfrm>
-            <a:off x="4864608" y="3429000"/>
-            <a:ext cx="457200" cy="0"/>
-          </a:xfrm>
-          <a:prstGeom prst="line">
-            <a:avLst/>
-          </a:prstGeom>
-          <a:noFill/>
-          <a:ln w="22860">
-            <a:solidFill>
-              <a:srgbClr val="9AA1B0"/>
-            </a:solidFill>
-            <a:prstDash val="solid"/>
-            <a:tailEnd type="triangle"/>
-          </a:ln>
-        </p:spPr>
-      </p:sp>
-      <p:sp>
-        <p:nvSpPr>
-          <p:cNvPr id="12" name="Shape 10"/>
-          <p:cNvSpPr/>
-          <p:nvPr/>
-        </p:nvSpPr>
-        <p:spPr>
-          <a:xfrm>
-            <a:off x="5413248" y="2194560"/>
-            <a:ext cx="1691640" cy="658368"/>
-          </a:xfrm>
-          <a:prstGeom prst="roundRect">
-            <a:avLst>
-              <a:gd name="adj" fmla="val 13889"/>
-            </a:avLst>
+              <a:t>styles</a:t>
+            </a:r>
+            <a:endParaRPr lang="en-US" sz="800" dirty="0"/>
+          </a:p>
+        </p:txBody>
+      </p:sp>
+      <p:sp>
+        <p:nvSpPr>
+          <p:cNvPr id="24" name="Shape 22"/>
+          <p:cNvSpPr/>
+          <p:nvPr/>
+        </p:nvSpPr>
+        <p:spPr>
+          <a:xfrm>
+            <a:off x="7434072" y="3593592"/>
+            <a:ext cx="950976" cy="950976"/>
+          </a:xfrm>
+          <a:prstGeom prst="ellipse">
+            <a:avLst/>
           </a:prstGeom>
           <a:solidFill>
-            <a:srgbClr val="F5F7FA"/>
+            <a:srgbClr val="0284C7"/>
           </a:solidFill>
-          <a:ln w="16510">
-            <a:solidFill>
-              <a:srgbClr val="0F9E8E"/>
-            </a:solidFill>
-            <a:prstDash val="solid"/>
-          </a:ln>
+          <a:ln/>
           <a:effectLst>
             <a:outerShdw sx="100000" sy="100000" kx="0" ky="0" algn="bl" rotWithShape="0" blurRad="139700" dist="38100" dir="5400000">
               <a:srgbClr val="9AA6BC">
@@ -9795,14 +10165,14 @@
       </p:sp>
       <p:sp>
         <p:nvSpPr>
-          <p:cNvPr id="13" name="Text 11"/>
-          <p:cNvSpPr/>
-          <p:nvPr/>
-        </p:nvSpPr>
-        <p:spPr>
-          <a:xfrm>
-            <a:off x="5413248" y="2221992"/>
-            <a:ext cx="1691640" cy="365760"/>
+          <p:cNvPr id="25" name="Text 23"/>
+          <p:cNvSpPr/>
+          <p:nvPr/>
+        </p:nvSpPr>
+        <p:spPr>
+          <a:xfrm>
+            <a:off x="7434072" y="3867912"/>
+            <a:ext cx="950976" cy="274320"/>
           </a:xfrm>
           <a:prstGeom prst="rect">
             <a:avLst/>
@@ -9818,30 +10188,30 @@
               <a:buNone/>
             </a:pPr>
             <a:r>
-              <a:rPr lang="en-US" sz="1300" b="1" dirty="0">
-                <a:solidFill>
-                  <a:srgbClr val="16181D"/>
+              <a:rPr lang="en-US" sz="1150" b="1" dirty="0">
+                <a:solidFill>
+                  <a:srgbClr val="FFFFFF"/>
                 </a:solidFill>
                 <a:latin typeface="Consolas" pitchFamily="34" charset="0"/>
                 <a:ea typeface="Consolas" pitchFamily="34" charset="-122"/>
                 <a:cs typeface="Consolas" pitchFamily="34" charset="-120"/>
               </a:rPr>
-              <a:t>Worker</a:t>
-            </a:r>
-            <a:endParaRPr lang="en-US" sz="1300" dirty="0"/>
-          </a:p>
-        </p:txBody>
-      </p:sp>
-      <p:sp>
-        <p:nvSpPr>
-          <p:cNvPr id="14" name="Text 12"/>
-          <p:cNvSpPr/>
-          <p:nvPr/>
-        </p:nvSpPr>
-        <p:spPr>
-          <a:xfrm>
-            <a:off x="5413248" y="2560320"/>
-            <a:ext cx="1691640" cy="274320"/>
+              <a:t>build</a:t>
+            </a:r>
+            <a:endParaRPr lang="en-US" sz="1150" dirty="0"/>
+          </a:p>
+        </p:txBody>
+      </p:sp>
+      <p:sp>
+        <p:nvSpPr>
+          <p:cNvPr id="26" name="Text 24"/>
+          <p:cNvSpPr/>
+          <p:nvPr/>
+        </p:nvSpPr>
+        <p:spPr>
+          <a:xfrm>
+            <a:off x="7434072" y="4087368"/>
+            <a:ext cx="950976" cy="256032"/>
           </a:xfrm>
           <a:prstGeom prst="rect">
             <a:avLst/>
@@ -9857,45 +10227,38 @@
               <a:buNone/>
             </a:pPr>
             <a:r>
-              <a:rPr lang="en-US" sz="850" spc="150" kern="0" dirty="0">
-                <a:solidFill>
-                  <a:srgbClr val="666C7A"/>
+              <a:rPr lang="en-US" sz="800" dirty="0">
+                <a:solidFill>
+                  <a:srgbClr val="FFFFFF"/>
                 </a:solidFill>
                 <a:latin typeface="Consolas" pitchFamily="34" charset="0"/>
                 <a:ea typeface="Consolas" pitchFamily="34" charset="-122"/>
                 <a:cs typeface="Consolas" pitchFamily="34" charset="-120"/>
               </a:rPr>
-              <a:t>ENGINEER</a:t>
-            </a:r>
-            <a:endParaRPr lang="en-US" sz="850" dirty="0"/>
-          </a:p>
-        </p:txBody>
-      </p:sp>
-      <p:sp>
-        <p:nvSpPr>
-          <p:cNvPr id="15" name="Shape 13"/>
-          <p:cNvSpPr/>
-          <p:nvPr/>
-        </p:nvSpPr>
-        <p:spPr>
-          <a:xfrm>
-            <a:off x="5413248" y="3099816"/>
-            <a:ext cx="1691640" cy="658368"/>
-          </a:xfrm>
-          <a:prstGeom prst="roundRect">
-            <a:avLst>
-              <a:gd name="adj" fmla="val 13889"/>
-            </a:avLst>
+              <a:t>assembles</a:t>
+            </a:r>
+            <a:endParaRPr lang="en-US" sz="800" dirty="0"/>
+          </a:p>
+        </p:txBody>
+      </p:sp>
+      <p:sp>
+        <p:nvSpPr>
+          <p:cNvPr id="27" name="Shape 25"/>
+          <p:cNvSpPr/>
+          <p:nvPr/>
+        </p:nvSpPr>
+        <p:spPr>
+          <a:xfrm>
+            <a:off x="5285232" y="4782312"/>
+            <a:ext cx="950976" cy="950976"/>
+          </a:xfrm>
+          <a:prstGeom prst="ellipse">
+            <a:avLst/>
           </a:prstGeom>
           <a:solidFill>
-            <a:srgbClr val="F5F7FA"/>
+            <a:srgbClr val="E11D48"/>
           </a:solidFill>
-          <a:ln w="16510">
-            <a:solidFill>
-              <a:srgbClr val="7C3AED"/>
-            </a:solidFill>
-            <a:prstDash val="solid"/>
-          </a:ln>
+          <a:ln/>
           <a:effectLst>
             <a:outerShdw sx="100000" sy="100000" kx="0" ky="0" algn="bl" rotWithShape="0" blurRad="139700" dist="38100" dir="5400000">
               <a:srgbClr val="9AA6BC">
@@ -9907,14 +10270,14 @@
       </p:sp>
       <p:sp>
         <p:nvSpPr>
-          <p:cNvPr id="16" name="Text 14"/>
-          <p:cNvSpPr/>
-          <p:nvPr/>
-        </p:nvSpPr>
-        <p:spPr>
-          <a:xfrm>
-            <a:off x="5413248" y="3127248"/>
-            <a:ext cx="1691640" cy="365760"/>
+          <p:cNvPr id="28" name="Text 26"/>
+          <p:cNvSpPr/>
+          <p:nvPr/>
+        </p:nvSpPr>
+        <p:spPr>
+          <a:xfrm>
+            <a:off x="5285232" y="5056632"/>
+            <a:ext cx="950976" cy="274320"/>
           </a:xfrm>
           <a:prstGeom prst="rect">
             <a:avLst/>
@@ -9930,30 +10293,30 @@
               <a:buNone/>
             </a:pPr>
             <a:r>
-              <a:rPr lang="en-US" sz="1300" b="1" dirty="0">
-                <a:solidFill>
-                  <a:srgbClr val="16181D"/>
+              <a:rPr lang="en-US" sz="1150" b="1" dirty="0">
+                <a:solidFill>
+                  <a:srgbClr val="FFFFFF"/>
                 </a:solidFill>
                 <a:latin typeface="Consolas" pitchFamily="34" charset="0"/>
                 <a:ea typeface="Consolas" pitchFamily="34" charset="-122"/>
                 <a:cs typeface="Consolas" pitchFamily="34" charset="-120"/>
               </a:rPr>
-              <a:t>Worker</a:t>
-            </a:r>
-            <a:endParaRPr lang="en-US" sz="1300" dirty="0"/>
-          </a:p>
-        </p:txBody>
-      </p:sp>
-      <p:sp>
-        <p:nvSpPr>
-          <p:cNvPr id="17" name="Text 15"/>
-          <p:cNvSpPr/>
-          <p:nvPr/>
-        </p:nvSpPr>
-        <p:spPr>
-          <a:xfrm>
-            <a:off x="5413248" y="3465576"/>
-            <a:ext cx="1691640" cy="274320"/>
+              <a:t>skeptic</a:t>
+            </a:r>
+            <a:endParaRPr lang="en-US" sz="1150" dirty="0"/>
+          </a:p>
+        </p:txBody>
+      </p:sp>
+      <p:sp>
+        <p:nvSpPr>
+          <p:cNvPr id="29" name="Text 27"/>
+          <p:cNvSpPr/>
+          <p:nvPr/>
+        </p:nvSpPr>
+        <p:spPr>
+          <a:xfrm>
+            <a:off x="5285232" y="5276088"/>
+            <a:ext cx="950976" cy="256032"/>
           </a:xfrm>
           <a:prstGeom prst="rect">
             <a:avLst/>
@@ -9969,413 +10332,29 @@
               <a:buNone/>
             </a:pPr>
             <a:r>
-              <a:rPr lang="en-US" sz="850" spc="150" kern="0" dirty="0">
-                <a:solidFill>
-                  <a:srgbClr val="666C7A"/>
+              <a:rPr lang="en-US" sz="800" dirty="0">
+                <a:solidFill>
+                  <a:srgbClr val="FFFFFF"/>
                 </a:solidFill>
                 <a:latin typeface="Consolas" pitchFamily="34" charset="0"/>
                 <a:ea typeface="Consolas" pitchFamily="34" charset="-122"/>
                 <a:cs typeface="Consolas" pitchFamily="34" charset="-120"/>
               </a:rPr>
-              <a:t>MARKETER</a:t>
-            </a:r>
-            <a:endParaRPr lang="en-US" sz="850" dirty="0"/>
-          </a:p>
-        </p:txBody>
-      </p:sp>
-      <p:sp>
-        <p:nvSpPr>
-          <p:cNvPr id="18" name="Shape 16"/>
-          <p:cNvSpPr/>
-          <p:nvPr/>
-        </p:nvSpPr>
-        <p:spPr>
-          <a:xfrm>
-            <a:off x="5413248" y="4005072"/>
-            <a:ext cx="1691640" cy="658368"/>
-          </a:xfrm>
-          <a:prstGeom prst="roundRect">
-            <a:avLst>
-              <a:gd name="adj" fmla="val 13889"/>
-            </a:avLst>
-          </a:prstGeom>
-          <a:solidFill>
-            <a:srgbClr val="F5F7FA"/>
-          </a:solidFill>
-          <a:ln w="16510">
-            <a:solidFill>
-              <a:srgbClr val="E11D48"/>
-            </a:solidFill>
-            <a:prstDash val="solid"/>
-          </a:ln>
-          <a:effectLst>
-            <a:outerShdw sx="100000" sy="100000" kx="0" ky="0" algn="bl" rotWithShape="0" blurRad="139700" dist="38100" dir="5400000">
-              <a:srgbClr val="9AA6BC">
-                <a:alpha val="28000"/>
-              </a:srgbClr>
-            </a:outerShdw>
-          </a:effectLst>
-        </p:spPr>
-      </p:sp>
-      <p:sp>
-        <p:nvSpPr>
-          <p:cNvPr id="19" name="Text 17"/>
-          <p:cNvSpPr/>
-          <p:nvPr/>
-        </p:nvSpPr>
-        <p:spPr>
-          <a:xfrm>
-            <a:off x="5413248" y="4032504"/>
-            <a:ext cx="1691640" cy="365760"/>
-          </a:xfrm>
-          <a:prstGeom prst="rect">
-            <a:avLst/>
-          </a:prstGeom>
-          <a:noFill/>
-          <a:ln/>
-        </p:spPr>
-        <p:txBody>
-          <a:bodyPr wrap="square" rtlCol="0" anchor="ctr"/>
-          <a:lstStyle/>
-          <a:p>
-            <a:pPr algn="ctr" indent="0" marL="0">
-              <a:buNone/>
-            </a:pPr>
-            <a:r>
-              <a:rPr lang="en-US" sz="1300" b="1" dirty="0">
-                <a:solidFill>
-                  <a:srgbClr val="16181D"/>
-                </a:solidFill>
-                <a:latin typeface="Consolas" pitchFamily="34" charset="0"/>
-                <a:ea typeface="Consolas" pitchFamily="34" charset="-122"/>
-                <a:cs typeface="Consolas" pitchFamily="34" charset="-120"/>
-              </a:rPr>
-              <a:t>Worker</a:t>
-            </a:r>
-            <a:endParaRPr lang="en-US" sz="1300" dirty="0"/>
-          </a:p>
-        </p:txBody>
-      </p:sp>
-      <p:sp>
-        <p:nvSpPr>
-          <p:cNvPr id="20" name="Text 18"/>
-          <p:cNvSpPr/>
-          <p:nvPr/>
-        </p:nvSpPr>
-        <p:spPr>
-          <a:xfrm>
-            <a:off x="5413248" y="4370832"/>
-            <a:ext cx="1691640" cy="274320"/>
-          </a:xfrm>
-          <a:prstGeom prst="rect">
-            <a:avLst/>
-          </a:prstGeom>
-          <a:noFill/>
-          <a:ln/>
-        </p:spPr>
-        <p:txBody>
-          <a:bodyPr wrap="square" rtlCol="0" anchor="ctr"/>
-          <a:lstStyle/>
-          <a:p>
-            <a:pPr algn="ctr" indent="0" marL="0">
-              <a:buNone/>
-            </a:pPr>
-            <a:r>
-              <a:rPr lang="en-US" sz="850" spc="150" kern="0" dirty="0">
-                <a:solidFill>
-                  <a:srgbClr val="666C7A"/>
-                </a:solidFill>
-                <a:latin typeface="Consolas" pitchFamily="34" charset="0"/>
-                <a:ea typeface="Consolas" pitchFamily="34" charset="-122"/>
-                <a:cs typeface="Consolas" pitchFamily="34" charset="-120"/>
-              </a:rPr>
-              <a:t>LEGAL</a:t>
-            </a:r>
-            <a:endParaRPr lang="en-US" sz="850" dirty="0"/>
-          </a:p>
-        </p:txBody>
-      </p:sp>
-      <p:sp>
-        <p:nvSpPr>
-          <p:cNvPr id="21" name="Shape 19"/>
-          <p:cNvSpPr/>
-          <p:nvPr/>
-        </p:nvSpPr>
-        <p:spPr>
-          <a:xfrm>
-            <a:off x="7196328" y="3429000"/>
-            <a:ext cx="457200" cy="0"/>
-          </a:xfrm>
-          <a:prstGeom prst="line">
-            <a:avLst/>
-          </a:prstGeom>
-          <a:noFill/>
-          <a:ln w="22860">
-            <a:solidFill>
-              <a:srgbClr val="9AA1B0"/>
-            </a:solidFill>
-            <a:prstDash val="solid"/>
-            <a:tailEnd type="triangle"/>
-          </a:ln>
-        </p:spPr>
-      </p:sp>
-      <p:sp>
-        <p:nvSpPr>
-          <p:cNvPr id="22" name="Shape 20"/>
-          <p:cNvSpPr/>
-          <p:nvPr/>
-        </p:nvSpPr>
-        <p:spPr>
-          <a:xfrm>
-            <a:off x="7744968" y="3017520"/>
-            <a:ext cx="1737360" cy="822960"/>
-          </a:xfrm>
-          <a:prstGeom prst="roundRect">
-            <a:avLst>
-              <a:gd name="adj" fmla="val 11111"/>
-            </a:avLst>
-          </a:prstGeom>
-          <a:solidFill>
-            <a:srgbClr val="F5F7FA"/>
-          </a:solidFill>
-          <a:ln w="16510">
-            <a:solidFill>
-              <a:srgbClr val="4F46E5"/>
-            </a:solidFill>
-            <a:prstDash val="solid"/>
-          </a:ln>
-          <a:effectLst>
-            <a:outerShdw sx="100000" sy="100000" kx="0" ky="0" algn="bl" rotWithShape="0" blurRad="139700" dist="38100" dir="5400000">
-              <a:srgbClr val="9AA6BC">
-                <a:alpha val="28000"/>
-              </a:srgbClr>
-            </a:outerShdw>
-          </a:effectLst>
-        </p:spPr>
-      </p:sp>
-      <p:sp>
-        <p:nvSpPr>
-          <p:cNvPr id="23" name="Text 21"/>
-          <p:cNvSpPr/>
-          <p:nvPr/>
-        </p:nvSpPr>
-        <p:spPr>
-          <a:xfrm>
-            <a:off x="7744968" y="3127248"/>
-            <a:ext cx="1737360" cy="365760"/>
-          </a:xfrm>
-          <a:prstGeom prst="rect">
-            <a:avLst/>
-          </a:prstGeom>
-          <a:noFill/>
-          <a:ln/>
-        </p:spPr>
-        <p:txBody>
-          <a:bodyPr wrap="square" rtlCol="0" anchor="ctr"/>
-          <a:lstStyle/>
-          <a:p>
-            <a:pPr algn="ctr" indent="0" marL="0">
-              <a:buNone/>
-            </a:pPr>
-            <a:r>
-              <a:rPr lang="en-US" sz="1300" b="1" dirty="0">
-                <a:solidFill>
-                  <a:srgbClr val="16181D"/>
-                </a:solidFill>
-                <a:latin typeface="Consolas" pitchFamily="34" charset="0"/>
-                <a:ea typeface="Consolas" pitchFamily="34" charset="-122"/>
-                <a:cs typeface="Consolas" pitchFamily="34" charset="-120"/>
-              </a:rPr>
-              <a:t>Synthesizer</a:t>
-            </a:r>
-            <a:endParaRPr lang="en-US" sz="1300" dirty="0"/>
-          </a:p>
-        </p:txBody>
-      </p:sp>
-      <p:sp>
-        <p:nvSpPr>
-          <p:cNvPr id="24" name="Text 22"/>
-          <p:cNvSpPr/>
-          <p:nvPr/>
-        </p:nvSpPr>
-        <p:spPr>
-          <a:xfrm>
-            <a:off x="7744968" y="3465576"/>
-            <a:ext cx="1737360" cy="274320"/>
-          </a:xfrm>
-          <a:prstGeom prst="rect">
-            <a:avLst/>
-          </a:prstGeom>
-          <a:noFill/>
-          <a:ln/>
-        </p:spPr>
-        <p:txBody>
-          <a:bodyPr wrap="square" rtlCol="0" anchor="ctr"/>
-          <a:lstStyle/>
-          <a:p>
-            <a:pPr algn="ctr" indent="0" marL="0">
-              <a:buNone/>
-            </a:pPr>
-            <a:r>
-              <a:rPr lang="en-US" sz="850" spc="150" kern="0" dirty="0">
-                <a:solidFill>
-                  <a:srgbClr val="666C7A"/>
-                </a:solidFill>
-                <a:latin typeface="Consolas" pitchFamily="34" charset="0"/>
-                <a:ea typeface="Consolas" pitchFamily="34" charset="-122"/>
-                <a:cs typeface="Consolas" pitchFamily="34" charset="-120"/>
-              </a:rPr>
-              <a:t>FAN-IN</a:t>
-            </a:r>
-            <a:endParaRPr lang="en-US" sz="850" dirty="0"/>
-          </a:p>
-        </p:txBody>
-      </p:sp>
-      <p:sp>
-        <p:nvSpPr>
-          <p:cNvPr id="25" name="Shape 23"/>
-          <p:cNvSpPr/>
-          <p:nvPr/>
-        </p:nvSpPr>
-        <p:spPr>
-          <a:xfrm>
-            <a:off x="9573768" y="3429000"/>
-            <a:ext cx="457200" cy="0"/>
-          </a:xfrm>
-          <a:prstGeom prst="line">
-            <a:avLst/>
-          </a:prstGeom>
-          <a:noFill/>
-          <a:ln w="22860">
-            <a:solidFill>
-              <a:srgbClr val="9AA1B0"/>
-            </a:solidFill>
-            <a:prstDash val="solid"/>
-            <a:tailEnd type="triangle"/>
-          </a:ln>
-        </p:spPr>
-      </p:sp>
-      <p:sp>
-        <p:nvSpPr>
-          <p:cNvPr id="26" name="Shape 24"/>
-          <p:cNvSpPr/>
-          <p:nvPr/>
-        </p:nvSpPr>
-        <p:spPr>
-          <a:xfrm>
-            <a:off x="10122408" y="3017520"/>
-            <a:ext cx="1463040" cy="822960"/>
-          </a:xfrm>
-          <a:prstGeom prst="roundRect">
-            <a:avLst>
-              <a:gd name="adj" fmla="val 11111"/>
-            </a:avLst>
-          </a:prstGeom>
-          <a:solidFill>
-            <a:srgbClr val="F5F7FA"/>
-          </a:solidFill>
-          <a:ln w="16510">
-            <a:solidFill>
-              <a:srgbClr val="4F46E5"/>
-            </a:solidFill>
-            <a:prstDash val="solid"/>
-          </a:ln>
-          <a:effectLst>
-            <a:outerShdw sx="100000" sy="100000" kx="0" ky="0" algn="bl" rotWithShape="0" blurRad="139700" dist="38100" dir="5400000">
-              <a:srgbClr val="9AA6BC">
-                <a:alpha val="28000"/>
-              </a:srgbClr>
-            </a:outerShdw>
-          </a:effectLst>
-        </p:spPr>
-      </p:sp>
-      <p:sp>
-        <p:nvSpPr>
-          <p:cNvPr id="27" name="Text 25"/>
-          <p:cNvSpPr/>
-          <p:nvPr/>
-        </p:nvSpPr>
-        <p:spPr>
-          <a:xfrm>
-            <a:off x="10122408" y="3127248"/>
-            <a:ext cx="1463040" cy="365760"/>
-          </a:xfrm>
-          <a:prstGeom prst="rect">
-            <a:avLst/>
-          </a:prstGeom>
-          <a:noFill/>
-          <a:ln/>
-        </p:spPr>
-        <p:txBody>
-          <a:bodyPr wrap="square" rtlCol="0" anchor="ctr"/>
-          <a:lstStyle/>
-          <a:p>
-            <a:pPr algn="ctr" indent="0" marL="0">
-              <a:buNone/>
-            </a:pPr>
-            <a:r>
-              <a:rPr lang="en-US" sz="1300" b="1" dirty="0">
-                <a:solidFill>
-                  <a:srgbClr val="16181D"/>
-                </a:solidFill>
-                <a:latin typeface="Consolas" pitchFamily="34" charset="0"/>
-                <a:ea typeface="Consolas" pitchFamily="34" charset="-122"/>
-                <a:cs typeface="Consolas" pitchFamily="34" charset="-120"/>
-              </a:rPr>
-              <a:t>one plan</a:t>
-            </a:r>
-            <a:endParaRPr lang="en-US" sz="1300" dirty="0"/>
-          </a:p>
-        </p:txBody>
-      </p:sp>
-      <p:sp>
-        <p:nvSpPr>
-          <p:cNvPr id="28" name="Text 26"/>
-          <p:cNvSpPr/>
-          <p:nvPr/>
-        </p:nvSpPr>
-        <p:spPr>
-          <a:xfrm>
-            <a:off x="10122408" y="3465576"/>
-            <a:ext cx="1463040" cy="274320"/>
-          </a:xfrm>
-          <a:prstGeom prst="rect">
-            <a:avLst/>
-          </a:prstGeom>
-          <a:noFill/>
-          <a:ln/>
-        </p:spPr>
-        <p:txBody>
-          <a:bodyPr wrap="square" rtlCol="0" anchor="ctr"/>
-          <a:lstStyle/>
-          <a:p>
-            <a:pPr algn="ctr" indent="0" marL="0">
-              <a:buNone/>
-            </a:pPr>
-            <a:r>
-              <a:rPr lang="en-US" sz="850" spc="150" kern="0" dirty="0">
-                <a:solidFill>
-                  <a:srgbClr val="666C7A"/>
-                </a:solidFill>
-                <a:latin typeface="Consolas" pitchFamily="34" charset="0"/>
-                <a:ea typeface="Consolas" pitchFamily="34" charset="-122"/>
-                <a:cs typeface="Consolas" pitchFamily="34" charset="-120"/>
-              </a:rPr>
-              <a:t>RESULT</a:t>
-            </a:r>
-            <a:endParaRPr lang="en-US" sz="850" dirty="0"/>
-          </a:p>
-        </p:txBody>
-      </p:sp>
-      <p:sp>
-        <p:nvSpPr>
-          <p:cNvPr id="29" name="Text 27"/>
-          <p:cNvSpPr/>
-          <p:nvPr/>
-        </p:nvSpPr>
-        <p:spPr>
-          <a:xfrm>
-            <a:off x="2286000" y="5669280"/>
+              <a:t>critiques</a:t>
+            </a:r>
+            <a:endParaRPr lang="en-US" sz="800" dirty="0"/>
+          </a:p>
+        </p:txBody>
+      </p:sp>
+      <p:sp>
+        <p:nvSpPr>
+          <p:cNvPr id="30" name="Text 28"/>
+          <p:cNvSpPr/>
+          <p:nvPr/>
+        </p:nvSpPr>
+        <p:spPr>
+          <a:xfrm>
+            <a:off x="2286000" y="6080760"/>
             <a:ext cx="7616952" cy="457200"/>
           </a:xfrm>
           <a:prstGeom prst="rect">
@@ -10400,7 +10379,7 @@
                 <a:ea typeface="Calibri" pitchFamily="34" charset="-122"/>
                 <a:cs typeface="Calibri" pitchFamily="34" charset="-120"/>
               </a:rPr>
-              <a:t>The planner </a:t>
+              <a:t>Every agent is the same local model. </a:t>
             </a:r>
             <a:pPr algn="ctr" indent="0" marL="0">
               <a:buNone/>
@@ -10414,21 +10393,7 @@
                 <a:ea typeface="Calibri" pitchFamily="34" charset="-122"/>
                 <a:cs typeface="Calibri" pitchFamily="34" charset="-120"/>
               </a:rPr>
-              <a:t>invents</a:t>
-            </a:r>
-            <a:pPr algn="ctr" indent="0" marL="0">
-              <a:buNone/>
-            </a:pPr>
-            <a:r>
-              <a:rPr lang="en-US" sz="1600" dirty="0">
-                <a:solidFill>
-                  <a:srgbClr val="666C7A"/>
-                </a:solidFill>
-                <a:latin typeface="Calibri" pitchFamily="34" charset="0"/>
-                <a:ea typeface="Calibri" pitchFamily="34" charset="-122"/>
-                <a:cs typeface="Calibri" pitchFamily="34" charset="-120"/>
-              </a:rPr>
-              <a:t> the crew. Nobody hardcoded those roles.</a:t>
+              <a:t>The web is the architecture.</a:t>
             </a:r>
             <a:endParaRPr lang="en-US" sz="1600" dirty="0"/>
           </a:p>

--- a/slides/One-Prompt-Many-Workers-Light.pptx
+++ b/slides/One-Prompt-Many-Workers-Light.pptx
@@ -32,9 +32,11 @@
     <p:sldId id="280" r:id="rId26"/>
     <p:sldId id="281" r:id="rId27"/>
     <p:sldId id="282" r:id="rId28"/>
+    <p:sldId id="283" r:id="rId29"/>
+    <p:sldId id="284" r:id="rId30"/>
   </p:sldIdLst>
   <p:notesMasterIdLst>
-    <p:notesMasterId r:id="rId29"/>
+    <p:notesMasterId r:id="rId31"/>
   </p:notesMasterIdLst>
   <p:sldSz cx="12191695" cy="6858000"/>
   <p:notesSz cx="6858000" cy="12191695"/>
@@ -2200,7 +2202,7 @@
           <a:p>
             <a:r>
               <a:rPr lang="en-US" dirty="0"/>
-              <a:t>Land the plane. A function that guesses, given a loop, a stack, six levers, and a crew, learns to command a team, in Java, offline. The real skill is knowing what to ask and how to constrain the answer. Scan to connect on LinkedIn and grab the code on GitHub. What do you want to break first?</a:t>
+              <a:t>This is the moment the whole talk has been building to. Say it slowly. 'Remember the code at the start? Every idea you sent went into a queue. And while I was up here talking about prompts and levers and loops, the crew never stopped. Seven agents. One laptop. No internet. Let me show you what they made.' Then switch the projector to the gallery.</a:t>
             </a:r>
             <a:endParaRPr lang="en-US" dirty="0"/>
           </a:p>
@@ -2224,6 +2226,182 @@
             <a:fld id="{F7021451-1387-4CA6-816F-3879F97B5CBC}" type="slidenum">
               <a:rPr lang="en-US"/>
               <a:t>27</a:t>
+            </a:fld>
+            <a:endParaRPr lang="en-US"/>
+          </a:p>
+        </p:txBody>
+      </p:sp>
+    </p:spTree>
+    <p:extLst>
+      <p:ext uri="{BB962C8B-B14F-4D97-AF65-F5344CB8AC3E}">
+        <p14:creationId xmlns:p14="http://schemas.microsoft.com/office/powerpoint/2010/main" val="1024086991"/>
+      </p:ext>
+    </p:extLst>
+  </p:cSld>
+  <p:clrMapOvr>
+    <a:masterClrMapping/>
+  </p:clrMapOvr>
+</p:notes>
+</file>
+
+<file path=ppt/notesSlides/notesSlide28.xml><?xml version="1.0" encoding="utf-8"?>
+<p:notes xmlns:a="http://schemas.openxmlformats.org/drawingml/2006/main" xmlns:r="http://schemas.openxmlformats.org/officeDocument/2006/relationships" xmlns:p="http://schemas.openxmlformats.org/presentationml/2006/main">
+  <p:cSld>
+    <p:spTree>
+      <p:nvGrpSpPr>
+        <p:cNvPr id="1" name=""/>
+        <p:cNvGrpSpPr/>
+        <p:nvPr/>
+      </p:nvGrpSpPr>
+      <p:grpSpPr>
+        <a:xfrm>
+          <a:off x="0" y="0"/>
+          <a:ext cx="0" cy="0"/>
+          <a:chOff x="0" y="0"/>
+          <a:chExt cx="0" cy="0"/>
+        </a:xfrm>
+      </p:grpSpPr>
+      <p:sp>
+        <p:nvSpPr>
+          <p:cNvPr id="2" name="Slide Image Placeholder 1"/>
+          <p:cNvSpPr>
+            <a:spLocks noGrp="1" noRot="1" noChangeAspect="1"/>
+          </p:cNvSpPr>
+          <p:nvPr>
+            <p:ph type="sldImg"/>
+          </p:nvPr>
+        </p:nvSpPr>
+        <p:spPr/>
+      </p:sp>
+      <p:sp>
+        <p:nvSpPr>
+          <p:cNvPr id="3" name="Notes Placeholder 2"/>
+          <p:cNvSpPr>
+            <a:spLocks noGrp="1"/>
+          </p:cNvSpPr>
+          <p:nvPr>
+            <p:ph type="body" idx="1"/>
+          </p:nvPr>
+        </p:nvSpPr>
+        <p:spPr/>
+        <p:txBody>
+          <a:bodyPr/>
+          <a:lstStyle/>
+          <a:p>
+            <a:r>
+              <a:rPr lang="en-US" dirty="0"/>
+              <a:t>Put the gallery on the projector and just let the room look for a few seconds. Do not talk over it. Then: 'Every one of these has its own name, its own artwork, its own colours, its own copy, and its own honest criticism. Same seven agents, run once per idea, on one laptop, while I was busy talking.' Point out one or two of the funnier ones by name. Let people find theirs.</a:t>
+            </a:r>
+            <a:endParaRPr lang="en-US" dirty="0"/>
+          </a:p>
+        </p:txBody>
+      </p:sp>
+      <p:sp>
+        <p:nvSpPr>
+          <p:cNvPr id="4" name="Slide Number Placeholder 3"/>
+          <p:cNvSpPr>
+            <a:spLocks noGrp="1"/>
+          </p:cNvSpPr>
+          <p:nvPr>
+            <p:ph type="sldNum" sz="quarter" idx="10"/>
+          </p:nvPr>
+        </p:nvSpPr>
+        <p:spPr/>
+        <p:txBody>
+          <a:bodyPr/>
+          <a:lstStyle/>
+          <a:p>
+            <a:fld id="{F7021451-1387-4CA6-816F-3879F97B5CBC}" type="slidenum">
+              <a:rPr lang="en-US"/>
+              <a:t>28</a:t>
+            </a:fld>
+            <a:endParaRPr lang="en-US"/>
+          </a:p>
+        </p:txBody>
+      </p:sp>
+    </p:spTree>
+    <p:extLst>
+      <p:ext uri="{BB962C8B-B14F-4D97-AF65-F5344CB8AC3E}">
+        <p14:creationId xmlns:p14="http://schemas.microsoft.com/office/powerpoint/2010/main" val="1024086991"/>
+      </p:ext>
+    </p:extLst>
+  </p:cSld>
+  <p:clrMapOvr>
+    <a:masterClrMapping/>
+  </p:clrMapOvr>
+</p:notes>
+</file>
+
+<file path=ppt/notesSlides/notesSlide29.xml><?xml version="1.0" encoding="utf-8"?>
+<p:notes xmlns:a="http://schemas.openxmlformats.org/drawingml/2006/main" xmlns:r="http://schemas.openxmlformats.org/officeDocument/2006/relationships" xmlns:p="http://schemas.openxmlformats.org/presentationml/2006/main">
+  <p:cSld>
+    <p:spTree>
+      <p:nvGrpSpPr>
+        <p:cNvPr id="1" name=""/>
+        <p:cNvGrpSpPr/>
+        <p:nvPr/>
+      </p:nvGrpSpPr>
+      <p:grpSpPr>
+        <a:xfrm>
+          <a:off x="0" y="0"/>
+          <a:ext cx="0" cy="0"/>
+          <a:chOff x="0" y="0"/>
+          <a:chExt cx="0" cy="0"/>
+        </a:xfrm>
+      </p:grpSpPr>
+      <p:sp>
+        <p:nvSpPr>
+          <p:cNvPr id="2" name="Slide Image Placeholder 1"/>
+          <p:cNvSpPr>
+            <a:spLocks noGrp="1" noRot="1" noChangeAspect="1"/>
+          </p:cNvSpPr>
+          <p:nvPr>
+            <p:ph type="sldImg"/>
+          </p:nvPr>
+        </p:nvSpPr>
+        <p:spPr/>
+      </p:sp>
+      <p:sp>
+        <p:nvSpPr>
+          <p:cNvPr id="3" name="Notes Placeholder 2"/>
+          <p:cNvSpPr>
+            <a:spLocks noGrp="1"/>
+          </p:cNvSpPr>
+          <p:nvPr>
+            <p:ph type="body" idx="1"/>
+          </p:nvPr>
+        </p:nvSpPr>
+        <p:spPr/>
+        <p:txBody>
+          <a:bodyPr/>
+          <a:lstStyle/>
+          <a:p>
+            <a:r>
+              <a:rPr lang="en-US" dirty="0"/>
+              <a:t>Land the plane. A function that guesses, given a loop, a stack, six levers, and a crew, learns to command a team, in Java, offline. The real skill is knowing what to ask and how to constrain the answer. Scan to connect on LinkedIn and grab the code on GitHub. What do you want to break first?</a:t>
+            </a:r>
+            <a:endParaRPr lang="en-US" dirty="0"/>
+          </a:p>
+        </p:txBody>
+      </p:sp>
+      <p:sp>
+        <p:nvSpPr>
+          <p:cNvPr id="4" name="Slide Number Placeholder 3"/>
+          <p:cNvSpPr>
+            <a:spLocks noGrp="1"/>
+          </p:cNvSpPr>
+          <p:nvPr>
+            <p:ph type="sldNum" sz="quarter" idx="10"/>
+          </p:nvPr>
+        </p:nvSpPr>
+        <p:spPr/>
+        <p:txBody>
+          <a:bodyPr/>
+          <a:lstStyle/>
+          <a:p>
+            <a:fld id="{F7021451-1387-4CA6-816F-3879F97B5CBC}" type="slidenum">
+              <a:rPr lang="en-US"/>
+              <a:t>29</a:t>
             </a:fld>
             <a:endParaRPr lang="en-US"/>
           </a:p>
@@ -2288,7 +2466,7 @@
           <a:p>
             <a:r>
               <a:rPr lang="en-US" dirty="0"/>
-              <a:t>Put this up early and leave it up. 'This talk has a live build. Scan that, hop on the wifi, and send my agents a product idea, anything, the sillier the better. Later we pick one and build a real landing page for it, live, on this screen. It all runs on this laptop.' Then carry on. Submissions pile up while you teach.</a:t>
+              <a:t>Put this up early and leave it up. This is the setup for the whole talk. 'Scan that, hop on the wifi, send my agents a product idea. Here is the thing: the moment you send it, a crew of agents on this laptop starts building a real landing page for it. They will keep working the entire time I am talking. At the end I will show you every single one.' Then carry on. The queue fills while you teach, and the payoff is waiting.</a:t>
             </a:r>
             <a:endParaRPr lang="en-US" dirty="0"/>
           </a:p>
@@ -16110,6 +16288,1493 @@
         </p:nvSpPr>
         <p:spPr>
           <a:xfrm>
+            <a:off x="841248" y="566928"/>
+            <a:ext cx="9144000" cy="292608"/>
+          </a:xfrm>
+          <a:prstGeom prst="rect">
+            <a:avLst/>
+          </a:prstGeom>
+          <a:noFill/>
+          <a:ln/>
+        </p:spPr>
+        <p:txBody>
+          <a:bodyPr wrap="square" rtlCol="0" anchor="ctr"/>
+          <a:lstStyle/>
+          <a:p>
+            <a:pPr indent="0" marL="0">
+              <a:buNone/>
+            </a:pPr>
+            <a:r>
+              <a:rPr lang="en-US" sz="1100" b="1" spc="300" kern="0" dirty="0">
+                <a:solidFill>
+                  <a:srgbClr val="D97706"/>
+                </a:solidFill>
+                <a:latin typeface="Arial" pitchFamily="34" charset="0"/>
+                <a:ea typeface="Arial" pitchFamily="34" charset="-122"/>
+                <a:cs typeface="Arial" pitchFamily="34" charset="-120"/>
+              </a:rPr>
+              <a:t>THE REVEAL</a:t>
+            </a:r>
+            <a:endParaRPr lang="en-US" sz="1100" dirty="0"/>
+          </a:p>
+        </p:txBody>
+      </p:sp>
+      <p:sp>
+        <p:nvSpPr>
+          <p:cNvPr id="3" name="Text 1"/>
+          <p:cNvSpPr/>
+          <p:nvPr/>
+        </p:nvSpPr>
+        <p:spPr>
+          <a:xfrm>
+            <a:off x="841248" y="1463040"/>
+            <a:ext cx="7680960" cy="1828800"/>
+          </a:xfrm>
+          <a:prstGeom prst="rect">
+            <a:avLst/>
+          </a:prstGeom>
+          <a:noFill/>
+          <a:ln/>
+        </p:spPr>
+        <p:txBody>
+          <a:bodyPr wrap="square" rtlCol="0" anchor="ctr"/>
+          <a:lstStyle/>
+          <a:p>
+            <a:pPr indent="0" marL="0">
+              <a:lnSpc>
+                <a:spcPts val="5000"/>
+              </a:lnSpc>
+              <a:buNone/>
+            </a:pPr>
+            <a:r>
+              <a:rPr lang="en-US" sz="4000" b="1" dirty="0">
+                <a:solidFill>
+                  <a:srgbClr val="16181D"/>
+                </a:solidFill>
+                <a:latin typeface="Arial" pitchFamily="34" charset="0"/>
+                <a:ea typeface="Arial" pitchFamily="34" charset="-122"/>
+                <a:cs typeface="Arial" pitchFamily="34" charset="-120"/>
+              </a:rPr>
+              <a:t>You have been </a:t>
+            </a:r>
+            <a:pPr indent="0" marL="0">
+              <a:lnSpc>
+                <a:spcPts val="5000"/>
+              </a:lnSpc>
+              <a:buNone/>
+            </a:pPr>
+            <a:r>
+              <a:rPr lang="en-US" sz="4000" b="1" dirty="0">
+                <a:solidFill>
+                  <a:srgbClr val="4F46E5"/>
+                </a:solidFill>
+                <a:latin typeface="Arial" pitchFamily="34" charset="0"/>
+                <a:ea typeface="Arial" pitchFamily="34" charset="-122"/>
+                <a:cs typeface="Arial" pitchFamily="34" charset="-120"/>
+              </a:rPr>
+              <a:t>employing them</a:t>
+            </a:r>
+            <a:pPr indent="0" marL="0">
+              <a:lnSpc>
+                <a:spcPts val="5000"/>
+              </a:lnSpc>
+              <a:buNone/>
+            </a:pPr>
+            <a:endParaRPr lang="en-US" sz="4000" dirty="0"/>
+          </a:p>
+          <a:p>
+            <a:pPr indent="0" marL="0">
+              <a:lnSpc>
+                <a:spcPts val="5000"/>
+              </a:lnSpc>
+              <a:buNone/>
+            </a:pPr>
+            <a:r>
+              <a:rPr lang="en-US" sz="4000" b="1" dirty="0">
+                <a:solidFill>
+                  <a:srgbClr val="16181D"/>
+                </a:solidFill>
+                <a:latin typeface="Arial" pitchFamily="34" charset="0"/>
+                <a:ea typeface="Arial" pitchFamily="34" charset="-122"/>
+                <a:cs typeface="Arial" pitchFamily="34" charset="-120"/>
+              </a:rPr>
+              <a:t>this whole time.</a:t>
+            </a:r>
+            <a:endParaRPr lang="en-US" sz="4000" dirty="0"/>
+          </a:p>
+        </p:txBody>
+      </p:sp>
+      <p:sp>
+        <p:nvSpPr>
+          <p:cNvPr id="4" name="Text 2"/>
+          <p:cNvSpPr/>
+          <p:nvPr/>
+        </p:nvSpPr>
+        <p:spPr>
+          <a:xfrm>
+            <a:off x="841248" y="3520440"/>
+            <a:ext cx="5943600" cy="1463040"/>
+          </a:xfrm>
+          <a:prstGeom prst="rect">
+            <a:avLst/>
+          </a:prstGeom>
+          <a:noFill/>
+          <a:ln/>
+        </p:spPr>
+        <p:txBody>
+          <a:bodyPr wrap="square" rtlCol="0" anchor="ctr"/>
+          <a:lstStyle/>
+          <a:p>
+            <a:pPr indent="0" marL="0">
+              <a:lnSpc>
+                <a:spcPts val="2700"/>
+              </a:lnSpc>
+              <a:buNone/>
+            </a:pPr>
+            <a:r>
+              <a:rPr lang="en-US" sz="1700" dirty="0">
+                <a:solidFill>
+                  <a:srgbClr val="666C7A"/>
+                </a:solidFill>
+                <a:latin typeface="Calibri" pitchFamily="34" charset="0"/>
+                <a:ea typeface="Calibri" pitchFamily="34" charset="-122"/>
+                <a:cs typeface="Calibri" pitchFamily="34" charset="-120"/>
+              </a:rPr>
+              <a:t>Every idea you sent went straight into the queue. While I was talking about prompts and levers and loops, seven agents on this laptop were quietly building a landing page for each one.</a:t>
+            </a:r>
+            <a:endParaRPr lang="en-US" sz="1700" dirty="0"/>
+          </a:p>
+        </p:txBody>
+      </p:sp>
+      <p:sp>
+        <p:nvSpPr>
+          <p:cNvPr id="5" name="Text 3"/>
+          <p:cNvSpPr/>
+          <p:nvPr/>
+        </p:nvSpPr>
+        <p:spPr>
+          <a:xfrm>
+            <a:off x="841248" y="5120640"/>
+            <a:ext cx="1828800" cy="685800"/>
+          </a:xfrm>
+          <a:prstGeom prst="rect">
+            <a:avLst/>
+          </a:prstGeom>
+          <a:noFill/>
+          <a:ln/>
+        </p:spPr>
+        <p:txBody>
+          <a:bodyPr wrap="square" rtlCol="0" anchor="ctr"/>
+          <a:lstStyle/>
+          <a:p>
+            <a:pPr indent="0" marL="0">
+              <a:buNone/>
+            </a:pPr>
+            <a:r>
+              <a:rPr lang="en-US" sz="3800" b="1" dirty="0">
+                <a:solidFill>
+                  <a:srgbClr val="4F46E5"/>
+                </a:solidFill>
+                <a:latin typeface="Arial" pitchFamily="34" charset="0"/>
+                <a:ea typeface="Arial" pitchFamily="34" charset="-122"/>
+                <a:cs typeface="Arial" pitchFamily="34" charset="-120"/>
+              </a:rPr>
+              <a:t>7</a:t>
+            </a:r>
+            <a:endParaRPr lang="en-US" sz="3800" dirty="0"/>
+          </a:p>
+        </p:txBody>
+      </p:sp>
+      <p:sp>
+        <p:nvSpPr>
+          <p:cNvPr id="6" name="Text 4"/>
+          <p:cNvSpPr/>
+          <p:nvPr/>
+        </p:nvSpPr>
+        <p:spPr>
+          <a:xfrm>
+            <a:off x="841248" y="5779008"/>
+            <a:ext cx="1920240" cy="548640"/>
+          </a:xfrm>
+          <a:prstGeom prst="rect">
+            <a:avLst/>
+          </a:prstGeom>
+          <a:noFill/>
+          <a:ln/>
+        </p:spPr>
+        <p:txBody>
+          <a:bodyPr wrap="square" rtlCol="0" anchor="ctr"/>
+          <a:lstStyle/>
+          <a:p>
+            <a:pPr indent="0" marL="0">
+              <a:lnSpc>
+                <a:spcPts val="1200"/>
+              </a:lnSpc>
+              <a:buNone/>
+            </a:pPr>
+            <a:r>
+              <a:rPr lang="en-US" sz="950" spc="150" kern="0" dirty="0">
+                <a:solidFill>
+                  <a:srgbClr val="666C7A"/>
+                </a:solidFill>
+                <a:latin typeface="Consolas" pitchFamily="34" charset="0"/>
+                <a:ea typeface="Consolas" pitchFamily="34" charset="-122"/>
+                <a:cs typeface="Consolas" pitchFamily="34" charset="-120"/>
+              </a:rPr>
+              <a:t>AGENTS PER IDEA</a:t>
+            </a:r>
+            <a:endParaRPr lang="en-US" sz="950" dirty="0"/>
+          </a:p>
+        </p:txBody>
+      </p:sp>
+      <p:sp>
+        <p:nvSpPr>
+          <p:cNvPr id="7" name="Text 5"/>
+          <p:cNvSpPr/>
+          <p:nvPr/>
+        </p:nvSpPr>
+        <p:spPr>
+          <a:xfrm>
+            <a:off x="2852928" y="5120640"/>
+            <a:ext cx="1828800" cy="685800"/>
+          </a:xfrm>
+          <a:prstGeom prst="rect">
+            <a:avLst/>
+          </a:prstGeom>
+          <a:noFill/>
+          <a:ln/>
+        </p:spPr>
+        <p:txBody>
+          <a:bodyPr wrap="square" rtlCol="0" anchor="ctr"/>
+          <a:lstStyle/>
+          <a:p>
+            <a:pPr indent="0" marL="0">
+              <a:buNone/>
+            </a:pPr>
+            <a:r>
+              <a:rPr lang="en-US" sz="3800" b="1" dirty="0">
+                <a:solidFill>
+                  <a:srgbClr val="16181D"/>
+                </a:solidFill>
+                <a:latin typeface="Arial" pitchFamily="34" charset="0"/>
+                <a:ea typeface="Arial" pitchFamily="34" charset="-122"/>
+                <a:cs typeface="Arial" pitchFamily="34" charset="-120"/>
+              </a:rPr>
+              <a:t>0</a:t>
+            </a:r>
+            <a:endParaRPr lang="en-US" sz="3800" dirty="0"/>
+          </a:p>
+        </p:txBody>
+      </p:sp>
+      <p:sp>
+        <p:nvSpPr>
+          <p:cNvPr id="8" name="Text 6"/>
+          <p:cNvSpPr/>
+          <p:nvPr/>
+        </p:nvSpPr>
+        <p:spPr>
+          <a:xfrm>
+            <a:off x="2852928" y="5779008"/>
+            <a:ext cx="1920240" cy="548640"/>
+          </a:xfrm>
+          <a:prstGeom prst="rect">
+            <a:avLst/>
+          </a:prstGeom>
+          <a:noFill/>
+          <a:ln/>
+        </p:spPr>
+        <p:txBody>
+          <a:bodyPr wrap="square" rtlCol="0" anchor="ctr"/>
+          <a:lstStyle/>
+          <a:p>
+            <a:pPr indent="0" marL="0">
+              <a:lnSpc>
+                <a:spcPts val="1200"/>
+              </a:lnSpc>
+              <a:buNone/>
+            </a:pPr>
+            <a:r>
+              <a:rPr lang="en-US" sz="950" spc="150" kern="0" dirty="0">
+                <a:solidFill>
+                  <a:srgbClr val="666C7A"/>
+                </a:solidFill>
+                <a:latin typeface="Consolas" pitchFamily="34" charset="0"/>
+                <a:ea typeface="Consolas" pitchFamily="34" charset="-122"/>
+                <a:cs typeface="Consolas" pitchFamily="34" charset="-120"/>
+              </a:rPr>
+              <a:t>CLOUD CALLS</a:t>
+            </a:r>
+            <a:endParaRPr lang="en-US" sz="950" dirty="0"/>
+          </a:p>
+        </p:txBody>
+      </p:sp>
+      <p:sp>
+        <p:nvSpPr>
+          <p:cNvPr id="9" name="Text 7"/>
+          <p:cNvSpPr/>
+          <p:nvPr/>
+        </p:nvSpPr>
+        <p:spPr>
+          <a:xfrm>
+            <a:off x="4590288" y="5120640"/>
+            <a:ext cx="1828800" cy="685800"/>
+          </a:xfrm>
+          <a:prstGeom prst="rect">
+            <a:avLst/>
+          </a:prstGeom>
+          <a:noFill/>
+          <a:ln/>
+        </p:spPr>
+        <p:txBody>
+          <a:bodyPr wrap="square" rtlCol="0" anchor="ctr"/>
+          <a:lstStyle/>
+          <a:p>
+            <a:pPr indent="0" marL="0">
+              <a:buNone/>
+            </a:pPr>
+            <a:r>
+              <a:rPr lang="en-US" sz="3800" b="1" dirty="0">
+                <a:solidFill>
+                  <a:srgbClr val="16181D"/>
+                </a:solidFill>
+                <a:latin typeface="Arial" pitchFamily="34" charset="0"/>
+                <a:ea typeface="Arial" pitchFamily="34" charset="-122"/>
+                <a:cs typeface="Arial" pitchFamily="34" charset="-120"/>
+              </a:rPr>
+              <a:t>1</a:t>
+            </a:r>
+            <a:endParaRPr lang="en-US" sz="3800" dirty="0"/>
+          </a:p>
+        </p:txBody>
+      </p:sp>
+      <p:sp>
+        <p:nvSpPr>
+          <p:cNvPr id="10" name="Text 8"/>
+          <p:cNvSpPr/>
+          <p:nvPr/>
+        </p:nvSpPr>
+        <p:spPr>
+          <a:xfrm>
+            <a:off x="4590288" y="5779008"/>
+            <a:ext cx="1920240" cy="548640"/>
+          </a:xfrm>
+          <a:prstGeom prst="rect">
+            <a:avLst/>
+          </a:prstGeom>
+          <a:noFill/>
+          <a:ln/>
+        </p:spPr>
+        <p:txBody>
+          <a:bodyPr wrap="square" rtlCol="0" anchor="ctr"/>
+          <a:lstStyle/>
+          <a:p>
+            <a:pPr indent="0" marL="0">
+              <a:lnSpc>
+                <a:spcPts val="1200"/>
+              </a:lnSpc>
+              <a:buNone/>
+            </a:pPr>
+            <a:r>
+              <a:rPr lang="en-US" sz="950" spc="150" kern="0" dirty="0">
+                <a:solidFill>
+                  <a:srgbClr val="666C7A"/>
+                </a:solidFill>
+                <a:latin typeface="Consolas" pitchFamily="34" charset="0"/>
+                <a:ea typeface="Consolas" pitchFamily="34" charset="-122"/>
+                <a:cs typeface="Consolas" pitchFamily="34" charset="-120"/>
+              </a:rPr>
+              <a:t>LAPTOP, STILL WARM</a:t>
+            </a:r>
+            <a:endParaRPr lang="en-US" sz="950" dirty="0"/>
+          </a:p>
+        </p:txBody>
+      </p:sp>
+      <p:sp>
+        <p:nvSpPr>
+          <p:cNvPr id="11" name="Shape 9"/>
+          <p:cNvSpPr/>
+          <p:nvPr/>
+        </p:nvSpPr>
+        <p:spPr>
+          <a:xfrm>
+            <a:off x="7680960" y="1737360"/>
+            <a:ext cx="3657600" cy="1051560"/>
+          </a:xfrm>
+          <a:prstGeom prst="roundRect">
+            <a:avLst>
+              <a:gd name="adj" fmla="val 8696"/>
+            </a:avLst>
+          </a:prstGeom>
+          <a:solidFill>
+            <a:srgbClr val="F5F7FA"/>
+          </a:solidFill>
+          <a:ln w="12700">
+            <a:solidFill>
+              <a:srgbClr val="E1E5EC"/>
+            </a:solidFill>
+            <a:prstDash val="solid"/>
+          </a:ln>
+          <a:effectLst>
+            <a:outerShdw sx="100000" sy="100000" kx="0" ky="0" algn="bl" rotWithShape="0" blurRad="139700" dist="38100" dir="5400000">
+              <a:srgbClr val="9AA6BC">
+                <a:alpha val="28000"/>
+              </a:srgbClr>
+            </a:outerShdw>
+          </a:effectLst>
+        </p:spPr>
+      </p:sp>
+      <p:sp>
+        <p:nvSpPr>
+          <p:cNvPr id="12" name="Shape 10"/>
+          <p:cNvSpPr/>
+          <p:nvPr/>
+        </p:nvSpPr>
+        <p:spPr>
+          <a:xfrm>
+            <a:off x="7973568" y="1988820"/>
+            <a:ext cx="548640" cy="548640"/>
+          </a:xfrm>
+          <a:prstGeom prst="ellipse">
+            <a:avLst/>
+          </a:prstGeom>
+          <a:solidFill>
+            <a:srgbClr val="4F46E5"/>
+          </a:solidFill>
+          <a:ln/>
+          <a:effectLst>
+            <a:outerShdw sx="100000" sy="100000" kx="0" ky="0" algn="bl" rotWithShape="0" blurRad="139700" dist="38100" dir="5400000">
+              <a:srgbClr val="9AA6BC">
+                <a:alpha val="28000"/>
+              </a:srgbClr>
+            </a:outerShdw>
+          </a:effectLst>
+        </p:spPr>
+      </p:sp>
+      <p:pic>
+        <p:nvPicPr>
+          <p:cNvPr id="13" name="Image 0" descr="preencoded.png">    </p:cNvPr>
+          <p:cNvPicPr>
+            <a:picLocks noChangeAspect="1"/>
+          </p:cNvPicPr>
+          <p:nvPr/>
+        </p:nvPicPr>
+        <p:blipFill>
+          <a:blip r:embed="rId1"/>
+          <a:stretch>
+            <a:fillRect/>
+          </a:stretch>
+        </p:blipFill>
+        <p:spPr>
+          <a:xfrm>
+            <a:off x="8105242" y="2120494"/>
+            <a:ext cx="285293" cy="285293"/>
+          </a:xfrm>
+          <a:prstGeom prst="rect">
+            <a:avLst/>
+          </a:prstGeom>
+        </p:spPr>
+      </p:pic>
+      <p:sp>
+        <p:nvSpPr>
+          <p:cNvPr id="14" name="Text 11"/>
+          <p:cNvSpPr/>
+          <p:nvPr/>
+        </p:nvSpPr>
+        <p:spPr>
+          <a:xfrm>
+            <a:off x="8732520" y="1737360"/>
+            <a:ext cx="2468880" cy="1051560"/>
+          </a:xfrm>
+          <a:prstGeom prst="rect">
+            <a:avLst/>
+          </a:prstGeom>
+          <a:noFill/>
+          <a:ln/>
+        </p:spPr>
+        <p:txBody>
+          <a:bodyPr wrap="square" rtlCol="0" anchor="ctr"/>
+          <a:lstStyle/>
+          <a:p>
+            <a:pPr indent="0" marL="0">
+              <a:buNone/>
+            </a:pPr>
+            <a:r>
+              <a:rPr lang="en-US" sz="1700" b="1" dirty="0">
+                <a:solidFill>
+                  <a:srgbClr val="16181D"/>
+                </a:solidFill>
+                <a:latin typeface="Arial" pitchFamily="34" charset="0"/>
+                <a:ea typeface="Arial" pitchFamily="34" charset="-122"/>
+                <a:cs typeface="Arial" pitchFamily="34" charset="-120"/>
+              </a:rPr>
+              <a:t>you sent it</a:t>
+            </a:r>
+            <a:endParaRPr lang="en-US" sz="1700" dirty="0"/>
+          </a:p>
+        </p:txBody>
+      </p:sp>
+      <p:sp>
+        <p:nvSpPr>
+          <p:cNvPr id="15" name="Shape 12"/>
+          <p:cNvSpPr/>
+          <p:nvPr/>
+        </p:nvSpPr>
+        <p:spPr>
+          <a:xfrm>
+            <a:off x="9509760" y="2788920"/>
+            <a:ext cx="0" cy="320040"/>
+          </a:xfrm>
+          <a:prstGeom prst="line">
+            <a:avLst/>
+          </a:prstGeom>
+          <a:noFill/>
+          <a:ln w="20320">
+            <a:solidFill>
+              <a:srgbClr val="9AA1B0"/>
+            </a:solidFill>
+            <a:prstDash val="solid"/>
+            <a:tailEnd type="triangle"/>
+          </a:ln>
+        </p:spPr>
+      </p:sp>
+      <p:sp>
+        <p:nvSpPr>
+          <p:cNvPr id="16" name="Shape 13"/>
+          <p:cNvSpPr/>
+          <p:nvPr/>
+        </p:nvSpPr>
+        <p:spPr>
+          <a:xfrm>
+            <a:off x="7680960" y="3108960"/>
+            <a:ext cx="3657600" cy="1051560"/>
+          </a:xfrm>
+          <a:prstGeom prst="roundRect">
+            <a:avLst>
+              <a:gd name="adj" fmla="val 8696"/>
+            </a:avLst>
+          </a:prstGeom>
+          <a:solidFill>
+            <a:srgbClr val="F5F7FA"/>
+          </a:solidFill>
+          <a:ln w="12700">
+            <a:solidFill>
+              <a:srgbClr val="E1E5EC"/>
+            </a:solidFill>
+            <a:prstDash val="solid"/>
+          </a:ln>
+          <a:effectLst>
+            <a:outerShdw sx="100000" sy="100000" kx="0" ky="0" algn="bl" rotWithShape="0" blurRad="139700" dist="38100" dir="5400000">
+              <a:srgbClr val="9AA6BC">
+                <a:alpha val="28000"/>
+              </a:srgbClr>
+            </a:outerShdw>
+          </a:effectLst>
+        </p:spPr>
+      </p:sp>
+      <p:sp>
+        <p:nvSpPr>
+          <p:cNvPr id="17" name="Shape 14"/>
+          <p:cNvSpPr/>
+          <p:nvPr/>
+        </p:nvSpPr>
+        <p:spPr>
+          <a:xfrm>
+            <a:off x="7973568" y="3360420"/>
+            <a:ext cx="548640" cy="548640"/>
+          </a:xfrm>
+          <a:prstGeom prst="ellipse">
+            <a:avLst/>
+          </a:prstGeom>
+          <a:solidFill>
+            <a:srgbClr val="7C3AED"/>
+          </a:solidFill>
+          <a:ln/>
+          <a:effectLst>
+            <a:outerShdw sx="100000" sy="100000" kx="0" ky="0" algn="bl" rotWithShape="0" blurRad="139700" dist="38100" dir="5400000">
+              <a:srgbClr val="9AA6BC">
+                <a:alpha val="28000"/>
+              </a:srgbClr>
+            </a:outerShdw>
+          </a:effectLst>
+        </p:spPr>
+      </p:sp>
+      <p:pic>
+        <p:nvPicPr>
+          <p:cNvPr id="18" name="Image 1" descr="preencoded.png">    </p:cNvPr>
+          <p:cNvPicPr>
+            <a:picLocks noChangeAspect="1"/>
+          </p:cNvPicPr>
+          <p:nvPr/>
+        </p:nvPicPr>
+        <p:blipFill>
+          <a:blip r:embed="rId2"/>
+          <a:stretch>
+            <a:fillRect/>
+          </a:stretch>
+        </p:blipFill>
+        <p:spPr>
+          <a:xfrm>
+            <a:off x="8105242" y="3492094"/>
+            <a:ext cx="285293" cy="285293"/>
+          </a:xfrm>
+          <a:prstGeom prst="rect">
+            <a:avLst/>
+          </a:prstGeom>
+        </p:spPr>
+      </p:pic>
+      <p:sp>
+        <p:nvSpPr>
+          <p:cNvPr id="19" name="Text 15"/>
+          <p:cNvSpPr/>
+          <p:nvPr/>
+        </p:nvSpPr>
+        <p:spPr>
+          <a:xfrm>
+            <a:off x="8732520" y="3108960"/>
+            <a:ext cx="2468880" cy="1051560"/>
+          </a:xfrm>
+          <a:prstGeom prst="rect">
+            <a:avLst/>
+          </a:prstGeom>
+          <a:noFill/>
+          <a:ln/>
+        </p:spPr>
+        <p:txBody>
+          <a:bodyPr wrap="square" rtlCol="0" anchor="ctr"/>
+          <a:lstStyle/>
+          <a:p>
+            <a:pPr indent="0" marL="0">
+              <a:buNone/>
+            </a:pPr>
+            <a:r>
+              <a:rPr lang="en-US" sz="1700" b="1" dirty="0">
+                <a:solidFill>
+                  <a:srgbClr val="16181D"/>
+                </a:solidFill>
+                <a:latin typeface="Arial" pitchFamily="34" charset="0"/>
+                <a:ea typeface="Arial" pitchFamily="34" charset="-122"/>
+                <a:cs typeface="Arial" pitchFamily="34" charset="-120"/>
+              </a:rPr>
+              <a:t>they built it</a:t>
+            </a:r>
+            <a:endParaRPr lang="en-US" sz="1700" dirty="0"/>
+          </a:p>
+        </p:txBody>
+      </p:sp>
+      <p:sp>
+        <p:nvSpPr>
+          <p:cNvPr id="20" name="Shape 16"/>
+          <p:cNvSpPr/>
+          <p:nvPr/>
+        </p:nvSpPr>
+        <p:spPr>
+          <a:xfrm>
+            <a:off x="9509760" y="4160520"/>
+            <a:ext cx="0" cy="320040"/>
+          </a:xfrm>
+          <a:prstGeom prst="line">
+            <a:avLst/>
+          </a:prstGeom>
+          <a:noFill/>
+          <a:ln w="20320">
+            <a:solidFill>
+              <a:srgbClr val="9AA1B0"/>
+            </a:solidFill>
+            <a:prstDash val="solid"/>
+            <a:tailEnd type="triangle"/>
+          </a:ln>
+        </p:spPr>
+      </p:sp>
+      <p:sp>
+        <p:nvSpPr>
+          <p:cNvPr id="21" name="Shape 17"/>
+          <p:cNvSpPr/>
+          <p:nvPr/>
+        </p:nvSpPr>
+        <p:spPr>
+          <a:xfrm>
+            <a:off x="7680960" y="4480560"/>
+            <a:ext cx="3657600" cy="1051560"/>
+          </a:xfrm>
+          <a:prstGeom prst="roundRect">
+            <a:avLst>
+              <a:gd name="adj" fmla="val 8696"/>
+            </a:avLst>
+          </a:prstGeom>
+          <a:solidFill>
+            <a:srgbClr val="F5F7FA"/>
+          </a:solidFill>
+          <a:ln w="12700">
+            <a:solidFill>
+              <a:srgbClr val="E1E5EC"/>
+            </a:solidFill>
+            <a:prstDash val="solid"/>
+          </a:ln>
+          <a:effectLst>
+            <a:outerShdw sx="100000" sy="100000" kx="0" ky="0" algn="bl" rotWithShape="0" blurRad="139700" dist="38100" dir="5400000">
+              <a:srgbClr val="9AA6BC">
+                <a:alpha val="28000"/>
+              </a:srgbClr>
+            </a:outerShdw>
+          </a:effectLst>
+        </p:spPr>
+      </p:sp>
+      <p:sp>
+        <p:nvSpPr>
+          <p:cNvPr id="22" name="Shape 18"/>
+          <p:cNvSpPr/>
+          <p:nvPr/>
+        </p:nvSpPr>
+        <p:spPr>
+          <a:xfrm>
+            <a:off x="7973568" y="4732020"/>
+            <a:ext cx="548640" cy="548640"/>
+          </a:xfrm>
+          <a:prstGeom prst="ellipse">
+            <a:avLst/>
+          </a:prstGeom>
+          <a:solidFill>
+            <a:srgbClr val="0F9E8E"/>
+          </a:solidFill>
+          <a:ln/>
+          <a:effectLst>
+            <a:outerShdw sx="100000" sy="100000" kx="0" ky="0" algn="bl" rotWithShape="0" blurRad="139700" dist="38100" dir="5400000">
+              <a:srgbClr val="9AA6BC">
+                <a:alpha val="28000"/>
+              </a:srgbClr>
+            </a:outerShdw>
+          </a:effectLst>
+        </p:spPr>
+      </p:sp>
+      <p:pic>
+        <p:nvPicPr>
+          <p:cNvPr id="23" name="Image 2" descr="preencoded.png">    </p:cNvPr>
+          <p:cNvPicPr>
+            <a:picLocks noChangeAspect="1"/>
+          </p:cNvPicPr>
+          <p:nvPr/>
+        </p:nvPicPr>
+        <p:blipFill>
+          <a:blip r:embed="rId3"/>
+          <a:stretch>
+            <a:fillRect/>
+          </a:stretch>
+        </p:blipFill>
+        <p:spPr>
+          <a:xfrm>
+            <a:off x="8105242" y="4863694"/>
+            <a:ext cx="285293" cy="285293"/>
+          </a:xfrm>
+          <a:prstGeom prst="rect">
+            <a:avLst/>
+          </a:prstGeom>
+        </p:spPr>
+      </p:pic>
+      <p:sp>
+        <p:nvSpPr>
+          <p:cNvPr id="24" name="Text 19"/>
+          <p:cNvSpPr/>
+          <p:nvPr/>
+        </p:nvSpPr>
+        <p:spPr>
+          <a:xfrm>
+            <a:off x="8732520" y="4480560"/>
+            <a:ext cx="2468880" cy="1051560"/>
+          </a:xfrm>
+          <a:prstGeom prst="rect">
+            <a:avLst/>
+          </a:prstGeom>
+          <a:noFill/>
+          <a:ln/>
+        </p:spPr>
+        <p:txBody>
+          <a:bodyPr wrap="square" rtlCol="0" anchor="ctr"/>
+          <a:lstStyle/>
+          <a:p>
+            <a:pPr indent="0" marL="0">
+              <a:buNone/>
+            </a:pPr>
+            <a:r>
+              <a:rPr lang="en-US" sz="1700" b="1" dirty="0">
+                <a:solidFill>
+                  <a:srgbClr val="16181D"/>
+                </a:solidFill>
+                <a:latin typeface="Arial" pitchFamily="34" charset="0"/>
+                <a:ea typeface="Arial" pitchFamily="34" charset="-122"/>
+                <a:cs typeface="Arial" pitchFamily="34" charset="-120"/>
+              </a:rPr>
+              <a:t>here it all is</a:t>
+            </a:r>
+            <a:endParaRPr lang="en-US" sz="1700" dirty="0"/>
+          </a:p>
+        </p:txBody>
+      </p:sp>
+    </p:spTree>
+  </p:cSld>
+  <p:clrMapOvr>
+    <a:masterClrMapping/>
+  </p:clrMapOvr>
+</p:sld>
+</file>
+
+<file path=ppt/slides/slide28.xml><?xml version="1.0" encoding="utf-8"?>
+<p:sld xmlns:a="http://schemas.openxmlformats.org/drawingml/2006/main" xmlns:r="http://schemas.openxmlformats.org/officeDocument/2006/relationships" xmlns:p="http://schemas.openxmlformats.org/presentationml/2006/main">
+  <p:cSld name="Slide 28">
+    <p:bg>
+      <p:bgPr>
+        <a:solidFill>
+          <a:srgbClr val="FFFFFF"/>
+        </a:solidFill>
+      </p:bgPr>
+    </p:bg>
+    <p:spTree>
+      <p:nvGrpSpPr>
+        <p:cNvPr id="1" name=""/>
+        <p:cNvGrpSpPr/>
+        <p:nvPr/>
+      </p:nvGrpSpPr>
+      <p:grpSpPr>
+        <a:xfrm>
+          <a:off x="0" y="0"/>
+          <a:ext cx="0" cy="0"/>
+          <a:chOff x="0" y="0"/>
+          <a:chExt cx="0" cy="0"/>
+        </a:xfrm>
+      </p:grpSpPr>
+      <p:sp>
+        <p:nvSpPr>
+          <p:cNvPr id="2" name="Shape 0"/>
+          <p:cNvSpPr/>
+          <p:nvPr/>
+        </p:nvSpPr>
+        <p:spPr>
+          <a:xfrm>
+            <a:off x="859536" y="621792"/>
+            <a:ext cx="182880" cy="182880"/>
+          </a:xfrm>
+          <a:prstGeom prst="ellipse">
+            <a:avLst/>
+          </a:prstGeom>
+          <a:solidFill>
+            <a:srgbClr val="4F46E5"/>
+          </a:solidFill>
+          <a:ln/>
+        </p:spPr>
+      </p:sp>
+      <p:sp>
+        <p:nvSpPr>
+          <p:cNvPr id="3" name="Text 1"/>
+          <p:cNvSpPr/>
+          <p:nvPr/>
+        </p:nvSpPr>
+        <p:spPr>
+          <a:xfrm>
+            <a:off x="1207008" y="566928"/>
+            <a:ext cx="4572000" cy="292608"/>
+          </a:xfrm>
+          <a:prstGeom prst="rect">
+            <a:avLst/>
+          </a:prstGeom>
+          <a:noFill/>
+          <a:ln/>
+        </p:spPr>
+        <p:txBody>
+          <a:bodyPr wrap="square" rtlCol="0" anchor="ctr"/>
+          <a:lstStyle/>
+          <a:p>
+            <a:pPr indent="0" marL="0">
+              <a:buNone/>
+            </a:pPr>
+            <a:r>
+              <a:rPr lang="en-US" sz="1200" spc="400" kern="0" dirty="0">
+                <a:solidFill>
+                  <a:srgbClr val="4F46E5"/>
+                </a:solidFill>
+                <a:latin typeface="Consolas" pitchFamily="34" charset="0"/>
+                <a:ea typeface="Consolas" pitchFamily="34" charset="-122"/>
+                <a:cs typeface="Consolas" pitchFamily="34" charset="-120"/>
+              </a:rPr>
+              <a:t>THE WALL</a:t>
+            </a:r>
+            <a:endParaRPr lang="en-US" sz="1200" dirty="0"/>
+          </a:p>
+        </p:txBody>
+      </p:sp>
+      <p:sp>
+        <p:nvSpPr>
+          <p:cNvPr id="4" name="Text 2"/>
+          <p:cNvSpPr/>
+          <p:nvPr/>
+        </p:nvSpPr>
+        <p:spPr>
+          <a:xfrm>
+            <a:off x="0" y="1463040"/>
+            <a:ext cx="12191695" cy="1005840"/>
+          </a:xfrm>
+          <a:prstGeom prst="rect">
+            <a:avLst/>
+          </a:prstGeom>
+          <a:noFill/>
+          <a:ln/>
+        </p:spPr>
+        <p:txBody>
+          <a:bodyPr wrap="square" rtlCol="0" anchor="ctr"/>
+          <a:lstStyle/>
+          <a:p>
+            <a:pPr algn="ctr" indent="0" marL="0">
+              <a:buNone/>
+            </a:pPr>
+            <a:r>
+              <a:rPr lang="en-US" sz="4600" b="1" dirty="0">
+                <a:solidFill>
+                  <a:srgbClr val="16181D"/>
+                </a:solidFill>
+                <a:latin typeface="Arial" pitchFamily="34" charset="0"/>
+                <a:ea typeface="Arial" pitchFamily="34" charset="-122"/>
+                <a:cs typeface="Arial" pitchFamily="34" charset="-120"/>
+              </a:rPr>
+              <a:t>Everyone's, </a:t>
+            </a:r>
+            <a:pPr algn="ctr" indent="0" marL="0">
+              <a:buNone/>
+            </a:pPr>
+            <a:r>
+              <a:rPr lang="en-US" sz="4600" b="1" dirty="0">
+                <a:solidFill>
+                  <a:srgbClr val="4F46E5"/>
+                </a:solidFill>
+                <a:latin typeface="Arial" pitchFamily="34" charset="0"/>
+                <a:ea typeface="Arial" pitchFamily="34" charset="-122"/>
+                <a:cs typeface="Arial" pitchFamily="34" charset="-120"/>
+              </a:rPr>
+              <a:t>all at once.</a:t>
+            </a:r>
+            <a:endParaRPr lang="en-US" sz="4600" dirty="0"/>
+          </a:p>
+        </p:txBody>
+      </p:sp>
+      <p:sp>
+        <p:nvSpPr>
+          <p:cNvPr id="5" name="Text 3"/>
+          <p:cNvSpPr/>
+          <p:nvPr/>
+        </p:nvSpPr>
+        <p:spPr>
+          <a:xfrm>
+            <a:off x="0" y="2606040"/>
+            <a:ext cx="12191695" cy="457200"/>
+          </a:xfrm>
+          <a:prstGeom prst="rect">
+            <a:avLst/>
+          </a:prstGeom>
+          <a:noFill/>
+          <a:ln/>
+        </p:spPr>
+        <p:txBody>
+          <a:bodyPr wrap="square" rtlCol="0" anchor="ctr"/>
+          <a:lstStyle/>
+          <a:p>
+            <a:pPr algn="ctr" indent="0" marL="0">
+              <a:buNone/>
+            </a:pPr>
+            <a:r>
+              <a:rPr lang="en-US" sz="1900" dirty="0">
+                <a:solidFill>
+                  <a:srgbClr val="666C7A"/>
+                </a:solidFill>
+                <a:latin typeface="Calibri" pitchFamily="34" charset="0"/>
+                <a:ea typeface="Calibri" pitchFamily="34" charset="-122"/>
+                <a:cs typeface="Calibri" pitchFamily="34" charset="-120"/>
+              </a:rPr>
+              <a:t>Find yours. Your name is on it.</a:t>
+            </a:r>
+            <a:endParaRPr lang="en-US" sz="1900" dirty="0"/>
+          </a:p>
+        </p:txBody>
+      </p:sp>
+      <p:sp>
+        <p:nvSpPr>
+          <p:cNvPr id="6" name="Shape 4"/>
+          <p:cNvSpPr/>
+          <p:nvPr/>
+        </p:nvSpPr>
+        <p:spPr>
+          <a:xfrm>
+            <a:off x="783184" y="3429000"/>
+            <a:ext cx="1920240" cy="1371600"/>
+          </a:xfrm>
+          <a:prstGeom prst="roundRect">
+            <a:avLst>
+              <a:gd name="adj" fmla="val 8000"/>
+            </a:avLst>
+          </a:prstGeom>
+          <a:solidFill>
+            <a:srgbClr val="F5F7FA"/>
+          </a:solidFill>
+          <a:ln w="17780">
+            <a:solidFill>
+              <a:srgbClr val="4F46E5"/>
+            </a:solidFill>
+            <a:prstDash val="solid"/>
+          </a:ln>
+          <a:effectLst>
+            <a:outerShdw sx="100000" sy="100000" kx="0" ky="0" algn="bl" rotWithShape="0" blurRad="139700" dist="38100" dir="5400000">
+              <a:srgbClr val="9AA6BC">
+                <a:alpha val="28000"/>
+              </a:srgbClr>
+            </a:outerShdw>
+          </a:effectLst>
+        </p:spPr>
+      </p:sp>
+      <p:sp>
+        <p:nvSpPr>
+          <p:cNvPr id="7" name="Text 5"/>
+          <p:cNvSpPr/>
+          <p:nvPr/>
+        </p:nvSpPr>
+        <p:spPr>
+          <a:xfrm>
+            <a:off x="783184" y="3429000"/>
+            <a:ext cx="1920240" cy="1371600"/>
+          </a:xfrm>
+          <a:prstGeom prst="rect">
+            <a:avLst/>
+          </a:prstGeom>
+          <a:noFill/>
+          <a:ln/>
+        </p:spPr>
+        <p:txBody>
+          <a:bodyPr wrap="square" rtlCol="0" anchor="ctr"/>
+          <a:lstStyle/>
+          <a:p>
+            <a:pPr algn="ctr" indent="0" marL="0">
+              <a:buNone/>
+            </a:pPr>
+            <a:r>
+              <a:rPr lang="en-US" sz="1500" b="1" dirty="0">
+                <a:solidFill>
+                  <a:srgbClr val="16181D"/>
+                </a:solidFill>
+                <a:latin typeface="Arial" pitchFamily="34" charset="0"/>
+                <a:ea typeface="Arial" pitchFamily="34" charset="-122"/>
+                <a:cs typeface="Arial" pitchFamily="34" charset="-120"/>
+              </a:rPr>
+              <a:t>a name</a:t>
+            </a:r>
+            <a:endParaRPr lang="en-US" sz="1500" dirty="0"/>
+          </a:p>
+        </p:txBody>
+      </p:sp>
+      <p:sp>
+        <p:nvSpPr>
+          <p:cNvPr id="8" name="Shape 6"/>
+          <p:cNvSpPr/>
+          <p:nvPr/>
+        </p:nvSpPr>
+        <p:spPr>
+          <a:xfrm>
+            <a:off x="2959456" y="3429000"/>
+            <a:ext cx="1920240" cy="1371600"/>
+          </a:xfrm>
+          <a:prstGeom prst="roundRect">
+            <a:avLst>
+              <a:gd name="adj" fmla="val 8000"/>
+            </a:avLst>
+          </a:prstGeom>
+          <a:solidFill>
+            <a:srgbClr val="F5F7FA"/>
+          </a:solidFill>
+          <a:ln w="17780">
+            <a:solidFill>
+              <a:srgbClr val="7C3AED"/>
+            </a:solidFill>
+            <a:prstDash val="solid"/>
+          </a:ln>
+          <a:effectLst>
+            <a:outerShdw sx="100000" sy="100000" kx="0" ky="0" algn="bl" rotWithShape="0" blurRad="139700" dist="38100" dir="5400000">
+              <a:srgbClr val="9AA6BC">
+                <a:alpha val="28000"/>
+              </a:srgbClr>
+            </a:outerShdw>
+          </a:effectLst>
+        </p:spPr>
+      </p:sp>
+      <p:sp>
+        <p:nvSpPr>
+          <p:cNvPr id="9" name="Text 7"/>
+          <p:cNvSpPr/>
+          <p:nvPr/>
+        </p:nvSpPr>
+        <p:spPr>
+          <a:xfrm>
+            <a:off x="2959456" y="3429000"/>
+            <a:ext cx="1920240" cy="1371600"/>
+          </a:xfrm>
+          <a:prstGeom prst="rect">
+            <a:avLst/>
+          </a:prstGeom>
+          <a:noFill/>
+          <a:ln/>
+        </p:spPr>
+        <p:txBody>
+          <a:bodyPr wrap="square" rtlCol="0" anchor="ctr"/>
+          <a:lstStyle/>
+          <a:p>
+            <a:pPr algn="ctr" indent="0" marL="0">
+              <a:buNone/>
+            </a:pPr>
+            <a:r>
+              <a:rPr lang="en-US" sz="1500" b="1" dirty="0">
+                <a:solidFill>
+                  <a:srgbClr val="16181D"/>
+                </a:solidFill>
+                <a:latin typeface="Arial" pitchFamily="34" charset="0"/>
+                <a:ea typeface="Arial" pitchFamily="34" charset="-122"/>
+                <a:cs typeface="Arial" pitchFamily="34" charset="-120"/>
+              </a:rPr>
+              <a:t>artwork</a:t>
+            </a:r>
+            <a:endParaRPr lang="en-US" sz="1500" dirty="0"/>
+          </a:p>
+        </p:txBody>
+      </p:sp>
+      <p:sp>
+        <p:nvSpPr>
+          <p:cNvPr id="10" name="Shape 8"/>
+          <p:cNvSpPr/>
+          <p:nvPr/>
+        </p:nvSpPr>
+        <p:spPr>
+          <a:xfrm>
+            <a:off x="5135728" y="3429000"/>
+            <a:ext cx="1920240" cy="1371600"/>
+          </a:xfrm>
+          <a:prstGeom prst="roundRect">
+            <a:avLst>
+              <a:gd name="adj" fmla="val 8000"/>
+            </a:avLst>
+          </a:prstGeom>
+          <a:solidFill>
+            <a:srgbClr val="F5F7FA"/>
+          </a:solidFill>
+          <a:ln w="17780">
+            <a:solidFill>
+              <a:srgbClr val="0F9E8E"/>
+            </a:solidFill>
+            <a:prstDash val="solid"/>
+          </a:ln>
+          <a:effectLst>
+            <a:outerShdw sx="100000" sy="100000" kx="0" ky="0" algn="bl" rotWithShape="0" blurRad="139700" dist="38100" dir="5400000">
+              <a:srgbClr val="9AA6BC">
+                <a:alpha val="28000"/>
+              </a:srgbClr>
+            </a:outerShdw>
+          </a:effectLst>
+        </p:spPr>
+      </p:sp>
+      <p:sp>
+        <p:nvSpPr>
+          <p:cNvPr id="11" name="Text 9"/>
+          <p:cNvSpPr/>
+          <p:nvPr/>
+        </p:nvSpPr>
+        <p:spPr>
+          <a:xfrm>
+            <a:off x="5135728" y="3429000"/>
+            <a:ext cx="1920240" cy="1371600"/>
+          </a:xfrm>
+          <a:prstGeom prst="rect">
+            <a:avLst/>
+          </a:prstGeom>
+          <a:noFill/>
+          <a:ln/>
+        </p:spPr>
+        <p:txBody>
+          <a:bodyPr wrap="square" rtlCol="0" anchor="ctr"/>
+          <a:lstStyle/>
+          <a:p>
+            <a:pPr algn="ctr" indent="0" marL="0">
+              <a:buNone/>
+            </a:pPr>
+            <a:r>
+              <a:rPr lang="en-US" sz="1500" b="1" dirty="0">
+                <a:solidFill>
+                  <a:srgbClr val="16181D"/>
+                </a:solidFill>
+                <a:latin typeface="Arial" pitchFamily="34" charset="0"/>
+                <a:ea typeface="Arial" pitchFamily="34" charset="-122"/>
+                <a:cs typeface="Arial" pitchFamily="34" charset="-120"/>
+              </a:rPr>
+              <a:t>copy</a:t>
+            </a:r>
+            <a:endParaRPr lang="en-US" sz="1500" dirty="0"/>
+          </a:p>
+        </p:txBody>
+      </p:sp>
+      <p:sp>
+        <p:nvSpPr>
+          <p:cNvPr id="12" name="Shape 10"/>
+          <p:cNvSpPr/>
+          <p:nvPr/>
+        </p:nvSpPr>
+        <p:spPr>
+          <a:xfrm>
+            <a:off x="7312000" y="3429000"/>
+            <a:ext cx="1920240" cy="1371600"/>
+          </a:xfrm>
+          <a:prstGeom prst="roundRect">
+            <a:avLst>
+              <a:gd name="adj" fmla="val 8000"/>
+            </a:avLst>
+          </a:prstGeom>
+          <a:solidFill>
+            <a:srgbClr val="F5F7FA"/>
+          </a:solidFill>
+          <a:ln w="17780">
+            <a:solidFill>
+              <a:srgbClr val="D97706"/>
+            </a:solidFill>
+            <a:prstDash val="solid"/>
+          </a:ln>
+          <a:effectLst>
+            <a:outerShdw sx="100000" sy="100000" kx="0" ky="0" algn="bl" rotWithShape="0" blurRad="139700" dist="38100" dir="5400000">
+              <a:srgbClr val="9AA6BC">
+                <a:alpha val="28000"/>
+              </a:srgbClr>
+            </a:outerShdw>
+          </a:effectLst>
+        </p:spPr>
+      </p:sp>
+      <p:sp>
+        <p:nvSpPr>
+          <p:cNvPr id="13" name="Text 11"/>
+          <p:cNvSpPr/>
+          <p:nvPr/>
+        </p:nvSpPr>
+        <p:spPr>
+          <a:xfrm>
+            <a:off x="7312000" y="3429000"/>
+            <a:ext cx="1920240" cy="1371600"/>
+          </a:xfrm>
+          <a:prstGeom prst="rect">
+            <a:avLst/>
+          </a:prstGeom>
+          <a:noFill/>
+          <a:ln/>
+        </p:spPr>
+        <p:txBody>
+          <a:bodyPr wrap="square" rtlCol="0" anchor="ctr"/>
+          <a:lstStyle/>
+          <a:p>
+            <a:pPr algn="ctr" indent="0" marL="0">
+              <a:buNone/>
+            </a:pPr>
+            <a:r>
+              <a:rPr lang="en-US" sz="1500" b="1" dirty="0">
+                <a:solidFill>
+                  <a:srgbClr val="16181D"/>
+                </a:solidFill>
+                <a:latin typeface="Arial" pitchFamily="34" charset="0"/>
+                <a:ea typeface="Arial" pitchFamily="34" charset="-122"/>
+                <a:cs typeface="Arial" pitchFamily="34" charset="-120"/>
+              </a:rPr>
+              <a:t>a palette</a:t>
+            </a:r>
+            <a:endParaRPr lang="en-US" sz="1500" dirty="0"/>
+          </a:p>
+        </p:txBody>
+      </p:sp>
+      <p:sp>
+        <p:nvSpPr>
+          <p:cNvPr id="14" name="Shape 12"/>
+          <p:cNvSpPr/>
+          <p:nvPr/>
+        </p:nvSpPr>
+        <p:spPr>
+          <a:xfrm>
+            <a:off x="9488272" y="3429000"/>
+            <a:ext cx="1920240" cy="1371600"/>
+          </a:xfrm>
+          <a:prstGeom prst="roundRect">
+            <a:avLst>
+              <a:gd name="adj" fmla="val 8000"/>
+            </a:avLst>
+          </a:prstGeom>
+          <a:solidFill>
+            <a:srgbClr val="F5F7FA"/>
+          </a:solidFill>
+          <a:ln w="17780">
+            <a:solidFill>
+              <a:srgbClr val="E11D48"/>
+            </a:solidFill>
+            <a:prstDash val="solid"/>
+          </a:ln>
+          <a:effectLst>
+            <a:outerShdw sx="100000" sy="100000" kx="0" ky="0" algn="bl" rotWithShape="0" blurRad="139700" dist="38100" dir="5400000">
+              <a:srgbClr val="9AA6BC">
+                <a:alpha val="28000"/>
+              </a:srgbClr>
+            </a:outerShdw>
+          </a:effectLst>
+        </p:spPr>
+      </p:sp>
+      <p:sp>
+        <p:nvSpPr>
+          <p:cNvPr id="15" name="Text 13"/>
+          <p:cNvSpPr/>
+          <p:nvPr/>
+        </p:nvSpPr>
+        <p:spPr>
+          <a:xfrm>
+            <a:off x="9488272" y="3429000"/>
+            <a:ext cx="1920240" cy="1371600"/>
+          </a:xfrm>
+          <a:prstGeom prst="rect">
+            <a:avLst/>
+          </a:prstGeom>
+          <a:noFill/>
+          <a:ln/>
+        </p:spPr>
+        <p:txBody>
+          <a:bodyPr wrap="square" rtlCol="0" anchor="ctr"/>
+          <a:lstStyle/>
+          <a:p>
+            <a:pPr algn="ctr" indent="0" marL="0">
+              <a:buNone/>
+            </a:pPr>
+            <a:r>
+              <a:rPr lang="en-US" sz="1500" b="1" dirty="0">
+                <a:solidFill>
+                  <a:srgbClr val="16181D"/>
+                </a:solidFill>
+                <a:latin typeface="Arial" pitchFamily="34" charset="0"/>
+                <a:ea typeface="Arial" pitchFamily="34" charset="-122"/>
+                <a:cs typeface="Arial" pitchFamily="34" charset="-120"/>
+              </a:rPr>
+              <a:t>a critique</a:t>
+            </a:r>
+            <a:endParaRPr lang="en-US" sz="1500" dirty="0"/>
+          </a:p>
+        </p:txBody>
+      </p:sp>
+      <p:sp>
+        <p:nvSpPr>
+          <p:cNvPr id="16" name="Text 14"/>
+          <p:cNvSpPr/>
+          <p:nvPr/>
+        </p:nvSpPr>
+        <p:spPr>
+          <a:xfrm>
+            <a:off x="1828800" y="5120640"/>
+            <a:ext cx="8534095" cy="457200"/>
+          </a:xfrm>
+          <a:prstGeom prst="rect">
+            <a:avLst/>
+          </a:prstGeom>
+          <a:noFill/>
+          <a:ln/>
+        </p:spPr>
+        <p:txBody>
+          <a:bodyPr wrap="square" rtlCol="0" anchor="ctr"/>
+          <a:lstStyle/>
+          <a:p>
+            <a:pPr algn="ctr" indent="0" marL="0">
+              <a:buNone/>
+            </a:pPr>
+            <a:r>
+              <a:rPr lang="en-US" sz="1200" dirty="0">
+                <a:solidFill>
+                  <a:srgbClr val="9AA1B0"/>
+                </a:solidFill>
+                <a:latin typeface="Consolas" pitchFamily="34" charset="0"/>
+                <a:ea typeface="Consolas" pitchFamily="34" charset="-122"/>
+                <a:cs typeface="Consolas" pitchFamily="34" charset="-120"/>
+              </a:rPr>
+              <a:t>every page invented from scratch, by a different run of the same seven agents</a:t>
+            </a:r>
+            <a:endParaRPr lang="en-US" sz="1200" dirty="0"/>
+          </a:p>
+        </p:txBody>
+      </p:sp>
+      <p:sp>
+        <p:nvSpPr>
+          <p:cNvPr id="17" name="Text 15"/>
+          <p:cNvSpPr/>
+          <p:nvPr/>
+        </p:nvSpPr>
+        <p:spPr>
+          <a:xfrm>
+            <a:off x="1828800" y="5852160"/>
+            <a:ext cx="8534095" cy="457200"/>
+          </a:xfrm>
+          <a:prstGeom prst="rect">
+            <a:avLst/>
+          </a:prstGeom>
+          <a:noFill/>
+          <a:ln/>
+        </p:spPr>
+        <p:txBody>
+          <a:bodyPr wrap="square" rtlCol="0" anchor="ctr"/>
+          <a:lstStyle/>
+          <a:p>
+            <a:pPr algn="ctr" indent="0" marL="0">
+              <a:buNone/>
+            </a:pPr>
+            <a:r>
+              <a:rPr lang="en-US" sz="1300" dirty="0">
+                <a:solidFill>
+                  <a:srgbClr val="4F46E5"/>
+                </a:solidFill>
+                <a:latin typeface="Consolas" pitchFamily="34" charset="0"/>
+                <a:ea typeface="Consolas" pitchFamily="34" charset="-122"/>
+                <a:cs typeface="Consolas" pitchFamily="34" charset="-120"/>
+              </a:rPr>
+              <a:t>open  /gallery  on the projector</a:t>
+            </a:r>
+            <a:endParaRPr lang="en-US" sz="1300" dirty="0"/>
+          </a:p>
+        </p:txBody>
+      </p:sp>
+    </p:spTree>
+  </p:cSld>
+  <p:clrMapOvr>
+    <a:masterClrMapping/>
+  </p:clrMapOvr>
+</p:sld>
+</file>
+
+<file path=ppt/slides/slide29.xml><?xml version="1.0" encoding="utf-8"?>
+<p:sld xmlns:a="http://schemas.openxmlformats.org/drawingml/2006/main" xmlns:r="http://schemas.openxmlformats.org/officeDocument/2006/relationships" xmlns:p="http://schemas.openxmlformats.org/presentationml/2006/main">
+  <p:cSld name="Slide 29">
+    <p:bg>
+      <p:bgPr>
+        <a:solidFill>
+          <a:srgbClr val="FFFFFF"/>
+        </a:solidFill>
+      </p:bgPr>
+    </p:bg>
+    <p:spTree>
+      <p:nvGrpSpPr>
+        <p:cNvPr id="1" name=""/>
+        <p:cNvGrpSpPr/>
+        <p:nvPr/>
+      </p:nvGrpSpPr>
+      <p:grpSpPr>
+        <a:xfrm>
+          <a:off x="0" y="0"/>
+          <a:ext cx="0" cy="0"/>
+          <a:chOff x="0" y="0"/>
+          <a:chExt cx="0" cy="0"/>
+        </a:xfrm>
+      </p:grpSpPr>
+      <p:sp>
+        <p:nvSpPr>
+          <p:cNvPr id="2" name="Text 0"/>
+          <p:cNvSpPr/>
+          <p:nvPr/>
+        </p:nvSpPr>
+        <p:spPr>
+          <a:xfrm>
             <a:off x="841248" y="640080"/>
             <a:ext cx="9144000" cy="292608"/>
           </a:xfrm>
@@ -16914,7 +18579,7 @@
                 <a:ea typeface="Arial" pitchFamily="34" charset="-122"/>
                 <a:cs typeface="Arial" pitchFamily="34" charset="-120"/>
               </a:rPr>
-              <a:t>We build one live, later.</a:t>
+              <a:t>The crew starts on it now.</a:t>
             </a:r>
             <a:endParaRPr lang="en-US" sz="3800" dirty="0"/>
           </a:p>
@@ -17250,7 +18915,7 @@
                 <a:ea typeface="Consolas" pitchFamily="34" charset="-122"/>
                 <a:cs typeface="Consolas" pitchFamily="34" charset="-120"/>
               </a:rPr>
-              <a:t>Every idea runs on the laptop up here. Nothing you type leaves the room.</a:t>
+              <a:t>From the moment you send it, agents on this laptop start building your page. You will see them all at the end.</a:t>
             </a:r>
             <a:endParaRPr lang="en-US" sz="1100" dirty="0"/>
           </a:p>

--- a/slides/One-Prompt-Many-Workers-Light.pptx
+++ b/slides/One-Prompt-Many-Workers-Light.pptx
@@ -34,9 +34,10 @@
     <p:sldId id="282" r:id="rId28"/>
     <p:sldId id="283" r:id="rId29"/>
     <p:sldId id="284" r:id="rId30"/>
+    <p:sldId id="285" r:id="rId31"/>
   </p:sldIdLst>
   <p:notesMasterIdLst>
-    <p:notesMasterId r:id="rId31"/>
+    <p:notesMasterId r:id="rId32"/>
   </p:notesMasterIdLst>
   <p:sldSz cx="12191695" cy="6858000"/>
   <p:notesSz cx="6858000" cy="12191695"/>
@@ -2202,7 +2203,7 @@
           <a:p>
             <a:r>
               <a:rPr lang="en-US" dirty="0"/>
-              <a:t>This is the moment the whole talk has been building to. Say it slowly. 'Remember the code at the start? Every idea you sent went into a queue. And while I was up here talking about prompts and levers and loops, the crew never stopped. Seven agents. One laptop. No internet. Let me show you what they made.' Then switch the projector to the gallery.</a:t>
+              <a:t>This is the slide that makes the talk worth an hour of a senior engineer's evening. Say it plainly: 'Everything you just watched, the parallel starts, the handoffs, the loops back, the fact that it did not die when I unplugged the model, the fact that nothing rude reached the screen, the fact that the queue kept building while I talked. None of that came from the model. That is a harness, and it is ordinary engineering. Threads, queues, schedulers, validation, a human approval step. The model is a component. The harness is the product.'</a:t>
             </a:r>
             <a:endParaRPr lang="en-US" dirty="0"/>
           </a:p>
@@ -2290,7 +2291,7 @@
           <a:p>
             <a:r>
               <a:rPr lang="en-US" dirty="0"/>
-              <a:t>Put the gallery on the projector and just let the room look for a few seconds. Do not talk over it. Then: 'Every one of these has its own name, its own artwork, its own colours, its own copy, and its own honest criticism. Same seven agents, run once per idea, on one laptop, while I was busy talking.' Point out one or two of the funnier ones by name. Let people find theirs.</a:t>
+              <a:t>This is the moment the whole talk has been building to. Say it slowly. 'Remember the code at the start? Every idea you sent went into a queue. And while I was up here talking about prompts and levers and loops, the crew never stopped. Seven agents. One laptop. No internet. Let me show you what they made.' Then switch the projector to the gallery.</a:t>
             </a:r>
             <a:endParaRPr lang="en-US" dirty="0"/>
           </a:p>
@@ -2378,7 +2379,7 @@
           <a:p>
             <a:r>
               <a:rPr lang="en-US" dirty="0"/>
-              <a:t>Land the plane. A function that guesses, given a loop, a stack, six levers, and a crew, learns to command a team, in Java, offline. The real skill is knowing what to ask and how to constrain the answer. Scan to connect on LinkedIn and grab the code on GitHub. What do you want to break first?</a:t>
+              <a:t>Put the gallery on the projector and just let the room look for a few seconds. Do not talk over it. Then: 'Every one of these has its own name, its own artwork, its own colours, its own copy, and its own honest criticism. Same seven agents, run once per idea, on one laptop, while I was busy talking.' Point out one or two of the funnier ones by name. Let people find theirs.</a:t>
             </a:r>
             <a:endParaRPr lang="en-US" dirty="0"/>
           </a:p>
@@ -2490,6 +2491,94 @@
             <a:fld id="{F7021451-1387-4CA6-816F-3879F97B5CBC}" type="slidenum">
               <a:rPr lang="en-US"/>
               <a:t>3</a:t>
+            </a:fld>
+            <a:endParaRPr lang="en-US"/>
+          </a:p>
+        </p:txBody>
+      </p:sp>
+    </p:spTree>
+    <p:extLst>
+      <p:ext uri="{BB962C8B-B14F-4D97-AF65-F5344CB8AC3E}">
+        <p14:creationId xmlns:p14="http://schemas.microsoft.com/office/powerpoint/2010/main" val="1024086991"/>
+      </p:ext>
+    </p:extLst>
+  </p:cSld>
+  <p:clrMapOvr>
+    <a:masterClrMapping/>
+  </p:clrMapOvr>
+</p:notes>
+</file>
+
+<file path=ppt/notesSlides/notesSlide30.xml><?xml version="1.0" encoding="utf-8"?>
+<p:notes xmlns:a="http://schemas.openxmlformats.org/drawingml/2006/main" xmlns:r="http://schemas.openxmlformats.org/officeDocument/2006/relationships" xmlns:p="http://schemas.openxmlformats.org/presentationml/2006/main">
+  <p:cSld>
+    <p:spTree>
+      <p:nvGrpSpPr>
+        <p:cNvPr id="1" name=""/>
+        <p:cNvGrpSpPr/>
+        <p:nvPr/>
+      </p:nvGrpSpPr>
+      <p:grpSpPr>
+        <a:xfrm>
+          <a:off x="0" y="0"/>
+          <a:ext cx="0" cy="0"/>
+          <a:chOff x="0" y="0"/>
+          <a:chExt cx="0" cy="0"/>
+        </a:xfrm>
+      </p:grpSpPr>
+      <p:sp>
+        <p:nvSpPr>
+          <p:cNvPr id="2" name="Slide Image Placeholder 1"/>
+          <p:cNvSpPr>
+            <a:spLocks noGrp="1" noRot="1" noChangeAspect="1"/>
+          </p:cNvSpPr>
+          <p:nvPr>
+            <p:ph type="sldImg"/>
+          </p:nvPr>
+        </p:nvSpPr>
+        <p:spPr/>
+      </p:sp>
+      <p:sp>
+        <p:nvSpPr>
+          <p:cNvPr id="3" name="Notes Placeholder 2"/>
+          <p:cNvSpPr>
+            <a:spLocks noGrp="1"/>
+          </p:cNvSpPr>
+          <p:nvPr>
+            <p:ph type="body" idx="1"/>
+          </p:nvPr>
+        </p:nvSpPr>
+        <p:spPr/>
+        <p:txBody>
+          <a:bodyPr/>
+          <a:lstStyle/>
+          <a:p>
+            <a:r>
+              <a:rPr lang="en-US" dirty="0"/>
+              <a:t>Land the plane. A function that guesses, given a loop, a stack, six levers, and a crew, learns to command a team, in Java, offline. The real skill is knowing what to ask and how to constrain the answer. Scan to connect on LinkedIn and grab the code on GitHub. What do you want to break first?</a:t>
+            </a:r>
+            <a:endParaRPr lang="en-US" dirty="0"/>
+          </a:p>
+        </p:txBody>
+      </p:sp>
+      <p:sp>
+        <p:nvSpPr>
+          <p:cNvPr id="4" name="Slide Number Placeholder 3"/>
+          <p:cNvSpPr>
+            <a:spLocks noGrp="1"/>
+          </p:cNvSpPr>
+          <p:nvPr>
+            <p:ph type="sldNum" sz="quarter" idx="10"/>
+          </p:nvPr>
+        </p:nvSpPr>
+        <p:spPr/>
+        <p:txBody>
+          <a:bodyPr/>
+          <a:lstStyle/>
+          <a:p>
+            <a:fld id="{F7021451-1387-4CA6-816F-3879F97B5CBC}" type="slidenum">
+              <a:rPr lang="en-US"/>
+              <a:t>30</a:t>
             </a:fld>
             <a:endParaRPr lang="en-US"/>
           </a:p>
@@ -16307,13 +16396,13 @@
             <a:r>
               <a:rPr lang="en-US" sz="1100" b="1" spc="300" kern="0" dirty="0">
                 <a:solidFill>
-                  <a:srgbClr val="D97706"/>
+                  <a:srgbClr val="7C3AED"/>
                 </a:solidFill>
                 <a:latin typeface="Arial" pitchFamily="34" charset="0"/>
                 <a:ea typeface="Arial" pitchFamily="34" charset="-122"/>
                 <a:cs typeface="Arial" pitchFamily="34" charset="-120"/>
               </a:rPr>
-              <a:t>THE REVEAL</a:t>
+              <a:t>WHAT YOU ACTUALLY WATCHED</a:t>
             </a:r>
             <a:endParaRPr lang="en-US" sz="1100" dirty="0"/>
           </a:p>
@@ -16327,27 +16416,24 @@
         </p:nvSpPr>
         <p:spPr>
           <a:xfrm>
-            <a:off x="841248" y="1463040"/>
-            <a:ext cx="7680960" cy="1828800"/>
-          </a:xfrm>
-          <a:prstGeom prst="rect">
-            <a:avLst/>
-          </a:prstGeom>
-          <a:noFill/>
-          <a:ln/>
-        </p:spPr>
-        <p:txBody>
-          <a:bodyPr wrap="square" rtlCol="0" anchor="ctr"/>
-          <a:lstStyle/>
-          <a:p>
-            <a:pPr indent="0" marL="0">
-              <a:lnSpc>
-                <a:spcPts val="5000"/>
-              </a:lnSpc>
-              <a:buNone/>
-            </a:pPr>
-            <a:r>
-              <a:rPr lang="en-US" sz="4000" b="1" dirty="0">
+            <a:off x="841248" y="1005840"/>
+            <a:ext cx="10424160" cy="822960"/>
+          </a:xfrm>
+          <a:prstGeom prst="rect">
+            <a:avLst/>
+          </a:prstGeom>
+          <a:noFill/>
+          <a:ln/>
+        </p:spPr>
+        <p:txBody>
+          <a:bodyPr wrap="square" rtlCol="0" anchor="ctr"/>
+          <a:lstStyle/>
+          <a:p>
+            <a:pPr indent="0" marL="0">
+              <a:buNone/>
+            </a:pPr>
+            <a:r>
+              <a:rPr lang="en-US" sz="3000" b="1" dirty="0">
                 <a:solidFill>
                   <a:srgbClr val="16181D"/>
                 </a:solidFill>
@@ -16355,16 +16441,13 @@
                 <a:ea typeface="Arial" pitchFamily="34" charset="-122"/>
                 <a:cs typeface="Arial" pitchFamily="34" charset="-120"/>
               </a:rPr>
-              <a:t>You have been </a:t>
-            </a:r>
-            <a:pPr indent="0" marL="0">
-              <a:lnSpc>
-                <a:spcPts val="5000"/>
-              </a:lnSpc>
-              <a:buNone/>
-            </a:pPr>
-            <a:r>
-              <a:rPr lang="en-US" sz="4000" b="1" dirty="0">
+              <a:t>The model was the easy part. </a:t>
+            </a:r>
+            <a:pPr indent="0" marL="0">
+              <a:buNone/>
+            </a:pPr>
+            <a:r>
+              <a:rPr lang="en-US" sz="3000" b="1" dirty="0">
                 <a:solidFill>
                   <a:srgbClr val="4F46E5"/>
                 </a:solidFill>
@@ -16372,35 +16455,9 @@
                 <a:ea typeface="Arial" pitchFamily="34" charset="-122"/>
                 <a:cs typeface="Arial" pitchFamily="34" charset="-120"/>
               </a:rPr>
-              <a:t>employing them</a:t>
-            </a:r>
-            <a:pPr indent="0" marL="0">
-              <a:lnSpc>
-                <a:spcPts val="5000"/>
-              </a:lnSpc>
-              <a:buNone/>
-            </a:pPr>
-            <a:endParaRPr lang="en-US" sz="4000" dirty="0"/>
-          </a:p>
-          <a:p>
-            <a:pPr indent="0" marL="0">
-              <a:lnSpc>
-                <a:spcPts val="5000"/>
-              </a:lnSpc>
-              <a:buNone/>
-            </a:pPr>
-            <a:r>
-              <a:rPr lang="en-US" sz="4000" b="1" dirty="0">
-                <a:solidFill>
-                  <a:srgbClr val="16181D"/>
-                </a:solidFill>
-                <a:latin typeface="Arial" pitchFamily="34" charset="0"/>
-                <a:ea typeface="Arial" pitchFamily="34" charset="-122"/>
-                <a:cs typeface="Arial" pitchFamily="34" charset="-120"/>
-              </a:rPr>
-              <a:t>this whole time.</a:t>
-            </a:r>
-            <a:endParaRPr lang="en-US" sz="4000" dirty="0"/>
+              <a:t>This is the work.</a:t>
+            </a:r>
+            <a:endParaRPr lang="en-US" sz="3000" dirty="0"/>
           </a:p>
         </p:txBody>
       </p:sp>
@@ -16412,27 +16469,24 @@
         </p:nvSpPr>
         <p:spPr>
           <a:xfrm>
-            <a:off x="841248" y="3520440"/>
-            <a:ext cx="5943600" cy="1463040"/>
-          </a:xfrm>
-          <a:prstGeom prst="rect">
-            <a:avLst/>
-          </a:prstGeom>
-          <a:noFill/>
-          <a:ln/>
-        </p:spPr>
-        <p:txBody>
-          <a:bodyPr wrap="square" rtlCol="0" anchor="ctr"/>
-          <a:lstStyle/>
-          <a:p>
-            <a:pPr indent="0" marL="0">
-              <a:lnSpc>
-                <a:spcPts val="2700"/>
-              </a:lnSpc>
-              <a:buNone/>
-            </a:pPr>
-            <a:r>
-              <a:rPr lang="en-US" sz="1700" dirty="0">
+            <a:off x="841248" y="1783080"/>
+            <a:ext cx="7863840" cy="548640"/>
+          </a:xfrm>
+          <a:prstGeom prst="rect">
+            <a:avLst/>
+          </a:prstGeom>
+          <a:noFill/>
+          <a:ln/>
+        </p:spPr>
+        <p:txBody>
+          <a:bodyPr wrap="square" rtlCol="0" anchor="ctr"/>
+          <a:lstStyle/>
+          <a:p>
+            <a:pPr indent="0" marL="0">
+              <a:buNone/>
+            </a:pPr>
+            <a:r>
+              <a:rPr lang="en-US" sz="1550" dirty="0">
                 <a:solidFill>
                   <a:srgbClr val="666C7A"/>
                 </a:solidFill>
@@ -16440,269 +16494,26 @@
                 <a:ea typeface="Calibri" pitchFamily="34" charset="-122"/>
                 <a:cs typeface="Calibri" pitchFamily="34" charset="-120"/>
               </a:rPr>
-              <a:t>Every idea you sent went straight into the queue. While I was talking about prompts and levers and loops, seven agents on this laptop were quietly building a landing page for each one.</a:t>
-            </a:r>
-            <a:endParaRPr lang="en-US" sz="1700" dirty="0"/>
-          </a:p>
-        </p:txBody>
-      </p:sp>
-      <p:sp>
-        <p:nvSpPr>
-          <p:cNvPr id="5" name="Text 3"/>
-          <p:cNvSpPr/>
-          <p:nvPr/>
-        </p:nvSpPr>
-        <p:spPr>
-          <a:xfrm>
-            <a:off x="841248" y="5120640"/>
-            <a:ext cx="1828800" cy="685800"/>
-          </a:xfrm>
-          <a:prstGeom prst="rect">
-            <a:avLst/>
-          </a:prstGeom>
-          <a:noFill/>
-          <a:ln/>
-        </p:spPr>
-        <p:txBody>
-          <a:bodyPr wrap="square" rtlCol="0" anchor="ctr"/>
-          <a:lstStyle/>
-          <a:p>
-            <a:pPr indent="0" marL="0">
-              <a:buNone/>
-            </a:pPr>
-            <a:r>
-              <a:rPr lang="en-US" sz="3800" b="1" dirty="0">
-                <a:solidFill>
-                  <a:srgbClr val="4F46E5"/>
-                </a:solidFill>
-                <a:latin typeface="Arial" pitchFamily="34" charset="0"/>
-                <a:ea typeface="Arial" pitchFamily="34" charset="-122"/>
-                <a:cs typeface="Arial" pitchFamily="34" charset="-120"/>
-              </a:rPr>
-              <a:t>7</a:t>
-            </a:r>
-            <a:endParaRPr lang="en-US" sz="3800" dirty="0"/>
-          </a:p>
-        </p:txBody>
-      </p:sp>
-      <p:sp>
-        <p:nvSpPr>
-          <p:cNvPr id="6" name="Text 4"/>
-          <p:cNvSpPr/>
-          <p:nvPr/>
-        </p:nvSpPr>
-        <p:spPr>
-          <a:xfrm>
-            <a:off x="841248" y="5779008"/>
-            <a:ext cx="1920240" cy="548640"/>
-          </a:xfrm>
-          <a:prstGeom prst="rect">
-            <a:avLst/>
-          </a:prstGeom>
-          <a:noFill/>
-          <a:ln/>
-        </p:spPr>
-        <p:txBody>
-          <a:bodyPr wrap="square" rtlCol="0" anchor="ctr"/>
-          <a:lstStyle/>
-          <a:p>
-            <a:pPr indent="0" marL="0">
-              <a:lnSpc>
-                <a:spcPts val="1200"/>
-              </a:lnSpc>
-              <a:buNone/>
-            </a:pPr>
-            <a:r>
-              <a:rPr lang="en-US" sz="950" spc="150" kern="0" dirty="0">
-                <a:solidFill>
-                  <a:srgbClr val="666C7A"/>
-                </a:solidFill>
-                <a:latin typeface="Consolas" pitchFamily="34" charset="0"/>
-                <a:ea typeface="Consolas" pitchFamily="34" charset="-122"/>
-                <a:cs typeface="Consolas" pitchFamily="34" charset="-120"/>
-              </a:rPr>
-              <a:t>AGENTS PER IDEA</a:t>
-            </a:r>
-            <a:endParaRPr lang="en-US" sz="950" dirty="0"/>
-          </a:p>
-        </p:txBody>
-      </p:sp>
-      <p:sp>
-        <p:nvSpPr>
-          <p:cNvPr id="7" name="Text 5"/>
-          <p:cNvSpPr/>
-          <p:nvPr/>
-        </p:nvSpPr>
-        <p:spPr>
-          <a:xfrm>
-            <a:off x="2852928" y="5120640"/>
-            <a:ext cx="1828800" cy="685800"/>
-          </a:xfrm>
-          <a:prstGeom prst="rect">
-            <a:avLst/>
-          </a:prstGeom>
-          <a:noFill/>
-          <a:ln/>
-        </p:spPr>
-        <p:txBody>
-          <a:bodyPr wrap="square" rtlCol="0" anchor="ctr"/>
-          <a:lstStyle/>
-          <a:p>
-            <a:pPr indent="0" marL="0">
-              <a:buNone/>
-            </a:pPr>
-            <a:r>
-              <a:rPr lang="en-US" sz="3800" b="1" dirty="0">
-                <a:solidFill>
-                  <a:srgbClr val="16181D"/>
-                </a:solidFill>
-                <a:latin typeface="Arial" pitchFamily="34" charset="0"/>
-                <a:ea typeface="Arial" pitchFamily="34" charset="-122"/>
-                <a:cs typeface="Arial" pitchFamily="34" charset="-120"/>
-              </a:rPr>
-              <a:t>0</a:t>
-            </a:r>
-            <a:endParaRPr lang="en-US" sz="3800" dirty="0"/>
-          </a:p>
-        </p:txBody>
-      </p:sp>
-      <p:sp>
-        <p:nvSpPr>
-          <p:cNvPr id="8" name="Text 6"/>
-          <p:cNvSpPr/>
-          <p:nvPr/>
-        </p:nvSpPr>
-        <p:spPr>
-          <a:xfrm>
-            <a:off x="2852928" y="5779008"/>
-            <a:ext cx="1920240" cy="548640"/>
-          </a:xfrm>
-          <a:prstGeom prst="rect">
-            <a:avLst/>
-          </a:prstGeom>
-          <a:noFill/>
-          <a:ln/>
-        </p:spPr>
-        <p:txBody>
-          <a:bodyPr wrap="square" rtlCol="0" anchor="ctr"/>
-          <a:lstStyle/>
-          <a:p>
-            <a:pPr indent="0" marL="0">
-              <a:lnSpc>
-                <a:spcPts val="1200"/>
-              </a:lnSpc>
-              <a:buNone/>
-            </a:pPr>
-            <a:r>
-              <a:rPr lang="en-US" sz="950" spc="150" kern="0" dirty="0">
-                <a:solidFill>
-                  <a:srgbClr val="666C7A"/>
-                </a:solidFill>
-                <a:latin typeface="Consolas" pitchFamily="34" charset="0"/>
-                <a:ea typeface="Consolas" pitchFamily="34" charset="-122"/>
-                <a:cs typeface="Consolas" pitchFamily="34" charset="-120"/>
-              </a:rPr>
-              <a:t>CLOUD CALLS</a:t>
-            </a:r>
-            <a:endParaRPr lang="en-US" sz="950" dirty="0"/>
-          </a:p>
-        </p:txBody>
-      </p:sp>
-      <p:sp>
-        <p:nvSpPr>
-          <p:cNvPr id="9" name="Text 7"/>
-          <p:cNvSpPr/>
-          <p:nvPr/>
-        </p:nvSpPr>
-        <p:spPr>
-          <a:xfrm>
-            <a:off x="4590288" y="5120640"/>
-            <a:ext cx="1828800" cy="685800"/>
-          </a:xfrm>
-          <a:prstGeom prst="rect">
-            <a:avLst/>
-          </a:prstGeom>
-          <a:noFill/>
-          <a:ln/>
-        </p:spPr>
-        <p:txBody>
-          <a:bodyPr wrap="square" rtlCol="0" anchor="ctr"/>
-          <a:lstStyle/>
-          <a:p>
-            <a:pPr indent="0" marL="0">
-              <a:buNone/>
-            </a:pPr>
-            <a:r>
-              <a:rPr lang="en-US" sz="3800" b="1" dirty="0">
-                <a:solidFill>
-                  <a:srgbClr val="16181D"/>
-                </a:solidFill>
-                <a:latin typeface="Arial" pitchFamily="34" charset="0"/>
-                <a:ea typeface="Arial" pitchFamily="34" charset="-122"/>
-                <a:cs typeface="Arial" pitchFamily="34" charset="-120"/>
-              </a:rPr>
-              <a:t>1</a:t>
-            </a:r>
-            <a:endParaRPr lang="en-US" sz="3800" dirty="0"/>
-          </a:p>
-        </p:txBody>
-      </p:sp>
-      <p:sp>
-        <p:nvSpPr>
-          <p:cNvPr id="10" name="Text 8"/>
-          <p:cNvSpPr/>
-          <p:nvPr/>
-        </p:nvSpPr>
-        <p:spPr>
-          <a:xfrm>
-            <a:off x="4590288" y="5779008"/>
-            <a:ext cx="1920240" cy="548640"/>
-          </a:xfrm>
-          <a:prstGeom prst="rect">
-            <a:avLst/>
-          </a:prstGeom>
-          <a:noFill/>
-          <a:ln/>
-        </p:spPr>
-        <p:txBody>
-          <a:bodyPr wrap="square" rtlCol="0" anchor="ctr"/>
-          <a:lstStyle/>
-          <a:p>
-            <a:pPr indent="0" marL="0">
-              <a:lnSpc>
-                <a:spcPts val="1200"/>
-              </a:lnSpc>
-              <a:buNone/>
-            </a:pPr>
-            <a:r>
-              <a:rPr lang="en-US" sz="950" spc="150" kern="0" dirty="0">
-                <a:solidFill>
-                  <a:srgbClr val="666C7A"/>
-                </a:solidFill>
-                <a:latin typeface="Consolas" pitchFamily="34" charset="0"/>
-                <a:ea typeface="Consolas" pitchFamily="34" charset="-122"/>
-                <a:cs typeface="Consolas" pitchFamily="34" charset="-120"/>
-              </a:rPr>
-              <a:t>LAPTOP, STILL WARM</a:t>
-            </a:r>
-            <a:endParaRPr lang="en-US" sz="950" dirty="0"/>
-          </a:p>
-        </p:txBody>
-      </p:sp>
-      <p:sp>
-        <p:nvSpPr>
-          <p:cNvPr id="11" name="Shape 9"/>
-          <p:cNvSpPr/>
-          <p:nvPr/>
-        </p:nvSpPr>
-        <p:spPr>
-          <a:xfrm>
-            <a:off x="7680960" y="1737360"/>
-            <a:ext cx="3657600" cy="1051560"/>
+              <a:t>Swap Qwen for a bigger model and almost nothing here changes. The harness is the part you build, own and get paged about.</a:t>
+            </a:r>
+            <a:endParaRPr lang="en-US" sz="1550" dirty="0"/>
+          </a:p>
+        </p:txBody>
+      </p:sp>
+      <p:sp>
+        <p:nvSpPr>
+          <p:cNvPr id="5" name="Shape 3"/>
+          <p:cNvSpPr/>
+          <p:nvPr/>
+        </p:nvSpPr>
+        <p:spPr>
+          <a:xfrm>
+            <a:off x="841248" y="2514600"/>
+            <a:ext cx="3401568" cy="1783080"/>
           </a:xfrm>
           <a:prstGeom prst="roundRect">
             <a:avLst>
-              <a:gd name="adj" fmla="val 8696"/>
+              <a:gd name="adj" fmla="val 5128"/>
             </a:avLst>
           </a:prstGeom>
           <a:solidFill>
@@ -16725,14 +16536,14 @@
       </p:sp>
       <p:sp>
         <p:nvSpPr>
-          <p:cNvPr id="12" name="Shape 10"/>
-          <p:cNvSpPr/>
-          <p:nvPr/>
-        </p:nvSpPr>
-        <p:spPr>
-          <a:xfrm>
-            <a:off x="7973568" y="1988820"/>
-            <a:ext cx="548640" cy="548640"/>
+          <p:cNvPr id="6" name="Shape 4"/>
+          <p:cNvSpPr/>
+          <p:nvPr/>
+        </p:nvSpPr>
+        <p:spPr>
+          <a:xfrm>
+            <a:off x="1143000" y="2798064"/>
+            <a:ext cx="493776" cy="493776"/>
           </a:xfrm>
           <a:prstGeom prst="ellipse">
             <a:avLst/>
@@ -16752,7 +16563,7 @@
       </p:sp>
       <p:pic>
         <p:nvPicPr>
-          <p:cNvPr id="13" name="Image 0" descr="preencoded.png">    </p:cNvPr>
+          <p:cNvPr id="7" name="Image 0" descr="preencoded.png">    </p:cNvPr>
           <p:cNvPicPr>
             <a:picLocks noChangeAspect="1"/>
           </p:cNvPicPr>
@@ -16766,8 +16577,8 @@
         </p:blipFill>
         <p:spPr>
           <a:xfrm>
-            <a:off x="8105242" y="2120494"/>
-            <a:ext cx="285293" cy="285293"/>
+            <a:off x="1261506" y="2916570"/>
+            <a:ext cx="256764" cy="256764"/>
           </a:xfrm>
           <a:prstGeom prst="rect">
             <a:avLst/>
@@ -16776,30 +16587,30 @@
       </p:pic>
       <p:sp>
         <p:nvSpPr>
-          <p:cNvPr id="14" name="Text 11"/>
-          <p:cNvSpPr/>
-          <p:nvPr/>
-        </p:nvSpPr>
-        <p:spPr>
-          <a:xfrm>
-            <a:off x="8732520" y="1737360"/>
-            <a:ext cx="2468880" cy="1051560"/>
-          </a:xfrm>
-          <a:prstGeom prst="rect">
-            <a:avLst/>
-          </a:prstGeom>
-          <a:noFill/>
-          <a:ln/>
-        </p:spPr>
-        <p:txBody>
-          <a:bodyPr wrap="square" rtlCol="0" anchor="ctr"/>
-          <a:lstStyle/>
-          <a:p>
-            <a:pPr indent="0" marL="0">
-              <a:buNone/>
-            </a:pPr>
-            <a:r>
-              <a:rPr lang="en-US" sz="1700" b="1" dirty="0">
+          <p:cNvPr id="8" name="Text 5"/>
+          <p:cNvSpPr/>
+          <p:nvPr/>
+        </p:nvSpPr>
+        <p:spPr>
+          <a:xfrm>
+            <a:off x="1773936" y="2807208"/>
+            <a:ext cx="2258568" cy="457200"/>
+          </a:xfrm>
+          <a:prstGeom prst="rect">
+            <a:avLst/>
+          </a:prstGeom>
+          <a:noFill/>
+          <a:ln/>
+        </p:spPr>
+        <p:txBody>
+          <a:bodyPr wrap="square" rtlCol="0" anchor="ctr"/>
+          <a:lstStyle/>
+          <a:p>
+            <a:pPr indent="0" marL="0">
+              <a:buNone/>
+            </a:pPr>
+            <a:r>
+              <a:rPr lang="en-US" sz="1550" b="1" dirty="0">
                 <a:solidFill>
                   <a:srgbClr val="16181D"/>
                 </a:solidFill>
@@ -16807,50 +16618,68 @@
                 <a:ea typeface="Arial" pitchFamily="34" charset="-122"/>
                 <a:cs typeface="Arial" pitchFamily="34" charset="-120"/>
               </a:rPr>
-              <a:t>you sent it</a:t>
-            </a:r>
-            <a:endParaRPr lang="en-US" sz="1700" dirty="0"/>
-          </a:p>
-        </p:txBody>
-      </p:sp>
-      <p:sp>
-        <p:nvSpPr>
-          <p:cNvPr id="15" name="Shape 12"/>
-          <p:cNvSpPr/>
-          <p:nvPr/>
-        </p:nvSpPr>
-        <p:spPr>
-          <a:xfrm>
-            <a:off x="9509760" y="2788920"/>
-            <a:ext cx="0" cy="320040"/>
-          </a:xfrm>
-          <a:prstGeom prst="line">
-            <a:avLst/>
-          </a:prstGeom>
-          <a:noFill/>
-          <a:ln w="20320">
-            <a:solidFill>
-              <a:srgbClr val="9AA1B0"/>
-            </a:solidFill>
-            <a:prstDash val="solid"/>
-            <a:tailEnd type="triangle"/>
-          </a:ln>
-        </p:spPr>
-      </p:sp>
-      <p:sp>
-        <p:nvSpPr>
-          <p:cNvPr id="16" name="Shape 13"/>
-          <p:cNvSpPr/>
-          <p:nvPr/>
-        </p:nvSpPr>
-        <p:spPr>
-          <a:xfrm>
-            <a:off x="7680960" y="3108960"/>
-            <a:ext cx="3657600" cy="1051560"/>
+              <a:t>Parallelism</a:t>
+            </a:r>
+            <a:endParaRPr lang="en-US" sz="1550" dirty="0"/>
+          </a:p>
+        </p:txBody>
+      </p:sp>
+      <p:sp>
+        <p:nvSpPr>
+          <p:cNvPr id="9" name="Text 6"/>
+          <p:cNvSpPr/>
+          <p:nvPr/>
+        </p:nvSpPr>
+        <p:spPr>
+          <a:xfrm>
+            <a:off x="1161288" y="3429000"/>
+            <a:ext cx="2761488" cy="731520"/>
+          </a:xfrm>
+          <a:prstGeom prst="rect">
+            <a:avLst/>
+          </a:prstGeom>
+          <a:noFill/>
+          <a:ln/>
+        </p:spPr>
+        <p:txBody>
+          <a:bodyPr wrap="square" rtlCol="0" anchor="ctr"/>
+          <a:lstStyle/>
+          <a:p>
+            <a:pPr indent="0" marL="0">
+              <a:lnSpc>
+                <a:spcPts val="1600"/>
+              </a:lnSpc>
+              <a:buNone/>
+            </a:pPr>
+            <a:r>
+              <a:rPr lang="en-US" sz="1200" dirty="0">
+                <a:solidFill>
+                  <a:srgbClr val="666C7A"/>
+                </a:solidFill>
+                <a:latin typeface="Calibri" pitchFamily="34" charset="0"/>
+                <a:ea typeface="Calibri" pitchFamily="34" charset="-122"/>
+                <a:cs typeface="Calibri" pitchFamily="34" charset="-120"/>
+              </a:rPr>
+              <a:t>Three agents start together. The one that finishes first assists, it does not idle.</a:t>
+            </a:r>
+            <a:endParaRPr lang="en-US" sz="1200" dirty="0"/>
+          </a:p>
+        </p:txBody>
+      </p:sp>
+      <p:sp>
+        <p:nvSpPr>
+          <p:cNvPr id="10" name="Shape 7"/>
+          <p:cNvSpPr/>
+          <p:nvPr/>
+        </p:nvSpPr>
+        <p:spPr>
+          <a:xfrm>
+            <a:off x="4498848" y="2514600"/>
+            <a:ext cx="3401568" cy="1783080"/>
           </a:xfrm>
           <a:prstGeom prst="roundRect">
             <a:avLst>
-              <a:gd name="adj" fmla="val 8696"/>
+              <a:gd name="adj" fmla="val 5128"/>
             </a:avLst>
           </a:prstGeom>
           <a:solidFill>
@@ -16873,14 +16702,14 @@
       </p:sp>
       <p:sp>
         <p:nvSpPr>
-          <p:cNvPr id="17" name="Shape 14"/>
-          <p:cNvSpPr/>
-          <p:nvPr/>
-        </p:nvSpPr>
-        <p:spPr>
-          <a:xfrm>
-            <a:off x="7973568" y="3360420"/>
-            <a:ext cx="548640" cy="548640"/>
+          <p:cNvPr id="11" name="Shape 8"/>
+          <p:cNvSpPr/>
+          <p:nvPr/>
+        </p:nvSpPr>
+        <p:spPr>
+          <a:xfrm>
+            <a:off x="4800600" y="2798064"/>
+            <a:ext cx="493776" cy="493776"/>
           </a:xfrm>
           <a:prstGeom prst="ellipse">
             <a:avLst/>
@@ -16900,7 +16729,7 @@
       </p:sp>
       <p:pic>
         <p:nvPicPr>
-          <p:cNvPr id="18" name="Image 1" descr="preencoded.png">    </p:cNvPr>
+          <p:cNvPr id="12" name="Image 1" descr="preencoded.png">    </p:cNvPr>
           <p:cNvPicPr>
             <a:picLocks noChangeAspect="1"/>
           </p:cNvPicPr>
@@ -16914,8 +16743,8 @@
         </p:blipFill>
         <p:spPr>
           <a:xfrm>
-            <a:off x="8105242" y="3492094"/>
-            <a:ext cx="285293" cy="285293"/>
+            <a:off x="4919106" y="2916570"/>
+            <a:ext cx="256764" cy="256764"/>
           </a:xfrm>
           <a:prstGeom prst="rect">
             <a:avLst/>
@@ -16924,30 +16753,30 @@
       </p:pic>
       <p:sp>
         <p:nvSpPr>
-          <p:cNvPr id="19" name="Text 15"/>
-          <p:cNvSpPr/>
-          <p:nvPr/>
-        </p:nvSpPr>
-        <p:spPr>
-          <a:xfrm>
-            <a:off x="8732520" y="3108960"/>
-            <a:ext cx="2468880" cy="1051560"/>
-          </a:xfrm>
-          <a:prstGeom prst="rect">
-            <a:avLst/>
-          </a:prstGeom>
-          <a:noFill/>
-          <a:ln/>
-        </p:spPr>
-        <p:txBody>
-          <a:bodyPr wrap="square" rtlCol="0" anchor="ctr"/>
-          <a:lstStyle/>
-          <a:p>
-            <a:pPr indent="0" marL="0">
-              <a:buNone/>
-            </a:pPr>
-            <a:r>
-              <a:rPr lang="en-US" sz="1700" b="1" dirty="0">
+          <p:cNvPr id="13" name="Text 9"/>
+          <p:cNvSpPr/>
+          <p:nvPr/>
+        </p:nvSpPr>
+        <p:spPr>
+          <a:xfrm>
+            <a:off x="5431536" y="2807208"/>
+            <a:ext cx="2258568" cy="457200"/>
+          </a:xfrm>
+          <a:prstGeom prst="rect">
+            <a:avLst/>
+          </a:prstGeom>
+          <a:noFill/>
+          <a:ln/>
+        </p:spPr>
+        <p:txBody>
+          <a:bodyPr wrap="square" rtlCol="0" anchor="ctr"/>
+          <a:lstStyle/>
+          <a:p>
+            <a:pPr indent="0" marL="0">
+              <a:buNone/>
+            </a:pPr>
+            <a:r>
+              <a:rPr lang="en-US" sz="1550" b="1" dirty="0">
                 <a:solidFill>
                   <a:srgbClr val="16181D"/>
                 </a:solidFill>
@@ -16955,50 +16784,68 @@
                 <a:ea typeface="Arial" pitchFamily="34" charset="-122"/>
                 <a:cs typeface="Arial" pitchFamily="34" charset="-120"/>
               </a:rPr>
-              <a:t>they built it</a:t>
-            </a:r>
-            <a:endParaRPr lang="en-US" sz="1700" dirty="0"/>
-          </a:p>
-        </p:txBody>
-      </p:sp>
-      <p:sp>
-        <p:nvSpPr>
-          <p:cNvPr id="20" name="Shape 16"/>
-          <p:cNvSpPr/>
-          <p:nvPr/>
-        </p:nvSpPr>
-        <p:spPr>
-          <a:xfrm>
-            <a:off x="9509760" y="4160520"/>
-            <a:ext cx="0" cy="320040"/>
-          </a:xfrm>
-          <a:prstGeom prst="line">
-            <a:avLst/>
-          </a:prstGeom>
-          <a:noFill/>
-          <a:ln w="20320">
-            <a:solidFill>
-              <a:srgbClr val="9AA1B0"/>
-            </a:solidFill>
-            <a:prstDash val="solid"/>
-            <a:tailEnd type="triangle"/>
-          </a:ln>
-        </p:spPr>
-      </p:sp>
-      <p:sp>
-        <p:nvSpPr>
-          <p:cNvPr id="21" name="Shape 17"/>
-          <p:cNvSpPr/>
-          <p:nvPr/>
-        </p:nvSpPr>
-        <p:spPr>
-          <a:xfrm>
-            <a:off x="7680960" y="4480560"/>
-            <a:ext cx="3657600" cy="1051560"/>
+              <a:t>Feedback loops</a:t>
+            </a:r>
+            <a:endParaRPr lang="en-US" sz="1550" dirty="0"/>
+          </a:p>
+        </p:txBody>
+      </p:sp>
+      <p:sp>
+        <p:nvSpPr>
+          <p:cNvPr id="14" name="Text 10"/>
+          <p:cNvSpPr/>
+          <p:nvPr/>
+        </p:nvSpPr>
+        <p:spPr>
+          <a:xfrm>
+            <a:off x="4818888" y="3429000"/>
+            <a:ext cx="2761488" cy="731520"/>
+          </a:xfrm>
+          <a:prstGeom prst="rect">
+            <a:avLst/>
+          </a:prstGeom>
+          <a:noFill/>
+          <a:ln/>
+        </p:spPr>
+        <p:txBody>
+          <a:bodyPr wrap="square" rtlCol="0" anchor="ctr"/>
+          <a:lstStyle/>
+          <a:p>
+            <a:pPr indent="0" marL="0">
+              <a:lnSpc>
+                <a:spcPts val="1600"/>
+              </a:lnSpc>
+              <a:buNone/>
+            </a:pPr>
+            <a:r>
+              <a:rPr lang="en-US" sz="1200" dirty="0">
+                <a:solidFill>
+                  <a:srgbClr val="666C7A"/>
+                </a:solidFill>
+                <a:latin typeface="Calibri" pitchFamily="34" charset="0"/>
+                <a:ea typeface="Calibri" pitchFamily="34" charset="-122"/>
+                <a:cs typeface="Calibri" pitchFamily="34" charset="-120"/>
+              </a:rPr>
+              <a:t>The Reviewer and the Skeptic send work backwards, and the copy is rewritten.</a:t>
+            </a:r>
+            <a:endParaRPr lang="en-US" sz="1200" dirty="0"/>
+          </a:p>
+        </p:txBody>
+      </p:sp>
+      <p:sp>
+        <p:nvSpPr>
+          <p:cNvPr id="15" name="Shape 11"/>
+          <p:cNvSpPr/>
+          <p:nvPr/>
+        </p:nvSpPr>
+        <p:spPr>
+          <a:xfrm>
+            <a:off x="8156448" y="2514600"/>
+            <a:ext cx="3401568" cy="1783080"/>
           </a:xfrm>
           <a:prstGeom prst="roundRect">
             <a:avLst>
-              <a:gd name="adj" fmla="val 8696"/>
+              <a:gd name="adj" fmla="val 5128"/>
             </a:avLst>
           </a:prstGeom>
           <a:solidFill>
@@ -17021,20 +16868,20 @@
       </p:sp>
       <p:sp>
         <p:nvSpPr>
-          <p:cNvPr id="22" name="Shape 18"/>
-          <p:cNvSpPr/>
-          <p:nvPr/>
-        </p:nvSpPr>
-        <p:spPr>
-          <a:xfrm>
-            <a:off x="7973568" y="4732020"/>
-            <a:ext cx="548640" cy="548640"/>
+          <p:cNvPr id="16" name="Shape 12"/>
+          <p:cNvSpPr/>
+          <p:nvPr/>
+        </p:nvSpPr>
+        <p:spPr>
+          <a:xfrm>
+            <a:off x="8458200" y="2798064"/>
+            <a:ext cx="493776" cy="493776"/>
           </a:xfrm>
           <a:prstGeom prst="ellipse">
             <a:avLst/>
           </a:prstGeom>
           <a:solidFill>
-            <a:srgbClr val="0F9E8E"/>
+            <a:srgbClr val="E11D48"/>
           </a:solidFill>
           <a:ln/>
           <a:effectLst>
@@ -17048,7 +16895,7 @@
       </p:sp>
       <p:pic>
         <p:nvPicPr>
-          <p:cNvPr id="23" name="Image 2" descr="preencoded.png">    </p:cNvPr>
+          <p:cNvPr id="17" name="Image 2" descr="preencoded.png">    </p:cNvPr>
           <p:cNvPicPr>
             <a:picLocks noChangeAspect="1"/>
           </p:cNvPicPr>
@@ -17062,8 +16909,8 @@
         </p:blipFill>
         <p:spPr>
           <a:xfrm>
-            <a:off x="8105242" y="4863694"/>
-            <a:ext cx="285293" cy="285293"/>
+            <a:off x="8576706" y="2916570"/>
+            <a:ext cx="256764" cy="256764"/>
           </a:xfrm>
           <a:prstGeom prst="rect">
             <a:avLst/>
@@ -17072,30 +16919,30 @@
       </p:pic>
       <p:sp>
         <p:nvSpPr>
-          <p:cNvPr id="24" name="Text 19"/>
-          <p:cNvSpPr/>
-          <p:nvPr/>
-        </p:nvSpPr>
-        <p:spPr>
-          <a:xfrm>
-            <a:off x="8732520" y="4480560"/>
-            <a:ext cx="2468880" cy="1051560"/>
-          </a:xfrm>
-          <a:prstGeom prst="rect">
-            <a:avLst/>
-          </a:prstGeom>
-          <a:noFill/>
-          <a:ln/>
-        </p:spPr>
-        <p:txBody>
-          <a:bodyPr wrap="square" rtlCol="0" anchor="ctr"/>
-          <a:lstStyle/>
-          <a:p>
-            <a:pPr indent="0" marL="0">
-              <a:buNone/>
-            </a:pPr>
-            <a:r>
-              <a:rPr lang="en-US" sz="1700" b="1" dirty="0">
+          <p:cNvPr id="18" name="Text 13"/>
+          <p:cNvSpPr/>
+          <p:nvPr/>
+        </p:nvSpPr>
+        <p:spPr>
+          <a:xfrm>
+            <a:off x="9089136" y="2807208"/>
+            <a:ext cx="2258568" cy="457200"/>
+          </a:xfrm>
+          <a:prstGeom prst="rect">
+            <a:avLst/>
+          </a:prstGeom>
+          <a:noFill/>
+          <a:ln/>
+        </p:spPr>
+        <p:txBody>
+          <a:bodyPr wrap="square" rtlCol="0" anchor="ctr"/>
+          <a:lstStyle/>
+          <a:p>
+            <a:pPr indent="0" marL="0">
+              <a:buNone/>
+            </a:pPr>
+            <a:r>
+              <a:rPr lang="en-US" sz="1550" b="1" dirty="0">
                 <a:solidFill>
                   <a:srgbClr val="16181D"/>
                 </a:solidFill>
@@ -17103,9 +16950,602 @@
                 <a:ea typeface="Arial" pitchFamily="34" charset="-122"/>
                 <a:cs typeface="Arial" pitchFamily="34" charset="-120"/>
               </a:rPr>
-              <a:t>here it all is</a:t>
-            </a:r>
-            <a:endParaRPr lang="en-US" sz="1700" dirty="0"/>
+              <a:t>Fallbacks</a:t>
+            </a:r>
+            <a:endParaRPr lang="en-US" sz="1550" dirty="0"/>
+          </a:p>
+        </p:txBody>
+      </p:sp>
+      <p:sp>
+        <p:nvSpPr>
+          <p:cNvPr id="19" name="Text 14"/>
+          <p:cNvSpPr/>
+          <p:nvPr/>
+        </p:nvSpPr>
+        <p:spPr>
+          <a:xfrm>
+            <a:off x="8476488" y="3429000"/>
+            <a:ext cx="2761488" cy="731520"/>
+          </a:xfrm>
+          <a:prstGeom prst="rect">
+            <a:avLst/>
+          </a:prstGeom>
+          <a:noFill/>
+          <a:ln/>
+        </p:spPr>
+        <p:txBody>
+          <a:bodyPr wrap="square" rtlCol="0" anchor="ctr"/>
+          <a:lstStyle/>
+          <a:p>
+            <a:pPr indent="0" marL="0">
+              <a:lnSpc>
+                <a:spcPts val="1600"/>
+              </a:lnSpc>
+              <a:buNone/>
+            </a:pPr>
+            <a:r>
+              <a:rPr lang="en-US" sz="1200" dirty="0">
+                <a:solidFill>
+                  <a:srgbClr val="666C7A"/>
+                </a:solidFill>
+                <a:latin typeface="Calibri" pitchFamily="34" charset="0"/>
+                <a:ea typeface="Calibri" pitchFamily="34" charset="-122"/>
+                <a:cs typeface="Calibri" pitchFamily="34" charset="-120"/>
+              </a:rPr>
+              <a:t>Every agent has a house answer. Kill Ollama mid-talk and the page still builds.</a:t>
+            </a:r>
+            <a:endParaRPr lang="en-US" sz="1200" dirty="0"/>
+          </a:p>
+        </p:txBody>
+      </p:sp>
+      <p:sp>
+        <p:nvSpPr>
+          <p:cNvPr id="20" name="Shape 15"/>
+          <p:cNvSpPr/>
+          <p:nvPr/>
+        </p:nvSpPr>
+        <p:spPr>
+          <a:xfrm>
+            <a:off x="841248" y="4535424"/>
+            <a:ext cx="3401568" cy="1783080"/>
+          </a:xfrm>
+          <a:prstGeom prst="roundRect">
+            <a:avLst>
+              <a:gd name="adj" fmla="val 5128"/>
+            </a:avLst>
+          </a:prstGeom>
+          <a:solidFill>
+            <a:srgbClr val="F5F7FA"/>
+          </a:solidFill>
+          <a:ln w="12700">
+            <a:solidFill>
+              <a:srgbClr val="E1E5EC"/>
+            </a:solidFill>
+            <a:prstDash val="solid"/>
+          </a:ln>
+          <a:effectLst>
+            <a:outerShdw sx="100000" sy="100000" kx="0" ky="0" algn="bl" rotWithShape="0" blurRad="139700" dist="38100" dir="5400000">
+              <a:srgbClr val="9AA6BC">
+                <a:alpha val="28000"/>
+              </a:srgbClr>
+            </a:outerShdw>
+          </a:effectLst>
+        </p:spPr>
+      </p:sp>
+      <p:sp>
+        <p:nvSpPr>
+          <p:cNvPr id="21" name="Shape 16"/>
+          <p:cNvSpPr/>
+          <p:nvPr/>
+        </p:nvSpPr>
+        <p:spPr>
+          <a:xfrm>
+            <a:off x="1143000" y="4818888"/>
+            <a:ext cx="493776" cy="493776"/>
+          </a:xfrm>
+          <a:prstGeom prst="ellipse">
+            <a:avLst/>
+          </a:prstGeom>
+          <a:solidFill>
+            <a:srgbClr val="0F9E8E"/>
+          </a:solidFill>
+          <a:ln/>
+          <a:effectLst>
+            <a:outerShdw sx="100000" sy="100000" kx="0" ky="0" algn="bl" rotWithShape="0" blurRad="139700" dist="38100" dir="5400000">
+              <a:srgbClr val="9AA6BC">
+                <a:alpha val="28000"/>
+              </a:srgbClr>
+            </a:outerShdw>
+          </a:effectLst>
+        </p:spPr>
+      </p:sp>
+      <p:pic>
+        <p:nvPicPr>
+          <p:cNvPr id="22" name="Image 3" descr="preencoded.png">    </p:cNvPr>
+          <p:cNvPicPr>
+            <a:picLocks noChangeAspect="1"/>
+          </p:cNvPicPr>
+          <p:nvPr/>
+        </p:nvPicPr>
+        <p:blipFill>
+          <a:blip r:embed="rId4"/>
+          <a:stretch>
+            <a:fillRect/>
+          </a:stretch>
+        </p:blipFill>
+        <p:spPr>
+          <a:xfrm>
+            <a:off x="1261506" y="4937394"/>
+            <a:ext cx="256764" cy="256764"/>
+          </a:xfrm>
+          <a:prstGeom prst="rect">
+            <a:avLst/>
+          </a:prstGeom>
+        </p:spPr>
+      </p:pic>
+      <p:sp>
+        <p:nvSpPr>
+          <p:cNvPr id="23" name="Text 17"/>
+          <p:cNvSpPr/>
+          <p:nvPr/>
+        </p:nvSpPr>
+        <p:spPr>
+          <a:xfrm>
+            <a:off x="1773936" y="4828032"/>
+            <a:ext cx="2258568" cy="457200"/>
+          </a:xfrm>
+          <a:prstGeom prst="rect">
+            <a:avLst/>
+          </a:prstGeom>
+          <a:noFill/>
+          <a:ln/>
+        </p:spPr>
+        <p:txBody>
+          <a:bodyPr wrap="square" rtlCol="0" anchor="ctr"/>
+          <a:lstStyle/>
+          <a:p>
+            <a:pPr indent="0" marL="0">
+              <a:buNone/>
+            </a:pPr>
+            <a:r>
+              <a:rPr lang="en-US" sz="1550" b="1" dirty="0">
+                <a:solidFill>
+                  <a:srgbClr val="16181D"/>
+                </a:solidFill>
+                <a:latin typeface="Arial" pitchFamily="34" charset="0"/>
+                <a:ea typeface="Arial" pitchFamily="34" charset="-122"/>
+                <a:cs typeface="Arial" pitchFamily="34" charset="-120"/>
+              </a:rPr>
+              <a:t>Human in the loop</a:t>
+            </a:r>
+            <a:endParaRPr lang="en-US" sz="1550" dirty="0"/>
+          </a:p>
+        </p:txBody>
+      </p:sp>
+      <p:sp>
+        <p:nvSpPr>
+          <p:cNvPr id="24" name="Text 18"/>
+          <p:cNvSpPr/>
+          <p:nvPr/>
+        </p:nvSpPr>
+        <p:spPr>
+          <a:xfrm>
+            <a:off x="1161288" y="5449824"/>
+            <a:ext cx="2761488" cy="731520"/>
+          </a:xfrm>
+          <a:prstGeom prst="rect">
+            <a:avLst/>
+          </a:prstGeom>
+          <a:noFill/>
+          <a:ln/>
+        </p:spPr>
+        <p:txBody>
+          <a:bodyPr wrap="square" rtlCol="0" anchor="ctr"/>
+          <a:lstStyle/>
+          <a:p>
+            <a:pPr indent="0" marL="0">
+              <a:lnSpc>
+                <a:spcPts val="1600"/>
+              </a:lnSpc>
+              <a:buNone/>
+            </a:pPr>
+            <a:r>
+              <a:rPr lang="en-US" sz="1200" dirty="0">
+                <a:solidFill>
+                  <a:srgbClr val="666C7A"/>
+                </a:solidFill>
+                <a:latin typeface="Calibri" pitchFamily="34" charset="0"/>
+                <a:ea typeface="Calibri" pitchFamily="34" charset="-122"/>
+                <a:cs typeface="Calibri" pitchFamily="34" charset="-120"/>
+              </a:rPr>
+              <a:t>Nothing reaches the projector until I press Run. I can Hide anything first.</a:t>
+            </a:r>
+            <a:endParaRPr lang="en-US" sz="1200" dirty="0"/>
+          </a:p>
+        </p:txBody>
+      </p:sp>
+      <p:sp>
+        <p:nvSpPr>
+          <p:cNvPr id="25" name="Shape 19"/>
+          <p:cNvSpPr/>
+          <p:nvPr/>
+        </p:nvSpPr>
+        <p:spPr>
+          <a:xfrm>
+            <a:off x="4498848" y="4535424"/>
+            <a:ext cx="3401568" cy="1783080"/>
+          </a:xfrm>
+          <a:prstGeom prst="roundRect">
+            <a:avLst>
+              <a:gd name="adj" fmla="val 5128"/>
+            </a:avLst>
+          </a:prstGeom>
+          <a:solidFill>
+            <a:srgbClr val="F5F7FA"/>
+          </a:solidFill>
+          <a:ln w="12700">
+            <a:solidFill>
+              <a:srgbClr val="E1E5EC"/>
+            </a:solidFill>
+            <a:prstDash val="solid"/>
+          </a:ln>
+          <a:effectLst>
+            <a:outerShdw sx="100000" sy="100000" kx="0" ky="0" algn="bl" rotWithShape="0" blurRad="139700" dist="38100" dir="5400000">
+              <a:srgbClr val="9AA6BC">
+                <a:alpha val="28000"/>
+              </a:srgbClr>
+            </a:outerShdw>
+          </a:effectLst>
+        </p:spPr>
+      </p:sp>
+      <p:sp>
+        <p:nvSpPr>
+          <p:cNvPr id="26" name="Shape 20"/>
+          <p:cNvSpPr/>
+          <p:nvPr/>
+        </p:nvSpPr>
+        <p:spPr>
+          <a:xfrm>
+            <a:off x="4800600" y="4818888"/>
+            <a:ext cx="493776" cy="493776"/>
+          </a:xfrm>
+          <a:prstGeom prst="ellipse">
+            <a:avLst/>
+          </a:prstGeom>
+          <a:solidFill>
+            <a:srgbClr val="D97706"/>
+          </a:solidFill>
+          <a:ln/>
+          <a:effectLst>
+            <a:outerShdw sx="100000" sy="100000" kx="0" ky="0" algn="bl" rotWithShape="0" blurRad="139700" dist="38100" dir="5400000">
+              <a:srgbClr val="9AA6BC">
+                <a:alpha val="28000"/>
+              </a:srgbClr>
+            </a:outerShdw>
+          </a:effectLst>
+        </p:spPr>
+      </p:sp>
+      <p:pic>
+        <p:nvPicPr>
+          <p:cNvPr id="27" name="Image 4" descr="preencoded.png">    </p:cNvPr>
+          <p:cNvPicPr>
+            <a:picLocks noChangeAspect="1"/>
+          </p:cNvPicPr>
+          <p:nvPr/>
+        </p:nvPicPr>
+        <p:blipFill>
+          <a:blip r:embed="rId5"/>
+          <a:stretch>
+            <a:fillRect/>
+          </a:stretch>
+        </p:blipFill>
+        <p:spPr>
+          <a:xfrm>
+            <a:off x="4919106" y="4937394"/>
+            <a:ext cx="256764" cy="256764"/>
+          </a:xfrm>
+          <a:prstGeom prst="rect">
+            <a:avLst/>
+          </a:prstGeom>
+        </p:spPr>
+      </p:pic>
+      <p:sp>
+        <p:nvSpPr>
+          <p:cNvPr id="28" name="Text 21"/>
+          <p:cNvSpPr/>
+          <p:nvPr/>
+        </p:nvSpPr>
+        <p:spPr>
+          <a:xfrm>
+            <a:off x="5431536" y="4828032"/>
+            <a:ext cx="2258568" cy="457200"/>
+          </a:xfrm>
+          <a:prstGeom prst="rect">
+            <a:avLst/>
+          </a:prstGeom>
+          <a:noFill/>
+          <a:ln/>
+        </p:spPr>
+        <p:txBody>
+          <a:bodyPr wrap="square" rtlCol="0" anchor="ctr"/>
+          <a:lstStyle/>
+          <a:p>
+            <a:pPr indent="0" marL="0">
+              <a:buNone/>
+            </a:pPr>
+            <a:r>
+              <a:rPr lang="en-US" sz="1550" b="1" dirty="0">
+                <a:solidFill>
+                  <a:srgbClr val="16181D"/>
+                </a:solidFill>
+                <a:latin typeface="Arial" pitchFamily="34" charset="0"/>
+                <a:ea typeface="Arial" pitchFamily="34" charset="-122"/>
+                <a:cs typeface="Arial" pitchFamily="34" charset="-120"/>
+              </a:rPr>
+              <a:t>Limits</a:t>
+            </a:r>
+            <a:endParaRPr lang="en-US" sz="1550" dirty="0"/>
+          </a:p>
+        </p:txBody>
+      </p:sp>
+      <p:sp>
+        <p:nvSpPr>
+          <p:cNvPr id="29" name="Text 22"/>
+          <p:cNvSpPr/>
+          <p:nvPr/>
+        </p:nvSpPr>
+        <p:spPr>
+          <a:xfrm>
+            <a:off x="4818888" y="5449824"/>
+            <a:ext cx="2761488" cy="731520"/>
+          </a:xfrm>
+          <a:prstGeom prst="rect">
+            <a:avLst/>
+          </a:prstGeom>
+          <a:noFill/>
+          <a:ln/>
+        </p:spPr>
+        <p:txBody>
+          <a:bodyPr wrap="square" rtlCol="0" anchor="ctr"/>
+          <a:lstStyle/>
+          <a:p>
+            <a:pPr indent="0" marL="0">
+              <a:lnSpc>
+                <a:spcPts val="1600"/>
+              </a:lnSpc>
+              <a:buNone/>
+            </a:pPr>
+            <a:r>
+              <a:rPr lang="en-US" sz="1200" dirty="0">
+                <a:solidFill>
+                  <a:srgbClr val="666C7A"/>
+                </a:solidFill>
+                <a:latin typeface="Calibri" pitchFamily="34" charset="0"/>
+                <a:ea typeface="Calibri" pitchFamily="34" charset="-122"/>
+                <a:cs typeface="Calibri" pitchFamily="34" charset="-120"/>
+              </a:rPr>
+              <a:t>Rate limits, a queue cap, dedup and a key on the panel. A room of devs will test all four.</a:t>
+            </a:r>
+            <a:endParaRPr lang="en-US" sz="1200" dirty="0"/>
+          </a:p>
+        </p:txBody>
+      </p:sp>
+      <p:sp>
+        <p:nvSpPr>
+          <p:cNvPr id="30" name="Shape 23"/>
+          <p:cNvSpPr/>
+          <p:nvPr/>
+        </p:nvSpPr>
+        <p:spPr>
+          <a:xfrm>
+            <a:off x="8156448" y="4535424"/>
+            <a:ext cx="3401568" cy="1783080"/>
+          </a:xfrm>
+          <a:prstGeom prst="roundRect">
+            <a:avLst>
+              <a:gd name="adj" fmla="val 5128"/>
+            </a:avLst>
+          </a:prstGeom>
+          <a:solidFill>
+            <a:srgbClr val="F5F7FA"/>
+          </a:solidFill>
+          <a:ln w="12700">
+            <a:solidFill>
+              <a:srgbClr val="E1E5EC"/>
+            </a:solidFill>
+            <a:prstDash val="solid"/>
+          </a:ln>
+          <a:effectLst>
+            <a:outerShdw sx="100000" sy="100000" kx="0" ky="0" algn="bl" rotWithShape="0" blurRad="139700" dist="38100" dir="5400000">
+              <a:srgbClr val="9AA6BC">
+                <a:alpha val="28000"/>
+              </a:srgbClr>
+            </a:outerShdw>
+          </a:effectLst>
+        </p:spPr>
+      </p:sp>
+      <p:sp>
+        <p:nvSpPr>
+          <p:cNvPr id="31" name="Shape 24"/>
+          <p:cNvSpPr/>
+          <p:nvPr/>
+        </p:nvSpPr>
+        <p:spPr>
+          <a:xfrm>
+            <a:off x="8458200" y="4818888"/>
+            <a:ext cx="493776" cy="493776"/>
+          </a:xfrm>
+          <a:prstGeom prst="ellipse">
+            <a:avLst/>
+          </a:prstGeom>
+          <a:solidFill>
+            <a:srgbClr val="0284C7"/>
+          </a:solidFill>
+          <a:ln/>
+          <a:effectLst>
+            <a:outerShdw sx="100000" sy="100000" kx="0" ky="0" algn="bl" rotWithShape="0" blurRad="139700" dist="38100" dir="5400000">
+              <a:srgbClr val="9AA6BC">
+                <a:alpha val="28000"/>
+              </a:srgbClr>
+            </a:outerShdw>
+          </a:effectLst>
+        </p:spPr>
+      </p:sp>
+      <p:pic>
+        <p:nvPicPr>
+          <p:cNvPr id="32" name="Image 5" descr="preencoded.png">    </p:cNvPr>
+          <p:cNvPicPr>
+            <a:picLocks noChangeAspect="1"/>
+          </p:cNvPicPr>
+          <p:nvPr/>
+        </p:nvPicPr>
+        <p:blipFill>
+          <a:blip r:embed="rId6"/>
+          <a:stretch>
+            <a:fillRect/>
+          </a:stretch>
+        </p:blipFill>
+        <p:spPr>
+          <a:xfrm>
+            <a:off x="8576706" y="4937394"/>
+            <a:ext cx="256764" cy="256764"/>
+          </a:xfrm>
+          <a:prstGeom prst="rect">
+            <a:avLst/>
+          </a:prstGeom>
+        </p:spPr>
+      </p:pic>
+      <p:sp>
+        <p:nvSpPr>
+          <p:cNvPr id="33" name="Text 25"/>
+          <p:cNvSpPr/>
+          <p:nvPr/>
+        </p:nvSpPr>
+        <p:spPr>
+          <a:xfrm>
+            <a:off x="9089136" y="4828032"/>
+            <a:ext cx="2258568" cy="457200"/>
+          </a:xfrm>
+          <a:prstGeom prst="rect">
+            <a:avLst/>
+          </a:prstGeom>
+          <a:noFill/>
+          <a:ln/>
+        </p:spPr>
+        <p:txBody>
+          <a:bodyPr wrap="square" rtlCol="0" anchor="ctr"/>
+          <a:lstStyle/>
+          <a:p>
+            <a:pPr indent="0" marL="0">
+              <a:buNone/>
+            </a:pPr>
+            <a:r>
+              <a:rPr lang="en-US" sz="1550" b="1" dirty="0">
+                <a:solidFill>
+                  <a:srgbClr val="16181D"/>
+                </a:solidFill>
+                <a:latin typeface="Arial" pitchFamily="34" charset="0"/>
+                <a:ea typeface="Arial" pitchFamily="34" charset="-122"/>
+                <a:cs typeface="Arial" pitchFamily="34" charset="-120"/>
+              </a:rPr>
+              <a:t>Background work</a:t>
+            </a:r>
+            <a:endParaRPr lang="en-US" sz="1550" dirty="0"/>
+          </a:p>
+        </p:txBody>
+      </p:sp>
+      <p:sp>
+        <p:nvSpPr>
+          <p:cNvPr id="34" name="Text 26"/>
+          <p:cNvSpPr/>
+          <p:nvPr/>
+        </p:nvSpPr>
+        <p:spPr>
+          <a:xfrm>
+            <a:off x="8476488" y="5449824"/>
+            <a:ext cx="2761488" cy="731520"/>
+          </a:xfrm>
+          <a:prstGeom prst="rect">
+            <a:avLst/>
+          </a:prstGeom>
+          <a:noFill/>
+          <a:ln/>
+        </p:spPr>
+        <p:txBody>
+          <a:bodyPr wrap="square" rtlCol="0" anchor="ctr"/>
+          <a:lstStyle/>
+          <a:p>
+            <a:pPr indent="0" marL="0">
+              <a:lnSpc>
+                <a:spcPts val="1600"/>
+              </a:lnSpc>
+              <a:buNone/>
+            </a:pPr>
+            <a:r>
+              <a:rPr lang="en-US" sz="1200" dirty="0">
+                <a:solidFill>
+                  <a:srgbClr val="666C7A"/>
+                </a:solidFill>
+                <a:latin typeface="Calibri" pitchFamily="34" charset="0"/>
+                <a:ea typeface="Calibri" pitchFamily="34" charset="-122"/>
+                <a:cs typeface="Calibri" pitchFamily="34" charset="-120"/>
+              </a:rPr>
+              <a:t>The queue kept building while I talked. Scheduling is orchestration too.</a:t>
+            </a:r>
+            <a:endParaRPr lang="en-US" sz="1200" dirty="0"/>
+          </a:p>
+        </p:txBody>
+      </p:sp>
+      <p:sp>
+        <p:nvSpPr>
+          <p:cNvPr id="35" name="Text 27"/>
+          <p:cNvSpPr/>
+          <p:nvPr/>
+        </p:nvSpPr>
+        <p:spPr>
+          <a:xfrm>
+            <a:off x="1828800" y="6263640"/>
+            <a:ext cx="8534095" cy="457200"/>
+          </a:xfrm>
+          <a:prstGeom prst="rect">
+            <a:avLst/>
+          </a:prstGeom>
+          <a:noFill/>
+          <a:ln/>
+        </p:spPr>
+        <p:txBody>
+          <a:bodyPr wrap="square" rtlCol="0" anchor="ctr"/>
+          <a:lstStyle/>
+          <a:p>
+            <a:pPr algn="ctr" indent="0" marL="0">
+              <a:buNone/>
+            </a:pPr>
+            <a:r>
+              <a:rPr lang="en-US" sz="1550" dirty="0">
+                <a:solidFill>
+                  <a:srgbClr val="666C7A"/>
+                </a:solidFill>
+                <a:latin typeface="Calibri" pitchFamily="34" charset="0"/>
+                <a:ea typeface="Calibri" pitchFamily="34" charset="-122"/>
+                <a:cs typeface="Calibri" pitchFamily="34" charset="-120"/>
+              </a:rPr>
+              <a:t>None of that is prompting. </a:t>
+            </a:r>
+            <a:pPr algn="ctr" indent="0" marL="0">
+              <a:buNone/>
+            </a:pPr>
+            <a:r>
+              <a:rPr lang="en-US" sz="1550" b="1" dirty="0">
+                <a:solidFill>
+                  <a:srgbClr val="4F46E5"/>
+                </a:solidFill>
+                <a:latin typeface="Calibri" pitchFamily="34" charset="0"/>
+                <a:ea typeface="Calibri" pitchFamily="34" charset="-122"/>
+                <a:cs typeface="Calibri" pitchFamily="34" charset="-120"/>
+              </a:rPr>
+              <a:t>All of it is engineering you already know how to do.</a:t>
+            </a:r>
+            <a:endParaRPr lang="en-US" sz="1550" dirty="0"/>
           </a:p>
         </p:txBody>
       </p:sp>
@@ -17143,23 +17583,42 @@
       </p:grpSpPr>
       <p:sp>
         <p:nvSpPr>
-          <p:cNvPr id="2" name="Shape 0"/>
-          <p:cNvSpPr/>
-          <p:nvPr/>
-        </p:nvSpPr>
-        <p:spPr>
-          <a:xfrm>
-            <a:off x="859536" y="621792"/>
-            <a:ext cx="182880" cy="182880"/>
-          </a:xfrm>
-          <a:prstGeom prst="ellipse">
-            <a:avLst/>
-          </a:prstGeom>
-          <a:solidFill>
-            <a:srgbClr val="4F46E5"/>
-          </a:solidFill>
-          <a:ln/>
-        </p:spPr>
+          <p:cNvPr id="2" name="Text 0"/>
+          <p:cNvSpPr/>
+          <p:nvPr/>
+        </p:nvSpPr>
+        <p:spPr>
+          <a:xfrm>
+            <a:off x="841248" y="566928"/>
+            <a:ext cx="9144000" cy="292608"/>
+          </a:xfrm>
+          <a:prstGeom prst="rect">
+            <a:avLst/>
+          </a:prstGeom>
+          <a:noFill/>
+          <a:ln/>
+        </p:spPr>
+        <p:txBody>
+          <a:bodyPr wrap="square" rtlCol="0" anchor="ctr"/>
+          <a:lstStyle/>
+          <a:p>
+            <a:pPr indent="0" marL="0">
+              <a:buNone/>
+            </a:pPr>
+            <a:r>
+              <a:rPr lang="en-US" sz="1100" b="1" spc="300" kern="0" dirty="0">
+                <a:solidFill>
+                  <a:srgbClr val="D97706"/>
+                </a:solidFill>
+                <a:latin typeface="Arial" pitchFamily="34" charset="0"/>
+                <a:ea typeface="Arial" pitchFamily="34" charset="-122"/>
+                <a:cs typeface="Arial" pitchFamily="34" charset="-120"/>
+              </a:rPr>
+              <a:t>THE REVEAL</a:t>
+            </a:r>
+            <a:endParaRPr lang="en-US" sz="1100" dirty="0"/>
+          </a:p>
+        </p:txBody>
       </p:sp>
       <p:sp>
         <p:nvSpPr>
@@ -17169,63 +17628,232 @@
         </p:nvSpPr>
         <p:spPr>
           <a:xfrm>
-            <a:off x="1207008" y="566928"/>
-            <a:ext cx="4572000" cy="292608"/>
-          </a:xfrm>
-          <a:prstGeom prst="rect">
-            <a:avLst/>
-          </a:prstGeom>
-          <a:noFill/>
-          <a:ln/>
-        </p:spPr>
-        <p:txBody>
-          <a:bodyPr wrap="square" rtlCol="0" anchor="ctr"/>
-          <a:lstStyle/>
-          <a:p>
-            <a:pPr indent="0" marL="0">
-              <a:buNone/>
-            </a:pPr>
-            <a:r>
-              <a:rPr lang="en-US" sz="1200" spc="400" kern="0" dirty="0">
+            <a:off x="841248" y="1463040"/>
+            <a:ext cx="7680960" cy="1828800"/>
+          </a:xfrm>
+          <a:prstGeom prst="rect">
+            <a:avLst/>
+          </a:prstGeom>
+          <a:noFill/>
+          <a:ln/>
+        </p:spPr>
+        <p:txBody>
+          <a:bodyPr wrap="square" rtlCol="0" anchor="ctr"/>
+          <a:lstStyle/>
+          <a:p>
+            <a:pPr indent="0" marL="0">
+              <a:lnSpc>
+                <a:spcPts val="5000"/>
+              </a:lnSpc>
+              <a:buNone/>
+            </a:pPr>
+            <a:r>
+              <a:rPr lang="en-US" sz="4000" b="1" dirty="0">
+                <a:solidFill>
+                  <a:srgbClr val="16181D"/>
+                </a:solidFill>
+                <a:latin typeface="Arial" pitchFamily="34" charset="0"/>
+                <a:ea typeface="Arial" pitchFamily="34" charset="-122"/>
+                <a:cs typeface="Arial" pitchFamily="34" charset="-120"/>
+              </a:rPr>
+              <a:t>You have been </a:t>
+            </a:r>
+            <a:pPr indent="0" marL="0">
+              <a:lnSpc>
+                <a:spcPts val="5000"/>
+              </a:lnSpc>
+              <a:buNone/>
+            </a:pPr>
+            <a:r>
+              <a:rPr lang="en-US" sz="4000" b="1" dirty="0">
                 <a:solidFill>
                   <a:srgbClr val="4F46E5"/>
+                </a:solidFill>
+                <a:latin typeface="Arial" pitchFamily="34" charset="0"/>
+                <a:ea typeface="Arial" pitchFamily="34" charset="-122"/>
+                <a:cs typeface="Arial" pitchFamily="34" charset="-120"/>
+              </a:rPr>
+              <a:t>employing them</a:t>
+            </a:r>
+            <a:pPr indent="0" marL="0">
+              <a:lnSpc>
+                <a:spcPts val="5000"/>
+              </a:lnSpc>
+              <a:buNone/>
+            </a:pPr>
+            <a:endParaRPr lang="en-US" sz="4000" dirty="0"/>
+          </a:p>
+          <a:p>
+            <a:pPr indent="0" marL="0">
+              <a:lnSpc>
+                <a:spcPts val="5000"/>
+              </a:lnSpc>
+              <a:buNone/>
+            </a:pPr>
+            <a:r>
+              <a:rPr lang="en-US" sz="4000" b="1" dirty="0">
+                <a:solidFill>
+                  <a:srgbClr val="16181D"/>
+                </a:solidFill>
+                <a:latin typeface="Arial" pitchFamily="34" charset="0"/>
+                <a:ea typeface="Arial" pitchFamily="34" charset="-122"/>
+                <a:cs typeface="Arial" pitchFamily="34" charset="-120"/>
+              </a:rPr>
+              <a:t>this whole time.</a:t>
+            </a:r>
+            <a:endParaRPr lang="en-US" sz="4000" dirty="0"/>
+          </a:p>
+        </p:txBody>
+      </p:sp>
+      <p:sp>
+        <p:nvSpPr>
+          <p:cNvPr id="4" name="Text 2"/>
+          <p:cNvSpPr/>
+          <p:nvPr/>
+        </p:nvSpPr>
+        <p:spPr>
+          <a:xfrm>
+            <a:off x="841248" y="3520440"/>
+            <a:ext cx="5943600" cy="1463040"/>
+          </a:xfrm>
+          <a:prstGeom prst="rect">
+            <a:avLst/>
+          </a:prstGeom>
+          <a:noFill/>
+          <a:ln/>
+        </p:spPr>
+        <p:txBody>
+          <a:bodyPr wrap="square" rtlCol="0" anchor="ctr"/>
+          <a:lstStyle/>
+          <a:p>
+            <a:pPr indent="0" marL="0">
+              <a:lnSpc>
+                <a:spcPts val="2700"/>
+              </a:lnSpc>
+              <a:buNone/>
+            </a:pPr>
+            <a:r>
+              <a:rPr lang="en-US" sz="1700" dirty="0">
+                <a:solidFill>
+                  <a:srgbClr val="666C7A"/>
+                </a:solidFill>
+                <a:latin typeface="Calibri" pitchFamily="34" charset="0"/>
+                <a:ea typeface="Calibri" pitchFamily="34" charset="-122"/>
+                <a:cs typeface="Calibri" pitchFamily="34" charset="-120"/>
+              </a:rPr>
+              <a:t>Every idea you sent went straight into the queue. While I was talking about prompts and levers and loops, seven agents on this laptop were quietly building a landing page for each one.</a:t>
+            </a:r>
+            <a:endParaRPr lang="en-US" sz="1700" dirty="0"/>
+          </a:p>
+        </p:txBody>
+      </p:sp>
+      <p:sp>
+        <p:nvSpPr>
+          <p:cNvPr id="5" name="Text 3"/>
+          <p:cNvSpPr/>
+          <p:nvPr/>
+        </p:nvSpPr>
+        <p:spPr>
+          <a:xfrm>
+            <a:off x="841248" y="5120640"/>
+            <a:ext cx="1828800" cy="685800"/>
+          </a:xfrm>
+          <a:prstGeom prst="rect">
+            <a:avLst/>
+          </a:prstGeom>
+          <a:noFill/>
+          <a:ln/>
+        </p:spPr>
+        <p:txBody>
+          <a:bodyPr wrap="square" rtlCol="0" anchor="ctr"/>
+          <a:lstStyle/>
+          <a:p>
+            <a:pPr indent="0" marL="0">
+              <a:buNone/>
+            </a:pPr>
+            <a:r>
+              <a:rPr lang="en-US" sz="3800" b="1" dirty="0">
+                <a:solidFill>
+                  <a:srgbClr val="4F46E5"/>
+                </a:solidFill>
+                <a:latin typeface="Arial" pitchFamily="34" charset="0"/>
+                <a:ea typeface="Arial" pitchFamily="34" charset="-122"/>
+                <a:cs typeface="Arial" pitchFamily="34" charset="-120"/>
+              </a:rPr>
+              <a:t>7</a:t>
+            </a:r>
+            <a:endParaRPr lang="en-US" sz="3800" dirty="0"/>
+          </a:p>
+        </p:txBody>
+      </p:sp>
+      <p:sp>
+        <p:nvSpPr>
+          <p:cNvPr id="6" name="Text 4"/>
+          <p:cNvSpPr/>
+          <p:nvPr/>
+        </p:nvSpPr>
+        <p:spPr>
+          <a:xfrm>
+            <a:off x="841248" y="5779008"/>
+            <a:ext cx="1920240" cy="548640"/>
+          </a:xfrm>
+          <a:prstGeom prst="rect">
+            <a:avLst/>
+          </a:prstGeom>
+          <a:noFill/>
+          <a:ln/>
+        </p:spPr>
+        <p:txBody>
+          <a:bodyPr wrap="square" rtlCol="0" anchor="ctr"/>
+          <a:lstStyle/>
+          <a:p>
+            <a:pPr indent="0" marL="0">
+              <a:lnSpc>
+                <a:spcPts val="1200"/>
+              </a:lnSpc>
+              <a:buNone/>
+            </a:pPr>
+            <a:r>
+              <a:rPr lang="en-US" sz="950" spc="150" kern="0" dirty="0">
+                <a:solidFill>
+                  <a:srgbClr val="666C7A"/>
                 </a:solidFill>
                 <a:latin typeface="Consolas" pitchFamily="34" charset="0"/>
                 <a:ea typeface="Consolas" pitchFamily="34" charset="-122"/>
                 <a:cs typeface="Consolas" pitchFamily="34" charset="-120"/>
               </a:rPr>
-              <a:t>THE WALL</a:t>
-            </a:r>
-            <a:endParaRPr lang="en-US" sz="1200" dirty="0"/>
-          </a:p>
-        </p:txBody>
-      </p:sp>
-      <p:sp>
-        <p:nvSpPr>
-          <p:cNvPr id="4" name="Text 2"/>
-          <p:cNvSpPr/>
-          <p:nvPr/>
-        </p:nvSpPr>
-        <p:spPr>
-          <a:xfrm>
-            <a:off x="0" y="1463040"/>
-            <a:ext cx="12191695" cy="1005840"/>
-          </a:xfrm>
-          <a:prstGeom prst="rect">
-            <a:avLst/>
-          </a:prstGeom>
-          <a:noFill/>
-          <a:ln/>
-        </p:spPr>
-        <p:txBody>
-          <a:bodyPr wrap="square" rtlCol="0" anchor="ctr"/>
-          <a:lstStyle/>
-          <a:p>
-            <a:pPr algn="ctr" indent="0" marL="0">
-              <a:buNone/>
-            </a:pPr>
-            <a:r>
-              <a:rPr lang="en-US" sz="4600" b="1" dirty="0">
+              <a:t>AGENTS PER IDEA</a:t>
+            </a:r>
+            <a:endParaRPr lang="en-US" sz="950" dirty="0"/>
+          </a:p>
+        </p:txBody>
+      </p:sp>
+      <p:sp>
+        <p:nvSpPr>
+          <p:cNvPr id="7" name="Text 5"/>
+          <p:cNvSpPr/>
+          <p:nvPr/>
+        </p:nvSpPr>
+        <p:spPr>
+          <a:xfrm>
+            <a:off x="2852928" y="5120640"/>
+            <a:ext cx="1828800" cy="685800"/>
+          </a:xfrm>
+          <a:prstGeom prst="rect">
+            <a:avLst/>
+          </a:prstGeom>
+          <a:noFill/>
+          <a:ln/>
+        </p:spPr>
+        <p:txBody>
+          <a:bodyPr wrap="square" rtlCol="0" anchor="ctr"/>
+          <a:lstStyle/>
+          <a:p>
+            <a:pPr indent="0" marL="0">
+              <a:buNone/>
+            </a:pPr>
+            <a:r>
+              <a:rPr lang="en-US" sz="3800" b="1" dirty="0">
                 <a:solidFill>
                   <a:srgbClr val="16181D"/>
                 </a:solidFill>
@@ -17233,87 +17861,157 @@
                 <a:ea typeface="Arial" pitchFamily="34" charset="-122"/>
                 <a:cs typeface="Arial" pitchFamily="34" charset="-120"/>
               </a:rPr>
-              <a:t>Everyone's, </a:t>
-            </a:r>
-            <a:pPr algn="ctr" indent="0" marL="0">
-              <a:buNone/>
-            </a:pPr>
-            <a:r>
-              <a:rPr lang="en-US" sz="4600" b="1" dirty="0">
-                <a:solidFill>
-                  <a:srgbClr val="4F46E5"/>
+              <a:t>0</a:t>
+            </a:r>
+            <a:endParaRPr lang="en-US" sz="3800" dirty="0"/>
+          </a:p>
+        </p:txBody>
+      </p:sp>
+      <p:sp>
+        <p:nvSpPr>
+          <p:cNvPr id="8" name="Text 6"/>
+          <p:cNvSpPr/>
+          <p:nvPr/>
+        </p:nvSpPr>
+        <p:spPr>
+          <a:xfrm>
+            <a:off x="2852928" y="5779008"/>
+            <a:ext cx="1920240" cy="548640"/>
+          </a:xfrm>
+          <a:prstGeom prst="rect">
+            <a:avLst/>
+          </a:prstGeom>
+          <a:noFill/>
+          <a:ln/>
+        </p:spPr>
+        <p:txBody>
+          <a:bodyPr wrap="square" rtlCol="0" anchor="ctr"/>
+          <a:lstStyle/>
+          <a:p>
+            <a:pPr indent="0" marL="0">
+              <a:lnSpc>
+                <a:spcPts val="1200"/>
+              </a:lnSpc>
+              <a:buNone/>
+            </a:pPr>
+            <a:r>
+              <a:rPr lang="en-US" sz="950" spc="150" kern="0" dirty="0">
+                <a:solidFill>
+                  <a:srgbClr val="666C7A"/>
+                </a:solidFill>
+                <a:latin typeface="Consolas" pitchFamily="34" charset="0"/>
+                <a:ea typeface="Consolas" pitchFamily="34" charset="-122"/>
+                <a:cs typeface="Consolas" pitchFamily="34" charset="-120"/>
+              </a:rPr>
+              <a:t>CLOUD CALLS</a:t>
+            </a:r>
+            <a:endParaRPr lang="en-US" sz="950" dirty="0"/>
+          </a:p>
+        </p:txBody>
+      </p:sp>
+      <p:sp>
+        <p:nvSpPr>
+          <p:cNvPr id="9" name="Text 7"/>
+          <p:cNvSpPr/>
+          <p:nvPr/>
+        </p:nvSpPr>
+        <p:spPr>
+          <a:xfrm>
+            <a:off x="4590288" y="5120640"/>
+            <a:ext cx="1828800" cy="685800"/>
+          </a:xfrm>
+          <a:prstGeom prst="rect">
+            <a:avLst/>
+          </a:prstGeom>
+          <a:noFill/>
+          <a:ln/>
+        </p:spPr>
+        <p:txBody>
+          <a:bodyPr wrap="square" rtlCol="0" anchor="ctr"/>
+          <a:lstStyle/>
+          <a:p>
+            <a:pPr indent="0" marL="0">
+              <a:buNone/>
+            </a:pPr>
+            <a:r>
+              <a:rPr lang="en-US" sz="3800" b="1" dirty="0">
+                <a:solidFill>
+                  <a:srgbClr val="16181D"/>
                 </a:solidFill>
                 <a:latin typeface="Arial" pitchFamily="34" charset="0"/>
                 <a:ea typeface="Arial" pitchFamily="34" charset="-122"/>
                 <a:cs typeface="Arial" pitchFamily="34" charset="-120"/>
               </a:rPr>
-              <a:t>all at once.</a:t>
-            </a:r>
-            <a:endParaRPr lang="en-US" sz="4600" dirty="0"/>
-          </a:p>
-        </p:txBody>
-      </p:sp>
-      <p:sp>
-        <p:nvSpPr>
-          <p:cNvPr id="5" name="Text 3"/>
-          <p:cNvSpPr/>
-          <p:nvPr/>
-        </p:nvSpPr>
-        <p:spPr>
-          <a:xfrm>
-            <a:off x="0" y="2606040"/>
-            <a:ext cx="12191695" cy="457200"/>
-          </a:xfrm>
-          <a:prstGeom prst="rect">
-            <a:avLst/>
-          </a:prstGeom>
-          <a:noFill/>
-          <a:ln/>
-        </p:spPr>
-        <p:txBody>
-          <a:bodyPr wrap="square" rtlCol="0" anchor="ctr"/>
-          <a:lstStyle/>
-          <a:p>
-            <a:pPr algn="ctr" indent="0" marL="0">
-              <a:buNone/>
-            </a:pPr>
-            <a:r>
-              <a:rPr lang="en-US" sz="1900" dirty="0">
+              <a:t>1</a:t>
+            </a:r>
+            <a:endParaRPr lang="en-US" sz="3800" dirty="0"/>
+          </a:p>
+        </p:txBody>
+      </p:sp>
+      <p:sp>
+        <p:nvSpPr>
+          <p:cNvPr id="10" name="Text 8"/>
+          <p:cNvSpPr/>
+          <p:nvPr/>
+        </p:nvSpPr>
+        <p:spPr>
+          <a:xfrm>
+            <a:off x="4590288" y="5779008"/>
+            <a:ext cx="1920240" cy="548640"/>
+          </a:xfrm>
+          <a:prstGeom prst="rect">
+            <a:avLst/>
+          </a:prstGeom>
+          <a:noFill/>
+          <a:ln/>
+        </p:spPr>
+        <p:txBody>
+          <a:bodyPr wrap="square" rtlCol="0" anchor="ctr"/>
+          <a:lstStyle/>
+          <a:p>
+            <a:pPr indent="0" marL="0">
+              <a:lnSpc>
+                <a:spcPts val="1200"/>
+              </a:lnSpc>
+              <a:buNone/>
+            </a:pPr>
+            <a:r>
+              <a:rPr lang="en-US" sz="950" spc="150" kern="0" dirty="0">
                 <a:solidFill>
                   <a:srgbClr val="666C7A"/>
                 </a:solidFill>
-                <a:latin typeface="Calibri" pitchFamily="34" charset="0"/>
-                <a:ea typeface="Calibri" pitchFamily="34" charset="-122"/>
-                <a:cs typeface="Calibri" pitchFamily="34" charset="-120"/>
-              </a:rPr>
-              <a:t>Find yours. Your name is on it.</a:t>
-            </a:r>
-            <a:endParaRPr lang="en-US" sz="1900" dirty="0"/>
-          </a:p>
-        </p:txBody>
-      </p:sp>
-      <p:sp>
-        <p:nvSpPr>
-          <p:cNvPr id="6" name="Shape 4"/>
-          <p:cNvSpPr/>
-          <p:nvPr/>
-        </p:nvSpPr>
-        <p:spPr>
-          <a:xfrm>
-            <a:off x="783184" y="3429000"/>
-            <a:ext cx="1920240" cy="1371600"/>
+                <a:latin typeface="Consolas" pitchFamily="34" charset="0"/>
+                <a:ea typeface="Consolas" pitchFamily="34" charset="-122"/>
+                <a:cs typeface="Consolas" pitchFamily="34" charset="-120"/>
+              </a:rPr>
+              <a:t>LAPTOP, STILL WARM</a:t>
+            </a:r>
+            <a:endParaRPr lang="en-US" sz="950" dirty="0"/>
+          </a:p>
+        </p:txBody>
+      </p:sp>
+      <p:sp>
+        <p:nvSpPr>
+          <p:cNvPr id="11" name="Shape 9"/>
+          <p:cNvSpPr/>
+          <p:nvPr/>
+        </p:nvSpPr>
+        <p:spPr>
+          <a:xfrm>
+            <a:off x="7680960" y="1737360"/>
+            <a:ext cx="3657600" cy="1051560"/>
           </a:xfrm>
           <a:prstGeom prst="roundRect">
             <a:avLst>
-              <a:gd name="adj" fmla="val 8000"/>
+              <a:gd name="adj" fmla="val 8696"/>
             </a:avLst>
           </a:prstGeom>
           <a:solidFill>
             <a:srgbClr val="F5F7FA"/>
           </a:solidFill>
-          <a:ln w="17780">
+          <a:ln w="12700">
             <a:solidFill>
-              <a:srgbClr val="4F46E5"/>
+              <a:srgbClr val="E1E5EC"/>
             </a:solidFill>
             <a:prstDash val="solid"/>
           </a:ln>
@@ -17328,30 +18026,81 @@
       </p:sp>
       <p:sp>
         <p:nvSpPr>
-          <p:cNvPr id="7" name="Text 5"/>
-          <p:cNvSpPr/>
-          <p:nvPr/>
-        </p:nvSpPr>
-        <p:spPr>
-          <a:xfrm>
-            <a:off x="783184" y="3429000"/>
-            <a:ext cx="1920240" cy="1371600"/>
-          </a:xfrm>
-          <a:prstGeom prst="rect">
-            <a:avLst/>
-          </a:prstGeom>
-          <a:noFill/>
-          <a:ln/>
-        </p:spPr>
-        <p:txBody>
-          <a:bodyPr wrap="square" rtlCol="0" anchor="ctr"/>
-          <a:lstStyle/>
-          <a:p>
-            <a:pPr algn="ctr" indent="0" marL="0">
-              <a:buNone/>
-            </a:pPr>
-            <a:r>
-              <a:rPr lang="en-US" sz="1500" b="1" dirty="0">
+          <p:cNvPr id="12" name="Shape 10"/>
+          <p:cNvSpPr/>
+          <p:nvPr/>
+        </p:nvSpPr>
+        <p:spPr>
+          <a:xfrm>
+            <a:off x="7973568" y="1988820"/>
+            <a:ext cx="548640" cy="548640"/>
+          </a:xfrm>
+          <a:prstGeom prst="ellipse">
+            <a:avLst/>
+          </a:prstGeom>
+          <a:solidFill>
+            <a:srgbClr val="4F46E5"/>
+          </a:solidFill>
+          <a:ln/>
+          <a:effectLst>
+            <a:outerShdw sx="100000" sy="100000" kx="0" ky="0" algn="bl" rotWithShape="0" blurRad="139700" dist="38100" dir="5400000">
+              <a:srgbClr val="9AA6BC">
+                <a:alpha val="28000"/>
+              </a:srgbClr>
+            </a:outerShdw>
+          </a:effectLst>
+        </p:spPr>
+      </p:sp>
+      <p:pic>
+        <p:nvPicPr>
+          <p:cNvPr id="13" name="Image 0" descr="preencoded.png">    </p:cNvPr>
+          <p:cNvPicPr>
+            <a:picLocks noChangeAspect="1"/>
+          </p:cNvPicPr>
+          <p:nvPr/>
+        </p:nvPicPr>
+        <p:blipFill>
+          <a:blip r:embed="rId1"/>
+          <a:stretch>
+            <a:fillRect/>
+          </a:stretch>
+        </p:blipFill>
+        <p:spPr>
+          <a:xfrm>
+            <a:off x="8105242" y="2120494"/>
+            <a:ext cx="285293" cy="285293"/>
+          </a:xfrm>
+          <a:prstGeom prst="rect">
+            <a:avLst/>
+          </a:prstGeom>
+        </p:spPr>
+      </p:pic>
+      <p:sp>
+        <p:nvSpPr>
+          <p:cNvPr id="14" name="Text 11"/>
+          <p:cNvSpPr/>
+          <p:nvPr/>
+        </p:nvSpPr>
+        <p:spPr>
+          <a:xfrm>
+            <a:off x="8732520" y="1737360"/>
+            <a:ext cx="2468880" cy="1051560"/>
+          </a:xfrm>
+          <a:prstGeom prst="rect">
+            <a:avLst/>
+          </a:prstGeom>
+          <a:noFill/>
+          <a:ln/>
+        </p:spPr>
+        <p:txBody>
+          <a:bodyPr wrap="square" rtlCol="0" anchor="ctr"/>
+          <a:lstStyle/>
+          <a:p>
+            <a:pPr indent="0" marL="0">
+              <a:buNone/>
+            </a:pPr>
+            <a:r>
+              <a:rPr lang="en-US" sz="1700" b="1" dirty="0">
                 <a:solidFill>
                   <a:srgbClr val="16181D"/>
                 </a:solidFill>
@@ -17359,34 +18108,58 @@
                 <a:ea typeface="Arial" pitchFamily="34" charset="-122"/>
                 <a:cs typeface="Arial" pitchFamily="34" charset="-120"/>
               </a:rPr>
-              <a:t>a name</a:t>
-            </a:r>
-            <a:endParaRPr lang="en-US" sz="1500" dirty="0"/>
-          </a:p>
-        </p:txBody>
-      </p:sp>
-      <p:sp>
-        <p:nvSpPr>
-          <p:cNvPr id="8" name="Shape 6"/>
-          <p:cNvSpPr/>
-          <p:nvPr/>
-        </p:nvSpPr>
-        <p:spPr>
-          <a:xfrm>
-            <a:off x="2959456" y="3429000"/>
-            <a:ext cx="1920240" cy="1371600"/>
+              <a:t>you sent it</a:t>
+            </a:r>
+            <a:endParaRPr lang="en-US" sz="1700" dirty="0"/>
+          </a:p>
+        </p:txBody>
+      </p:sp>
+      <p:sp>
+        <p:nvSpPr>
+          <p:cNvPr id="15" name="Shape 12"/>
+          <p:cNvSpPr/>
+          <p:nvPr/>
+        </p:nvSpPr>
+        <p:spPr>
+          <a:xfrm>
+            <a:off x="9509760" y="2788920"/>
+            <a:ext cx="0" cy="320040"/>
+          </a:xfrm>
+          <a:prstGeom prst="line">
+            <a:avLst/>
+          </a:prstGeom>
+          <a:noFill/>
+          <a:ln w="20320">
+            <a:solidFill>
+              <a:srgbClr val="9AA1B0"/>
+            </a:solidFill>
+            <a:prstDash val="solid"/>
+            <a:tailEnd type="triangle"/>
+          </a:ln>
+        </p:spPr>
+      </p:sp>
+      <p:sp>
+        <p:nvSpPr>
+          <p:cNvPr id="16" name="Shape 13"/>
+          <p:cNvSpPr/>
+          <p:nvPr/>
+        </p:nvSpPr>
+        <p:spPr>
+          <a:xfrm>
+            <a:off x="7680960" y="3108960"/>
+            <a:ext cx="3657600" cy="1051560"/>
           </a:xfrm>
           <a:prstGeom prst="roundRect">
             <a:avLst>
-              <a:gd name="adj" fmla="val 8000"/>
+              <a:gd name="adj" fmla="val 8696"/>
             </a:avLst>
           </a:prstGeom>
           <a:solidFill>
             <a:srgbClr val="F5F7FA"/>
           </a:solidFill>
-          <a:ln w="17780">
+          <a:ln w="12700">
             <a:solidFill>
-              <a:srgbClr val="7C3AED"/>
+              <a:srgbClr val="E1E5EC"/>
             </a:solidFill>
             <a:prstDash val="solid"/>
           </a:ln>
@@ -17401,30 +18174,81 @@
       </p:sp>
       <p:sp>
         <p:nvSpPr>
-          <p:cNvPr id="9" name="Text 7"/>
-          <p:cNvSpPr/>
-          <p:nvPr/>
-        </p:nvSpPr>
-        <p:spPr>
-          <a:xfrm>
-            <a:off x="2959456" y="3429000"/>
-            <a:ext cx="1920240" cy="1371600"/>
-          </a:xfrm>
-          <a:prstGeom prst="rect">
-            <a:avLst/>
-          </a:prstGeom>
-          <a:noFill/>
-          <a:ln/>
-        </p:spPr>
-        <p:txBody>
-          <a:bodyPr wrap="square" rtlCol="0" anchor="ctr"/>
-          <a:lstStyle/>
-          <a:p>
-            <a:pPr algn="ctr" indent="0" marL="0">
-              <a:buNone/>
-            </a:pPr>
-            <a:r>
-              <a:rPr lang="en-US" sz="1500" b="1" dirty="0">
+          <p:cNvPr id="17" name="Shape 14"/>
+          <p:cNvSpPr/>
+          <p:nvPr/>
+        </p:nvSpPr>
+        <p:spPr>
+          <a:xfrm>
+            <a:off x="7973568" y="3360420"/>
+            <a:ext cx="548640" cy="548640"/>
+          </a:xfrm>
+          <a:prstGeom prst="ellipse">
+            <a:avLst/>
+          </a:prstGeom>
+          <a:solidFill>
+            <a:srgbClr val="7C3AED"/>
+          </a:solidFill>
+          <a:ln/>
+          <a:effectLst>
+            <a:outerShdw sx="100000" sy="100000" kx="0" ky="0" algn="bl" rotWithShape="0" blurRad="139700" dist="38100" dir="5400000">
+              <a:srgbClr val="9AA6BC">
+                <a:alpha val="28000"/>
+              </a:srgbClr>
+            </a:outerShdw>
+          </a:effectLst>
+        </p:spPr>
+      </p:sp>
+      <p:pic>
+        <p:nvPicPr>
+          <p:cNvPr id="18" name="Image 1" descr="preencoded.png">    </p:cNvPr>
+          <p:cNvPicPr>
+            <a:picLocks noChangeAspect="1"/>
+          </p:cNvPicPr>
+          <p:nvPr/>
+        </p:nvPicPr>
+        <p:blipFill>
+          <a:blip r:embed="rId2"/>
+          <a:stretch>
+            <a:fillRect/>
+          </a:stretch>
+        </p:blipFill>
+        <p:spPr>
+          <a:xfrm>
+            <a:off x="8105242" y="3492094"/>
+            <a:ext cx="285293" cy="285293"/>
+          </a:xfrm>
+          <a:prstGeom prst="rect">
+            <a:avLst/>
+          </a:prstGeom>
+        </p:spPr>
+      </p:pic>
+      <p:sp>
+        <p:nvSpPr>
+          <p:cNvPr id="19" name="Text 15"/>
+          <p:cNvSpPr/>
+          <p:nvPr/>
+        </p:nvSpPr>
+        <p:spPr>
+          <a:xfrm>
+            <a:off x="8732520" y="3108960"/>
+            <a:ext cx="2468880" cy="1051560"/>
+          </a:xfrm>
+          <a:prstGeom prst="rect">
+            <a:avLst/>
+          </a:prstGeom>
+          <a:noFill/>
+          <a:ln/>
+        </p:spPr>
+        <p:txBody>
+          <a:bodyPr wrap="square" rtlCol="0" anchor="ctr"/>
+          <a:lstStyle/>
+          <a:p>
+            <a:pPr indent="0" marL="0">
+              <a:buNone/>
+            </a:pPr>
+            <a:r>
+              <a:rPr lang="en-US" sz="1700" b="1" dirty="0">
                 <a:solidFill>
                   <a:srgbClr val="16181D"/>
                 </a:solidFill>
@@ -17432,34 +18256,58 @@
                 <a:ea typeface="Arial" pitchFamily="34" charset="-122"/>
                 <a:cs typeface="Arial" pitchFamily="34" charset="-120"/>
               </a:rPr>
-              <a:t>artwork</a:t>
-            </a:r>
-            <a:endParaRPr lang="en-US" sz="1500" dirty="0"/>
-          </a:p>
-        </p:txBody>
-      </p:sp>
-      <p:sp>
-        <p:nvSpPr>
-          <p:cNvPr id="10" name="Shape 8"/>
-          <p:cNvSpPr/>
-          <p:nvPr/>
-        </p:nvSpPr>
-        <p:spPr>
-          <a:xfrm>
-            <a:off x="5135728" y="3429000"/>
-            <a:ext cx="1920240" cy="1371600"/>
+              <a:t>they built it</a:t>
+            </a:r>
+            <a:endParaRPr lang="en-US" sz="1700" dirty="0"/>
+          </a:p>
+        </p:txBody>
+      </p:sp>
+      <p:sp>
+        <p:nvSpPr>
+          <p:cNvPr id="20" name="Shape 16"/>
+          <p:cNvSpPr/>
+          <p:nvPr/>
+        </p:nvSpPr>
+        <p:spPr>
+          <a:xfrm>
+            <a:off x="9509760" y="4160520"/>
+            <a:ext cx="0" cy="320040"/>
+          </a:xfrm>
+          <a:prstGeom prst="line">
+            <a:avLst/>
+          </a:prstGeom>
+          <a:noFill/>
+          <a:ln w="20320">
+            <a:solidFill>
+              <a:srgbClr val="9AA1B0"/>
+            </a:solidFill>
+            <a:prstDash val="solid"/>
+            <a:tailEnd type="triangle"/>
+          </a:ln>
+        </p:spPr>
+      </p:sp>
+      <p:sp>
+        <p:nvSpPr>
+          <p:cNvPr id="21" name="Shape 17"/>
+          <p:cNvSpPr/>
+          <p:nvPr/>
+        </p:nvSpPr>
+        <p:spPr>
+          <a:xfrm>
+            <a:off x="7680960" y="4480560"/>
+            <a:ext cx="3657600" cy="1051560"/>
           </a:xfrm>
           <a:prstGeom prst="roundRect">
             <a:avLst>
-              <a:gd name="adj" fmla="val 8000"/>
+              <a:gd name="adj" fmla="val 8696"/>
             </a:avLst>
           </a:prstGeom>
           <a:solidFill>
             <a:srgbClr val="F5F7FA"/>
           </a:solidFill>
-          <a:ln w="17780">
+          <a:ln w="12700">
             <a:solidFill>
-              <a:srgbClr val="0F9E8E"/>
+              <a:srgbClr val="E1E5EC"/>
             </a:solidFill>
             <a:prstDash val="solid"/>
           </a:ln>
@@ -17474,68 +18322,22 @@
       </p:sp>
       <p:sp>
         <p:nvSpPr>
-          <p:cNvPr id="11" name="Text 9"/>
-          <p:cNvSpPr/>
-          <p:nvPr/>
-        </p:nvSpPr>
-        <p:spPr>
-          <a:xfrm>
-            <a:off x="5135728" y="3429000"/>
-            <a:ext cx="1920240" cy="1371600"/>
-          </a:xfrm>
-          <a:prstGeom prst="rect">
-            <a:avLst/>
-          </a:prstGeom>
-          <a:noFill/>
-          <a:ln/>
-        </p:spPr>
-        <p:txBody>
-          <a:bodyPr wrap="square" rtlCol="0" anchor="ctr"/>
-          <a:lstStyle/>
-          <a:p>
-            <a:pPr algn="ctr" indent="0" marL="0">
-              <a:buNone/>
-            </a:pPr>
-            <a:r>
-              <a:rPr lang="en-US" sz="1500" b="1" dirty="0">
-                <a:solidFill>
-                  <a:srgbClr val="16181D"/>
-                </a:solidFill>
-                <a:latin typeface="Arial" pitchFamily="34" charset="0"/>
-                <a:ea typeface="Arial" pitchFamily="34" charset="-122"/>
-                <a:cs typeface="Arial" pitchFamily="34" charset="-120"/>
-              </a:rPr>
-              <a:t>copy</a:t>
-            </a:r>
-            <a:endParaRPr lang="en-US" sz="1500" dirty="0"/>
-          </a:p>
-        </p:txBody>
-      </p:sp>
-      <p:sp>
-        <p:nvSpPr>
-          <p:cNvPr id="12" name="Shape 10"/>
-          <p:cNvSpPr/>
-          <p:nvPr/>
-        </p:nvSpPr>
-        <p:spPr>
-          <a:xfrm>
-            <a:off x="7312000" y="3429000"/>
-            <a:ext cx="1920240" cy="1371600"/>
-          </a:xfrm>
-          <a:prstGeom prst="roundRect">
-            <a:avLst>
-              <a:gd name="adj" fmla="val 8000"/>
-            </a:avLst>
+          <p:cNvPr id="22" name="Shape 18"/>
+          <p:cNvSpPr/>
+          <p:nvPr/>
+        </p:nvSpPr>
+        <p:spPr>
+          <a:xfrm>
+            <a:off x="7973568" y="4732020"/>
+            <a:ext cx="548640" cy="548640"/>
+          </a:xfrm>
+          <a:prstGeom prst="ellipse">
+            <a:avLst/>
           </a:prstGeom>
           <a:solidFill>
-            <a:srgbClr val="F5F7FA"/>
+            <a:srgbClr val="0F9E8E"/>
           </a:solidFill>
-          <a:ln w="17780">
-            <a:solidFill>
-              <a:srgbClr val="D97706"/>
-            </a:solidFill>
-            <a:prstDash val="solid"/>
-          </a:ln>
+          <a:ln/>
           <a:effectLst>
             <a:outerShdw sx="100000" sy="100000" kx="0" ky="0" algn="bl" rotWithShape="0" blurRad="139700" dist="38100" dir="5400000">
               <a:srgbClr val="9AA6BC">
@@ -17545,32 +18347,56 @@
           </a:effectLst>
         </p:spPr>
       </p:sp>
-      <p:sp>
-        <p:nvSpPr>
-          <p:cNvPr id="13" name="Text 11"/>
-          <p:cNvSpPr/>
-          <p:nvPr/>
-        </p:nvSpPr>
-        <p:spPr>
-          <a:xfrm>
-            <a:off x="7312000" y="3429000"/>
-            <a:ext cx="1920240" cy="1371600"/>
-          </a:xfrm>
-          <a:prstGeom prst="rect">
-            <a:avLst/>
-          </a:prstGeom>
-          <a:noFill/>
-          <a:ln/>
-        </p:spPr>
-        <p:txBody>
-          <a:bodyPr wrap="square" rtlCol="0" anchor="ctr"/>
-          <a:lstStyle/>
-          <a:p>
-            <a:pPr algn="ctr" indent="0" marL="0">
-              <a:buNone/>
-            </a:pPr>
-            <a:r>
-              <a:rPr lang="en-US" sz="1500" b="1" dirty="0">
+      <p:pic>
+        <p:nvPicPr>
+          <p:cNvPr id="23" name="Image 2" descr="preencoded.png">    </p:cNvPr>
+          <p:cNvPicPr>
+            <a:picLocks noChangeAspect="1"/>
+          </p:cNvPicPr>
+          <p:nvPr/>
+        </p:nvPicPr>
+        <p:blipFill>
+          <a:blip r:embed="rId3"/>
+          <a:stretch>
+            <a:fillRect/>
+          </a:stretch>
+        </p:blipFill>
+        <p:spPr>
+          <a:xfrm>
+            <a:off x="8105242" y="4863694"/>
+            <a:ext cx="285293" cy="285293"/>
+          </a:xfrm>
+          <a:prstGeom prst="rect">
+            <a:avLst/>
+          </a:prstGeom>
+        </p:spPr>
+      </p:pic>
+      <p:sp>
+        <p:nvSpPr>
+          <p:cNvPr id="24" name="Text 19"/>
+          <p:cNvSpPr/>
+          <p:nvPr/>
+        </p:nvSpPr>
+        <p:spPr>
+          <a:xfrm>
+            <a:off x="8732520" y="4480560"/>
+            <a:ext cx="2468880" cy="1051560"/>
+          </a:xfrm>
+          <a:prstGeom prst="rect">
+            <a:avLst/>
+          </a:prstGeom>
+          <a:noFill/>
+          <a:ln/>
+        </p:spPr>
+        <p:txBody>
+          <a:bodyPr wrap="square" rtlCol="0" anchor="ctr"/>
+          <a:lstStyle/>
+          <a:p>
+            <a:pPr indent="0" marL="0">
+              <a:buNone/>
+            </a:pPr>
+            <a:r>
+              <a:rPr lang="en-US" sz="1700" b="1" dirty="0">
                 <a:solidFill>
                   <a:srgbClr val="16181D"/>
                 </a:solidFill>
@@ -17578,160 +18404,9 @@
                 <a:ea typeface="Arial" pitchFamily="34" charset="-122"/>
                 <a:cs typeface="Arial" pitchFamily="34" charset="-120"/>
               </a:rPr>
-              <a:t>a palette</a:t>
-            </a:r>
-            <a:endParaRPr lang="en-US" sz="1500" dirty="0"/>
-          </a:p>
-        </p:txBody>
-      </p:sp>
-      <p:sp>
-        <p:nvSpPr>
-          <p:cNvPr id="14" name="Shape 12"/>
-          <p:cNvSpPr/>
-          <p:nvPr/>
-        </p:nvSpPr>
-        <p:spPr>
-          <a:xfrm>
-            <a:off x="9488272" y="3429000"/>
-            <a:ext cx="1920240" cy="1371600"/>
-          </a:xfrm>
-          <a:prstGeom prst="roundRect">
-            <a:avLst>
-              <a:gd name="adj" fmla="val 8000"/>
-            </a:avLst>
-          </a:prstGeom>
-          <a:solidFill>
-            <a:srgbClr val="F5F7FA"/>
-          </a:solidFill>
-          <a:ln w="17780">
-            <a:solidFill>
-              <a:srgbClr val="E11D48"/>
-            </a:solidFill>
-            <a:prstDash val="solid"/>
-          </a:ln>
-          <a:effectLst>
-            <a:outerShdw sx="100000" sy="100000" kx="0" ky="0" algn="bl" rotWithShape="0" blurRad="139700" dist="38100" dir="5400000">
-              <a:srgbClr val="9AA6BC">
-                <a:alpha val="28000"/>
-              </a:srgbClr>
-            </a:outerShdw>
-          </a:effectLst>
-        </p:spPr>
-      </p:sp>
-      <p:sp>
-        <p:nvSpPr>
-          <p:cNvPr id="15" name="Text 13"/>
-          <p:cNvSpPr/>
-          <p:nvPr/>
-        </p:nvSpPr>
-        <p:spPr>
-          <a:xfrm>
-            <a:off x="9488272" y="3429000"/>
-            <a:ext cx="1920240" cy="1371600"/>
-          </a:xfrm>
-          <a:prstGeom prst="rect">
-            <a:avLst/>
-          </a:prstGeom>
-          <a:noFill/>
-          <a:ln/>
-        </p:spPr>
-        <p:txBody>
-          <a:bodyPr wrap="square" rtlCol="0" anchor="ctr"/>
-          <a:lstStyle/>
-          <a:p>
-            <a:pPr algn="ctr" indent="0" marL="0">
-              <a:buNone/>
-            </a:pPr>
-            <a:r>
-              <a:rPr lang="en-US" sz="1500" b="1" dirty="0">
-                <a:solidFill>
-                  <a:srgbClr val="16181D"/>
-                </a:solidFill>
-                <a:latin typeface="Arial" pitchFamily="34" charset="0"/>
-                <a:ea typeface="Arial" pitchFamily="34" charset="-122"/>
-                <a:cs typeface="Arial" pitchFamily="34" charset="-120"/>
-              </a:rPr>
-              <a:t>a critique</a:t>
-            </a:r>
-            <a:endParaRPr lang="en-US" sz="1500" dirty="0"/>
-          </a:p>
-        </p:txBody>
-      </p:sp>
-      <p:sp>
-        <p:nvSpPr>
-          <p:cNvPr id="16" name="Text 14"/>
-          <p:cNvSpPr/>
-          <p:nvPr/>
-        </p:nvSpPr>
-        <p:spPr>
-          <a:xfrm>
-            <a:off x="1828800" y="5120640"/>
-            <a:ext cx="8534095" cy="457200"/>
-          </a:xfrm>
-          <a:prstGeom prst="rect">
-            <a:avLst/>
-          </a:prstGeom>
-          <a:noFill/>
-          <a:ln/>
-        </p:spPr>
-        <p:txBody>
-          <a:bodyPr wrap="square" rtlCol="0" anchor="ctr"/>
-          <a:lstStyle/>
-          <a:p>
-            <a:pPr algn="ctr" indent="0" marL="0">
-              <a:buNone/>
-            </a:pPr>
-            <a:r>
-              <a:rPr lang="en-US" sz="1200" dirty="0">
-                <a:solidFill>
-                  <a:srgbClr val="9AA1B0"/>
-                </a:solidFill>
-                <a:latin typeface="Consolas" pitchFamily="34" charset="0"/>
-                <a:ea typeface="Consolas" pitchFamily="34" charset="-122"/>
-                <a:cs typeface="Consolas" pitchFamily="34" charset="-120"/>
-              </a:rPr>
-              <a:t>every page invented from scratch, by a different run of the same seven agents</a:t>
-            </a:r>
-            <a:endParaRPr lang="en-US" sz="1200" dirty="0"/>
-          </a:p>
-        </p:txBody>
-      </p:sp>
-      <p:sp>
-        <p:nvSpPr>
-          <p:cNvPr id="17" name="Text 15"/>
-          <p:cNvSpPr/>
-          <p:nvPr/>
-        </p:nvSpPr>
-        <p:spPr>
-          <a:xfrm>
-            <a:off x="1828800" y="5852160"/>
-            <a:ext cx="8534095" cy="457200"/>
-          </a:xfrm>
-          <a:prstGeom prst="rect">
-            <a:avLst/>
-          </a:prstGeom>
-          <a:noFill/>
-          <a:ln/>
-        </p:spPr>
-        <p:txBody>
-          <a:bodyPr wrap="square" rtlCol="0" anchor="ctr"/>
-          <a:lstStyle/>
-          <a:p>
-            <a:pPr algn="ctr" indent="0" marL="0">
-              <a:buNone/>
-            </a:pPr>
-            <a:r>
-              <a:rPr lang="en-US" sz="1300" dirty="0">
-                <a:solidFill>
-                  <a:srgbClr val="4F46E5"/>
-                </a:solidFill>
-                <a:latin typeface="Consolas" pitchFamily="34" charset="0"/>
-                <a:ea typeface="Consolas" pitchFamily="34" charset="-122"/>
-                <a:cs typeface="Consolas" pitchFamily="34" charset="-120"/>
-              </a:rPr>
-              <a:t>open  /gallery  on the projector</a:t>
-            </a:r>
-            <a:endParaRPr lang="en-US" sz="1300" dirty="0"/>
+              <a:t>here it all is</a:t>
+            </a:r>
+            <a:endParaRPr lang="en-US" sz="1700" dirty="0"/>
           </a:p>
         </p:txBody>
       </p:sp>
@@ -17769,194 +18444,142 @@
       </p:grpSpPr>
       <p:sp>
         <p:nvSpPr>
-          <p:cNvPr id="2" name="Text 0"/>
-          <p:cNvSpPr/>
-          <p:nvPr/>
-        </p:nvSpPr>
-        <p:spPr>
-          <a:xfrm>
-            <a:off x="841248" y="640080"/>
-            <a:ext cx="9144000" cy="292608"/>
-          </a:xfrm>
-          <a:prstGeom prst="rect">
-            <a:avLst/>
-          </a:prstGeom>
-          <a:noFill/>
-          <a:ln/>
-        </p:spPr>
-        <p:txBody>
-          <a:bodyPr wrap="square" rtlCol="0" anchor="ctr"/>
-          <a:lstStyle/>
-          <a:p>
-            <a:pPr indent="0" marL="0">
-              <a:buNone/>
-            </a:pPr>
-            <a:r>
-              <a:rPr lang="en-US" sz="1100" b="1" spc="300" kern="0" dirty="0">
+          <p:cNvPr id="2" name="Shape 0"/>
+          <p:cNvSpPr/>
+          <p:nvPr/>
+        </p:nvSpPr>
+        <p:spPr>
+          <a:xfrm>
+            <a:off x="859536" y="621792"/>
+            <a:ext cx="182880" cy="182880"/>
+          </a:xfrm>
+          <a:prstGeom prst="ellipse">
+            <a:avLst/>
+          </a:prstGeom>
+          <a:solidFill>
+            <a:srgbClr val="4F46E5"/>
+          </a:solidFill>
+          <a:ln/>
+        </p:spPr>
+      </p:sp>
+      <p:sp>
+        <p:nvSpPr>
+          <p:cNvPr id="3" name="Text 1"/>
+          <p:cNvSpPr/>
+          <p:nvPr/>
+        </p:nvSpPr>
+        <p:spPr>
+          <a:xfrm>
+            <a:off x="1207008" y="566928"/>
+            <a:ext cx="4572000" cy="292608"/>
+          </a:xfrm>
+          <a:prstGeom prst="rect">
+            <a:avLst/>
+          </a:prstGeom>
+          <a:noFill/>
+          <a:ln/>
+        </p:spPr>
+        <p:txBody>
+          <a:bodyPr wrap="square" rtlCol="0" anchor="ctr"/>
+          <a:lstStyle/>
+          <a:p>
+            <a:pPr indent="0" marL="0">
+              <a:buNone/>
+            </a:pPr>
+            <a:r>
+              <a:rPr lang="en-US" sz="1200" spc="400" kern="0" dirty="0">
                 <a:solidFill>
                   <a:srgbClr val="4F46E5"/>
+                </a:solidFill>
+                <a:latin typeface="Consolas" pitchFamily="34" charset="0"/>
+                <a:ea typeface="Consolas" pitchFamily="34" charset="-122"/>
+                <a:cs typeface="Consolas" pitchFamily="34" charset="-120"/>
+              </a:rPr>
+              <a:t>THE WALL</a:t>
+            </a:r>
+            <a:endParaRPr lang="en-US" sz="1200" dirty="0"/>
+          </a:p>
+        </p:txBody>
+      </p:sp>
+      <p:sp>
+        <p:nvSpPr>
+          <p:cNvPr id="4" name="Text 2"/>
+          <p:cNvSpPr/>
+          <p:nvPr/>
+        </p:nvSpPr>
+        <p:spPr>
+          <a:xfrm>
+            <a:off x="0" y="1463040"/>
+            <a:ext cx="12191695" cy="1005840"/>
+          </a:xfrm>
+          <a:prstGeom prst="rect">
+            <a:avLst/>
+          </a:prstGeom>
+          <a:noFill/>
+          <a:ln/>
+        </p:spPr>
+        <p:txBody>
+          <a:bodyPr wrap="square" rtlCol="0" anchor="ctr"/>
+          <a:lstStyle/>
+          <a:p>
+            <a:pPr algn="ctr" indent="0" marL="0">
+              <a:buNone/>
+            </a:pPr>
+            <a:r>
+              <a:rPr lang="en-US" sz="4600" b="1" dirty="0">
+                <a:solidFill>
+                  <a:srgbClr val="16181D"/>
                 </a:solidFill>
                 <a:latin typeface="Arial" pitchFamily="34" charset="0"/>
                 <a:ea typeface="Arial" pitchFamily="34" charset="-122"/>
                 <a:cs typeface="Arial" pitchFamily="34" charset="-120"/>
               </a:rPr>
-              <a:t>THE TAKEAWAY</a:t>
-            </a:r>
-            <a:endParaRPr lang="en-US" sz="1100" dirty="0"/>
-          </a:p>
-        </p:txBody>
-      </p:sp>
-      <p:sp>
-        <p:nvSpPr>
-          <p:cNvPr id="3" name="Text 1"/>
-          <p:cNvSpPr/>
-          <p:nvPr/>
-        </p:nvSpPr>
-        <p:spPr>
-          <a:xfrm>
-            <a:off x="841248" y="1325880"/>
-            <a:ext cx="5943600" cy="2377440"/>
-          </a:xfrm>
-          <a:prstGeom prst="rect">
-            <a:avLst/>
-          </a:prstGeom>
-          <a:noFill/>
-          <a:ln/>
-        </p:spPr>
-        <p:txBody>
-          <a:bodyPr wrap="square" rtlCol="0" anchor="ctr"/>
-          <a:lstStyle/>
-          <a:p>
-            <a:pPr indent="0" marL="0">
-              <a:lnSpc>
-                <a:spcPts val="4400"/>
-              </a:lnSpc>
-              <a:buNone/>
-            </a:pPr>
-            <a:r>
-              <a:rPr lang="en-US" sz="3600" b="1" dirty="0">
-                <a:solidFill>
-                  <a:srgbClr val="16181D"/>
+              <a:t>Everyone's, </a:t>
+            </a:r>
+            <a:pPr algn="ctr" indent="0" marL="0">
+              <a:buNone/>
+            </a:pPr>
+            <a:r>
+              <a:rPr lang="en-US" sz="4600" b="1" dirty="0">
+                <a:solidFill>
+                  <a:srgbClr val="4F46E5"/>
                 </a:solidFill>
                 <a:latin typeface="Arial" pitchFamily="34" charset="0"/>
                 <a:ea typeface="Arial" pitchFamily="34" charset="-122"/>
                 <a:cs typeface="Arial" pitchFamily="34" charset="-120"/>
               </a:rPr>
-              <a:t>Your codebase</a:t>
-            </a:r>
-            <a:endParaRPr lang="en-US" sz="3600" dirty="0"/>
-          </a:p>
-          <a:p>
-            <a:pPr indent="0" marL="0">
-              <a:lnSpc>
-                <a:spcPts val="4400"/>
-              </a:lnSpc>
-              <a:buNone/>
-            </a:pPr>
-            <a:r>
-              <a:rPr lang="en-US" sz="3600" b="1" dirty="0">
-                <a:solidFill>
-                  <a:srgbClr val="16181D"/>
-                </a:solidFill>
-                <a:latin typeface="Arial" pitchFamily="34" charset="0"/>
-                <a:ea typeface="Arial" pitchFamily="34" charset="-122"/>
-                <a:cs typeface="Arial" pitchFamily="34" charset="-120"/>
-              </a:rPr>
-              <a:t>becomes a </a:t>
-            </a:r>
-            <a:endParaRPr lang="en-US" sz="3600" dirty="0"/>
-          </a:p>
-          <a:p>
-            <a:pPr indent="0" marL="0">
-              <a:lnSpc>
-                <a:spcPts val="4400"/>
-              </a:lnSpc>
-              <a:buNone/>
-            </a:pPr>
-            <a:r>
-              <a:rPr lang="en-US" sz="3600" b="1" dirty="0">
-                <a:solidFill>
-                  <a:srgbClr val="4F46E5"/>
-                </a:solidFill>
-                <a:latin typeface="Arial" pitchFamily="34" charset="0"/>
-                <a:ea typeface="Arial" pitchFamily="34" charset="-122"/>
-                <a:cs typeface="Arial" pitchFamily="34" charset="-120"/>
-              </a:rPr>
-              <a:t>team</a:t>
-            </a:r>
-            <a:endParaRPr lang="en-US" sz="3600" dirty="0"/>
-          </a:p>
-          <a:p>
-            <a:pPr indent="0" marL="0">
-              <a:lnSpc>
-                <a:spcPts val="4400"/>
-              </a:lnSpc>
-              <a:buNone/>
-            </a:pPr>
-            <a:r>
-              <a:rPr lang="en-US" sz="3600" b="1" dirty="0">
-                <a:solidFill>
-                  <a:srgbClr val="4F46E5"/>
-                </a:solidFill>
-                <a:latin typeface="Arial" pitchFamily="34" charset="0"/>
-                <a:ea typeface="Arial" pitchFamily="34" charset="-122"/>
-                <a:cs typeface="Arial" pitchFamily="34" charset="-120"/>
-              </a:rPr>
-              <a:t>you direct</a:t>
-            </a:r>
-            <a:endParaRPr lang="en-US" sz="3600" dirty="0"/>
-          </a:p>
-          <a:p>
-            <a:pPr indent="0" marL="0">
-              <a:lnSpc>
-                <a:spcPts val="4400"/>
-              </a:lnSpc>
-              <a:buNone/>
-            </a:pPr>
-            <a:r>
-              <a:rPr lang="en-US" sz="3600" b="1" dirty="0">
-                <a:solidFill>
-                  <a:srgbClr val="16181D"/>
-                </a:solidFill>
-                <a:latin typeface="Arial" pitchFamily="34" charset="0"/>
-                <a:ea typeface="Arial" pitchFamily="34" charset="-122"/>
-                <a:cs typeface="Arial" pitchFamily="34" charset="-120"/>
-              </a:rPr>
-              <a:t> in English.</a:t>
-            </a:r>
-            <a:endParaRPr lang="en-US" sz="3600" dirty="0"/>
-          </a:p>
-        </p:txBody>
-      </p:sp>
-      <p:sp>
-        <p:nvSpPr>
-          <p:cNvPr id="4" name="Text 2"/>
-          <p:cNvSpPr/>
-          <p:nvPr/>
-        </p:nvSpPr>
-        <p:spPr>
-          <a:xfrm>
-            <a:off x="841248" y="4160520"/>
-            <a:ext cx="5760720" cy="1280160"/>
-          </a:xfrm>
-          <a:prstGeom prst="rect">
-            <a:avLst/>
-          </a:prstGeom>
-          <a:noFill/>
-          <a:ln/>
-        </p:spPr>
-        <p:txBody>
-          <a:bodyPr wrap="square" rtlCol="0" anchor="ctr"/>
-          <a:lstStyle/>
-          <a:p>
-            <a:pPr indent="0" marL="0">
-              <a:lnSpc>
-                <a:spcPts val="2500"/>
-              </a:lnSpc>
-              <a:buNone/>
-            </a:pPr>
-            <a:r>
-              <a:rPr lang="en-US" sz="1600" dirty="0">
+              <a:t>all at once.</a:t>
+            </a:r>
+            <a:endParaRPr lang="en-US" sz="4600" dirty="0"/>
+          </a:p>
+        </p:txBody>
+      </p:sp>
+      <p:sp>
+        <p:nvSpPr>
+          <p:cNvPr id="5" name="Text 3"/>
+          <p:cNvSpPr/>
+          <p:nvPr/>
+        </p:nvSpPr>
+        <p:spPr>
+          <a:xfrm>
+            <a:off x="0" y="2606040"/>
+            <a:ext cx="12191695" cy="457200"/>
+          </a:xfrm>
+          <a:prstGeom prst="rect">
+            <a:avLst/>
+          </a:prstGeom>
+          <a:noFill/>
+          <a:ln/>
+        </p:spPr>
+        <p:txBody>
+          <a:bodyPr wrap="square" rtlCol="0" anchor="ctr"/>
+          <a:lstStyle/>
+          <a:p>
+            <a:pPr algn="ctr" indent="0" marL="0">
+              <a:buNone/>
+            </a:pPr>
+            <a:r>
+              <a:rPr lang="en-US" sz="1900" dirty="0">
                 <a:solidFill>
                   <a:srgbClr val="666C7A"/>
                 </a:solidFill>
@@ -17964,94 +18587,9 @@
                 <a:ea typeface="Calibri" pitchFamily="34" charset="-122"/>
                 <a:cs typeface="Calibri" pitchFamily="34" charset="-120"/>
               </a:rPr>
-              <a:t>One prompt. Many workers. In Java, on your own machine. The skill ahead is knowing what to ask, and how to constrain the answer.</a:t>
-            </a:r>
-            <a:endParaRPr lang="en-US" sz="1600" dirty="0"/>
-          </a:p>
-        </p:txBody>
-      </p:sp>
-      <p:sp>
-        <p:nvSpPr>
-          <p:cNvPr id="5" name="Text 3"/>
-          <p:cNvSpPr/>
-          <p:nvPr/>
-        </p:nvSpPr>
-        <p:spPr>
-          <a:xfrm>
-            <a:off x="841248" y="5669280"/>
-            <a:ext cx="5486400" cy="822960"/>
-          </a:xfrm>
-          <a:prstGeom prst="rect">
-            <a:avLst/>
-          </a:prstGeom>
-          <a:noFill/>
-          <a:ln/>
-        </p:spPr>
-        <p:txBody>
-          <a:bodyPr wrap="square" rtlCol="0" anchor="ctr"/>
-          <a:lstStyle/>
-          <a:p>
-            <a:pPr indent="0" marL="0">
-              <a:lnSpc>
-                <a:spcPts val="2200"/>
-              </a:lnSpc>
-              <a:buNone/>
-            </a:pPr>
-            <a:r>
-              <a:rPr lang="en-US" sz="1250" b="1" dirty="0">
-                <a:solidFill>
-                  <a:srgbClr val="16181D"/>
-                </a:solidFill>
-                <a:latin typeface="Consolas" pitchFamily="34" charset="0"/>
-                <a:ea typeface="Consolas" pitchFamily="34" charset="-122"/>
-                <a:cs typeface="Consolas" pitchFamily="34" charset="-120"/>
-              </a:rPr>
-              <a:t>Nevin Tom</a:t>
-            </a:r>
-            <a:pPr indent="0" marL="0">
-              <a:lnSpc>
-                <a:spcPts val="2200"/>
-              </a:lnSpc>
-              <a:buNone/>
-            </a:pPr>
-            <a:r>
-              <a:rPr lang="en-US" sz="1250" b="1" dirty="0">
-                <a:solidFill>
-                  <a:srgbClr val="4F46E5"/>
-                </a:solidFill>
-                <a:latin typeface="Consolas" pitchFamily="34" charset="0"/>
-                <a:ea typeface="Consolas" pitchFamily="34" charset="-122"/>
-                <a:cs typeface="Consolas" pitchFamily="34" charset="-120"/>
-              </a:rPr>
-              <a:t>   /   BBD</a:t>
-            </a:r>
-            <a:pPr indent="0" marL="0">
-              <a:lnSpc>
-                <a:spcPts val="2200"/>
-              </a:lnSpc>
-              <a:buNone/>
-            </a:pPr>
-            <a:endParaRPr lang="en-US" sz="1250" dirty="0"/>
-          </a:p>
-          <a:p>
-            <a:pPr indent="0" marL="0">
-              <a:lnSpc>
-                <a:spcPts val="2200"/>
-              </a:lnSpc>
-              <a:buNone/>
-            </a:pPr>
-            <a:r>
-              <a:rPr lang="en-US" sz="1250" dirty="0">
-                <a:solidFill>
-                  <a:srgbClr val="9AA1B0"/>
-                </a:solidFill>
-                <a:latin typeface="Consolas" pitchFamily="34" charset="0"/>
-                <a:ea typeface="Consolas" pitchFamily="34" charset="-122"/>
-                <a:cs typeface="Consolas" pitchFamily="34" charset="-120"/>
-              </a:rPr>
-              <a:t>what do you want to break first?</a:t>
-            </a:r>
-            <a:endParaRPr lang="en-US" sz="1250" dirty="0"/>
+              <a:t>Find yours. Your name is on it.</a:t>
+            </a:r>
+            <a:endParaRPr lang="en-US" sz="1900" dirty="0"/>
           </a:p>
         </p:txBody>
       </p:sp>
@@ -18063,20 +18601,20 @@
         </p:nvSpPr>
         <p:spPr>
           <a:xfrm>
-            <a:off x="7360920" y="1691640"/>
-            <a:ext cx="1874520" cy="3154680"/>
+            <a:off x="783184" y="3429000"/>
+            <a:ext cx="1920240" cy="1371600"/>
           </a:xfrm>
           <a:prstGeom prst="roundRect">
             <a:avLst>
-              <a:gd name="adj" fmla="val 4878"/>
+              <a:gd name="adj" fmla="val 8000"/>
             </a:avLst>
           </a:prstGeom>
           <a:solidFill>
             <a:srgbClr val="F5F7FA"/>
           </a:solidFill>
-          <a:ln w="12700">
+          <a:ln w="17780">
             <a:solidFill>
-              <a:srgbClr val="E1E5EC"/>
+              <a:srgbClr val="4F46E5"/>
             </a:solidFill>
             <a:prstDash val="solid"/>
           </a:ln>
@@ -18089,91 +18627,16 @@
           </a:effectLst>
         </p:spPr>
       </p:sp>
-      <p:pic>
-        <p:nvPicPr>
-          <p:cNvPr id="7" name="Image 0" descr="preencoded.png">    </p:cNvPr>
-          <p:cNvPicPr>
-            <a:picLocks noChangeAspect="1"/>
-          </p:cNvPicPr>
-          <p:nvPr/>
-        </p:nvPicPr>
-        <p:blipFill>
-          <a:blip r:embed="rId1"/>
-          <a:stretch>
-            <a:fillRect/>
-          </a:stretch>
-        </p:blipFill>
-        <p:spPr>
-          <a:xfrm>
-            <a:off x="7612380" y="1965960"/>
-            <a:ext cx="1371600" cy="1371600"/>
-          </a:xfrm>
-          <a:prstGeom prst="rect">
-            <a:avLst/>
-          </a:prstGeom>
-        </p:spPr>
-      </p:pic>
-      <p:sp>
-        <p:nvSpPr>
-          <p:cNvPr id="8" name="Shape 5"/>
-          <p:cNvSpPr/>
-          <p:nvPr/>
-        </p:nvSpPr>
-        <p:spPr>
-          <a:xfrm>
-            <a:off x="8087868" y="3566160"/>
-            <a:ext cx="420624" cy="420624"/>
-          </a:xfrm>
-          <a:prstGeom prst="ellipse">
-            <a:avLst/>
-          </a:prstGeom>
-          <a:solidFill>
-            <a:srgbClr val="4F46E5"/>
-          </a:solidFill>
-          <a:ln/>
-          <a:effectLst>
-            <a:outerShdw sx="100000" sy="100000" kx="0" ky="0" algn="bl" rotWithShape="0" blurRad="139700" dist="38100" dir="5400000">
-              <a:srgbClr val="9AA6BC">
-                <a:alpha val="28000"/>
-              </a:srgbClr>
-            </a:outerShdw>
-          </a:effectLst>
-        </p:spPr>
-      </p:sp>
-      <p:pic>
-        <p:nvPicPr>
-          <p:cNvPr id="9" name="Image 1" descr="preencoded.png">    </p:cNvPr>
-          <p:cNvPicPr>
-            <a:picLocks noChangeAspect="1"/>
-          </p:cNvPicPr>
-          <p:nvPr/>
-        </p:nvPicPr>
-        <p:blipFill>
-          <a:blip r:embed="rId2"/>
-          <a:stretch>
-            <a:fillRect/>
-          </a:stretch>
-        </p:blipFill>
-        <p:spPr>
-          <a:xfrm>
-            <a:off x="8188818" y="3667110"/>
-            <a:ext cx="218724" cy="218724"/>
-          </a:xfrm>
-          <a:prstGeom prst="rect">
-            <a:avLst/>
-          </a:prstGeom>
-        </p:spPr>
-      </p:pic>
-      <p:sp>
-        <p:nvSpPr>
-          <p:cNvPr id="10" name="Text 6"/>
-          <p:cNvSpPr/>
-          <p:nvPr/>
-        </p:nvSpPr>
-        <p:spPr>
-          <a:xfrm>
-            <a:off x="7360920" y="4069080"/>
-            <a:ext cx="1874520" cy="320040"/>
+      <p:sp>
+        <p:nvSpPr>
+          <p:cNvPr id="7" name="Text 5"/>
+          <p:cNvSpPr/>
+          <p:nvPr/>
+        </p:nvSpPr>
+        <p:spPr>
+          <a:xfrm>
+            <a:off x="783184" y="3429000"/>
+            <a:ext cx="1920240" cy="1371600"/>
           </a:xfrm>
           <a:prstGeom prst="rect">
             <a:avLst/>
@@ -18197,7 +18660,7 @@
                 <a:ea typeface="Arial" pitchFamily="34" charset="-122"/>
                 <a:cs typeface="Arial" pitchFamily="34" charset="-120"/>
               </a:rPr>
-              <a:t>LinkedIn</a:t>
+              <a:t>a name</a:t>
             </a:r>
             <a:endParaRPr lang="en-US" sz="1500" dirty="0"/>
           </a:p>
@@ -18205,65 +18668,26 @@
       </p:sp>
       <p:sp>
         <p:nvSpPr>
-          <p:cNvPr id="11" name="Text 7"/>
-          <p:cNvSpPr/>
-          <p:nvPr/>
-        </p:nvSpPr>
-        <p:spPr>
-          <a:xfrm>
-            <a:off x="7360920" y="4379976"/>
-            <a:ext cx="1874520" cy="274320"/>
-          </a:xfrm>
-          <a:prstGeom prst="rect">
-            <a:avLst/>
-          </a:prstGeom>
-          <a:noFill/>
-          <a:ln/>
-        </p:spPr>
-        <p:txBody>
-          <a:bodyPr wrap="square" rtlCol="0" anchor="ctr"/>
-          <a:lstStyle/>
-          <a:p>
-            <a:pPr algn="ctr" indent="0" marL="0">
-              <a:buNone/>
-            </a:pPr>
-            <a:r>
-              <a:rPr lang="en-US" sz="1150" dirty="0">
-                <a:solidFill>
-                  <a:srgbClr val="666C7A"/>
-                </a:solidFill>
-                <a:latin typeface="Calibri" pitchFamily="34" charset="0"/>
-                <a:ea typeface="Calibri" pitchFamily="34" charset="-122"/>
-                <a:cs typeface="Calibri" pitchFamily="34" charset="-120"/>
-              </a:rPr>
-              <a:t>Nevin Tom</a:t>
-            </a:r>
-            <a:endParaRPr lang="en-US" sz="1150" dirty="0"/>
-          </a:p>
-        </p:txBody>
-      </p:sp>
-      <p:sp>
-        <p:nvSpPr>
-          <p:cNvPr id="12" name="Shape 8"/>
-          <p:cNvSpPr/>
-          <p:nvPr/>
-        </p:nvSpPr>
-        <p:spPr>
-          <a:xfrm>
-            <a:off x="9555480" y="1691640"/>
-            <a:ext cx="1874520" cy="3154680"/>
+          <p:cNvPr id="8" name="Shape 6"/>
+          <p:cNvSpPr/>
+          <p:nvPr/>
+        </p:nvSpPr>
+        <p:spPr>
+          <a:xfrm>
+            <a:off x="2959456" y="3429000"/>
+            <a:ext cx="1920240" cy="1371600"/>
           </a:xfrm>
           <a:prstGeom prst="roundRect">
             <a:avLst>
-              <a:gd name="adj" fmla="val 4878"/>
+              <a:gd name="adj" fmla="val 8000"/>
             </a:avLst>
           </a:prstGeom>
           <a:solidFill>
             <a:srgbClr val="F5F7FA"/>
           </a:solidFill>
-          <a:ln w="12700">
+          <a:ln w="17780">
             <a:solidFill>
-              <a:srgbClr val="E1E5EC"/>
+              <a:srgbClr val="7C3AED"/>
             </a:solidFill>
             <a:prstDash val="solid"/>
           </a:ln>
@@ -18276,48 +18700,70 @@
           </a:effectLst>
         </p:spPr>
       </p:sp>
-      <p:pic>
-        <p:nvPicPr>
-          <p:cNvPr id="13" name="Image 2" descr="preencoded.png">    </p:cNvPr>
-          <p:cNvPicPr>
-            <a:picLocks noChangeAspect="1"/>
-          </p:cNvPicPr>
-          <p:nvPr/>
-        </p:nvPicPr>
-        <p:blipFill>
-          <a:blip r:embed="rId3"/>
-          <a:stretch>
-            <a:fillRect/>
-          </a:stretch>
-        </p:blipFill>
-        <p:spPr>
-          <a:xfrm>
-            <a:off x="9806940" y="1965960"/>
-            <a:ext cx="1371600" cy="1371600"/>
-          </a:xfrm>
-          <a:prstGeom prst="rect">
-            <a:avLst/>
-          </a:prstGeom>
-        </p:spPr>
-      </p:pic>
-      <p:sp>
-        <p:nvSpPr>
-          <p:cNvPr id="14" name="Shape 9"/>
-          <p:cNvSpPr/>
-          <p:nvPr/>
-        </p:nvSpPr>
-        <p:spPr>
-          <a:xfrm>
-            <a:off x="10282428" y="3566160"/>
-            <a:ext cx="420624" cy="420624"/>
-          </a:xfrm>
-          <a:prstGeom prst="ellipse">
-            <a:avLst/>
+      <p:sp>
+        <p:nvSpPr>
+          <p:cNvPr id="9" name="Text 7"/>
+          <p:cNvSpPr/>
+          <p:nvPr/>
+        </p:nvSpPr>
+        <p:spPr>
+          <a:xfrm>
+            <a:off x="2959456" y="3429000"/>
+            <a:ext cx="1920240" cy="1371600"/>
+          </a:xfrm>
+          <a:prstGeom prst="rect">
+            <a:avLst/>
+          </a:prstGeom>
+          <a:noFill/>
+          <a:ln/>
+        </p:spPr>
+        <p:txBody>
+          <a:bodyPr wrap="square" rtlCol="0" anchor="ctr"/>
+          <a:lstStyle/>
+          <a:p>
+            <a:pPr algn="ctr" indent="0" marL="0">
+              <a:buNone/>
+            </a:pPr>
+            <a:r>
+              <a:rPr lang="en-US" sz="1500" b="1" dirty="0">
+                <a:solidFill>
+                  <a:srgbClr val="16181D"/>
+                </a:solidFill>
+                <a:latin typeface="Arial" pitchFamily="34" charset="0"/>
+                <a:ea typeface="Arial" pitchFamily="34" charset="-122"/>
+                <a:cs typeface="Arial" pitchFamily="34" charset="-120"/>
+              </a:rPr>
+              <a:t>artwork</a:t>
+            </a:r>
+            <a:endParaRPr lang="en-US" sz="1500" dirty="0"/>
+          </a:p>
+        </p:txBody>
+      </p:sp>
+      <p:sp>
+        <p:nvSpPr>
+          <p:cNvPr id="10" name="Shape 8"/>
+          <p:cNvSpPr/>
+          <p:nvPr/>
+        </p:nvSpPr>
+        <p:spPr>
+          <a:xfrm>
+            <a:off x="5135728" y="3429000"/>
+            <a:ext cx="1920240" cy="1371600"/>
+          </a:xfrm>
+          <a:prstGeom prst="roundRect">
+            <a:avLst>
+              <a:gd name="adj" fmla="val 8000"/>
+            </a:avLst>
           </a:prstGeom>
           <a:solidFill>
-            <a:srgbClr val="16181D"/>
+            <a:srgbClr val="F5F7FA"/>
           </a:solidFill>
-          <a:ln/>
+          <a:ln w="17780">
+            <a:solidFill>
+              <a:srgbClr val="0F9E8E"/>
+            </a:solidFill>
+            <a:prstDash val="solid"/>
+          </a:ln>
           <a:effectLst>
             <a:outerShdw sx="100000" sy="100000" kx="0" ky="0" algn="bl" rotWithShape="0" blurRad="139700" dist="38100" dir="5400000">
               <a:srgbClr val="9AA6BC">
@@ -18327,40 +18773,16 @@
           </a:effectLst>
         </p:spPr>
       </p:sp>
-      <p:pic>
-        <p:nvPicPr>
-          <p:cNvPr id="15" name="Image 3" descr="preencoded.png">    </p:cNvPr>
-          <p:cNvPicPr>
-            <a:picLocks noChangeAspect="1"/>
-          </p:cNvPicPr>
-          <p:nvPr/>
-        </p:nvPicPr>
-        <p:blipFill>
-          <a:blip r:embed="rId4"/>
-          <a:stretch>
-            <a:fillRect/>
-          </a:stretch>
-        </p:blipFill>
-        <p:spPr>
-          <a:xfrm>
-            <a:off x="10383378" y="3667110"/>
-            <a:ext cx="218724" cy="218724"/>
-          </a:xfrm>
-          <a:prstGeom prst="rect">
-            <a:avLst/>
-          </a:prstGeom>
-        </p:spPr>
-      </p:pic>
-      <p:sp>
-        <p:nvSpPr>
-          <p:cNvPr id="16" name="Text 10"/>
-          <p:cNvSpPr/>
-          <p:nvPr/>
-        </p:nvSpPr>
-        <p:spPr>
-          <a:xfrm>
-            <a:off x="9555480" y="4069080"/>
-            <a:ext cx="1874520" cy="320040"/>
+      <p:sp>
+        <p:nvSpPr>
+          <p:cNvPr id="11" name="Text 9"/>
+          <p:cNvSpPr/>
+          <p:nvPr/>
+        </p:nvSpPr>
+        <p:spPr>
+          <a:xfrm>
+            <a:off x="5135728" y="3429000"/>
+            <a:ext cx="1920240" cy="1371600"/>
           </a:xfrm>
           <a:prstGeom prst="rect">
             <a:avLst/>
@@ -18384,7 +18806,7 @@
                 <a:ea typeface="Arial" pitchFamily="34" charset="-122"/>
                 <a:cs typeface="Arial" pitchFamily="34" charset="-120"/>
               </a:rPr>
-              <a:t>GitHub</a:t>
+              <a:t>copy</a:t>
             </a:r>
             <a:endParaRPr lang="en-US" sz="1500" dirty="0"/>
           </a:p>
@@ -18392,14 +18814,48 @@
       </p:sp>
       <p:sp>
         <p:nvSpPr>
-          <p:cNvPr id="17" name="Text 11"/>
-          <p:cNvSpPr/>
-          <p:nvPr/>
-        </p:nvSpPr>
-        <p:spPr>
-          <a:xfrm>
-            <a:off x="9555480" y="4379976"/>
-            <a:ext cx="1874520" cy="274320"/>
+          <p:cNvPr id="12" name="Shape 10"/>
+          <p:cNvSpPr/>
+          <p:nvPr/>
+        </p:nvSpPr>
+        <p:spPr>
+          <a:xfrm>
+            <a:off x="7312000" y="3429000"/>
+            <a:ext cx="1920240" cy="1371600"/>
+          </a:xfrm>
+          <a:prstGeom prst="roundRect">
+            <a:avLst>
+              <a:gd name="adj" fmla="val 8000"/>
+            </a:avLst>
+          </a:prstGeom>
+          <a:solidFill>
+            <a:srgbClr val="F5F7FA"/>
+          </a:solidFill>
+          <a:ln w="17780">
+            <a:solidFill>
+              <a:srgbClr val="D97706"/>
+            </a:solidFill>
+            <a:prstDash val="solid"/>
+          </a:ln>
+          <a:effectLst>
+            <a:outerShdw sx="100000" sy="100000" kx="0" ky="0" algn="bl" rotWithShape="0" blurRad="139700" dist="38100" dir="5400000">
+              <a:srgbClr val="9AA6BC">
+                <a:alpha val="28000"/>
+              </a:srgbClr>
+            </a:outerShdw>
+          </a:effectLst>
+        </p:spPr>
+      </p:sp>
+      <p:sp>
+        <p:nvSpPr>
+          <p:cNvPr id="13" name="Text 11"/>
+          <p:cNvSpPr/>
+          <p:nvPr/>
+        </p:nvSpPr>
+        <p:spPr>
+          <a:xfrm>
+            <a:off x="7312000" y="3429000"/>
+            <a:ext cx="1920240" cy="1371600"/>
           </a:xfrm>
           <a:prstGeom prst="rect">
             <a:avLst/>
@@ -18415,17 +18871,168 @@
               <a:buNone/>
             </a:pPr>
             <a:r>
-              <a:rPr lang="en-US" sz="1150" dirty="0">
-                <a:solidFill>
-                  <a:srgbClr val="666C7A"/>
-                </a:solidFill>
-                <a:latin typeface="Calibri" pitchFamily="34" charset="0"/>
-                <a:ea typeface="Calibri" pitchFamily="34" charset="-122"/>
-                <a:cs typeface="Calibri" pitchFamily="34" charset="-120"/>
-              </a:rPr>
-              <a:t>the demo repo</a:t>
-            </a:r>
-            <a:endParaRPr lang="en-US" sz="1150" dirty="0"/>
+              <a:rPr lang="en-US" sz="1500" b="1" dirty="0">
+                <a:solidFill>
+                  <a:srgbClr val="16181D"/>
+                </a:solidFill>
+                <a:latin typeface="Arial" pitchFamily="34" charset="0"/>
+                <a:ea typeface="Arial" pitchFamily="34" charset="-122"/>
+                <a:cs typeface="Arial" pitchFamily="34" charset="-120"/>
+              </a:rPr>
+              <a:t>a palette</a:t>
+            </a:r>
+            <a:endParaRPr lang="en-US" sz="1500" dirty="0"/>
+          </a:p>
+        </p:txBody>
+      </p:sp>
+      <p:sp>
+        <p:nvSpPr>
+          <p:cNvPr id="14" name="Shape 12"/>
+          <p:cNvSpPr/>
+          <p:nvPr/>
+        </p:nvSpPr>
+        <p:spPr>
+          <a:xfrm>
+            <a:off x="9488272" y="3429000"/>
+            <a:ext cx="1920240" cy="1371600"/>
+          </a:xfrm>
+          <a:prstGeom prst="roundRect">
+            <a:avLst>
+              <a:gd name="adj" fmla="val 8000"/>
+            </a:avLst>
+          </a:prstGeom>
+          <a:solidFill>
+            <a:srgbClr val="F5F7FA"/>
+          </a:solidFill>
+          <a:ln w="17780">
+            <a:solidFill>
+              <a:srgbClr val="E11D48"/>
+            </a:solidFill>
+            <a:prstDash val="solid"/>
+          </a:ln>
+          <a:effectLst>
+            <a:outerShdw sx="100000" sy="100000" kx="0" ky="0" algn="bl" rotWithShape="0" blurRad="139700" dist="38100" dir="5400000">
+              <a:srgbClr val="9AA6BC">
+                <a:alpha val="28000"/>
+              </a:srgbClr>
+            </a:outerShdw>
+          </a:effectLst>
+        </p:spPr>
+      </p:sp>
+      <p:sp>
+        <p:nvSpPr>
+          <p:cNvPr id="15" name="Text 13"/>
+          <p:cNvSpPr/>
+          <p:nvPr/>
+        </p:nvSpPr>
+        <p:spPr>
+          <a:xfrm>
+            <a:off x="9488272" y="3429000"/>
+            <a:ext cx="1920240" cy="1371600"/>
+          </a:xfrm>
+          <a:prstGeom prst="rect">
+            <a:avLst/>
+          </a:prstGeom>
+          <a:noFill/>
+          <a:ln/>
+        </p:spPr>
+        <p:txBody>
+          <a:bodyPr wrap="square" rtlCol="0" anchor="ctr"/>
+          <a:lstStyle/>
+          <a:p>
+            <a:pPr algn="ctr" indent="0" marL="0">
+              <a:buNone/>
+            </a:pPr>
+            <a:r>
+              <a:rPr lang="en-US" sz="1500" b="1" dirty="0">
+                <a:solidFill>
+                  <a:srgbClr val="16181D"/>
+                </a:solidFill>
+                <a:latin typeface="Arial" pitchFamily="34" charset="0"/>
+                <a:ea typeface="Arial" pitchFamily="34" charset="-122"/>
+                <a:cs typeface="Arial" pitchFamily="34" charset="-120"/>
+              </a:rPr>
+              <a:t>a critique</a:t>
+            </a:r>
+            <a:endParaRPr lang="en-US" sz="1500" dirty="0"/>
+          </a:p>
+        </p:txBody>
+      </p:sp>
+      <p:sp>
+        <p:nvSpPr>
+          <p:cNvPr id="16" name="Text 14"/>
+          <p:cNvSpPr/>
+          <p:nvPr/>
+        </p:nvSpPr>
+        <p:spPr>
+          <a:xfrm>
+            <a:off x="1828800" y="5120640"/>
+            <a:ext cx="8534095" cy="457200"/>
+          </a:xfrm>
+          <a:prstGeom prst="rect">
+            <a:avLst/>
+          </a:prstGeom>
+          <a:noFill/>
+          <a:ln/>
+        </p:spPr>
+        <p:txBody>
+          <a:bodyPr wrap="square" rtlCol="0" anchor="ctr"/>
+          <a:lstStyle/>
+          <a:p>
+            <a:pPr algn="ctr" indent="0" marL="0">
+              <a:buNone/>
+            </a:pPr>
+            <a:r>
+              <a:rPr lang="en-US" sz="1200" dirty="0">
+                <a:solidFill>
+                  <a:srgbClr val="9AA1B0"/>
+                </a:solidFill>
+                <a:latin typeface="Consolas" pitchFamily="34" charset="0"/>
+                <a:ea typeface="Consolas" pitchFamily="34" charset="-122"/>
+                <a:cs typeface="Consolas" pitchFamily="34" charset="-120"/>
+              </a:rPr>
+              <a:t>every page invented from scratch, by a different run of the same seven agents</a:t>
+            </a:r>
+            <a:endParaRPr lang="en-US" sz="1200" dirty="0"/>
+          </a:p>
+        </p:txBody>
+      </p:sp>
+      <p:sp>
+        <p:nvSpPr>
+          <p:cNvPr id="17" name="Text 15"/>
+          <p:cNvSpPr/>
+          <p:nvPr/>
+        </p:nvSpPr>
+        <p:spPr>
+          <a:xfrm>
+            <a:off x="1828800" y="5852160"/>
+            <a:ext cx="8534095" cy="457200"/>
+          </a:xfrm>
+          <a:prstGeom prst="rect">
+            <a:avLst/>
+          </a:prstGeom>
+          <a:noFill/>
+          <a:ln/>
+        </p:spPr>
+        <p:txBody>
+          <a:bodyPr wrap="square" rtlCol="0" anchor="ctr"/>
+          <a:lstStyle/>
+          <a:p>
+            <a:pPr algn="ctr" indent="0" marL="0">
+              <a:buNone/>
+            </a:pPr>
+            <a:r>
+              <a:rPr lang="en-US" sz="1300" dirty="0">
+                <a:solidFill>
+                  <a:srgbClr val="4F46E5"/>
+                </a:solidFill>
+                <a:latin typeface="Consolas" pitchFamily="34" charset="0"/>
+                <a:ea typeface="Consolas" pitchFamily="34" charset="-122"/>
+                <a:cs typeface="Consolas" pitchFamily="34" charset="-120"/>
+              </a:rPr>
+              <a:t>open  /gallery  on the projector</a:t>
+            </a:r>
+            <a:endParaRPr lang="en-US" sz="1300" dirty="0"/>
           </a:p>
         </p:txBody>
       </p:sp>
@@ -19105,6 +19712,700 @@
               <a:t>the crew is waiting</a:t>
             </a:r>
             <a:endParaRPr lang="en-US" sz="1200" dirty="0"/>
+          </a:p>
+        </p:txBody>
+      </p:sp>
+    </p:spTree>
+  </p:cSld>
+  <p:clrMapOvr>
+    <a:masterClrMapping/>
+  </p:clrMapOvr>
+</p:sld>
+</file>
+
+<file path=ppt/slides/slide30.xml><?xml version="1.0" encoding="utf-8"?>
+<p:sld xmlns:a="http://schemas.openxmlformats.org/drawingml/2006/main" xmlns:r="http://schemas.openxmlformats.org/officeDocument/2006/relationships" xmlns:p="http://schemas.openxmlformats.org/presentationml/2006/main">
+  <p:cSld name="Slide 30">
+    <p:bg>
+      <p:bgPr>
+        <a:solidFill>
+          <a:srgbClr val="FFFFFF"/>
+        </a:solidFill>
+      </p:bgPr>
+    </p:bg>
+    <p:spTree>
+      <p:nvGrpSpPr>
+        <p:cNvPr id="1" name=""/>
+        <p:cNvGrpSpPr/>
+        <p:nvPr/>
+      </p:nvGrpSpPr>
+      <p:grpSpPr>
+        <a:xfrm>
+          <a:off x="0" y="0"/>
+          <a:ext cx="0" cy="0"/>
+          <a:chOff x="0" y="0"/>
+          <a:chExt cx="0" cy="0"/>
+        </a:xfrm>
+      </p:grpSpPr>
+      <p:sp>
+        <p:nvSpPr>
+          <p:cNvPr id="2" name="Text 0"/>
+          <p:cNvSpPr/>
+          <p:nvPr/>
+        </p:nvSpPr>
+        <p:spPr>
+          <a:xfrm>
+            <a:off x="841248" y="640080"/>
+            <a:ext cx="9144000" cy="292608"/>
+          </a:xfrm>
+          <a:prstGeom prst="rect">
+            <a:avLst/>
+          </a:prstGeom>
+          <a:noFill/>
+          <a:ln/>
+        </p:spPr>
+        <p:txBody>
+          <a:bodyPr wrap="square" rtlCol="0" anchor="ctr"/>
+          <a:lstStyle/>
+          <a:p>
+            <a:pPr indent="0" marL="0">
+              <a:buNone/>
+            </a:pPr>
+            <a:r>
+              <a:rPr lang="en-US" sz="1100" b="1" spc="300" kern="0" dirty="0">
+                <a:solidFill>
+                  <a:srgbClr val="4F46E5"/>
+                </a:solidFill>
+                <a:latin typeface="Arial" pitchFamily="34" charset="0"/>
+                <a:ea typeface="Arial" pitchFamily="34" charset="-122"/>
+                <a:cs typeface="Arial" pitchFamily="34" charset="-120"/>
+              </a:rPr>
+              <a:t>THE TAKEAWAY</a:t>
+            </a:r>
+            <a:endParaRPr lang="en-US" sz="1100" dirty="0"/>
+          </a:p>
+        </p:txBody>
+      </p:sp>
+      <p:sp>
+        <p:nvSpPr>
+          <p:cNvPr id="3" name="Text 1"/>
+          <p:cNvSpPr/>
+          <p:nvPr/>
+        </p:nvSpPr>
+        <p:spPr>
+          <a:xfrm>
+            <a:off x="841248" y="1325880"/>
+            <a:ext cx="5943600" cy="2377440"/>
+          </a:xfrm>
+          <a:prstGeom prst="rect">
+            <a:avLst/>
+          </a:prstGeom>
+          <a:noFill/>
+          <a:ln/>
+        </p:spPr>
+        <p:txBody>
+          <a:bodyPr wrap="square" rtlCol="0" anchor="ctr"/>
+          <a:lstStyle/>
+          <a:p>
+            <a:pPr indent="0" marL="0">
+              <a:lnSpc>
+                <a:spcPts val="4400"/>
+              </a:lnSpc>
+              <a:buNone/>
+            </a:pPr>
+            <a:r>
+              <a:rPr lang="en-US" sz="3600" b="1" dirty="0">
+                <a:solidFill>
+                  <a:srgbClr val="16181D"/>
+                </a:solidFill>
+                <a:latin typeface="Arial" pitchFamily="34" charset="0"/>
+                <a:ea typeface="Arial" pitchFamily="34" charset="-122"/>
+                <a:cs typeface="Arial" pitchFamily="34" charset="-120"/>
+              </a:rPr>
+              <a:t>Your codebase</a:t>
+            </a:r>
+            <a:endParaRPr lang="en-US" sz="3600" dirty="0"/>
+          </a:p>
+          <a:p>
+            <a:pPr indent="0" marL="0">
+              <a:lnSpc>
+                <a:spcPts val="4400"/>
+              </a:lnSpc>
+              <a:buNone/>
+            </a:pPr>
+            <a:r>
+              <a:rPr lang="en-US" sz="3600" b="1" dirty="0">
+                <a:solidFill>
+                  <a:srgbClr val="16181D"/>
+                </a:solidFill>
+                <a:latin typeface="Arial" pitchFamily="34" charset="0"/>
+                <a:ea typeface="Arial" pitchFamily="34" charset="-122"/>
+                <a:cs typeface="Arial" pitchFamily="34" charset="-120"/>
+              </a:rPr>
+              <a:t>becomes a </a:t>
+            </a:r>
+            <a:endParaRPr lang="en-US" sz="3600" dirty="0"/>
+          </a:p>
+          <a:p>
+            <a:pPr indent="0" marL="0">
+              <a:lnSpc>
+                <a:spcPts val="4400"/>
+              </a:lnSpc>
+              <a:buNone/>
+            </a:pPr>
+            <a:r>
+              <a:rPr lang="en-US" sz="3600" b="1" dirty="0">
+                <a:solidFill>
+                  <a:srgbClr val="4F46E5"/>
+                </a:solidFill>
+                <a:latin typeface="Arial" pitchFamily="34" charset="0"/>
+                <a:ea typeface="Arial" pitchFamily="34" charset="-122"/>
+                <a:cs typeface="Arial" pitchFamily="34" charset="-120"/>
+              </a:rPr>
+              <a:t>team</a:t>
+            </a:r>
+            <a:endParaRPr lang="en-US" sz="3600" dirty="0"/>
+          </a:p>
+          <a:p>
+            <a:pPr indent="0" marL="0">
+              <a:lnSpc>
+                <a:spcPts val="4400"/>
+              </a:lnSpc>
+              <a:buNone/>
+            </a:pPr>
+            <a:r>
+              <a:rPr lang="en-US" sz="3600" b="1" dirty="0">
+                <a:solidFill>
+                  <a:srgbClr val="4F46E5"/>
+                </a:solidFill>
+                <a:latin typeface="Arial" pitchFamily="34" charset="0"/>
+                <a:ea typeface="Arial" pitchFamily="34" charset="-122"/>
+                <a:cs typeface="Arial" pitchFamily="34" charset="-120"/>
+              </a:rPr>
+              <a:t>you direct</a:t>
+            </a:r>
+            <a:endParaRPr lang="en-US" sz="3600" dirty="0"/>
+          </a:p>
+          <a:p>
+            <a:pPr indent="0" marL="0">
+              <a:lnSpc>
+                <a:spcPts val="4400"/>
+              </a:lnSpc>
+              <a:buNone/>
+            </a:pPr>
+            <a:r>
+              <a:rPr lang="en-US" sz="3600" b="1" dirty="0">
+                <a:solidFill>
+                  <a:srgbClr val="16181D"/>
+                </a:solidFill>
+                <a:latin typeface="Arial" pitchFamily="34" charset="0"/>
+                <a:ea typeface="Arial" pitchFamily="34" charset="-122"/>
+                <a:cs typeface="Arial" pitchFamily="34" charset="-120"/>
+              </a:rPr>
+              <a:t> in English.</a:t>
+            </a:r>
+            <a:endParaRPr lang="en-US" sz="3600" dirty="0"/>
+          </a:p>
+        </p:txBody>
+      </p:sp>
+      <p:sp>
+        <p:nvSpPr>
+          <p:cNvPr id="4" name="Text 2"/>
+          <p:cNvSpPr/>
+          <p:nvPr/>
+        </p:nvSpPr>
+        <p:spPr>
+          <a:xfrm>
+            <a:off x="841248" y="4160520"/>
+            <a:ext cx="5760720" cy="1280160"/>
+          </a:xfrm>
+          <a:prstGeom prst="rect">
+            <a:avLst/>
+          </a:prstGeom>
+          <a:noFill/>
+          <a:ln/>
+        </p:spPr>
+        <p:txBody>
+          <a:bodyPr wrap="square" rtlCol="0" anchor="ctr"/>
+          <a:lstStyle/>
+          <a:p>
+            <a:pPr indent="0" marL="0">
+              <a:lnSpc>
+                <a:spcPts val="2500"/>
+              </a:lnSpc>
+              <a:buNone/>
+            </a:pPr>
+            <a:r>
+              <a:rPr lang="en-US" sz="1600" dirty="0">
+                <a:solidFill>
+                  <a:srgbClr val="666C7A"/>
+                </a:solidFill>
+                <a:latin typeface="Calibri" pitchFamily="34" charset="0"/>
+                <a:ea typeface="Calibri" pitchFamily="34" charset="-122"/>
+                <a:cs typeface="Calibri" pitchFamily="34" charset="-120"/>
+              </a:rPr>
+              <a:t>One prompt. Many workers. In Java, on your own machine. The skill ahead is knowing what to ask, and how to constrain the answer.</a:t>
+            </a:r>
+            <a:endParaRPr lang="en-US" sz="1600" dirty="0"/>
+          </a:p>
+        </p:txBody>
+      </p:sp>
+      <p:sp>
+        <p:nvSpPr>
+          <p:cNvPr id="5" name="Text 3"/>
+          <p:cNvSpPr/>
+          <p:nvPr/>
+        </p:nvSpPr>
+        <p:spPr>
+          <a:xfrm>
+            <a:off x="841248" y="5669280"/>
+            <a:ext cx="5486400" cy="822960"/>
+          </a:xfrm>
+          <a:prstGeom prst="rect">
+            <a:avLst/>
+          </a:prstGeom>
+          <a:noFill/>
+          <a:ln/>
+        </p:spPr>
+        <p:txBody>
+          <a:bodyPr wrap="square" rtlCol="0" anchor="ctr"/>
+          <a:lstStyle/>
+          <a:p>
+            <a:pPr indent="0" marL="0">
+              <a:lnSpc>
+                <a:spcPts val="2200"/>
+              </a:lnSpc>
+              <a:buNone/>
+            </a:pPr>
+            <a:r>
+              <a:rPr lang="en-US" sz="1250" b="1" dirty="0">
+                <a:solidFill>
+                  <a:srgbClr val="16181D"/>
+                </a:solidFill>
+                <a:latin typeface="Consolas" pitchFamily="34" charset="0"/>
+                <a:ea typeface="Consolas" pitchFamily="34" charset="-122"/>
+                <a:cs typeface="Consolas" pitchFamily="34" charset="-120"/>
+              </a:rPr>
+              <a:t>Nevin Tom</a:t>
+            </a:r>
+            <a:pPr indent="0" marL="0">
+              <a:lnSpc>
+                <a:spcPts val="2200"/>
+              </a:lnSpc>
+              <a:buNone/>
+            </a:pPr>
+            <a:r>
+              <a:rPr lang="en-US" sz="1250" b="1" dirty="0">
+                <a:solidFill>
+                  <a:srgbClr val="4F46E5"/>
+                </a:solidFill>
+                <a:latin typeface="Consolas" pitchFamily="34" charset="0"/>
+                <a:ea typeface="Consolas" pitchFamily="34" charset="-122"/>
+                <a:cs typeface="Consolas" pitchFamily="34" charset="-120"/>
+              </a:rPr>
+              <a:t>   /   BBD</a:t>
+            </a:r>
+            <a:pPr indent="0" marL="0">
+              <a:lnSpc>
+                <a:spcPts val="2200"/>
+              </a:lnSpc>
+              <a:buNone/>
+            </a:pPr>
+            <a:endParaRPr lang="en-US" sz="1250" dirty="0"/>
+          </a:p>
+          <a:p>
+            <a:pPr indent="0" marL="0">
+              <a:lnSpc>
+                <a:spcPts val="2200"/>
+              </a:lnSpc>
+              <a:buNone/>
+            </a:pPr>
+            <a:r>
+              <a:rPr lang="en-US" sz="1250" dirty="0">
+                <a:solidFill>
+                  <a:srgbClr val="9AA1B0"/>
+                </a:solidFill>
+                <a:latin typeface="Consolas" pitchFamily="34" charset="0"/>
+                <a:ea typeface="Consolas" pitchFamily="34" charset="-122"/>
+                <a:cs typeface="Consolas" pitchFamily="34" charset="-120"/>
+              </a:rPr>
+              <a:t>what do you want to break first?</a:t>
+            </a:r>
+            <a:endParaRPr lang="en-US" sz="1250" dirty="0"/>
+          </a:p>
+        </p:txBody>
+      </p:sp>
+      <p:sp>
+        <p:nvSpPr>
+          <p:cNvPr id="6" name="Shape 4"/>
+          <p:cNvSpPr/>
+          <p:nvPr/>
+        </p:nvSpPr>
+        <p:spPr>
+          <a:xfrm>
+            <a:off x="7360920" y="1691640"/>
+            <a:ext cx="1874520" cy="3154680"/>
+          </a:xfrm>
+          <a:prstGeom prst="roundRect">
+            <a:avLst>
+              <a:gd name="adj" fmla="val 4878"/>
+            </a:avLst>
+          </a:prstGeom>
+          <a:solidFill>
+            <a:srgbClr val="F5F7FA"/>
+          </a:solidFill>
+          <a:ln w="12700">
+            <a:solidFill>
+              <a:srgbClr val="E1E5EC"/>
+            </a:solidFill>
+            <a:prstDash val="solid"/>
+          </a:ln>
+          <a:effectLst>
+            <a:outerShdw sx="100000" sy="100000" kx="0" ky="0" algn="bl" rotWithShape="0" blurRad="139700" dist="38100" dir="5400000">
+              <a:srgbClr val="9AA6BC">
+                <a:alpha val="28000"/>
+              </a:srgbClr>
+            </a:outerShdw>
+          </a:effectLst>
+        </p:spPr>
+      </p:sp>
+      <p:pic>
+        <p:nvPicPr>
+          <p:cNvPr id="7" name="Image 0" descr="preencoded.png">    </p:cNvPr>
+          <p:cNvPicPr>
+            <a:picLocks noChangeAspect="1"/>
+          </p:cNvPicPr>
+          <p:nvPr/>
+        </p:nvPicPr>
+        <p:blipFill>
+          <a:blip r:embed="rId1"/>
+          <a:stretch>
+            <a:fillRect/>
+          </a:stretch>
+        </p:blipFill>
+        <p:spPr>
+          <a:xfrm>
+            <a:off x="7612380" y="1965960"/>
+            <a:ext cx="1371600" cy="1371600"/>
+          </a:xfrm>
+          <a:prstGeom prst="rect">
+            <a:avLst/>
+          </a:prstGeom>
+        </p:spPr>
+      </p:pic>
+      <p:sp>
+        <p:nvSpPr>
+          <p:cNvPr id="8" name="Shape 5"/>
+          <p:cNvSpPr/>
+          <p:nvPr/>
+        </p:nvSpPr>
+        <p:spPr>
+          <a:xfrm>
+            <a:off x="8087868" y="3566160"/>
+            <a:ext cx="420624" cy="420624"/>
+          </a:xfrm>
+          <a:prstGeom prst="ellipse">
+            <a:avLst/>
+          </a:prstGeom>
+          <a:solidFill>
+            <a:srgbClr val="4F46E5"/>
+          </a:solidFill>
+          <a:ln/>
+          <a:effectLst>
+            <a:outerShdw sx="100000" sy="100000" kx="0" ky="0" algn="bl" rotWithShape="0" blurRad="139700" dist="38100" dir="5400000">
+              <a:srgbClr val="9AA6BC">
+                <a:alpha val="28000"/>
+              </a:srgbClr>
+            </a:outerShdw>
+          </a:effectLst>
+        </p:spPr>
+      </p:sp>
+      <p:pic>
+        <p:nvPicPr>
+          <p:cNvPr id="9" name="Image 1" descr="preencoded.png">    </p:cNvPr>
+          <p:cNvPicPr>
+            <a:picLocks noChangeAspect="1"/>
+          </p:cNvPicPr>
+          <p:nvPr/>
+        </p:nvPicPr>
+        <p:blipFill>
+          <a:blip r:embed="rId2"/>
+          <a:stretch>
+            <a:fillRect/>
+          </a:stretch>
+        </p:blipFill>
+        <p:spPr>
+          <a:xfrm>
+            <a:off x="8188818" y="3667110"/>
+            <a:ext cx="218724" cy="218724"/>
+          </a:xfrm>
+          <a:prstGeom prst="rect">
+            <a:avLst/>
+          </a:prstGeom>
+        </p:spPr>
+      </p:pic>
+      <p:sp>
+        <p:nvSpPr>
+          <p:cNvPr id="10" name="Text 6"/>
+          <p:cNvSpPr/>
+          <p:nvPr/>
+        </p:nvSpPr>
+        <p:spPr>
+          <a:xfrm>
+            <a:off x="7360920" y="4069080"/>
+            <a:ext cx="1874520" cy="320040"/>
+          </a:xfrm>
+          <a:prstGeom prst="rect">
+            <a:avLst/>
+          </a:prstGeom>
+          <a:noFill/>
+          <a:ln/>
+        </p:spPr>
+        <p:txBody>
+          <a:bodyPr wrap="square" rtlCol="0" anchor="ctr"/>
+          <a:lstStyle/>
+          <a:p>
+            <a:pPr algn="ctr" indent="0" marL="0">
+              <a:buNone/>
+            </a:pPr>
+            <a:r>
+              <a:rPr lang="en-US" sz="1500" b="1" dirty="0">
+                <a:solidFill>
+                  <a:srgbClr val="16181D"/>
+                </a:solidFill>
+                <a:latin typeface="Arial" pitchFamily="34" charset="0"/>
+                <a:ea typeface="Arial" pitchFamily="34" charset="-122"/>
+                <a:cs typeface="Arial" pitchFamily="34" charset="-120"/>
+              </a:rPr>
+              <a:t>LinkedIn</a:t>
+            </a:r>
+            <a:endParaRPr lang="en-US" sz="1500" dirty="0"/>
+          </a:p>
+        </p:txBody>
+      </p:sp>
+      <p:sp>
+        <p:nvSpPr>
+          <p:cNvPr id="11" name="Text 7"/>
+          <p:cNvSpPr/>
+          <p:nvPr/>
+        </p:nvSpPr>
+        <p:spPr>
+          <a:xfrm>
+            <a:off x="7360920" y="4379976"/>
+            <a:ext cx="1874520" cy="274320"/>
+          </a:xfrm>
+          <a:prstGeom prst="rect">
+            <a:avLst/>
+          </a:prstGeom>
+          <a:noFill/>
+          <a:ln/>
+        </p:spPr>
+        <p:txBody>
+          <a:bodyPr wrap="square" rtlCol="0" anchor="ctr"/>
+          <a:lstStyle/>
+          <a:p>
+            <a:pPr algn="ctr" indent="0" marL="0">
+              <a:buNone/>
+            </a:pPr>
+            <a:r>
+              <a:rPr lang="en-US" sz="1150" dirty="0">
+                <a:solidFill>
+                  <a:srgbClr val="666C7A"/>
+                </a:solidFill>
+                <a:latin typeface="Calibri" pitchFamily="34" charset="0"/>
+                <a:ea typeface="Calibri" pitchFamily="34" charset="-122"/>
+                <a:cs typeface="Calibri" pitchFamily="34" charset="-120"/>
+              </a:rPr>
+              <a:t>Nevin Tom</a:t>
+            </a:r>
+            <a:endParaRPr lang="en-US" sz="1150" dirty="0"/>
+          </a:p>
+        </p:txBody>
+      </p:sp>
+      <p:sp>
+        <p:nvSpPr>
+          <p:cNvPr id="12" name="Shape 8"/>
+          <p:cNvSpPr/>
+          <p:nvPr/>
+        </p:nvSpPr>
+        <p:spPr>
+          <a:xfrm>
+            <a:off x="9555480" y="1691640"/>
+            <a:ext cx="1874520" cy="3154680"/>
+          </a:xfrm>
+          <a:prstGeom prst="roundRect">
+            <a:avLst>
+              <a:gd name="adj" fmla="val 4878"/>
+            </a:avLst>
+          </a:prstGeom>
+          <a:solidFill>
+            <a:srgbClr val="F5F7FA"/>
+          </a:solidFill>
+          <a:ln w="12700">
+            <a:solidFill>
+              <a:srgbClr val="E1E5EC"/>
+            </a:solidFill>
+            <a:prstDash val="solid"/>
+          </a:ln>
+          <a:effectLst>
+            <a:outerShdw sx="100000" sy="100000" kx="0" ky="0" algn="bl" rotWithShape="0" blurRad="139700" dist="38100" dir="5400000">
+              <a:srgbClr val="9AA6BC">
+                <a:alpha val="28000"/>
+              </a:srgbClr>
+            </a:outerShdw>
+          </a:effectLst>
+        </p:spPr>
+      </p:sp>
+      <p:pic>
+        <p:nvPicPr>
+          <p:cNvPr id="13" name="Image 2" descr="preencoded.png">    </p:cNvPr>
+          <p:cNvPicPr>
+            <a:picLocks noChangeAspect="1"/>
+          </p:cNvPicPr>
+          <p:nvPr/>
+        </p:nvPicPr>
+        <p:blipFill>
+          <a:blip r:embed="rId3"/>
+          <a:stretch>
+            <a:fillRect/>
+          </a:stretch>
+        </p:blipFill>
+        <p:spPr>
+          <a:xfrm>
+            <a:off x="9806940" y="1965960"/>
+            <a:ext cx="1371600" cy="1371600"/>
+          </a:xfrm>
+          <a:prstGeom prst="rect">
+            <a:avLst/>
+          </a:prstGeom>
+        </p:spPr>
+      </p:pic>
+      <p:sp>
+        <p:nvSpPr>
+          <p:cNvPr id="14" name="Shape 9"/>
+          <p:cNvSpPr/>
+          <p:nvPr/>
+        </p:nvSpPr>
+        <p:spPr>
+          <a:xfrm>
+            <a:off x="10282428" y="3566160"/>
+            <a:ext cx="420624" cy="420624"/>
+          </a:xfrm>
+          <a:prstGeom prst="ellipse">
+            <a:avLst/>
+          </a:prstGeom>
+          <a:solidFill>
+            <a:srgbClr val="16181D"/>
+          </a:solidFill>
+          <a:ln/>
+          <a:effectLst>
+            <a:outerShdw sx="100000" sy="100000" kx="0" ky="0" algn="bl" rotWithShape="0" blurRad="139700" dist="38100" dir="5400000">
+              <a:srgbClr val="9AA6BC">
+                <a:alpha val="28000"/>
+              </a:srgbClr>
+            </a:outerShdw>
+          </a:effectLst>
+        </p:spPr>
+      </p:sp>
+      <p:pic>
+        <p:nvPicPr>
+          <p:cNvPr id="15" name="Image 3" descr="preencoded.png">    </p:cNvPr>
+          <p:cNvPicPr>
+            <a:picLocks noChangeAspect="1"/>
+          </p:cNvPicPr>
+          <p:nvPr/>
+        </p:nvPicPr>
+        <p:blipFill>
+          <a:blip r:embed="rId4"/>
+          <a:stretch>
+            <a:fillRect/>
+          </a:stretch>
+        </p:blipFill>
+        <p:spPr>
+          <a:xfrm>
+            <a:off x="10383378" y="3667110"/>
+            <a:ext cx="218724" cy="218724"/>
+          </a:xfrm>
+          <a:prstGeom prst="rect">
+            <a:avLst/>
+          </a:prstGeom>
+        </p:spPr>
+      </p:pic>
+      <p:sp>
+        <p:nvSpPr>
+          <p:cNvPr id="16" name="Text 10"/>
+          <p:cNvSpPr/>
+          <p:nvPr/>
+        </p:nvSpPr>
+        <p:spPr>
+          <a:xfrm>
+            <a:off x="9555480" y="4069080"/>
+            <a:ext cx="1874520" cy="320040"/>
+          </a:xfrm>
+          <a:prstGeom prst="rect">
+            <a:avLst/>
+          </a:prstGeom>
+          <a:noFill/>
+          <a:ln/>
+        </p:spPr>
+        <p:txBody>
+          <a:bodyPr wrap="square" rtlCol="0" anchor="ctr"/>
+          <a:lstStyle/>
+          <a:p>
+            <a:pPr algn="ctr" indent="0" marL="0">
+              <a:buNone/>
+            </a:pPr>
+            <a:r>
+              <a:rPr lang="en-US" sz="1500" b="1" dirty="0">
+                <a:solidFill>
+                  <a:srgbClr val="16181D"/>
+                </a:solidFill>
+                <a:latin typeface="Arial" pitchFamily="34" charset="0"/>
+                <a:ea typeface="Arial" pitchFamily="34" charset="-122"/>
+                <a:cs typeface="Arial" pitchFamily="34" charset="-120"/>
+              </a:rPr>
+              <a:t>GitHub</a:t>
+            </a:r>
+            <a:endParaRPr lang="en-US" sz="1500" dirty="0"/>
+          </a:p>
+        </p:txBody>
+      </p:sp>
+      <p:sp>
+        <p:nvSpPr>
+          <p:cNvPr id="17" name="Text 11"/>
+          <p:cNvSpPr/>
+          <p:nvPr/>
+        </p:nvSpPr>
+        <p:spPr>
+          <a:xfrm>
+            <a:off x="9555480" y="4379976"/>
+            <a:ext cx="1874520" cy="274320"/>
+          </a:xfrm>
+          <a:prstGeom prst="rect">
+            <a:avLst/>
+          </a:prstGeom>
+          <a:noFill/>
+          <a:ln/>
+        </p:spPr>
+        <p:txBody>
+          <a:bodyPr wrap="square" rtlCol="0" anchor="ctr"/>
+          <a:lstStyle/>
+          <a:p>
+            <a:pPr algn="ctr" indent="0" marL="0">
+              <a:buNone/>
+            </a:pPr>
+            <a:r>
+              <a:rPr lang="en-US" sz="1150" dirty="0">
+                <a:solidFill>
+                  <a:srgbClr val="666C7A"/>
+                </a:solidFill>
+                <a:latin typeface="Calibri" pitchFamily="34" charset="0"/>
+                <a:ea typeface="Calibri" pitchFamily="34" charset="-122"/>
+                <a:cs typeface="Calibri" pitchFamily="34" charset="-120"/>
+              </a:rPr>
+              <a:t>the demo repo</a:t>
+            </a:r>
+            <a:endParaRPr lang="en-US" sz="1150" dirty="0"/>
           </a:p>
         </p:txBody>
       </p:sp>

--- a/slides/One-Prompt-Many-Workers-Light.pptx
+++ b/slides/One-Prompt-Many-Workers-Light.pptx
@@ -35,9 +35,10 @@
     <p:sldId id="283" r:id="rId29"/>
     <p:sldId id="284" r:id="rId30"/>
     <p:sldId id="285" r:id="rId31"/>
+    <p:sldId id="286" r:id="rId32"/>
   </p:sldIdLst>
   <p:notesMasterIdLst>
-    <p:notesMasterId r:id="rId32"/>
+    <p:notesMasterId r:id="rId33"/>
   </p:notesMasterIdLst>
   <p:sldSz cx="12191695" cy="6858000"/>
   <p:notesSz cx="6858000" cy="12191695"/>
@@ -2203,7 +2204,7 @@
           <a:p>
             <a:r>
               <a:rPr lang="en-US" dirty="0"/>
-              <a:t>This is the slide that makes the talk worth an hour of a senior engineer's evening. Say it plainly: 'Everything you just watched, the parallel starts, the handoffs, the loops back, the fact that it did not die when I unplugged the model, the fact that nothing rude reached the screen, the fact that the queue kept building while I talked. None of that came from the model. That is a harness, and it is ordinary engineering. Threads, queues, schedulers, validation, a human approval step. The model is a component. The harness is the product.'</a:t>
+              <a:t>Use this to kill the 'yes but in the real world' objection before it is asked. Twelve hundred lines. Eight files. Seven agents that are one model with seven different system prompts. Nine endpoints. Eight dependencies. Zero cloud calls. You could read the whole thing on the train home, and the repo is in the QR at the end. Nothing here is a framework you have to buy into.</a:t>
             </a:r>
             <a:endParaRPr lang="en-US" dirty="0"/>
           </a:p>
@@ -2291,7 +2292,7 @@
           <a:p>
             <a:r>
               <a:rPr lang="en-US" dirty="0"/>
-              <a:t>This is the moment the whole talk has been building to. Say it slowly. 'Remember the code at the start? Every idea you sent went into a queue. And while I was up here talking about prompts and levers and loops, the crew never stopped. Seven agents. One laptop. No internet. Let me show you what they made.' Then switch the projector to the gallery.</a:t>
+              <a:t>This is the slide that makes the talk worth an hour of a senior engineer's evening. Say it plainly: 'Everything you just watched, the parallel starts, the handoffs, the loops back, the fact that it did not die when I unplugged the model, the fact that nothing rude reached the screen, the fact that the queue kept building while I talked. None of that came from the model. That is a harness, and it is ordinary engineering. Threads, queues, schedulers, validation, a human approval step. The model is a component. The harness is the product.'</a:t>
             </a:r>
             <a:endParaRPr lang="en-US" dirty="0"/>
           </a:p>
@@ -2379,7 +2380,7 @@
           <a:p>
             <a:r>
               <a:rPr lang="en-US" dirty="0"/>
-              <a:t>Put the gallery on the projector and just let the room look for a few seconds. Do not talk over it. Then: 'Every one of these has its own name, its own artwork, its own colours, its own copy, and its own honest criticism. Same seven agents, run once per idea, on one laptop, while I was busy talking.' Point out one or two of the funnier ones by name. Let people find theirs.</a:t>
+              <a:t>This is the moment the whole talk has been building to. Say it slowly. 'Remember the code at the start? Every idea you sent went into a queue. And while I was up here talking about prompts and levers and loops, the crew never stopped. Seven agents. One laptop. No internet. Let me show you what they made.' Then switch the projector to the gallery.</a:t>
             </a:r>
             <a:endParaRPr lang="en-US" dirty="0"/>
           </a:p>
@@ -2555,7 +2556,7 @@
           <a:p>
             <a:r>
               <a:rPr lang="en-US" dirty="0"/>
-              <a:t>Land the plane. A function that guesses, given a loop, a stack, six levers, and a crew, learns to command a team, in Java, offline. The real skill is knowing what to ask and how to constrain the answer. Scan to connect on LinkedIn and grab the code on GitHub. What do you want to break first?</a:t>
+              <a:t>Put the gallery on the projector and just let the room look for a few seconds. Do not talk over it. Then: 'Every one of these has its own name, its own artwork, its own colours, its own copy, and its own honest criticism. Same seven agents, run once per idea, on one laptop, while I was busy talking.' Point out one or two of the funnier ones by name. Let people find theirs.</a:t>
             </a:r>
             <a:endParaRPr lang="en-US" dirty="0"/>
           </a:p>
@@ -2579,6 +2580,94 @@
             <a:fld id="{F7021451-1387-4CA6-816F-3879F97B5CBC}" type="slidenum">
               <a:rPr lang="en-US"/>
               <a:t>30</a:t>
+            </a:fld>
+            <a:endParaRPr lang="en-US"/>
+          </a:p>
+        </p:txBody>
+      </p:sp>
+    </p:spTree>
+    <p:extLst>
+      <p:ext uri="{BB962C8B-B14F-4D97-AF65-F5344CB8AC3E}">
+        <p14:creationId xmlns:p14="http://schemas.microsoft.com/office/powerpoint/2010/main" val="1024086991"/>
+      </p:ext>
+    </p:extLst>
+  </p:cSld>
+  <p:clrMapOvr>
+    <a:masterClrMapping/>
+  </p:clrMapOvr>
+</p:notes>
+</file>
+
+<file path=ppt/notesSlides/notesSlide31.xml><?xml version="1.0" encoding="utf-8"?>
+<p:notes xmlns:a="http://schemas.openxmlformats.org/drawingml/2006/main" xmlns:r="http://schemas.openxmlformats.org/officeDocument/2006/relationships" xmlns:p="http://schemas.openxmlformats.org/presentationml/2006/main">
+  <p:cSld>
+    <p:spTree>
+      <p:nvGrpSpPr>
+        <p:cNvPr id="1" name=""/>
+        <p:cNvGrpSpPr/>
+        <p:nvPr/>
+      </p:nvGrpSpPr>
+      <p:grpSpPr>
+        <a:xfrm>
+          <a:off x="0" y="0"/>
+          <a:ext cx="0" cy="0"/>
+          <a:chOff x="0" y="0"/>
+          <a:chExt cx="0" cy="0"/>
+        </a:xfrm>
+      </p:grpSpPr>
+      <p:sp>
+        <p:nvSpPr>
+          <p:cNvPr id="2" name="Slide Image Placeholder 1"/>
+          <p:cNvSpPr>
+            <a:spLocks noGrp="1" noRot="1" noChangeAspect="1"/>
+          </p:cNvSpPr>
+          <p:nvPr>
+            <p:ph type="sldImg"/>
+          </p:nvPr>
+        </p:nvSpPr>
+        <p:spPr/>
+      </p:sp>
+      <p:sp>
+        <p:nvSpPr>
+          <p:cNvPr id="3" name="Notes Placeholder 2"/>
+          <p:cNvSpPr>
+            <a:spLocks noGrp="1"/>
+          </p:cNvSpPr>
+          <p:nvPr>
+            <p:ph type="body" idx="1"/>
+          </p:nvPr>
+        </p:nvSpPr>
+        <p:spPr/>
+        <p:txBody>
+          <a:bodyPr/>
+          <a:lstStyle/>
+          <a:p>
+            <a:r>
+              <a:rPr lang="en-US" dirty="0"/>
+              <a:t>Land the plane. A function that guesses, given a loop, a stack, six levers, and a crew, learns to command a team, in Java, offline. The real skill is knowing what to ask and how to constrain the answer. Scan to connect on LinkedIn and grab the code on GitHub. What do you want to break first?</a:t>
+            </a:r>
+            <a:endParaRPr lang="en-US" dirty="0"/>
+          </a:p>
+        </p:txBody>
+      </p:sp>
+      <p:sp>
+        <p:nvSpPr>
+          <p:cNvPr id="4" name="Slide Number Placeholder 3"/>
+          <p:cNvSpPr>
+            <a:spLocks noGrp="1"/>
+          </p:cNvSpPr>
+          <p:nvPr>
+            <p:ph type="sldNum" sz="quarter" idx="10"/>
+          </p:nvPr>
+        </p:nvSpPr>
+        <p:spPr/>
+        <p:txBody>
+          <a:bodyPr/>
+          <a:lstStyle/>
+          <a:p>
+            <a:fld id="{F7021451-1387-4CA6-816F-3879F97B5CBC}" type="slidenum">
+              <a:rPr lang="en-US"/>
+              <a:t>31</a:t>
             </a:fld>
             <a:endParaRPr lang="en-US"/>
           </a:p>
@@ -5118,7 +5207,7 @@
                 <a:ea typeface="Calibri" pitchFamily="34" charset="-122"/>
                 <a:cs typeface="Calibri" pitchFamily="34" charset="-120"/>
               </a:rPr>
-              <a:t>The model host. </a:t>
+              <a:t>Ollama on localhost:11434. </a:t>
             </a:r>
             <a:pPr indent="0" marL="0">
               <a:buNone/>
@@ -5132,7 +5221,7 @@
                 <a:ea typeface="Calibri" pitchFamily="34" charset="-122"/>
                 <a:cs typeface="Calibri" pitchFamily="34" charset="-120"/>
               </a:rPr>
-              <a:t>Ollama, running Qwen on your machine.</a:t>
+              <a:t>qwen2.5:3b on stage, 1.5b for background work.</a:t>
             </a:r>
             <a:endParaRPr lang="en-US" sz="1650" dirty="0"/>
           </a:p>
@@ -5261,7 +5350,7 @@
                 <a:ea typeface="Calibri" pitchFamily="34" charset="-122"/>
                 <a:cs typeface="Calibri" pitchFamily="34" charset="-120"/>
               </a:rPr>
-              <a:t>The loop and wiring. </a:t>
+              <a:t>LangChain4j 1.0 AiServices. </a:t>
             </a:r>
             <a:pPr indent="0" marL="0">
               <a:buNone/>
@@ -5275,7 +5364,7 @@
                 <a:ea typeface="Calibri" pitchFamily="34" charset="-122"/>
                 <a:cs typeface="Calibri" pitchFamily="34" charset="-120"/>
               </a:rPr>
-              <a:t>LangChain4j or Spring AI.</a:t>
+              <a:t>Interfaces with annotations. No implementations.</a:t>
             </a:r>
             <a:endParaRPr lang="en-US" sz="1650" dirty="0"/>
           </a:p>
@@ -5404,7 +5493,7 @@
                 <a:ea typeface="Calibri" pitchFamily="34" charset="-122"/>
                 <a:cs typeface="Calibri" pitchFamily="34" charset="-120"/>
               </a:rPr>
-              <a:t>The hands. </a:t>
+              <a:t>Plain Java methods. </a:t>
             </a:r>
             <a:pPr indent="0" marL="0">
               <a:buNone/>
@@ -5418,7 +5507,7 @@
                 <a:ea typeface="Calibri" pitchFamily="34" charset="-122"/>
                 <a:cs typeface="Calibri" pitchFamily="34" charset="-120"/>
               </a:rPr>
-              <a:t>Java methods the model may call.</a:t>
+              <a:t>Whatever you would let an intern call.</a:t>
             </a:r>
             <a:endParaRPr lang="en-US" sz="1650" dirty="0"/>
           </a:p>
@@ -5547,7 +5636,7 @@
                 <a:ea typeface="Calibri" pitchFamily="34" charset="-122"/>
                 <a:cs typeface="Calibri" pitchFamily="34" charset="-120"/>
               </a:rPr>
-              <a:t>The notebook. </a:t>
+              <a:t>A queue and a result per idea. </a:t>
             </a:r>
             <a:pPr indent="0" marL="0">
               <a:buNone/>
@@ -5561,7 +5650,7 @@
                 <a:ea typeface="Calibri" pitchFamily="34" charset="-122"/>
                 <a:cs typeface="Calibri" pitchFamily="34" charset="-120"/>
               </a:rPr>
-              <a:t>What it carries between turns.</a:t>
+              <a:t>Nothing global. Each run is its own object.</a:t>
             </a:r>
             <a:endParaRPr lang="en-US" sz="1650" dirty="0"/>
           </a:p>
@@ -5690,7 +5779,7 @@
                 <a:ea typeface="Calibri" pitchFamily="34" charset="-122"/>
                 <a:cs typeface="Calibri" pitchFamily="34" charset="-120"/>
               </a:rPr>
-              <a:t>Typed output. </a:t>
+              <a:t>Java records: Copy, Palette, Tier. </a:t>
             </a:r>
             <a:pPr indent="0" marL="0">
               <a:buNone/>
@@ -5704,7 +5793,7 @@
                 <a:ea typeface="Calibri" pitchFamily="34" charset="-122"/>
                 <a:cs typeface="Calibri" pitchFamily="34" charset="-120"/>
               </a:rPr>
-              <a:t>Answers as objects, not prose.</a:t>
+              <a:t>The model fills a type, it does not write prose.</a:t>
             </a:r>
             <a:endParaRPr lang="en-US" sz="1650" dirty="0"/>
           </a:p>
@@ -16396,13 +16485,13 @@
             <a:r>
               <a:rPr lang="en-US" sz="1100" b="1" spc="300" kern="0" dirty="0">
                 <a:solidFill>
-                  <a:srgbClr val="7C3AED"/>
+                  <a:srgbClr val="0F9E8E"/>
                 </a:solidFill>
                 <a:latin typeface="Arial" pitchFamily="34" charset="0"/>
                 <a:ea typeface="Arial" pitchFamily="34" charset="-122"/>
                 <a:cs typeface="Arial" pitchFamily="34" charset="-120"/>
               </a:rPr>
-              <a:t>WHAT YOU ACTUALLY WATCHED</a:t>
+              <a:t>NO HAND WAVING</a:t>
             </a:r>
             <a:endParaRPr lang="en-US" sz="1100" dirty="0"/>
           </a:p>
@@ -16433,7 +16522,7 @@
               <a:buNone/>
             </a:pPr>
             <a:r>
-              <a:rPr lang="en-US" sz="3000" b="1" dirty="0">
+              <a:rPr lang="en-US" sz="3200" b="1" dirty="0">
                 <a:solidFill>
                   <a:srgbClr val="16181D"/>
                 </a:solidFill>
@@ -16441,13 +16530,13 @@
                 <a:ea typeface="Arial" pitchFamily="34" charset="-122"/>
                 <a:cs typeface="Arial" pitchFamily="34" charset="-120"/>
               </a:rPr>
-              <a:t>The model was the easy part. </a:t>
-            </a:r>
-            <a:pPr indent="0" marL="0">
-              <a:buNone/>
-            </a:pPr>
-            <a:r>
-              <a:rPr lang="en-US" sz="3000" b="1" dirty="0">
+              <a:t>The whole thing, </a:t>
+            </a:r>
+            <a:pPr indent="0" marL="0">
+              <a:buNone/>
+            </a:pPr>
+            <a:r>
+              <a:rPr lang="en-US" sz="3200" b="1" dirty="0">
                 <a:solidFill>
                   <a:srgbClr val="4F46E5"/>
                 </a:solidFill>
@@ -16455,9 +16544,9 @@
                 <a:ea typeface="Arial" pitchFamily="34" charset="-122"/>
                 <a:cs typeface="Arial" pitchFamily="34" charset="-120"/>
               </a:rPr>
-              <a:t>This is the work.</a:t>
-            </a:r>
-            <a:endParaRPr lang="en-US" sz="3000" dirty="0"/>
+              <a:t>measured.</a:t>
+            </a:r>
+            <a:endParaRPr lang="en-US" sz="3200" dirty="0"/>
           </a:p>
         </p:txBody>
       </p:sp>
@@ -16470,23 +16559,23 @@
         <p:spPr>
           <a:xfrm>
             <a:off x="841248" y="1783080"/>
-            <a:ext cx="7863840" cy="548640"/>
-          </a:xfrm>
-          <a:prstGeom prst="rect">
-            <a:avLst/>
-          </a:prstGeom>
-          <a:noFill/>
-          <a:ln/>
-        </p:spPr>
-        <p:txBody>
-          <a:bodyPr wrap="square" rtlCol="0" anchor="ctr"/>
-          <a:lstStyle/>
-          <a:p>
-            <a:pPr indent="0" marL="0">
-              <a:buNone/>
-            </a:pPr>
-            <a:r>
-              <a:rPr lang="en-US" sz="1550" dirty="0">
+            <a:ext cx="7863840" cy="457200"/>
+          </a:xfrm>
+          <a:prstGeom prst="rect">
+            <a:avLst/>
+          </a:prstGeom>
+          <a:noFill/>
+          <a:ln/>
+        </p:spPr>
+        <p:txBody>
+          <a:bodyPr wrap="square" rtlCol="0" anchor="ctr"/>
+          <a:lstStyle/>
+          <a:p>
+            <a:pPr indent="0" marL="0">
+              <a:buNone/>
+            </a:pPr>
+            <a:r>
+              <a:rPr lang="en-US" sz="1500" dirty="0">
                 <a:solidFill>
                   <a:srgbClr val="666C7A"/>
                 </a:solidFill>
@@ -16494,9 +16583,9 @@
                 <a:ea typeface="Calibri" pitchFamily="34" charset="-122"/>
                 <a:cs typeface="Calibri" pitchFamily="34" charset="-120"/>
               </a:rPr>
-              <a:t>Swap Qwen for a bigger model and almost nothing here changes. The harness is the part you build, own and get paged about.</a:t>
-            </a:r>
-            <a:endParaRPr lang="en-US" sz="1550" dirty="0"/>
+              <a:t>Everything on this slide is counted from the repository you can clone tonight, not rounded up for a talk.</a:t>
+            </a:r>
+            <a:endParaRPr lang="en-US" sz="1500" dirty="0"/>
           </a:p>
         </p:txBody>
       </p:sp>
@@ -16508,12 +16597,12 @@
         </p:nvSpPr>
         <p:spPr>
           <a:xfrm>
-            <a:off x="841248" y="2514600"/>
-            <a:ext cx="3401568" cy="1783080"/>
+            <a:off x="841248" y="2468880"/>
+            <a:ext cx="3401568" cy="1481328"/>
           </a:xfrm>
           <a:prstGeom prst="roundRect">
             <a:avLst>
-              <a:gd name="adj" fmla="val 5128"/>
+              <a:gd name="adj" fmla="val 6173"/>
             </a:avLst>
           </a:prstGeom>
           <a:solidFill>
@@ -16536,104 +16625,92 @@
       </p:sp>
       <p:sp>
         <p:nvSpPr>
-          <p:cNvPr id="6" name="Shape 4"/>
-          <p:cNvSpPr/>
-          <p:nvPr/>
-        </p:nvSpPr>
-        <p:spPr>
-          <a:xfrm>
-            <a:off x="1143000" y="2798064"/>
-            <a:ext cx="493776" cy="493776"/>
-          </a:xfrm>
-          <a:prstGeom prst="ellipse">
-            <a:avLst/>
-          </a:prstGeom>
-          <a:solidFill>
-            <a:srgbClr val="4F46E5"/>
-          </a:solidFill>
-          <a:ln/>
-          <a:effectLst>
-            <a:outerShdw sx="100000" sy="100000" kx="0" ky="0" algn="bl" rotWithShape="0" blurRad="139700" dist="38100" dir="5400000">
-              <a:srgbClr val="9AA6BC">
-                <a:alpha val="28000"/>
-              </a:srgbClr>
-            </a:outerShdw>
-          </a:effectLst>
-        </p:spPr>
-      </p:sp>
-      <p:pic>
-        <p:nvPicPr>
-          <p:cNvPr id="7" name="Image 0" descr="preencoded.png">    </p:cNvPr>
-          <p:cNvPicPr>
-            <a:picLocks noChangeAspect="1"/>
-          </p:cNvPicPr>
-          <p:nvPr/>
-        </p:nvPicPr>
-        <p:blipFill>
-          <a:blip r:embed="rId1"/>
-          <a:stretch>
-            <a:fillRect/>
-          </a:stretch>
-        </p:blipFill>
-        <p:spPr>
-          <a:xfrm>
-            <a:off x="1261506" y="2916570"/>
-            <a:ext cx="256764" cy="256764"/>
-          </a:xfrm>
-          <a:prstGeom prst="rect">
-            <a:avLst/>
-          </a:prstGeom>
-        </p:spPr>
-      </p:pic>
-      <p:sp>
-        <p:nvSpPr>
-          <p:cNvPr id="8" name="Text 5"/>
-          <p:cNvSpPr/>
-          <p:nvPr/>
-        </p:nvSpPr>
-        <p:spPr>
-          <a:xfrm>
-            <a:off x="1773936" y="2807208"/>
-            <a:ext cx="2258568" cy="457200"/>
-          </a:xfrm>
-          <a:prstGeom prst="rect">
-            <a:avLst/>
-          </a:prstGeom>
-          <a:noFill/>
-          <a:ln/>
-        </p:spPr>
-        <p:txBody>
-          <a:bodyPr wrap="square" rtlCol="0" anchor="ctr"/>
-          <a:lstStyle/>
-          <a:p>
-            <a:pPr indent="0" marL="0">
-              <a:buNone/>
-            </a:pPr>
-            <a:r>
-              <a:rPr lang="en-US" sz="1550" b="1" dirty="0">
-                <a:solidFill>
-                  <a:srgbClr val="16181D"/>
+          <p:cNvPr id="6" name="Text 4"/>
+          <p:cNvSpPr/>
+          <p:nvPr/>
+        </p:nvSpPr>
+        <p:spPr>
+          <a:xfrm>
+            <a:off x="1161288" y="2670048"/>
+            <a:ext cx="2761488" cy="566928"/>
+          </a:xfrm>
+          <a:prstGeom prst="rect">
+            <a:avLst/>
+          </a:prstGeom>
+          <a:noFill/>
+          <a:ln/>
+        </p:spPr>
+        <p:txBody>
+          <a:bodyPr wrap="square" rtlCol="0" anchor="ctr"/>
+          <a:lstStyle/>
+          <a:p>
+            <a:pPr indent="0" marL="0">
+              <a:buNone/>
+            </a:pPr>
+            <a:r>
+              <a:rPr lang="en-US" sz="3000" b="1" dirty="0">
+                <a:solidFill>
+                  <a:srgbClr val="4F46E5"/>
                 </a:solidFill>
                 <a:latin typeface="Arial" pitchFamily="34" charset="0"/>
                 <a:ea typeface="Arial" pitchFamily="34" charset="-122"/>
                 <a:cs typeface="Arial" pitchFamily="34" charset="-120"/>
               </a:rPr>
-              <a:t>Parallelism</a:t>
-            </a:r>
-            <a:endParaRPr lang="en-US" sz="1550" dirty="0"/>
-          </a:p>
-        </p:txBody>
-      </p:sp>
-      <p:sp>
-        <p:nvSpPr>
-          <p:cNvPr id="9" name="Text 6"/>
-          <p:cNvSpPr/>
-          <p:nvPr/>
-        </p:nvSpPr>
-        <p:spPr>
-          <a:xfrm>
-            <a:off x="1161288" y="3429000"/>
-            <a:ext cx="2761488" cy="731520"/>
+              <a:t>1 212</a:t>
+            </a:r>
+            <a:endParaRPr lang="en-US" sz="3000" dirty="0"/>
+          </a:p>
+        </p:txBody>
+      </p:sp>
+      <p:sp>
+        <p:nvSpPr>
+          <p:cNvPr id="7" name="Text 5"/>
+          <p:cNvSpPr/>
+          <p:nvPr/>
+        </p:nvSpPr>
+        <p:spPr>
+          <a:xfrm>
+            <a:off x="1161288" y="3218688"/>
+            <a:ext cx="2761488" cy="310896"/>
+          </a:xfrm>
+          <a:prstGeom prst="rect">
+            <a:avLst/>
+          </a:prstGeom>
+          <a:noFill/>
+          <a:ln/>
+        </p:spPr>
+        <p:txBody>
+          <a:bodyPr wrap="square" rtlCol="0" anchor="ctr"/>
+          <a:lstStyle/>
+          <a:p>
+            <a:pPr indent="0" marL="0">
+              <a:buNone/>
+            </a:pPr>
+            <a:r>
+              <a:rPr lang="en-US" sz="1400" b="1" dirty="0">
+                <a:solidFill>
+                  <a:srgbClr val="16181D"/>
+                </a:solidFill>
+                <a:latin typeface="Arial" pitchFamily="34" charset="0"/>
+                <a:ea typeface="Arial" pitchFamily="34" charset="-122"/>
+                <a:cs typeface="Arial" pitchFamily="34" charset="-120"/>
+              </a:rPr>
+              <a:t>lines of Java</a:t>
+            </a:r>
+            <a:endParaRPr lang="en-US" sz="1400" dirty="0"/>
+          </a:p>
+        </p:txBody>
+      </p:sp>
+      <p:sp>
+        <p:nvSpPr>
+          <p:cNvPr id="8" name="Text 6"/>
+          <p:cNvSpPr/>
+          <p:nvPr/>
+        </p:nvSpPr>
+        <p:spPr>
+          <a:xfrm>
+            <a:off x="1161288" y="3511296"/>
+            <a:ext cx="2761488" cy="347472"/>
           </a:xfrm>
           <a:prstGeom prst="rect">
             <a:avLst/>
@@ -16647,12 +16724,12 @@
           <a:p>
             <a:pPr indent="0" marL="0">
               <a:lnSpc>
-                <a:spcPts val="1600"/>
+                <a:spcPts val="1400"/>
               </a:lnSpc>
               <a:buNone/>
             </a:pPr>
             <a:r>
-              <a:rPr lang="en-US" sz="1200" dirty="0">
+              <a:rPr lang="en-US" sz="1150" dirty="0">
                 <a:solidFill>
                   <a:srgbClr val="666C7A"/>
                 </a:solidFill>
@@ -16660,26 +16737,26 @@
                 <a:ea typeface="Calibri" pitchFamily="34" charset="-122"/>
                 <a:cs typeface="Calibri" pitchFamily="34" charset="-120"/>
               </a:rPr>
-              <a:t>Three agents start together. The one that finishes first assists, it does not idle.</a:t>
-            </a:r>
-            <a:endParaRPr lang="en-US" sz="1200" dirty="0"/>
-          </a:p>
-        </p:txBody>
-      </p:sp>
-      <p:sp>
-        <p:nvSpPr>
-          <p:cNvPr id="10" name="Shape 7"/>
-          <p:cNvSpPr/>
-          <p:nvPr/>
-        </p:nvSpPr>
-        <p:spPr>
-          <a:xfrm>
-            <a:off x="4498848" y="2514600"/>
-            <a:ext cx="3401568" cy="1783080"/>
+              <a:t>across 8 files</a:t>
+            </a:r>
+            <a:endParaRPr lang="en-US" sz="1150" dirty="0"/>
+          </a:p>
+        </p:txBody>
+      </p:sp>
+      <p:sp>
+        <p:nvSpPr>
+          <p:cNvPr id="9" name="Shape 7"/>
+          <p:cNvSpPr/>
+          <p:nvPr/>
+        </p:nvSpPr>
+        <p:spPr>
+          <a:xfrm>
+            <a:off x="4498848" y="2468880"/>
+            <a:ext cx="3401568" cy="1481328"/>
           </a:xfrm>
           <a:prstGeom prst="roundRect">
             <a:avLst>
-              <a:gd name="adj" fmla="val 5128"/>
+              <a:gd name="adj" fmla="val 6173"/>
             </a:avLst>
           </a:prstGeom>
           <a:solidFill>
@@ -16702,104 +16779,92 @@
       </p:sp>
       <p:sp>
         <p:nvSpPr>
-          <p:cNvPr id="11" name="Shape 8"/>
-          <p:cNvSpPr/>
-          <p:nvPr/>
-        </p:nvSpPr>
-        <p:spPr>
-          <a:xfrm>
-            <a:off x="4800600" y="2798064"/>
-            <a:ext cx="493776" cy="493776"/>
-          </a:xfrm>
-          <a:prstGeom prst="ellipse">
-            <a:avLst/>
-          </a:prstGeom>
-          <a:solidFill>
-            <a:srgbClr val="7C3AED"/>
-          </a:solidFill>
-          <a:ln/>
-          <a:effectLst>
-            <a:outerShdw sx="100000" sy="100000" kx="0" ky="0" algn="bl" rotWithShape="0" blurRad="139700" dist="38100" dir="5400000">
-              <a:srgbClr val="9AA6BC">
-                <a:alpha val="28000"/>
-              </a:srgbClr>
-            </a:outerShdw>
-          </a:effectLst>
-        </p:spPr>
-      </p:sp>
-      <p:pic>
-        <p:nvPicPr>
-          <p:cNvPr id="12" name="Image 1" descr="preencoded.png">    </p:cNvPr>
-          <p:cNvPicPr>
-            <a:picLocks noChangeAspect="1"/>
-          </p:cNvPicPr>
-          <p:nvPr/>
-        </p:nvPicPr>
-        <p:blipFill>
-          <a:blip r:embed="rId2"/>
-          <a:stretch>
-            <a:fillRect/>
-          </a:stretch>
-        </p:blipFill>
-        <p:spPr>
-          <a:xfrm>
-            <a:off x="4919106" y="2916570"/>
-            <a:ext cx="256764" cy="256764"/>
-          </a:xfrm>
-          <a:prstGeom prst="rect">
-            <a:avLst/>
-          </a:prstGeom>
-        </p:spPr>
-      </p:pic>
-      <p:sp>
-        <p:nvSpPr>
-          <p:cNvPr id="13" name="Text 9"/>
-          <p:cNvSpPr/>
-          <p:nvPr/>
-        </p:nvSpPr>
-        <p:spPr>
-          <a:xfrm>
-            <a:off x="5431536" y="2807208"/>
-            <a:ext cx="2258568" cy="457200"/>
-          </a:xfrm>
-          <a:prstGeom prst="rect">
-            <a:avLst/>
-          </a:prstGeom>
-          <a:noFill/>
-          <a:ln/>
-        </p:spPr>
-        <p:txBody>
-          <a:bodyPr wrap="square" rtlCol="0" anchor="ctr"/>
-          <a:lstStyle/>
-          <a:p>
-            <a:pPr indent="0" marL="0">
-              <a:buNone/>
-            </a:pPr>
-            <a:r>
-              <a:rPr lang="en-US" sz="1550" b="1" dirty="0">
-                <a:solidFill>
-                  <a:srgbClr val="16181D"/>
+          <p:cNvPr id="10" name="Text 8"/>
+          <p:cNvSpPr/>
+          <p:nvPr/>
+        </p:nvSpPr>
+        <p:spPr>
+          <a:xfrm>
+            <a:off x="4818888" y="2670048"/>
+            <a:ext cx="2761488" cy="566928"/>
+          </a:xfrm>
+          <a:prstGeom prst="rect">
+            <a:avLst/>
+          </a:prstGeom>
+          <a:noFill/>
+          <a:ln/>
+        </p:spPr>
+        <p:txBody>
+          <a:bodyPr wrap="square" rtlCol="0" anchor="ctr"/>
+          <a:lstStyle/>
+          <a:p>
+            <a:pPr indent="0" marL="0">
+              <a:buNone/>
+            </a:pPr>
+            <a:r>
+              <a:rPr lang="en-US" sz="3000" b="1" dirty="0">
+                <a:solidFill>
+                  <a:srgbClr val="7C3AED"/>
                 </a:solidFill>
                 <a:latin typeface="Arial" pitchFamily="34" charset="0"/>
                 <a:ea typeface="Arial" pitchFamily="34" charset="-122"/>
                 <a:cs typeface="Arial" pitchFamily="34" charset="-120"/>
               </a:rPr>
-              <a:t>Feedback loops</a:t>
-            </a:r>
-            <a:endParaRPr lang="en-US" sz="1550" dirty="0"/>
-          </a:p>
-        </p:txBody>
-      </p:sp>
-      <p:sp>
-        <p:nvSpPr>
-          <p:cNvPr id="14" name="Text 10"/>
-          <p:cNvSpPr/>
-          <p:nvPr/>
-        </p:nvSpPr>
-        <p:spPr>
-          <a:xfrm>
-            <a:off x="4818888" y="3429000"/>
-            <a:ext cx="2761488" cy="731520"/>
+              <a:t>7</a:t>
+            </a:r>
+            <a:endParaRPr lang="en-US" sz="3000" dirty="0"/>
+          </a:p>
+        </p:txBody>
+      </p:sp>
+      <p:sp>
+        <p:nvSpPr>
+          <p:cNvPr id="11" name="Text 9"/>
+          <p:cNvSpPr/>
+          <p:nvPr/>
+        </p:nvSpPr>
+        <p:spPr>
+          <a:xfrm>
+            <a:off x="4818888" y="3218688"/>
+            <a:ext cx="2761488" cy="310896"/>
+          </a:xfrm>
+          <a:prstGeom prst="rect">
+            <a:avLst/>
+          </a:prstGeom>
+          <a:noFill/>
+          <a:ln/>
+        </p:spPr>
+        <p:txBody>
+          <a:bodyPr wrap="square" rtlCol="0" anchor="ctr"/>
+          <a:lstStyle/>
+          <a:p>
+            <a:pPr indent="0" marL="0">
+              <a:buNone/>
+            </a:pPr>
+            <a:r>
+              <a:rPr lang="en-US" sz="1400" b="1" dirty="0">
+                <a:solidFill>
+                  <a:srgbClr val="16181D"/>
+                </a:solidFill>
+                <a:latin typeface="Arial" pitchFamily="34" charset="0"/>
+                <a:ea typeface="Arial" pitchFamily="34" charset="-122"/>
+                <a:cs typeface="Arial" pitchFamily="34" charset="-120"/>
+              </a:rPr>
+              <a:t>agents</a:t>
+            </a:r>
+            <a:endParaRPr lang="en-US" sz="1400" dirty="0"/>
+          </a:p>
+        </p:txBody>
+      </p:sp>
+      <p:sp>
+        <p:nvSpPr>
+          <p:cNvPr id="12" name="Text 10"/>
+          <p:cNvSpPr/>
+          <p:nvPr/>
+        </p:nvSpPr>
+        <p:spPr>
+          <a:xfrm>
+            <a:off x="4818888" y="3511296"/>
+            <a:ext cx="2761488" cy="347472"/>
           </a:xfrm>
           <a:prstGeom prst="rect">
             <a:avLst/>
@@ -16813,12 +16878,12 @@
           <a:p>
             <a:pPr indent="0" marL="0">
               <a:lnSpc>
-                <a:spcPts val="1600"/>
+                <a:spcPts val="1400"/>
               </a:lnSpc>
               <a:buNone/>
             </a:pPr>
             <a:r>
-              <a:rPr lang="en-US" sz="1200" dirty="0">
+              <a:rPr lang="en-US" sz="1150" dirty="0">
                 <a:solidFill>
                   <a:srgbClr val="666C7A"/>
                 </a:solidFill>
@@ -16826,26 +16891,26 @@
                 <a:ea typeface="Calibri" pitchFamily="34" charset="-122"/>
                 <a:cs typeface="Calibri" pitchFamily="34" charset="-120"/>
               </a:rPr>
-              <a:t>The Reviewer and the Skeptic send work backwards, and the copy is rewritten.</a:t>
-            </a:r>
-            <a:endParaRPr lang="en-US" sz="1200" dirty="0"/>
-          </a:p>
-        </p:txBody>
-      </p:sp>
-      <p:sp>
-        <p:nvSpPr>
-          <p:cNvPr id="15" name="Shape 11"/>
-          <p:cNvSpPr/>
-          <p:nvPr/>
-        </p:nvSpPr>
-        <p:spPr>
-          <a:xfrm>
-            <a:off x="8156448" y="2514600"/>
-            <a:ext cx="3401568" cy="1783080"/>
+              <a:t>one model, seven system prompts</a:t>
+            </a:r>
+            <a:endParaRPr lang="en-US" sz="1150" dirty="0"/>
+          </a:p>
+        </p:txBody>
+      </p:sp>
+      <p:sp>
+        <p:nvSpPr>
+          <p:cNvPr id="13" name="Shape 11"/>
+          <p:cNvSpPr/>
+          <p:nvPr/>
+        </p:nvSpPr>
+        <p:spPr>
+          <a:xfrm>
+            <a:off x="8156448" y="2468880"/>
+            <a:ext cx="3401568" cy="1481328"/>
           </a:xfrm>
           <a:prstGeom prst="roundRect">
             <a:avLst>
-              <a:gd name="adj" fmla="val 5128"/>
+              <a:gd name="adj" fmla="val 6173"/>
             </a:avLst>
           </a:prstGeom>
           <a:solidFill>
@@ -16868,104 +16933,92 @@
       </p:sp>
       <p:sp>
         <p:nvSpPr>
-          <p:cNvPr id="16" name="Shape 12"/>
-          <p:cNvSpPr/>
-          <p:nvPr/>
-        </p:nvSpPr>
-        <p:spPr>
-          <a:xfrm>
-            <a:off x="8458200" y="2798064"/>
-            <a:ext cx="493776" cy="493776"/>
-          </a:xfrm>
-          <a:prstGeom prst="ellipse">
-            <a:avLst/>
-          </a:prstGeom>
-          <a:solidFill>
-            <a:srgbClr val="E11D48"/>
-          </a:solidFill>
-          <a:ln/>
-          <a:effectLst>
-            <a:outerShdw sx="100000" sy="100000" kx="0" ky="0" algn="bl" rotWithShape="0" blurRad="139700" dist="38100" dir="5400000">
-              <a:srgbClr val="9AA6BC">
-                <a:alpha val="28000"/>
-              </a:srgbClr>
-            </a:outerShdw>
-          </a:effectLst>
-        </p:spPr>
-      </p:sp>
-      <p:pic>
-        <p:nvPicPr>
-          <p:cNvPr id="17" name="Image 2" descr="preencoded.png">    </p:cNvPr>
-          <p:cNvPicPr>
-            <a:picLocks noChangeAspect="1"/>
-          </p:cNvPicPr>
-          <p:nvPr/>
-        </p:nvPicPr>
-        <p:blipFill>
-          <a:blip r:embed="rId3"/>
-          <a:stretch>
-            <a:fillRect/>
-          </a:stretch>
-        </p:blipFill>
-        <p:spPr>
-          <a:xfrm>
-            <a:off x="8576706" y="2916570"/>
-            <a:ext cx="256764" cy="256764"/>
-          </a:xfrm>
-          <a:prstGeom prst="rect">
-            <a:avLst/>
-          </a:prstGeom>
-        </p:spPr>
-      </p:pic>
-      <p:sp>
-        <p:nvSpPr>
-          <p:cNvPr id="18" name="Text 13"/>
-          <p:cNvSpPr/>
-          <p:nvPr/>
-        </p:nvSpPr>
-        <p:spPr>
-          <a:xfrm>
-            <a:off x="9089136" y="2807208"/>
-            <a:ext cx="2258568" cy="457200"/>
-          </a:xfrm>
-          <a:prstGeom prst="rect">
-            <a:avLst/>
-          </a:prstGeom>
-          <a:noFill/>
-          <a:ln/>
-        </p:spPr>
-        <p:txBody>
-          <a:bodyPr wrap="square" rtlCol="0" anchor="ctr"/>
-          <a:lstStyle/>
-          <a:p>
-            <a:pPr indent="0" marL="0">
-              <a:buNone/>
-            </a:pPr>
-            <a:r>
-              <a:rPr lang="en-US" sz="1550" b="1" dirty="0">
-                <a:solidFill>
-                  <a:srgbClr val="16181D"/>
+          <p:cNvPr id="14" name="Text 12"/>
+          <p:cNvSpPr/>
+          <p:nvPr/>
+        </p:nvSpPr>
+        <p:spPr>
+          <a:xfrm>
+            <a:off x="8476488" y="2670048"/>
+            <a:ext cx="2761488" cy="566928"/>
+          </a:xfrm>
+          <a:prstGeom prst="rect">
+            <a:avLst/>
+          </a:prstGeom>
+          <a:noFill/>
+          <a:ln/>
+        </p:spPr>
+        <p:txBody>
+          <a:bodyPr wrap="square" rtlCol="0" anchor="ctr"/>
+          <a:lstStyle/>
+          <a:p>
+            <a:pPr indent="0" marL="0">
+              <a:buNone/>
+            </a:pPr>
+            <a:r>
+              <a:rPr lang="en-US" sz="3000" b="1" dirty="0">
+                <a:solidFill>
+                  <a:srgbClr val="0284C7"/>
                 </a:solidFill>
                 <a:latin typeface="Arial" pitchFamily="34" charset="0"/>
                 <a:ea typeface="Arial" pitchFamily="34" charset="-122"/>
                 <a:cs typeface="Arial" pitchFamily="34" charset="-120"/>
               </a:rPr>
-              <a:t>Fallbacks</a:t>
-            </a:r>
-            <a:endParaRPr lang="en-US" sz="1550" dirty="0"/>
-          </a:p>
-        </p:txBody>
-      </p:sp>
-      <p:sp>
-        <p:nvSpPr>
-          <p:cNvPr id="19" name="Text 14"/>
-          <p:cNvSpPr/>
-          <p:nvPr/>
-        </p:nvSpPr>
-        <p:spPr>
-          <a:xfrm>
-            <a:off x="8476488" y="3429000"/>
-            <a:ext cx="2761488" cy="731520"/>
+              <a:t>9</a:t>
+            </a:r>
+            <a:endParaRPr lang="en-US" sz="3000" dirty="0"/>
+          </a:p>
+        </p:txBody>
+      </p:sp>
+      <p:sp>
+        <p:nvSpPr>
+          <p:cNvPr id="15" name="Text 13"/>
+          <p:cNvSpPr/>
+          <p:nvPr/>
+        </p:nvSpPr>
+        <p:spPr>
+          <a:xfrm>
+            <a:off x="8476488" y="3218688"/>
+            <a:ext cx="2761488" cy="310896"/>
+          </a:xfrm>
+          <a:prstGeom prst="rect">
+            <a:avLst/>
+          </a:prstGeom>
+          <a:noFill/>
+          <a:ln/>
+        </p:spPr>
+        <p:txBody>
+          <a:bodyPr wrap="square" rtlCol="0" anchor="ctr"/>
+          <a:lstStyle/>
+          <a:p>
+            <a:pPr indent="0" marL="0">
+              <a:buNone/>
+            </a:pPr>
+            <a:r>
+              <a:rPr lang="en-US" sz="1400" b="1" dirty="0">
+                <a:solidFill>
+                  <a:srgbClr val="16181D"/>
+                </a:solidFill>
+                <a:latin typeface="Arial" pitchFamily="34" charset="0"/>
+                <a:ea typeface="Arial" pitchFamily="34" charset="-122"/>
+                <a:cs typeface="Arial" pitchFamily="34" charset="-120"/>
+              </a:rPr>
+              <a:t>HTTP endpoints</a:t>
+            </a:r>
+            <a:endParaRPr lang="en-US" sz="1400" dirty="0"/>
+          </a:p>
+        </p:txBody>
+      </p:sp>
+      <p:sp>
+        <p:nvSpPr>
+          <p:cNvPr id="16" name="Text 14"/>
+          <p:cNvSpPr/>
+          <p:nvPr/>
+        </p:nvSpPr>
+        <p:spPr>
+          <a:xfrm>
+            <a:off x="8476488" y="3511296"/>
+            <a:ext cx="2761488" cy="347472"/>
           </a:xfrm>
           <a:prstGeom prst="rect">
             <a:avLst/>
@@ -16979,12 +17032,12 @@
           <a:p>
             <a:pPr indent="0" marL="0">
               <a:lnSpc>
-                <a:spcPts val="1600"/>
+                <a:spcPts val="1400"/>
               </a:lnSpc>
               <a:buNone/>
             </a:pPr>
             <a:r>
-              <a:rPr lang="en-US" sz="1200" dirty="0">
+              <a:rPr lang="en-US" sz="1150" dirty="0">
                 <a:solidFill>
                   <a:srgbClr val="666C7A"/>
                 </a:solidFill>
@@ -16992,26 +17045,26 @@
                 <a:ea typeface="Calibri" pitchFamily="34" charset="-122"/>
                 <a:cs typeface="Calibri" pitchFamily="34" charset="-120"/>
               </a:rPr>
-              <a:t>Every agent has a house answer. Kill Ollama mid-talk and the page still builds.</a:t>
-            </a:r>
-            <a:endParaRPr lang="en-US" sz="1200" dirty="0"/>
-          </a:p>
-        </p:txBody>
-      </p:sp>
-      <p:sp>
-        <p:nvSpPr>
-          <p:cNvPr id="20" name="Shape 15"/>
-          <p:cNvSpPr/>
-          <p:nvPr/>
-        </p:nvSpPr>
-        <p:spPr>
-          <a:xfrm>
-            <a:off x="841248" y="4535424"/>
-            <a:ext cx="3401568" cy="1783080"/>
+              <a:t>submit, run, hide, queue, gallery, page…</a:t>
+            </a:r>
+            <a:endParaRPr lang="en-US" sz="1150" dirty="0"/>
+          </a:p>
+        </p:txBody>
+      </p:sp>
+      <p:sp>
+        <p:nvSpPr>
+          <p:cNvPr id="17" name="Shape 15"/>
+          <p:cNvSpPr/>
+          <p:nvPr/>
+        </p:nvSpPr>
+        <p:spPr>
+          <a:xfrm>
+            <a:off x="841248" y="4187952"/>
+            <a:ext cx="3401568" cy="1481328"/>
           </a:xfrm>
           <a:prstGeom prst="roundRect">
             <a:avLst>
-              <a:gd name="adj" fmla="val 5128"/>
+              <a:gd name="adj" fmla="val 6173"/>
             </a:avLst>
           </a:prstGeom>
           <a:solidFill>
@@ -17034,104 +17087,92 @@
       </p:sp>
       <p:sp>
         <p:nvSpPr>
-          <p:cNvPr id="21" name="Shape 16"/>
-          <p:cNvSpPr/>
-          <p:nvPr/>
-        </p:nvSpPr>
-        <p:spPr>
-          <a:xfrm>
-            <a:off x="1143000" y="4818888"/>
-            <a:ext cx="493776" cy="493776"/>
-          </a:xfrm>
-          <a:prstGeom prst="ellipse">
-            <a:avLst/>
-          </a:prstGeom>
-          <a:solidFill>
-            <a:srgbClr val="0F9E8E"/>
-          </a:solidFill>
-          <a:ln/>
-          <a:effectLst>
-            <a:outerShdw sx="100000" sy="100000" kx="0" ky="0" algn="bl" rotWithShape="0" blurRad="139700" dist="38100" dir="5400000">
-              <a:srgbClr val="9AA6BC">
-                <a:alpha val="28000"/>
-              </a:srgbClr>
-            </a:outerShdw>
-          </a:effectLst>
-        </p:spPr>
-      </p:sp>
-      <p:pic>
-        <p:nvPicPr>
-          <p:cNvPr id="22" name="Image 3" descr="preencoded.png">    </p:cNvPr>
-          <p:cNvPicPr>
-            <a:picLocks noChangeAspect="1"/>
-          </p:cNvPicPr>
-          <p:nvPr/>
-        </p:nvPicPr>
-        <p:blipFill>
-          <a:blip r:embed="rId4"/>
-          <a:stretch>
-            <a:fillRect/>
-          </a:stretch>
-        </p:blipFill>
-        <p:spPr>
-          <a:xfrm>
-            <a:off x="1261506" y="4937394"/>
-            <a:ext cx="256764" cy="256764"/>
-          </a:xfrm>
-          <a:prstGeom prst="rect">
-            <a:avLst/>
-          </a:prstGeom>
-        </p:spPr>
-      </p:pic>
-      <p:sp>
-        <p:nvSpPr>
-          <p:cNvPr id="23" name="Text 17"/>
-          <p:cNvSpPr/>
-          <p:nvPr/>
-        </p:nvSpPr>
-        <p:spPr>
-          <a:xfrm>
-            <a:off x="1773936" y="4828032"/>
-            <a:ext cx="2258568" cy="457200"/>
-          </a:xfrm>
-          <a:prstGeom prst="rect">
-            <a:avLst/>
-          </a:prstGeom>
-          <a:noFill/>
-          <a:ln/>
-        </p:spPr>
-        <p:txBody>
-          <a:bodyPr wrap="square" rtlCol="0" anchor="ctr"/>
-          <a:lstStyle/>
-          <a:p>
-            <a:pPr indent="0" marL="0">
-              <a:buNone/>
-            </a:pPr>
-            <a:r>
-              <a:rPr lang="en-US" sz="1550" b="1" dirty="0">
-                <a:solidFill>
-                  <a:srgbClr val="16181D"/>
+          <p:cNvPr id="18" name="Text 16"/>
+          <p:cNvSpPr/>
+          <p:nvPr/>
+        </p:nvSpPr>
+        <p:spPr>
+          <a:xfrm>
+            <a:off x="1161288" y="4389120"/>
+            <a:ext cx="2761488" cy="566928"/>
+          </a:xfrm>
+          <a:prstGeom prst="rect">
+            <a:avLst/>
+          </a:prstGeom>
+          <a:noFill/>
+          <a:ln/>
+        </p:spPr>
+        <p:txBody>
+          <a:bodyPr wrap="square" rtlCol="0" anchor="ctr"/>
+          <a:lstStyle/>
+          <a:p>
+            <a:pPr indent="0" marL="0">
+              <a:buNone/>
+            </a:pPr>
+            <a:r>
+              <a:rPr lang="en-US" sz="3000" b="1" dirty="0">
+                <a:solidFill>
+                  <a:srgbClr val="0F9E8E"/>
                 </a:solidFill>
                 <a:latin typeface="Arial" pitchFamily="34" charset="0"/>
                 <a:ea typeface="Arial" pitchFamily="34" charset="-122"/>
                 <a:cs typeface="Arial" pitchFamily="34" charset="-120"/>
               </a:rPr>
-              <a:t>Human in the loop</a:t>
-            </a:r>
-            <a:endParaRPr lang="en-US" sz="1550" dirty="0"/>
-          </a:p>
-        </p:txBody>
-      </p:sp>
-      <p:sp>
-        <p:nvSpPr>
-          <p:cNvPr id="24" name="Text 18"/>
-          <p:cNvSpPr/>
-          <p:nvPr/>
-        </p:nvSpPr>
-        <p:spPr>
-          <a:xfrm>
-            <a:off x="1161288" y="5449824"/>
-            <a:ext cx="2761488" cy="731520"/>
+              <a:t>10</a:t>
+            </a:r>
+            <a:endParaRPr lang="en-US" sz="3000" dirty="0"/>
+          </a:p>
+        </p:txBody>
+      </p:sp>
+      <p:sp>
+        <p:nvSpPr>
+          <p:cNvPr id="19" name="Text 17"/>
+          <p:cNvSpPr/>
+          <p:nvPr/>
+        </p:nvSpPr>
+        <p:spPr>
+          <a:xfrm>
+            <a:off x="1161288" y="4937760"/>
+            <a:ext cx="2761488" cy="310896"/>
+          </a:xfrm>
+          <a:prstGeom prst="rect">
+            <a:avLst/>
+          </a:prstGeom>
+          <a:noFill/>
+          <a:ln/>
+        </p:spPr>
+        <p:txBody>
+          <a:bodyPr wrap="square" rtlCol="0" anchor="ctr"/>
+          <a:lstStyle/>
+          <a:p>
+            <a:pPr indent="0" marL="0">
+              <a:buNone/>
+            </a:pPr>
+            <a:r>
+              <a:rPr lang="en-US" sz="1400" b="1" dirty="0">
+                <a:solidFill>
+                  <a:srgbClr val="16181D"/>
+                </a:solidFill>
+                <a:latin typeface="Arial" pitchFamily="34" charset="0"/>
+                <a:ea typeface="Arial" pitchFamily="34" charset="-122"/>
+                <a:cs typeface="Arial" pitchFamily="34" charset="-120"/>
+              </a:rPr>
+              <a:t>event types</a:t>
+            </a:r>
+            <a:endParaRPr lang="en-US" sz="1400" dirty="0"/>
+          </a:p>
+        </p:txBody>
+      </p:sp>
+      <p:sp>
+        <p:nvSpPr>
+          <p:cNvPr id="20" name="Text 18"/>
+          <p:cNvSpPr/>
+          <p:nvPr/>
+        </p:nvSpPr>
+        <p:spPr>
+          <a:xfrm>
+            <a:off x="1161288" y="5230368"/>
+            <a:ext cx="2761488" cy="347472"/>
           </a:xfrm>
           <a:prstGeom prst="rect">
             <a:avLst/>
@@ -17145,12 +17186,12 @@
           <a:p>
             <a:pPr indent="0" marL="0">
               <a:lnSpc>
-                <a:spcPts val="1600"/>
+                <a:spcPts val="1400"/>
               </a:lnSpc>
               <a:buNone/>
             </a:pPr>
             <a:r>
-              <a:rPr lang="en-US" sz="1200" dirty="0">
+              <a:rPr lang="en-US" sz="1150" dirty="0">
                 <a:solidFill>
                   <a:srgbClr val="666C7A"/>
                 </a:solidFill>
@@ -17158,26 +17199,26 @@
                 <a:ea typeface="Calibri" pitchFamily="34" charset="-122"/>
                 <a:cs typeface="Calibri" pitchFamily="34" charset="-120"/>
               </a:rPr>
-              <a:t>Nothing reaches the projector until I press Run. I can Hide anything first.</a:t>
-            </a:r>
-            <a:endParaRPr lang="en-US" sz="1200" dirty="0"/>
-          </a:p>
-        </p:txBody>
-      </p:sp>
-      <p:sp>
-        <p:nvSpPr>
-          <p:cNvPr id="25" name="Shape 19"/>
-          <p:cNvSpPr/>
-          <p:nvPr/>
-        </p:nvSpPr>
-        <p:spPr>
-          <a:xfrm>
-            <a:off x="4498848" y="4535424"/>
-            <a:ext cx="3401568" cy="1783080"/>
+              <a:t>streamed to the projector over SSE</a:t>
+            </a:r>
+            <a:endParaRPr lang="en-US" sz="1150" dirty="0"/>
+          </a:p>
+        </p:txBody>
+      </p:sp>
+      <p:sp>
+        <p:nvSpPr>
+          <p:cNvPr id="21" name="Shape 19"/>
+          <p:cNvSpPr/>
+          <p:nvPr/>
+        </p:nvSpPr>
+        <p:spPr>
+          <a:xfrm>
+            <a:off x="4498848" y="4187952"/>
+            <a:ext cx="3401568" cy="1481328"/>
           </a:xfrm>
           <a:prstGeom prst="roundRect">
             <a:avLst>
-              <a:gd name="adj" fmla="val 5128"/>
+              <a:gd name="adj" fmla="val 6173"/>
             </a:avLst>
           </a:prstGeom>
           <a:solidFill>
@@ -17200,104 +17241,92 @@
       </p:sp>
       <p:sp>
         <p:nvSpPr>
-          <p:cNvPr id="26" name="Shape 20"/>
-          <p:cNvSpPr/>
-          <p:nvPr/>
-        </p:nvSpPr>
-        <p:spPr>
-          <a:xfrm>
-            <a:off x="4800600" y="4818888"/>
-            <a:ext cx="493776" cy="493776"/>
-          </a:xfrm>
-          <a:prstGeom prst="ellipse">
-            <a:avLst/>
-          </a:prstGeom>
-          <a:solidFill>
-            <a:srgbClr val="D97706"/>
-          </a:solidFill>
-          <a:ln/>
-          <a:effectLst>
-            <a:outerShdw sx="100000" sy="100000" kx="0" ky="0" algn="bl" rotWithShape="0" blurRad="139700" dist="38100" dir="5400000">
-              <a:srgbClr val="9AA6BC">
-                <a:alpha val="28000"/>
-              </a:srgbClr>
-            </a:outerShdw>
-          </a:effectLst>
-        </p:spPr>
-      </p:sp>
-      <p:pic>
-        <p:nvPicPr>
-          <p:cNvPr id="27" name="Image 4" descr="preencoded.png">    </p:cNvPr>
-          <p:cNvPicPr>
-            <a:picLocks noChangeAspect="1"/>
-          </p:cNvPicPr>
-          <p:nvPr/>
-        </p:nvPicPr>
-        <p:blipFill>
-          <a:blip r:embed="rId5"/>
-          <a:stretch>
-            <a:fillRect/>
-          </a:stretch>
-        </p:blipFill>
-        <p:spPr>
-          <a:xfrm>
-            <a:off x="4919106" y="4937394"/>
-            <a:ext cx="256764" cy="256764"/>
-          </a:xfrm>
-          <a:prstGeom prst="rect">
-            <a:avLst/>
-          </a:prstGeom>
-        </p:spPr>
-      </p:pic>
-      <p:sp>
-        <p:nvSpPr>
-          <p:cNvPr id="28" name="Text 21"/>
-          <p:cNvSpPr/>
-          <p:nvPr/>
-        </p:nvSpPr>
-        <p:spPr>
-          <a:xfrm>
-            <a:off x="5431536" y="4828032"/>
-            <a:ext cx="2258568" cy="457200"/>
-          </a:xfrm>
-          <a:prstGeom prst="rect">
-            <a:avLst/>
-          </a:prstGeom>
-          <a:noFill/>
-          <a:ln/>
-        </p:spPr>
-        <p:txBody>
-          <a:bodyPr wrap="square" rtlCol="0" anchor="ctr"/>
-          <a:lstStyle/>
-          <a:p>
-            <a:pPr indent="0" marL="0">
-              <a:buNone/>
-            </a:pPr>
-            <a:r>
-              <a:rPr lang="en-US" sz="1550" b="1" dirty="0">
-                <a:solidFill>
-                  <a:srgbClr val="16181D"/>
+          <p:cNvPr id="22" name="Text 20"/>
+          <p:cNvSpPr/>
+          <p:nvPr/>
+        </p:nvSpPr>
+        <p:spPr>
+          <a:xfrm>
+            <a:off x="4818888" y="4389120"/>
+            <a:ext cx="2761488" cy="566928"/>
+          </a:xfrm>
+          <a:prstGeom prst="rect">
+            <a:avLst/>
+          </a:prstGeom>
+          <a:noFill/>
+          <a:ln/>
+        </p:spPr>
+        <p:txBody>
+          <a:bodyPr wrap="square" rtlCol="0" anchor="ctr"/>
+          <a:lstStyle/>
+          <a:p>
+            <a:pPr indent="0" marL="0">
+              <a:buNone/>
+            </a:pPr>
+            <a:r>
+              <a:rPr lang="en-US" sz="3000" b="1" dirty="0">
+                <a:solidFill>
+                  <a:srgbClr val="D97706"/>
                 </a:solidFill>
                 <a:latin typeface="Arial" pitchFamily="34" charset="0"/>
                 <a:ea typeface="Arial" pitchFamily="34" charset="-122"/>
                 <a:cs typeface="Arial" pitchFamily="34" charset="-120"/>
               </a:rPr>
-              <a:t>Limits</a:t>
-            </a:r>
-            <a:endParaRPr lang="en-US" sz="1550" dirty="0"/>
-          </a:p>
-        </p:txBody>
-      </p:sp>
-      <p:sp>
-        <p:nvSpPr>
-          <p:cNvPr id="29" name="Text 22"/>
-          <p:cNvSpPr/>
-          <p:nvPr/>
-        </p:nvSpPr>
-        <p:spPr>
-          <a:xfrm>
-            <a:off x="4818888" y="5449824"/>
-            <a:ext cx="2761488" cy="731520"/>
+              <a:t>8</a:t>
+            </a:r>
+            <a:endParaRPr lang="en-US" sz="3000" dirty="0"/>
+          </a:p>
+        </p:txBody>
+      </p:sp>
+      <p:sp>
+        <p:nvSpPr>
+          <p:cNvPr id="23" name="Text 21"/>
+          <p:cNvSpPr/>
+          <p:nvPr/>
+        </p:nvSpPr>
+        <p:spPr>
+          <a:xfrm>
+            <a:off x="4818888" y="4937760"/>
+            <a:ext cx="2761488" cy="310896"/>
+          </a:xfrm>
+          <a:prstGeom prst="rect">
+            <a:avLst/>
+          </a:prstGeom>
+          <a:noFill/>
+          <a:ln/>
+        </p:spPr>
+        <p:txBody>
+          <a:bodyPr wrap="square" rtlCol="0" anchor="ctr"/>
+          <a:lstStyle/>
+          <a:p>
+            <a:pPr indent="0" marL="0">
+              <a:buNone/>
+            </a:pPr>
+            <a:r>
+              <a:rPr lang="en-US" sz="1400" b="1" dirty="0">
+                <a:solidFill>
+                  <a:srgbClr val="16181D"/>
+                </a:solidFill>
+                <a:latin typeface="Arial" pitchFamily="34" charset="0"/>
+                <a:ea typeface="Arial" pitchFamily="34" charset="-122"/>
+                <a:cs typeface="Arial" pitchFamily="34" charset="-120"/>
+              </a:rPr>
+              <a:t>dependencies</a:t>
+            </a:r>
+            <a:endParaRPr lang="en-US" sz="1400" dirty="0"/>
+          </a:p>
+        </p:txBody>
+      </p:sp>
+      <p:sp>
+        <p:nvSpPr>
+          <p:cNvPr id="24" name="Text 22"/>
+          <p:cNvSpPr/>
+          <p:nvPr/>
+        </p:nvSpPr>
+        <p:spPr>
+          <a:xfrm>
+            <a:off x="4818888" y="5230368"/>
+            <a:ext cx="2761488" cy="347472"/>
           </a:xfrm>
           <a:prstGeom prst="rect">
             <a:avLst/>
@@ -17311,12 +17340,12 @@
           <a:p>
             <a:pPr indent="0" marL="0">
               <a:lnSpc>
-                <a:spcPts val="1600"/>
+                <a:spcPts val="1400"/>
               </a:lnSpc>
               <a:buNone/>
             </a:pPr>
             <a:r>
-              <a:rPr lang="en-US" sz="1200" dirty="0">
+              <a:rPr lang="en-US" sz="1150" dirty="0">
                 <a:solidFill>
                   <a:srgbClr val="666C7A"/>
                 </a:solidFill>
@@ -17324,26 +17353,26 @@
                 <a:ea typeface="Calibri" pitchFamily="34" charset="-122"/>
                 <a:cs typeface="Calibri" pitchFamily="34" charset="-120"/>
               </a:rPr>
-              <a:t>Rate limits, a queue cap, dedup and a key on the panel. A room of devs will test all four.</a:t>
-            </a:r>
-            <a:endParaRPr lang="en-US" sz="1200" dirty="0"/>
-          </a:p>
-        </p:txBody>
-      </p:sp>
-      <p:sp>
-        <p:nvSpPr>
-          <p:cNvPr id="30" name="Shape 23"/>
-          <p:cNvSpPr/>
-          <p:nvPr/>
-        </p:nvSpPr>
-        <p:spPr>
-          <a:xfrm>
-            <a:off x="8156448" y="4535424"/>
-            <a:ext cx="3401568" cy="1783080"/>
+              <a:t>Spring Boot, LangChain4j, Ollama, ZXing</a:t>
+            </a:r>
+            <a:endParaRPr lang="en-US" sz="1150" dirty="0"/>
+          </a:p>
+        </p:txBody>
+      </p:sp>
+      <p:sp>
+        <p:nvSpPr>
+          <p:cNvPr id="25" name="Shape 23"/>
+          <p:cNvSpPr/>
+          <p:nvPr/>
+        </p:nvSpPr>
+        <p:spPr>
+          <a:xfrm>
+            <a:off x="8156448" y="4187952"/>
+            <a:ext cx="3401568" cy="1481328"/>
           </a:xfrm>
           <a:prstGeom prst="roundRect">
             <a:avLst>
-              <a:gd name="adj" fmla="val 5128"/>
+              <a:gd name="adj" fmla="val 6173"/>
             </a:avLst>
           </a:prstGeom>
           <a:solidFill>
@@ -17366,104 +17395,92 @@
       </p:sp>
       <p:sp>
         <p:nvSpPr>
-          <p:cNvPr id="31" name="Shape 24"/>
-          <p:cNvSpPr/>
-          <p:nvPr/>
-        </p:nvSpPr>
-        <p:spPr>
-          <a:xfrm>
-            <a:off x="8458200" y="4818888"/>
-            <a:ext cx="493776" cy="493776"/>
-          </a:xfrm>
-          <a:prstGeom prst="ellipse">
-            <a:avLst/>
-          </a:prstGeom>
-          <a:solidFill>
-            <a:srgbClr val="0284C7"/>
-          </a:solidFill>
-          <a:ln/>
-          <a:effectLst>
-            <a:outerShdw sx="100000" sy="100000" kx="0" ky="0" algn="bl" rotWithShape="0" blurRad="139700" dist="38100" dir="5400000">
-              <a:srgbClr val="9AA6BC">
-                <a:alpha val="28000"/>
-              </a:srgbClr>
-            </a:outerShdw>
-          </a:effectLst>
-        </p:spPr>
-      </p:sp>
-      <p:pic>
-        <p:nvPicPr>
-          <p:cNvPr id="32" name="Image 5" descr="preencoded.png">    </p:cNvPr>
-          <p:cNvPicPr>
-            <a:picLocks noChangeAspect="1"/>
-          </p:cNvPicPr>
-          <p:nvPr/>
-        </p:nvPicPr>
-        <p:blipFill>
-          <a:blip r:embed="rId6"/>
-          <a:stretch>
-            <a:fillRect/>
-          </a:stretch>
-        </p:blipFill>
-        <p:spPr>
-          <a:xfrm>
-            <a:off x="8576706" y="4937394"/>
-            <a:ext cx="256764" cy="256764"/>
-          </a:xfrm>
-          <a:prstGeom prst="rect">
-            <a:avLst/>
-          </a:prstGeom>
-        </p:spPr>
-      </p:pic>
-      <p:sp>
-        <p:nvSpPr>
-          <p:cNvPr id="33" name="Text 25"/>
-          <p:cNvSpPr/>
-          <p:nvPr/>
-        </p:nvSpPr>
-        <p:spPr>
-          <a:xfrm>
-            <a:off x="9089136" y="4828032"/>
-            <a:ext cx="2258568" cy="457200"/>
-          </a:xfrm>
-          <a:prstGeom prst="rect">
-            <a:avLst/>
-          </a:prstGeom>
-          <a:noFill/>
-          <a:ln/>
-        </p:spPr>
-        <p:txBody>
-          <a:bodyPr wrap="square" rtlCol="0" anchor="ctr"/>
-          <a:lstStyle/>
-          <a:p>
-            <a:pPr indent="0" marL="0">
-              <a:buNone/>
-            </a:pPr>
-            <a:r>
-              <a:rPr lang="en-US" sz="1550" b="1" dirty="0">
-                <a:solidFill>
-                  <a:srgbClr val="16181D"/>
+          <p:cNvPr id="26" name="Text 24"/>
+          <p:cNvSpPr/>
+          <p:nvPr/>
+        </p:nvSpPr>
+        <p:spPr>
+          <a:xfrm>
+            <a:off x="8476488" y="4389120"/>
+            <a:ext cx="2761488" cy="566928"/>
+          </a:xfrm>
+          <a:prstGeom prst="rect">
+            <a:avLst/>
+          </a:prstGeom>
+          <a:noFill/>
+          <a:ln/>
+        </p:spPr>
+        <p:txBody>
+          <a:bodyPr wrap="square" rtlCol="0" anchor="ctr"/>
+          <a:lstStyle/>
+          <a:p>
+            <a:pPr indent="0" marL="0">
+              <a:buNone/>
+            </a:pPr>
+            <a:r>
+              <a:rPr lang="en-US" sz="3000" b="1" dirty="0">
+                <a:solidFill>
+                  <a:srgbClr val="E11D48"/>
                 </a:solidFill>
                 <a:latin typeface="Arial" pitchFamily="34" charset="0"/>
                 <a:ea typeface="Arial" pitchFamily="34" charset="-122"/>
                 <a:cs typeface="Arial" pitchFamily="34" charset="-120"/>
               </a:rPr>
-              <a:t>Background work</a:t>
-            </a:r>
-            <a:endParaRPr lang="en-US" sz="1550" dirty="0"/>
-          </a:p>
-        </p:txBody>
-      </p:sp>
-      <p:sp>
-        <p:nvSpPr>
-          <p:cNvPr id="34" name="Text 26"/>
-          <p:cNvSpPr/>
-          <p:nvPr/>
-        </p:nvSpPr>
-        <p:spPr>
-          <a:xfrm>
-            <a:off x="8476488" y="5449824"/>
-            <a:ext cx="2761488" cy="731520"/>
+              <a:t>0</a:t>
+            </a:r>
+            <a:endParaRPr lang="en-US" sz="3000" dirty="0"/>
+          </a:p>
+        </p:txBody>
+      </p:sp>
+      <p:sp>
+        <p:nvSpPr>
+          <p:cNvPr id="27" name="Text 25"/>
+          <p:cNvSpPr/>
+          <p:nvPr/>
+        </p:nvSpPr>
+        <p:spPr>
+          <a:xfrm>
+            <a:off x="8476488" y="4937760"/>
+            <a:ext cx="2761488" cy="310896"/>
+          </a:xfrm>
+          <a:prstGeom prst="rect">
+            <a:avLst/>
+          </a:prstGeom>
+          <a:noFill/>
+          <a:ln/>
+        </p:spPr>
+        <p:txBody>
+          <a:bodyPr wrap="square" rtlCol="0" anchor="ctr"/>
+          <a:lstStyle/>
+          <a:p>
+            <a:pPr indent="0" marL="0">
+              <a:buNone/>
+            </a:pPr>
+            <a:r>
+              <a:rPr lang="en-US" sz="1400" b="1" dirty="0">
+                <a:solidFill>
+                  <a:srgbClr val="16181D"/>
+                </a:solidFill>
+                <a:latin typeface="Arial" pitchFamily="34" charset="0"/>
+                <a:ea typeface="Arial" pitchFamily="34" charset="-122"/>
+                <a:cs typeface="Arial" pitchFamily="34" charset="-120"/>
+              </a:rPr>
+              <a:t>cloud calls</a:t>
+            </a:r>
+            <a:endParaRPr lang="en-US" sz="1400" dirty="0"/>
+          </a:p>
+        </p:txBody>
+      </p:sp>
+      <p:sp>
+        <p:nvSpPr>
+          <p:cNvPr id="28" name="Text 26"/>
+          <p:cNvSpPr/>
+          <p:nvPr/>
+        </p:nvSpPr>
+        <p:spPr>
+          <a:xfrm>
+            <a:off x="8476488" y="5230368"/>
+            <a:ext cx="2761488" cy="347472"/>
           </a:xfrm>
           <a:prstGeom prst="rect">
             <a:avLst/>
@@ -17477,12 +17494,12 @@
           <a:p>
             <a:pPr indent="0" marL="0">
               <a:lnSpc>
-                <a:spcPts val="1600"/>
+                <a:spcPts val="1400"/>
               </a:lnSpc>
               <a:buNone/>
             </a:pPr>
             <a:r>
-              <a:rPr lang="en-US" sz="1200" dirty="0">
+              <a:rPr lang="en-US" sz="1150" dirty="0">
                 <a:solidFill>
                   <a:srgbClr val="666C7A"/>
                 </a:solidFill>
@@ -17490,22 +17507,22 @@
                 <a:ea typeface="Calibri" pitchFamily="34" charset="-122"/>
                 <a:cs typeface="Calibri" pitchFamily="34" charset="-120"/>
               </a:rPr>
-              <a:t>The queue kept building while I talked. Scheduling is orchestration too.</a:t>
-            </a:r>
-            <a:endParaRPr lang="en-US" sz="1200" dirty="0"/>
-          </a:p>
-        </p:txBody>
-      </p:sp>
-      <p:sp>
-        <p:nvSpPr>
-          <p:cNvPr id="35" name="Text 27"/>
-          <p:cNvSpPr/>
-          <p:nvPr/>
-        </p:nvSpPr>
-        <p:spPr>
-          <a:xfrm>
-            <a:off x="1828800" y="6263640"/>
-            <a:ext cx="8534095" cy="457200"/>
+              <a:t>nothing left the laptop, all evening</a:t>
+            </a:r>
+            <a:endParaRPr lang="en-US" sz="1150" dirty="0"/>
+          </a:p>
+        </p:txBody>
+      </p:sp>
+      <p:sp>
+        <p:nvSpPr>
+          <p:cNvPr id="29" name="Text 27"/>
+          <p:cNvSpPr/>
+          <p:nvPr/>
+        </p:nvSpPr>
+        <p:spPr>
+          <a:xfrm>
+            <a:off x="841248" y="5943600"/>
+            <a:ext cx="10509199" cy="548640"/>
           </a:xfrm>
           <a:prstGeom prst="rect">
             <a:avLst/>
@@ -17521,7 +17538,7 @@
               <a:buNone/>
             </a:pPr>
             <a:r>
-              <a:rPr lang="en-US" sz="1550" dirty="0">
+              <a:rPr lang="en-US" sz="1500" dirty="0">
                 <a:solidFill>
                   <a:srgbClr val="666C7A"/>
                 </a:solidFill>
@@ -17529,13 +17546,13 @@
                 <a:ea typeface="Calibri" pitchFamily="34" charset="-122"/>
                 <a:cs typeface="Calibri" pitchFamily="34" charset="-120"/>
               </a:rPr>
-              <a:t>None of that is prompting. </a:t>
+              <a:t>A landing page comes out at about </a:t>
             </a:r>
             <a:pPr algn="ctr" indent="0" marL="0">
               <a:buNone/>
             </a:pPr>
             <a:r>
-              <a:rPr lang="en-US" sz="1550" b="1" dirty="0">
+              <a:rPr lang="en-US" sz="1500" b="1" dirty="0">
                 <a:solidFill>
                   <a:srgbClr val="4F46E5"/>
                 </a:solidFill>
@@ -17543,9 +17560,23 @@
                 <a:ea typeface="Calibri" pitchFamily="34" charset="-122"/>
                 <a:cs typeface="Calibri" pitchFamily="34" charset="-120"/>
               </a:rPr>
-              <a:t>All of it is engineering you already know how to do.</a:t>
-            </a:r>
-            <a:endParaRPr lang="en-US" sz="1550" dirty="0"/>
+              <a:t>12 KB</a:t>
+            </a:r>
+            <a:pPr algn="ctr" indent="0" marL="0">
+              <a:buNone/>
+            </a:pPr>
+            <a:r>
+              <a:rPr lang="en-US" sz="1500" dirty="0">
+                <a:solidFill>
+                  <a:srgbClr val="666C7A"/>
+                </a:solidFill>
+                <a:latin typeface="Calibri" pitchFamily="34" charset="0"/>
+                <a:ea typeface="Calibri" pitchFamily="34" charset="-122"/>
+                <a:cs typeface="Calibri" pitchFamily="34" charset="-120"/>
+              </a:rPr>
+              <a:t>: one HTML file, styles inlined, no framework, no build step, opens on any phone in the room.</a:t>
+            </a:r>
+            <a:endParaRPr lang="en-US" sz="1500" dirty="0"/>
           </a:p>
         </p:txBody>
       </p:sp>
@@ -17608,13 +17639,13 @@
             <a:r>
               <a:rPr lang="en-US" sz="1100" b="1" spc="300" kern="0" dirty="0">
                 <a:solidFill>
-                  <a:srgbClr val="D97706"/>
+                  <a:srgbClr val="7C3AED"/>
                 </a:solidFill>
                 <a:latin typeface="Arial" pitchFamily="34" charset="0"/>
                 <a:ea typeface="Arial" pitchFamily="34" charset="-122"/>
                 <a:cs typeface="Arial" pitchFamily="34" charset="-120"/>
               </a:rPr>
-              <a:t>THE REVEAL</a:t>
+              <a:t>WHAT YOU ACTUALLY WATCHED</a:t>
             </a:r>
             <a:endParaRPr lang="en-US" sz="1100" dirty="0"/>
           </a:p>
@@ -17628,27 +17659,24 @@
         </p:nvSpPr>
         <p:spPr>
           <a:xfrm>
-            <a:off x="841248" y="1463040"/>
-            <a:ext cx="7680960" cy="1828800"/>
-          </a:xfrm>
-          <a:prstGeom prst="rect">
-            <a:avLst/>
-          </a:prstGeom>
-          <a:noFill/>
-          <a:ln/>
-        </p:spPr>
-        <p:txBody>
-          <a:bodyPr wrap="square" rtlCol="0" anchor="ctr"/>
-          <a:lstStyle/>
-          <a:p>
-            <a:pPr indent="0" marL="0">
-              <a:lnSpc>
-                <a:spcPts val="5000"/>
-              </a:lnSpc>
-              <a:buNone/>
-            </a:pPr>
-            <a:r>
-              <a:rPr lang="en-US" sz="4000" b="1" dirty="0">
+            <a:off x="841248" y="1005840"/>
+            <a:ext cx="10424160" cy="822960"/>
+          </a:xfrm>
+          <a:prstGeom prst="rect">
+            <a:avLst/>
+          </a:prstGeom>
+          <a:noFill/>
+          <a:ln/>
+        </p:spPr>
+        <p:txBody>
+          <a:bodyPr wrap="square" rtlCol="0" anchor="ctr"/>
+          <a:lstStyle/>
+          <a:p>
+            <a:pPr indent="0" marL="0">
+              <a:buNone/>
+            </a:pPr>
+            <a:r>
+              <a:rPr lang="en-US" sz="3000" b="1" dirty="0">
                 <a:solidFill>
                   <a:srgbClr val="16181D"/>
                 </a:solidFill>
@@ -17656,16 +17684,13 @@
                 <a:ea typeface="Arial" pitchFamily="34" charset="-122"/>
                 <a:cs typeface="Arial" pitchFamily="34" charset="-120"/>
               </a:rPr>
-              <a:t>You have been </a:t>
-            </a:r>
-            <a:pPr indent="0" marL="0">
-              <a:lnSpc>
-                <a:spcPts val="5000"/>
-              </a:lnSpc>
-              <a:buNone/>
-            </a:pPr>
-            <a:r>
-              <a:rPr lang="en-US" sz="4000" b="1" dirty="0">
+              <a:t>The model was the easy part. </a:t>
+            </a:r>
+            <a:pPr indent="0" marL="0">
+              <a:buNone/>
+            </a:pPr>
+            <a:r>
+              <a:rPr lang="en-US" sz="3000" b="1" dirty="0">
                 <a:solidFill>
                   <a:srgbClr val="4F46E5"/>
                 </a:solidFill>
@@ -17673,35 +17698,9 @@
                 <a:ea typeface="Arial" pitchFamily="34" charset="-122"/>
                 <a:cs typeface="Arial" pitchFamily="34" charset="-120"/>
               </a:rPr>
-              <a:t>employing them</a:t>
-            </a:r>
-            <a:pPr indent="0" marL="0">
-              <a:lnSpc>
-                <a:spcPts val="5000"/>
-              </a:lnSpc>
-              <a:buNone/>
-            </a:pPr>
-            <a:endParaRPr lang="en-US" sz="4000" dirty="0"/>
-          </a:p>
-          <a:p>
-            <a:pPr indent="0" marL="0">
-              <a:lnSpc>
-                <a:spcPts val="5000"/>
-              </a:lnSpc>
-              <a:buNone/>
-            </a:pPr>
-            <a:r>
-              <a:rPr lang="en-US" sz="4000" b="1" dirty="0">
-                <a:solidFill>
-                  <a:srgbClr val="16181D"/>
-                </a:solidFill>
-                <a:latin typeface="Arial" pitchFamily="34" charset="0"/>
-                <a:ea typeface="Arial" pitchFamily="34" charset="-122"/>
-                <a:cs typeface="Arial" pitchFamily="34" charset="-120"/>
-              </a:rPr>
-              <a:t>this whole time.</a:t>
-            </a:r>
-            <a:endParaRPr lang="en-US" sz="4000" dirty="0"/>
+              <a:t>This is the work.</a:t>
+            </a:r>
+            <a:endParaRPr lang="en-US" sz="3000" dirty="0"/>
           </a:p>
         </p:txBody>
       </p:sp>
@@ -17713,27 +17712,24 @@
         </p:nvSpPr>
         <p:spPr>
           <a:xfrm>
-            <a:off x="841248" y="3520440"/>
-            <a:ext cx="5943600" cy="1463040"/>
-          </a:xfrm>
-          <a:prstGeom prst="rect">
-            <a:avLst/>
-          </a:prstGeom>
-          <a:noFill/>
-          <a:ln/>
-        </p:spPr>
-        <p:txBody>
-          <a:bodyPr wrap="square" rtlCol="0" anchor="ctr"/>
-          <a:lstStyle/>
-          <a:p>
-            <a:pPr indent="0" marL="0">
-              <a:lnSpc>
-                <a:spcPts val="2700"/>
-              </a:lnSpc>
-              <a:buNone/>
-            </a:pPr>
-            <a:r>
-              <a:rPr lang="en-US" sz="1700" dirty="0">
+            <a:off x="841248" y="1783080"/>
+            <a:ext cx="7863840" cy="548640"/>
+          </a:xfrm>
+          <a:prstGeom prst="rect">
+            <a:avLst/>
+          </a:prstGeom>
+          <a:noFill/>
+          <a:ln/>
+        </p:spPr>
+        <p:txBody>
+          <a:bodyPr wrap="square" rtlCol="0" anchor="ctr"/>
+          <a:lstStyle/>
+          <a:p>
+            <a:pPr indent="0" marL="0">
+              <a:buNone/>
+            </a:pPr>
+            <a:r>
+              <a:rPr lang="en-US" sz="1550" dirty="0">
                 <a:solidFill>
                   <a:srgbClr val="666C7A"/>
                 </a:solidFill>
@@ -17741,269 +17737,26 @@
                 <a:ea typeface="Calibri" pitchFamily="34" charset="-122"/>
                 <a:cs typeface="Calibri" pitchFamily="34" charset="-120"/>
               </a:rPr>
-              <a:t>Every idea you sent went straight into the queue. While I was talking about prompts and levers and loops, seven agents on this laptop were quietly building a landing page for each one.</a:t>
-            </a:r>
-            <a:endParaRPr lang="en-US" sz="1700" dirty="0"/>
-          </a:p>
-        </p:txBody>
-      </p:sp>
-      <p:sp>
-        <p:nvSpPr>
-          <p:cNvPr id="5" name="Text 3"/>
-          <p:cNvSpPr/>
-          <p:nvPr/>
-        </p:nvSpPr>
-        <p:spPr>
-          <a:xfrm>
-            <a:off x="841248" y="5120640"/>
-            <a:ext cx="1828800" cy="685800"/>
-          </a:xfrm>
-          <a:prstGeom prst="rect">
-            <a:avLst/>
-          </a:prstGeom>
-          <a:noFill/>
-          <a:ln/>
-        </p:spPr>
-        <p:txBody>
-          <a:bodyPr wrap="square" rtlCol="0" anchor="ctr"/>
-          <a:lstStyle/>
-          <a:p>
-            <a:pPr indent="0" marL="0">
-              <a:buNone/>
-            </a:pPr>
-            <a:r>
-              <a:rPr lang="en-US" sz="3800" b="1" dirty="0">
-                <a:solidFill>
-                  <a:srgbClr val="4F46E5"/>
-                </a:solidFill>
-                <a:latin typeface="Arial" pitchFamily="34" charset="0"/>
-                <a:ea typeface="Arial" pitchFamily="34" charset="-122"/>
-                <a:cs typeface="Arial" pitchFamily="34" charset="-120"/>
-              </a:rPr>
-              <a:t>7</a:t>
-            </a:r>
-            <a:endParaRPr lang="en-US" sz="3800" dirty="0"/>
-          </a:p>
-        </p:txBody>
-      </p:sp>
-      <p:sp>
-        <p:nvSpPr>
-          <p:cNvPr id="6" name="Text 4"/>
-          <p:cNvSpPr/>
-          <p:nvPr/>
-        </p:nvSpPr>
-        <p:spPr>
-          <a:xfrm>
-            <a:off x="841248" y="5779008"/>
-            <a:ext cx="1920240" cy="548640"/>
-          </a:xfrm>
-          <a:prstGeom prst="rect">
-            <a:avLst/>
-          </a:prstGeom>
-          <a:noFill/>
-          <a:ln/>
-        </p:spPr>
-        <p:txBody>
-          <a:bodyPr wrap="square" rtlCol="0" anchor="ctr"/>
-          <a:lstStyle/>
-          <a:p>
-            <a:pPr indent="0" marL="0">
-              <a:lnSpc>
-                <a:spcPts val="1200"/>
-              </a:lnSpc>
-              <a:buNone/>
-            </a:pPr>
-            <a:r>
-              <a:rPr lang="en-US" sz="950" spc="150" kern="0" dirty="0">
-                <a:solidFill>
-                  <a:srgbClr val="666C7A"/>
-                </a:solidFill>
-                <a:latin typeface="Consolas" pitchFamily="34" charset="0"/>
-                <a:ea typeface="Consolas" pitchFamily="34" charset="-122"/>
-                <a:cs typeface="Consolas" pitchFamily="34" charset="-120"/>
-              </a:rPr>
-              <a:t>AGENTS PER IDEA</a:t>
-            </a:r>
-            <a:endParaRPr lang="en-US" sz="950" dirty="0"/>
-          </a:p>
-        </p:txBody>
-      </p:sp>
-      <p:sp>
-        <p:nvSpPr>
-          <p:cNvPr id="7" name="Text 5"/>
-          <p:cNvSpPr/>
-          <p:nvPr/>
-        </p:nvSpPr>
-        <p:spPr>
-          <a:xfrm>
-            <a:off x="2852928" y="5120640"/>
-            <a:ext cx="1828800" cy="685800"/>
-          </a:xfrm>
-          <a:prstGeom prst="rect">
-            <a:avLst/>
-          </a:prstGeom>
-          <a:noFill/>
-          <a:ln/>
-        </p:spPr>
-        <p:txBody>
-          <a:bodyPr wrap="square" rtlCol="0" anchor="ctr"/>
-          <a:lstStyle/>
-          <a:p>
-            <a:pPr indent="0" marL="0">
-              <a:buNone/>
-            </a:pPr>
-            <a:r>
-              <a:rPr lang="en-US" sz="3800" b="1" dirty="0">
-                <a:solidFill>
-                  <a:srgbClr val="16181D"/>
-                </a:solidFill>
-                <a:latin typeface="Arial" pitchFamily="34" charset="0"/>
-                <a:ea typeface="Arial" pitchFamily="34" charset="-122"/>
-                <a:cs typeface="Arial" pitchFamily="34" charset="-120"/>
-              </a:rPr>
-              <a:t>0</a:t>
-            </a:r>
-            <a:endParaRPr lang="en-US" sz="3800" dirty="0"/>
-          </a:p>
-        </p:txBody>
-      </p:sp>
-      <p:sp>
-        <p:nvSpPr>
-          <p:cNvPr id="8" name="Text 6"/>
-          <p:cNvSpPr/>
-          <p:nvPr/>
-        </p:nvSpPr>
-        <p:spPr>
-          <a:xfrm>
-            <a:off x="2852928" y="5779008"/>
-            <a:ext cx="1920240" cy="548640"/>
-          </a:xfrm>
-          <a:prstGeom prst="rect">
-            <a:avLst/>
-          </a:prstGeom>
-          <a:noFill/>
-          <a:ln/>
-        </p:spPr>
-        <p:txBody>
-          <a:bodyPr wrap="square" rtlCol="0" anchor="ctr"/>
-          <a:lstStyle/>
-          <a:p>
-            <a:pPr indent="0" marL="0">
-              <a:lnSpc>
-                <a:spcPts val="1200"/>
-              </a:lnSpc>
-              <a:buNone/>
-            </a:pPr>
-            <a:r>
-              <a:rPr lang="en-US" sz="950" spc="150" kern="0" dirty="0">
-                <a:solidFill>
-                  <a:srgbClr val="666C7A"/>
-                </a:solidFill>
-                <a:latin typeface="Consolas" pitchFamily="34" charset="0"/>
-                <a:ea typeface="Consolas" pitchFamily="34" charset="-122"/>
-                <a:cs typeface="Consolas" pitchFamily="34" charset="-120"/>
-              </a:rPr>
-              <a:t>CLOUD CALLS</a:t>
-            </a:r>
-            <a:endParaRPr lang="en-US" sz="950" dirty="0"/>
-          </a:p>
-        </p:txBody>
-      </p:sp>
-      <p:sp>
-        <p:nvSpPr>
-          <p:cNvPr id="9" name="Text 7"/>
-          <p:cNvSpPr/>
-          <p:nvPr/>
-        </p:nvSpPr>
-        <p:spPr>
-          <a:xfrm>
-            <a:off x="4590288" y="5120640"/>
-            <a:ext cx="1828800" cy="685800"/>
-          </a:xfrm>
-          <a:prstGeom prst="rect">
-            <a:avLst/>
-          </a:prstGeom>
-          <a:noFill/>
-          <a:ln/>
-        </p:spPr>
-        <p:txBody>
-          <a:bodyPr wrap="square" rtlCol="0" anchor="ctr"/>
-          <a:lstStyle/>
-          <a:p>
-            <a:pPr indent="0" marL="0">
-              <a:buNone/>
-            </a:pPr>
-            <a:r>
-              <a:rPr lang="en-US" sz="3800" b="1" dirty="0">
-                <a:solidFill>
-                  <a:srgbClr val="16181D"/>
-                </a:solidFill>
-                <a:latin typeface="Arial" pitchFamily="34" charset="0"/>
-                <a:ea typeface="Arial" pitchFamily="34" charset="-122"/>
-                <a:cs typeface="Arial" pitchFamily="34" charset="-120"/>
-              </a:rPr>
-              <a:t>1</a:t>
-            </a:r>
-            <a:endParaRPr lang="en-US" sz="3800" dirty="0"/>
-          </a:p>
-        </p:txBody>
-      </p:sp>
-      <p:sp>
-        <p:nvSpPr>
-          <p:cNvPr id="10" name="Text 8"/>
-          <p:cNvSpPr/>
-          <p:nvPr/>
-        </p:nvSpPr>
-        <p:spPr>
-          <a:xfrm>
-            <a:off x="4590288" y="5779008"/>
-            <a:ext cx="1920240" cy="548640"/>
-          </a:xfrm>
-          <a:prstGeom prst="rect">
-            <a:avLst/>
-          </a:prstGeom>
-          <a:noFill/>
-          <a:ln/>
-        </p:spPr>
-        <p:txBody>
-          <a:bodyPr wrap="square" rtlCol="0" anchor="ctr"/>
-          <a:lstStyle/>
-          <a:p>
-            <a:pPr indent="0" marL="0">
-              <a:lnSpc>
-                <a:spcPts val="1200"/>
-              </a:lnSpc>
-              <a:buNone/>
-            </a:pPr>
-            <a:r>
-              <a:rPr lang="en-US" sz="950" spc="150" kern="0" dirty="0">
-                <a:solidFill>
-                  <a:srgbClr val="666C7A"/>
-                </a:solidFill>
-                <a:latin typeface="Consolas" pitchFamily="34" charset="0"/>
-                <a:ea typeface="Consolas" pitchFamily="34" charset="-122"/>
-                <a:cs typeface="Consolas" pitchFamily="34" charset="-120"/>
-              </a:rPr>
-              <a:t>LAPTOP, STILL WARM</a:t>
-            </a:r>
-            <a:endParaRPr lang="en-US" sz="950" dirty="0"/>
-          </a:p>
-        </p:txBody>
-      </p:sp>
-      <p:sp>
-        <p:nvSpPr>
-          <p:cNvPr id="11" name="Shape 9"/>
-          <p:cNvSpPr/>
-          <p:nvPr/>
-        </p:nvSpPr>
-        <p:spPr>
-          <a:xfrm>
-            <a:off x="7680960" y="1737360"/>
-            <a:ext cx="3657600" cy="1051560"/>
+              <a:t>Swap Qwen for a bigger model and almost nothing here changes. The harness is the part you build, own and get paged about.</a:t>
+            </a:r>
+            <a:endParaRPr lang="en-US" sz="1550" dirty="0"/>
+          </a:p>
+        </p:txBody>
+      </p:sp>
+      <p:sp>
+        <p:nvSpPr>
+          <p:cNvPr id="5" name="Shape 3"/>
+          <p:cNvSpPr/>
+          <p:nvPr/>
+        </p:nvSpPr>
+        <p:spPr>
+          <a:xfrm>
+            <a:off x="841248" y="2514600"/>
+            <a:ext cx="3401568" cy="1783080"/>
           </a:xfrm>
           <a:prstGeom prst="roundRect">
             <a:avLst>
-              <a:gd name="adj" fmla="val 8696"/>
+              <a:gd name="adj" fmla="val 5128"/>
             </a:avLst>
           </a:prstGeom>
           <a:solidFill>
@@ -18026,14 +17779,14 @@
       </p:sp>
       <p:sp>
         <p:nvSpPr>
-          <p:cNvPr id="12" name="Shape 10"/>
-          <p:cNvSpPr/>
-          <p:nvPr/>
-        </p:nvSpPr>
-        <p:spPr>
-          <a:xfrm>
-            <a:off x="7973568" y="1988820"/>
-            <a:ext cx="548640" cy="548640"/>
+          <p:cNvPr id="6" name="Shape 4"/>
+          <p:cNvSpPr/>
+          <p:nvPr/>
+        </p:nvSpPr>
+        <p:spPr>
+          <a:xfrm>
+            <a:off x="1143000" y="2798064"/>
+            <a:ext cx="493776" cy="493776"/>
           </a:xfrm>
           <a:prstGeom prst="ellipse">
             <a:avLst/>
@@ -18053,7 +17806,7 @@
       </p:sp>
       <p:pic>
         <p:nvPicPr>
-          <p:cNvPr id="13" name="Image 0" descr="preencoded.png">    </p:cNvPr>
+          <p:cNvPr id="7" name="Image 0" descr="preencoded.png">    </p:cNvPr>
           <p:cNvPicPr>
             <a:picLocks noChangeAspect="1"/>
           </p:cNvPicPr>
@@ -18067,8 +17820,8 @@
         </p:blipFill>
         <p:spPr>
           <a:xfrm>
-            <a:off x="8105242" y="2120494"/>
-            <a:ext cx="285293" cy="285293"/>
+            <a:off x="1261506" y="2916570"/>
+            <a:ext cx="256764" cy="256764"/>
           </a:xfrm>
           <a:prstGeom prst="rect">
             <a:avLst/>
@@ -18077,30 +17830,30 @@
       </p:pic>
       <p:sp>
         <p:nvSpPr>
-          <p:cNvPr id="14" name="Text 11"/>
-          <p:cNvSpPr/>
-          <p:nvPr/>
-        </p:nvSpPr>
-        <p:spPr>
-          <a:xfrm>
-            <a:off x="8732520" y="1737360"/>
-            <a:ext cx="2468880" cy="1051560"/>
-          </a:xfrm>
-          <a:prstGeom prst="rect">
-            <a:avLst/>
-          </a:prstGeom>
-          <a:noFill/>
-          <a:ln/>
-        </p:spPr>
-        <p:txBody>
-          <a:bodyPr wrap="square" rtlCol="0" anchor="ctr"/>
-          <a:lstStyle/>
-          <a:p>
-            <a:pPr indent="0" marL="0">
-              <a:buNone/>
-            </a:pPr>
-            <a:r>
-              <a:rPr lang="en-US" sz="1700" b="1" dirty="0">
+          <p:cNvPr id="8" name="Text 5"/>
+          <p:cNvSpPr/>
+          <p:nvPr/>
+        </p:nvSpPr>
+        <p:spPr>
+          <a:xfrm>
+            <a:off x="1773936" y="2807208"/>
+            <a:ext cx="2258568" cy="457200"/>
+          </a:xfrm>
+          <a:prstGeom prst="rect">
+            <a:avLst/>
+          </a:prstGeom>
+          <a:noFill/>
+          <a:ln/>
+        </p:spPr>
+        <p:txBody>
+          <a:bodyPr wrap="square" rtlCol="0" anchor="ctr"/>
+          <a:lstStyle/>
+          <a:p>
+            <a:pPr indent="0" marL="0">
+              <a:buNone/>
+            </a:pPr>
+            <a:r>
+              <a:rPr lang="en-US" sz="1550" b="1" dirty="0">
                 <a:solidFill>
                   <a:srgbClr val="16181D"/>
                 </a:solidFill>
@@ -18108,50 +17861,68 @@
                 <a:ea typeface="Arial" pitchFamily="34" charset="-122"/>
                 <a:cs typeface="Arial" pitchFamily="34" charset="-120"/>
               </a:rPr>
-              <a:t>you sent it</a:t>
-            </a:r>
-            <a:endParaRPr lang="en-US" sz="1700" dirty="0"/>
-          </a:p>
-        </p:txBody>
-      </p:sp>
-      <p:sp>
-        <p:nvSpPr>
-          <p:cNvPr id="15" name="Shape 12"/>
-          <p:cNvSpPr/>
-          <p:nvPr/>
-        </p:nvSpPr>
-        <p:spPr>
-          <a:xfrm>
-            <a:off x="9509760" y="2788920"/>
-            <a:ext cx="0" cy="320040"/>
-          </a:xfrm>
-          <a:prstGeom prst="line">
-            <a:avLst/>
-          </a:prstGeom>
-          <a:noFill/>
-          <a:ln w="20320">
-            <a:solidFill>
-              <a:srgbClr val="9AA1B0"/>
-            </a:solidFill>
-            <a:prstDash val="solid"/>
-            <a:tailEnd type="triangle"/>
-          </a:ln>
-        </p:spPr>
-      </p:sp>
-      <p:sp>
-        <p:nvSpPr>
-          <p:cNvPr id="16" name="Shape 13"/>
-          <p:cNvSpPr/>
-          <p:nvPr/>
-        </p:nvSpPr>
-        <p:spPr>
-          <a:xfrm>
-            <a:off x="7680960" y="3108960"/>
-            <a:ext cx="3657600" cy="1051560"/>
+              <a:t>Parallelism</a:t>
+            </a:r>
+            <a:endParaRPr lang="en-US" sz="1550" dirty="0"/>
+          </a:p>
+        </p:txBody>
+      </p:sp>
+      <p:sp>
+        <p:nvSpPr>
+          <p:cNvPr id="9" name="Text 6"/>
+          <p:cNvSpPr/>
+          <p:nvPr/>
+        </p:nvSpPr>
+        <p:spPr>
+          <a:xfrm>
+            <a:off x="1161288" y="3429000"/>
+            <a:ext cx="2761488" cy="731520"/>
+          </a:xfrm>
+          <a:prstGeom prst="rect">
+            <a:avLst/>
+          </a:prstGeom>
+          <a:noFill/>
+          <a:ln/>
+        </p:spPr>
+        <p:txBody>
+          <a:bodyPr wrap="square" rtlCol="0" anchor="ctr"/>
+          <a:lstStyle/>
+          <a:p>
+            <a:pPr indent="0" marL="0">
+              <a:lnSpc>
+                <a:spcPts val="1600"/>
+              </a:lnSpc>
+              <a:buNone/>
+            </a:pPr>
+            <a:r>
+              <a:rPr lang="en-US" sz="1200" dirty="0">
+                <a:solidFill>
+                  <a:srgbClr val="666C7A"/>
+                </a:solidFill>
+                <a:latin typeface="Calibri" pitchFamily="34" charset="0"/>
+                <a:ea typeface="Calibri" pitchFamily="34" charset="-122"/>
+                <a:cs typeface="Calibri" pitchFamily="34" charset="-120"/>
+              </a:rPr>
+              <a:t>Three agents start together. The one that finishes first assists, it does not idle.</a:t>
+            </a:r>
+            <a:endParaRPr lang="en-US" sz="1200" dirty="0"/>
+          </a:p>
+        </p:txBody>
+      </p:sp>
+      <p:sp>
+        <p:nvSpPr>
+          <p:cNvPr id="10" name="Shape 7"/>
+          <p:cNvSpPr/>
+          <p:nvPr/>
+        </p:nvSpPr>
+        <p:spPr>
+          <a:xfrm>
+            <a:off x="4498848" y="2514600"/>
+            <a:ext cx="3401568" cy="1783080"/>
           </a:xfrm>
           <a:prstGeom prst="roundRect">
             <a:avLst>
-              <a:gd name="adj" fmla="val 8696"/>
+              <a:gd name="adj" fmla="val 5128"/>
             </a:avLst>
           </a:prstGeom>
           <a:solidFill>
@@ -18174,14 +17945,14 @@
       </p:sp>
       <p:sp>
         <p:nvSpPr>
-          <p:cNvPr id="17" name="Shape 14"/>
-          <p:cNvSpPr/>
-          <p:nvPr/>
-        </p:nvSpPr>
-        <p:spPr>
-          <a:xfrm>
-            <a:off x="7973568" y="3360420"/>
-            <a:ext cx="548640" cy="548640"/>
+          <p:cNvPr id="11" name="Shape 8"/>
+          <p:cNvSpPr/>
+          <p:nvPr/>
+        </p:nvSpPr>
+        <p:spPr>
+          <a:xfrm>
+            <a:off x="4800600" y="2798064"/>
+            <a:ext cx="493776" cy="493776"/>
           </a:xfrm>
           <a:prstGeom prst="ellipse">
             <a:avLst/>
@@ -18201,7 +17972,7 @@
       </p:sp>
       <p:pic>
         <p:nvPicPr>
-          <p:cNvPr id="18" name="Image 1" descr="preencoded.png">    </p:cNvPr>
+          <p:cNvPr id="12" name="Image 1" descr="preencoded.png">    </p:cNvPr>
           <p:cNvPicPr>
             <a:picLocks noChangeAspect="1"/>
           </p:cNvPicPr>
@@ -18215,8 +17986,8 @@
         </p:blipFill>
         <p:spPr>
           <a:xfrm>
-            <a:off x="8105242" y="3492094"/>
-            <a:ext cx="285293" cy="285293"/>
+            <a:off x="4919106" y="2916570"/>
+            <a:ext cx="256764" cy="256764"/>
           </a:xfrm>
           <a:prstGeom prst="rect">
             <a:avLst/>
@@ -18225,30 +17996,30 @@
       </p:pic>
       <p:sp>
         <p:nvSpPr>
-          <p:cNvPr id="19" name="Text 15"/>
-          <p:cNvSpPr/>
-          <p:nvPr/>
-        </p:nvSpPr>
-        <p:spPr>
-          <a:xfrm>
-            <a:off x="8732520" y="3108960"/>
-            <a:ext cx="2468880" cy="1051560"/>
-          </a:xfrm>
-          <a:prstGeom prst="rect">
-            <a:avLst/>
-          </a:prstGeom>
-          <a:noFill/>
-          <a:ln/>
-        </p:spPr>
-        <p:txBody>
-          <a:bodyPr wrap="square" rtlCol="0" anchor="ctr"/>
-          <a:lstStyle/>
-          <a:p>
-            <a:pPr indent="0" marL="0">
-              <a:buNone/>
-            </a:pPr>
-            <a:r>
-              <a:rPr lang="en-US" sz="1700" b="1" dirty="0">
+          <p:cNvPr id="13" name="Text 9"/>
+          <p:cNvSpPr/>
+          <p:nvPr/>
+        </p:nvSpPr>
+        <p:spPr>
+          <a:xfrm>
+            <a:off x="5431536" y="2807208"/>
+            <a:ext cx="2258568" cy="457200"/>
+          </a:xfrm>
+          <a:prstGeom prst="rect">
+            <a:avLst/>
+          </a:prstGeom>
+          <a:noFill/>
+          <a:ln/>
+        </p:spPr>
+        <p:txBody>
+          <a:bodyPr wrap="square" rtlCol="0" anchor="ctr"/>
+          <a:lstStyle/>
+          <a:p>
+            <a:pPr indent="0" marL="0">
+              <a:buNone/>
+            </a:pPr>
+            <a:r>
+              <a:rPr lang="en-US" sz="1550" b="1" dirty="0">
                 <a:solidFill>
                   <a:srgbClr val="16181D"/>
                 </a:solidFill>
@@ -18256,50 +18027,68 @@
                 <a:ea typeface="Arial" pitchFamily="34" charset="-122"/>
                 <a:cs typeface="Arial" pitchFamily="34" charset="-120"/>
               </a:rPr>
-              <a:t>they built it</a:t>
-            </a:r>
-            <a:endParaRPr lang="en-US" sz="1700" dirty="0"/>
-          </a:p>
-        </p:txBody>
-      </p:sp>
-      <p:sp>
-        <p:nvSpPr>
-          <p:cNvPr id="20" name="Shape 16"/>
-          <p:cNvSpPr/>
-          <p:nvPr/>
-        </p:nvSpPr>
-        <p:spPr>
-          <a:xfrm>
-            <a:off x="9509760" y="4160520"/>
-            <a:ext cx="0" cy="320040"/>
-          </a:xfrm>
-          <a:prstGeom prst="line">
-            <a:avLst/>
-          </a:prstGeom>
-          <a:noFill/>
-          <a:ln w="20320">
-            <a:solidFill>
-              <a:srgbClr val="9AA1B0"/>
-            </a:solidFill>
-            <a:prstDash val="solid"/>
-            <a:tailEnd type="triangle"/>
-          </a:ln>
-        </p:spPr>
-      </p:sp>
-      <p:sp>
-        <p:nvSpPr>
-          <p:cNvPr id="21" name="Shape 17"/>
-          <p:cNvSpPr/>
-          <p:nvPr/>
-        </p:nvSpPr>
-        <p:spPr>
-          <a:xfrm>
-            <a:off x="7680960" y="4480560"/>
-            <a:ext cx="3657600" cy="1051560"/>
+              <a:t>Feedback loops</a:t>
+            </a:r>
+            <a:endParaRPr lang="en-US" sz="1550" dirty="0"/>
+          </a:p>
+        </p:txBody>
+      </p:sp>
+      <p:sp>
+        <p:nvSpPr>
+          <p:cNvPr id="14" name="Text 10"/>
+          <p:cNvSpPr/>
+          <p:nvPr/>
+        </p:nvSpPr>
+        <p:spPr>
+          <a:xfrm>
+            <a:off x="4818888" y="3429000"/>
+            <a:ext cx="2761488" cy="731520"/>
+          </a:xfrm>
+          <a:prstGeom prst="rect">
+            <a:avLst/>
+          </a:prstGeom>
+          <a:noFill/>
+          <a:ln/>
+        </p:spPr>
+        <p:txBody>
+          <a:bodyPr wrap="square" rtlCol="0" anchor="ctr"/>
+          <a:lstStyle/>
+          <a:p>
+            <a:pPr indent="0" marL="0">
+              <a:lnSpc>
+                <a:spcPts val="1600"/>
+              </a:lnSpc>
+              <a:buNone/>
+            </a:pPr>
+            <a:r>
+              <a:rPr lang="en-US" sz="1200" dirty="0">
+                <a:solidFill>
+                  <a:srgbClr val="666C7A"/>
+                </a:solidFill>
+                <a:latin typeface="Calibri" pitchFamily="34" charset="0"/>
+                <a:ea typeface="Calibri" pitchFamily="34" charset="-122"/>
+                <a:cs typeface="Calibri" pitchFamily="34" charset="-120"/>
+              </a:rPr>
+              <a:t>The Reviewer and the Skeptic send work backwards, and the copy is rewritten.</a:t>
+            </a:r>
+            <a:endParaRPr lang="en-US" sz="1200" dirty="0"/>
+          </a:p>
+        </p:txBody>
+      </p:sp>
+      <p:sp>
+        <p:nvSpPr>
+          <p:cNvPr id="15" name="Shape 11"/>
+          <p:cNvSpPr/>
+          <p:nvPr/>
+        </p:nvSpPr>
+        <p:spPr>
+          <a:xfrm>
+            <a:off x="8156448" y="2514600"/>
+            <a:ext cx="3401568" cy="1783080"/>
           </a:xfrm>
           <a:prstGeom prst="roundRect">
             <a:avLst>
-              <a:gd name="adj" fmla="val 8696"/>
+              <a:gd name="adj" fmla="val 5128"/>
             </a:avLst>
           </a:prstGeom>
           <a:solidFill>
@@ -18322,20 +18111,20 @@
       </p:sp>
       <p:sp>
         <p:nvSpPr>
-          <p:cNvPr id="22" name="Shape 18"/>
-          <p:cNvSpPr/>
-          <p:nvPr/>
-        </p:nvSpPr>
-        <p:spPr>
-          <a:xfrm>
-            <a:off x="7973568" y="4732020"/>
-            <a:ext cx="548640" cy="548640"/>
+          <p:cNvPr id="16" name="Shape 12"/>
+          <p:cNvSpPr/>
+          <p:nvPr/>
+        </p:nvSpPr>
+        <p:spPr>
+          <a:xfrm>
+            <a:off x="8458200" y="2798064"/>
+            <a:ext cx="493776" cy="493776"/>
           </a:xfrm>
           <a:prstGeom prst="ellipse">
             <a:avLst/>
           </a:prstGeom>
           <a:solidFill>
-            <a:srgbClr val="0F9E8E"/>
+            <a:srgbClr val="E11D48"/>
           </a:solidFill>
           <a:ln/>
           <a:effectLst>
@@ -18349,7 +18138,7 @@
       </p:sp>
       <p:pic>
         <p:nvPicPr>
-          <p:cNvPr id="23" name="Image 2" descr="preencoded.png">    </p:cNvPr>
+          <p:cNvPr id="17" name="Image 2" descr="preencoded.png">    </p:cNvPr>
           <p:cNvPicPr>
             <a:picLocks noChangeAspect="1"/>
           </p:cNvPicPr>
@@ -18363,8 +18152,8 @@
         </p:blipFill>
         <p:spPr>
           <a:xfrm>
-            <a:off x="8105242" y="4863694"/>
-            <a:ext cx="285293" cy="285293"/>
+            <a:off x="8576706" y="2916570"/>
+            <a:ext cx="256764" cy="256764"/>
           </a:xfrm>
           <a:prstGeom prst="rect">
             <a:avLst/>
@@ -18373,30 +18162,30 @@
       </p:pic>
       <p:sp>
         <p:nvSpPr>
-          <p:cNvPr id="24" name="Text 19"/>
-          <p:cNvSpPr/>
-          <p:nvPr/>
-        </p:nvSpPr>
-        <p:spPr>
-          <a:xfrm>
-            <a:off x="8732520" y="4480560"/>
-            <a:ext cx="2468880" cy="1051560"/>
-          </a:xfrm>
-          <a:prstGeom prst="rect">
-            <a:avLst/>
-          </a:prstGeom>
-          <a:noFill/>
-          <a:ln/>
-        </p:spPr>
-        <p:txBody>
-          <a:bodyPr wrap="square" rtlCol="0" anchor="ctr"/>
-          <a:lstStyle/>
-          <a:p>
-            <a:pPr indent="0" marL="0">
-              <a:buNone/>
-            </a:pPr>
-            <a:r>
-              <a:rPr lang="en-US" sz="1700" b="1" dirty="0">
+          <p:cNvPr id="18" name="Text 13"/>
+          <p:cNvSpPr/>
+          <p:nvPr/>
+        </p:nvSpPr>
+        <p:spPr>
+          <a:xfrm>
+            <a:off x="9089136" y="2807208"/>
+            <a:ext cx="2258568" cy="457200"/>
+          </a:xfrm>
+          <a:prstGeom prst="rect">
+            <a:avLst/>
+          </a:prstGeom>
+          <a:noFill/>
+          <a:ln/>
+        </p:spPr>
+        <p:txBody>
+          <a:bodyPr wrap="square" rtlCol="0" anchor="ctr"/>
+          <a:lstStyle/>
+          <a:p>
+            <a:pPr indent="0" marL="0">
+              <a:buNone/>
+            </a:pPr>
+            <a:r>
+              <a:rPr lang="en-US" sz="1550" b="1" dirty="0">
                 <a:solidFill>
                   <a:srgbClr val="16181D"/>
                 </a:solidFill>
@@ -18404,9 +18193,602 @@
                 <a:ea typeface="Arial" pitchFamily="34" charset="-122"/>
                 <a:cs typeface="Arial" pitchFamily="34" charset="-120"/>
               </a:rPr>
-              <a:t>here it all is</a:t>
-            </a:r>
-            <a:endParaRPr lang="en-US" sz="1700" dirty="0"/>
+              <a:t>Fallbacks</a:t>
+            </a:r>
+            <a:endParaRPr lang="en-US" sz="1550" dirty="0"/>
+          </a:p>
+        </p:txBody>
+      </p:sp>
+      <p:sp>
+        <p:nvSpPr>
+          <p:cNvPr id="19" name="Text 14"/>
+          <p:cNvSpPr/>
+          <p:nvPr/>
+        </p:nvSpPr>
+        <p:spPr>
+          <a:xfrm>
+            <a:off x="8476488" y="3429000"/>
+            <a:ext cx="2761488" cy="731520"/>
+          </a:xfrm>
+          <a:prstGeom prst="rect">
+            <a:avLst/>
+          </a:prstGeom>
+          <a:noFill/>
+          <a:ln/>
+        </p:spPr>
+        <p:txBody>
+          <a:bodyPr wrap="square" rtlCol="0" anchor="ctr"/>
+          <a:lstStyle/>
+          <a:p>
+            <a:pPr indent="0" marL="0">
+              <a:lnSpc>
+                <a:spcPts val="1600"/>
+              </a:lnSpc>
+              <a:buNone/>
+            </a:pPr>
+            <a:r>
+              <a:rPr lang="en-US" sz="1200" dirty="0">
+                <a:solidFill>
+                  <a:srgbClr val="666C7A"/>
+                </a:solidFill>
+                <a:latin typeface="Calibri" pitchFamily="34" charset="0"/>
+                <a:ea typeface="Calibri" pitchFamily="34" charset="-122"/>
+                <a:cs typeface="Calibri" pitchFamily="34" charset="-120"/>
+              </a:rPr>
+              <a:t>Every agent has a house answer. Kill Ollama mid-talk and the page still builds.</a:t>
+            </a:r>
+            <a:endParaRPr lang="en-US" sz="1200" dirty="0"/>
+          </a:p>
+        </p:txBody>
+      </p:sp>
+      <p:sp>
+        <p:nvSpPr>
+          <p:cNvPr id="20" name="Shape 15"/>
+          <p:cNvSpPr/>
+          <p:nvPr/>
+        </p:nvSpPr>
+        <p:spPr>
+          <a:xfrm>
+            <a:off x="841248" y="4535424"/>
+            <a:ext cx="3401568" cy="1783080"/>
+          </a:xfrm>
+          <a:prstGeom prst="roundRect">
+            <a:avLst>
+              <a:gd name="adj" fmla="val 5128"/>
+            </a:avLst>
+          </a:prstGeom>
+          <a:solidFill>
+            <a:srgbClr val="F5F7FA"/>
+          </a:solidFill>
+          <a:ln w="12700">
+            <a:solidFill>
+              <a:srgbClr val="E1E5EC"/>
+            </a:solidFill>
+            <a:prstDash val="solid"/>
+          </a:ln>
+          <a:effectLst>
+            <a:outerShdw sx="100000" sy="100000" kx="0" ky="0" algn="bl" rotWithShape="0" blurRad="139700" dist="38100" dir="5400000">
+              <a:srgbClr val="9AA6BC">
+                <a:alpha val="28000"/>
+              </a:srgbClr>
+            </a:outerShdw>
+          </a:effectLst>
+        </p:spPr>
+      </p:sp>
+      <p:sp>
+        <p:nvSpPr>
+          <p:cNvPr id="21" name="Shape 16"/>
+          <p:cNvSpPr/>
+          <p:nvPr/>
+        </p:nvSpPr>
+        <p:spPr>
+          <a:xfrm>
+            <a:off x="1143000" y="4818888"/>
+            <a:ext cx="493776" cy="493776"/>
+          </a:xfrm>
+          <a:prstGeom prst="ellipse">
+            <a:avLst/>
+          </a:prstGeom>
+          <a:solidFill>
+            <a:srgbClr val="0F9E8E"/>
+          </a:solidFill>
+          <a:ln/>
+          <a:effectLst>
+            <a:outerShdw sx="100000" sy="100000" kx="0" ky="0" algn="bl" rotWithShape="0" blurRad="139700" dist="38100" dir="5400000">
+              <a:srgbClr val="9AA6BC">
+                <a:alpha val="28000"/>
+              </a:srgbClr>
+            </a:outerShdw>
+          </a:effectLst>
+        </p:spPr>
+      </p:sp>
+      <p:pic>
+        <p:nvPicPr>
+          <p:cNvPr id="22" name="Image 3" descr="preencoded.png">    </p:cNvPr>
+          <p:cNvPicPr>
+            <a:picLocks noChangeAspect="1"/>
+          </p:cNvPicPr>
+          <p:nvPr/>
+        </p:nvPicPr>
+        <p:blipFill>
+          <a:blip r:embed="rId4"/>
+          <a:stretch>
+            <a:fillRect/>
+          </a:stretch>
+        </p:blipFill>
+        <p:spPr>
+          <a:xfrm>
+            <a:off x="1261506" y="4937394"/>
+            <a:ext cx="256764" cy="256764"/>
+          </a:xfrm>
+          <a:prstGeom prst="rect">
+            <a:avLst/>
+          </a:prstGeom>
+        </p:spPr>
+      </p:pic>
+      <p:sp>
+        <p:nvSpPr>
+          <p:cNvPr id="23" name="Text 17"/>
+          <p:cNvSpPr/>
+          <p:nvPr/>
+        </p:nvSpPr>
+        <p:spPr>
+          <a:xfrm>
+            <a:off x="1773936" y="4828032"/>
+            <a:ext cx="2258568" cy="457200"/>
+          </a:xfrm>
+          <a:prstGeom prst="rect">
+            <a:avLst/>
+          </a:prstGeom>
+          <a:noFill/>
+          <a:ln/>
+        </p:spPr>
+        <p:txBody>
+          <a:bodyPr wrap="square" rtlCol="0" anchor="ctr"/>
+          <a:lstStyle/>
+          <a:p>
+            <a:pPr indent="0" marL="0">
+              <a:buNone/>
+            </a:pPr>
+            <a:r>
+              <a:rPr lang="en-US" sz="1550" b="1" dirty="0">
+                <a:solidFill>
+                  <a:srgbClr val="16181D"/>
+                </a:solidFill>
+                <a:latin typeface="Arial" pitchFamily="34" charset="0"/>
+                <a:ea typeface="Arial" pitchFamily="34" charset="-122"/>
+                <a:cs typeface="Arial" pitchFamily="34" charset="-120"/>
+              </a:rPr>
+              <a:t>Human in the loop</a:t>
+            </a:r>
+            <a:endParaRPr lang="en-US" sz="1550" dirty="0"/>
+          </a:p>
+        </p:txBody>
+      </p:sp>
+      <p:sp>
+        <p:nvSpPr>
+          <p:cNvPr id="24" name="Text 18"/>
+          <p:cNvSpPr/>
+          <p:nvPr/>
+        </p:nvSpPr>
+        <p:spPr>
+          <a:xfrm>
+            <a:off x="1161288" y="5449824"/>
+            <a:ext cx="2761488" cy="731520"/>
+          </a:xfrm>
+          <a:prstGeom prst="rect">
+            <a:avLst/>
+          </a:prstGeom>
+          <a:noFill/>
+          <a:ln/>
+        </p:spPr>
+        <p:txBody>
+          <a:bodyPr wrap="square" rtlCol="0" anchor="ctr"/>
+          <a:lstStyle/>
+          <a:p>
+            <a:pPr indent="0" marL="0">
+              <a:lnSpc>
+                <a:spcPts val="1600"/>
+              </a:lnSpc>
+              <a:buNone/>
+            </a:pPr>
+            <a:r>
+              <a:rPr lang="en-US" sz="1200" dirty="0">
+                <a:solidFill>
+                  <a:srgbClr val="666C7A"/>
+                </a:solidFill>
+                <a:latin typeface="Calibri" pitchFamily="34" charset="0"/>
+                <a:ea typeface="Calibri" pitchFamily="34" charset="-122"/>
+                <a:cs typeface="Calibri" pitchFamily="34" charset="-120"/>
+              </a:rPr>
+              <a:t>Nothing reaches the projector until I press Run. I can Hide anything first.</a:t>
+            </a:r>
+            <a:endParaRPr lang="en-US" sz="1200" dirty="0"/>
+          </a:p>
+        </p:txBody>
+      </p:sp>
+      <p:sp>
+        <p:nvSpPr>
+          <p:cNvPr id="25" name="Shape 19"/>
+          <p:cNvSpPr/>
+          <p:nvPr/>
+        </p:nvSpPr>
+        <p:spPr>
+          <a:xfrm>
+            <a:off x="4498848" y="4535424"/>
+            <a:ext cx="3401568" cy="1783080"/>
+          </a:xfrm>
+          <a:prstGeom prst="roundRect">
+            <a:avLst>
+              <a:gd name="adj" fmla="val 5128"/>
+            </a:avLst>
+          </a:prstGeom>
+          <a:solidFill>
+            <a:srgbClr val="F5F7FA"/>
+          </a:solidFill>
+          <a:ln w="12700">
+            <a:solidFill>
+              <a:srgbClr val="E1E5EC"/>
+            </a:solidFill>
+            <a:prstDash val="solid"/>
+          </a:ln>
+          <a:effectLst>
+            <a:outerShdw sx="100000" sy="100000" kx="0" ky="0" algn="bl" rotWithShape="0" blurRad="139700" dist="38100" dir="5400000">
+              <a:srgbClr val="9AA6BC">
+                <a:alpha val="28000"/>
+              </a:srgbClr>
+            </a:outerShdw>
+          </a:effectLst>
+        </p:spPr>
+      </p:sp>
+      <p:sp>
+        <p:nvSpPr>
+          <p:cNvPr id="26" name="Shape 20"/>
+          <p:cNvSpPr/>
+          <p:nvPr/>
+        </p:nvSpPr>
+        <p:spPr>
+          <a:xfrm>
+            <a:off x="4800600" y="4818888"/>
+            <a:ext cx="493776" cy="493776"/>
+          </a:xfrm>
+          <a:prstGeom prst="ellipse">
+            <a:avLst/>
+          </a:prstGeom>
+          <a:solidFill>
+            <a:srgbClr val="D97706"/>
+          </a:solidFill>
+          <a:ln/>
+          <a:effectLst>
+            <a:outerShdw sx="100000" sy="100000" kx="0" ky="0" algn="bl" rotWithShape="0" blurRad="139700" dist="38100" dir="5400000">
+              <a:srgbClr val="9AA6BC">
+                <a:alpha val="28000"/>
+              </a:srgbClr>
+            </a:outerShdw>
+          </a:effectLst>
+        </p:spPr>
+      </p:sp>
+      <p:pic>
+        <p:nvPicPr>
+          <p:cNvPr id="27" name="Image 4" descr="preencoded.png">    </p:cNvPr>
+          <p:cNvPicPr>
+            <a:picLocks noChangeAspect="1"/>
+          </p:cNvPicPr>
+          <p:nvPr/>
+        </p:nvPicPr>
+        <p:blipFill>
+          <a:blip r:embed="rId5"/>
+          <a:stretch>
+            <a:fillRect/>
+          </a:stretch>
+        </p:blipFill>
+        <p:spPr>
+          <a:xfrm>
+            <a:off x="4919106" y="4937394"/>
+            <a:ext cx="256764" cy="256764"/>
+          </a:xfrm>
+          <a:prstGeom prst="rect">
+            <a:avLst/>
+          </a:prstGeom>
+        </p:spPr>
+      </p:pic>
+      <p:sp>
+        <p:nvSpPr>
+          <p:cNvPr id="28" name="Text 21"/>
+          <p:cNvSpPr/>
+          <p:nvPr/>
+        </p:nvSpPr>
+        <p:spPr>
+          <a:xfrm>
+            <a:off x="5431536" y="4828032"/>
+            <a:ext cx="2258568" cy="457200"/>
+          </a:xfrm>
+          <a:prstGeom prst="rect">
+            <a:avLst/>
+          </a:prstGeom>
+          <a:noFill/>
+          <a:ln/>
+        </p:spPr>
+        <p:txBody>
+          <a:bodyPr wrap="square" rtlCol="0" anchor="ctr"/>
+          <a:lstStyle/>
+          <a:p>
+            <a:pPr indent="0" marL="0">
+              <a:buNone/>
+            </a:pPr>
+            <a:r>
+              <a:rPr lang="en-US" sz="1550" b="1" dirty="0">
+                <a:solidFill>
+                  <a:srgbClr val="16181D"/>
+                </a:solidFill>
+                <a:latin typeface="Arial" pitchFamily="34" charset="0"/>
+                <a:ea typeface="Arial" pitchFamily="34" charset="-122"/>
+                <a:cs typeface="Arial" pitchFamily="34" charset="-120"/>
+              </a:rPr>
+              <a:t>Limits</a:t>
+            </a:r>
+            <a:endParaRPr lang="en-US" sz="1550" dirty="0"/>
+          </a:p>
+        </p:txBody>
+      </p:sp>
+      <p:sp>
+        <p:nvSpPr>
+          <p:cNvPr id="29" name="Text 22"/>
+          <p:cNvSpPr/>
+          <p:nvPr/>
+        </p:nvSpPr>
+        <p:spPr>
+          <a:xfrm>
+            <a:off x="4818888" y="5449824"/>
+            <a:ext cx="2761488" cy="731520"/>
+          </a:xfrm>
+          <a:prstGeom prst="rect">
+            <a:avLst/>
+          </a:prstGeom>
+          <a:noFill/>
+          <a:ln/>
+        </p:spPr>
+        <p:txBody>
+          <a:bodyPr wrap="square" rtlCol="0" anchor="ctr"/>
+          <a:lstStyle/>
+          <a:p>
+            <a:pPr indent="0" marL="0">
+              <a:lnSpc>
+                <a:spcPts val="1600"/>
+              </a:lnSpc>
+              <a:buNone/>
+            </a:pPr>
+            <a:r>
+              <a:rPr lang="en-US" sz="1200" dirty="0">
+                <a:solidFill>
+                  <a:srgbClr val="666C7A"/>
+                </a:solidFill>
+                <a:latin typeface="Calibri" pitchFamily="34" charset="0"/>
+                <a:ea typeface="Calibri" pitchFamily="34" charset="-122"/>
+                <a:cs typeface="Calibri" pitchFamily="34" charset="-120"/>
+              </a:rPr>
+              <a:t>Rate limits, a queue cap, dedup and a key on the panel. A room of devs will test all four.</a:t>
+            </a:r>
+            <a:endParaRPr lang="en-US" sz="1200" dirty="0"/>
+          </a:p>
+        </p:txBody>
+      </p:sp>
+      <p:sp>
+        <p:nvSpPr>
+          <p:cNvPr id="30" name="Shape 23"/>
+          <p:cNvSpPr/>
+          <p:nvPr/>
+        </p:nvSpPr>
+        <p:spPr>
+          <a:xfrm>
+            <a:off x="8156448" y="4535424"/>
+            <a:ext cx="3401568" cy="1783080"/>
+          </a:xfrm>
+          <a:prstGeom prst="roundRect">
+            <a:avLst>
+              <a:gd name="adj" fmla="val 5128"/>
+            </a:avLst>
+          </a:prstGeom>
+          <a:solidFill>
+            <a:srgbClr val="F5F7FA"/>
+          </a:solidFill>
+          <a:ln w="12700">
+            <a:solidFill>
+              <a:srgbClr val="E1E5EC"/>
+            </a:solidFill>
+            <a:prstDash val="solid"/>
+          </a:ln>
+          <a:effectLst>
+            <a:outerShdw sx="100000" sy="100000" kx="0" ky="0" algn="bl" rotWithShape="0" blurRad="139700" dist="38100" dir="5400000">
+              <a:srgbClr val="9AA6BC">
+                <a:alpha val="28000"/>
+              </a:srgbClr>
+            </a:outerShdw>
+          </a:effectLst>
+        </p:spPr>
+      </p:sp>
+      <p:sp>
+        <p:nvSpPr>
+          <p:cNvPr id="31" name="Shape 24"/>
+          <p:cNvSpPr/>
+          <p:nvPr/>
+        </p:nvSpPr>
+        <p:spPr>
+          <a:xfrm>
+            <a:off x="8458200" y="4818888"/>
+            <a:ext cx="493776" cy="493776"/>
+          </a:xfrm>
+          <a:prstGeom prst="ellipse">
+            <a:avLst/>
+          </a:prstGeom>
+          <a:solidFill>
+            <a:srgbClr val="0284C7"/>
+          </a:solidFill>
+          <a:ln/>
+          <a:effectLst>
+            <a:outerShdw sx="100000" sy="100000" kx="0" ky="0" algn="bl" rotWithShape="0" blurRad="139700" dist="38100" dir="5400000">
+              <a:srgbClr val="9AA6BC">
+                <a:alpha val="28000"/>
+              </a:srgbClr>
+            </a:outerShdw>
+          </a:effectLst>
+        </p:spPr>
+      </p:sp>
+      <p:pic>
+        <p:nvPicPr>
+          <p:cNvPr id="32" name="Image 5" descr="preencoded.png">    </p:cNvPr>
+          <p:cNvPicPr>
+            <a:picLocks noChangeAspect="1"/>
+          </p:cNvPicPr>
+          <p:nvPr/>
+        </p:nvPicPr>
+        <p:blipFill>
+          <a:blip r:embed="rId6"/>
+          <a:stretch>
+            <a:fillRect/>
+          </a:stretch>
+        </p:blipFill>
+        <p:spPr>
+          <a:xfrm>
+            <a:off x="8576706" y="4937394"/>
+            <a:ext cx="256764" cy="256764"/>
+          </a:xfrm>
+          <a:prstGeom prst="rect">
+            <a:avLst/>
+          </a:prstGeom>
+        </p:spPr>
+      </p:pic>
+      <p:sp>
+        <p:nvSpPr>
+          <p:cNvPr id="33" name="Text 25"/>
+          <p:cNvSpPr/>
+          <p:nvPr/>
+        </p:nvSpPr>
+        <p:spPr>
+          <a:xfrm>
+            <a:off x="9089136" y="4828032"/>
+            <a:ext cx="2258568" cy="457200"/>
+          </a:xfrm>
+          <a:prstGeom prst="rect">
+            <a:avLst/>
+          </a:prstGeom>
+          <a:noFill/>
+          <a:ln/>
+        </p:spPr>
+        <p:txBody>
+          <a:bodyPr wrap="square" rtlCol="0" anchor="ctr"/>
+          <a:lstStyle/>
+          <a:p>
+            <a:pPr indent="0" marL="0">
+              <a:buNone/>
+            </a:pPr>
+            <a:r>
+              <a:rPr lang="en-US" sz="1550" b="1" dirty="0">
+                <a:solidFill>
+                  <a:srgbClr val="16181D"/>
+                </a:solidFill>
+                <a:latin typeface="Arial" pitchFamily="34" charset="0"/>
+                <a:ea typeface="Arial" pitchFamily="34" charset="-122"/>
+                <a:cs typeface="Arial" pitchFamily="34" charset="-120"/>
+              </a:rPr>
+              <a:t>Background work</a:t>
+            </a:r>
+            <a:endParaRPr lang="en-US" sz="1550" dirty="0"/>
+          </a:p>
+        </p:txBody>
+      </p:sp>
+      <p:sp>
+        <p:nvSpPr>
+          <p:cNvPr id="34" name="Text 26"/>
+          <p:cNvSpPr/>
+          <p:nvPr/>
+        </p:nvSpPr>
+        <p:spPr>
+          <a:xfrm>
+            <a:off x="8476488" y="5449824"/>
+            <a:ext cx="2761488" cy="731520"/>
+          </a:xfrm>
+          <a:prstGeom prst="rect">
+            <a:avLst/>
+          </a:prstGeom>
+          <a:noFill/>
+          <a:ln/>
+        </p:spPr>
+        <p:txBody>
+          <a:bodyPr wrap="square" rtlCol="0" anchor="ctr"/>
+          <a:lstStyle/>
+          <a:p>
+            <a:pPr indent="0" marL="0">
+              <a:lnSpc>
+                <a:spcPts val="1600"/>
+              </a:lnSpc>
+              <a:buNone/>
+            </a:pPr>
+            <a:r>
+              <a:rPr lang="en-US" sz="1200" dirty="0">
+                <a:solidFill>
+                  <a:srgbClr val="666C7A"/>
+                </a:solidFill>
+                <a:latin typeface="Calibri" pitchFamily="34" charset="0"/>
+                <a:ea typeface="Calibri" pitchFamily="34" charset="-122"/>
+                <a:cs typeface="Calibri" pitchFamily="34" charset="-120"/>
+              </a:rPr>
+              <a:t>The queue kept building while I talked. Scheduling is orchestration too.</a:t>
+            </a:r>
+            <a:endParaRPr lang="en-US" sz="1200" dirty="0"/>
+          </a:p>
+        </p:txBody>
+      </p:sp>
+      <p:sp>
+        <p:nvSpPr>
+          <p:cNvPr id="35" name="Text 27"/>
+          <p:cNvSpPr/>
+          <p:nvPr/>
+        </p:nvSpPr>
+        <p:spPr>
+          <a:xfrm>
+            <a:off x="1828800" y="6263640"/>
+            <a:ext cx="8534095" cy="457200"/>
+          </a:xfrm>
+          <a:prstGeom prst="rect">
+            <a:avLst/>
+          </a:prstGeom>
+          <a:noFill/>
+          <a:ln/>
+        </p:spPr>
+        <p:txBody>
+          <a:bodyPr wrap="square" rtlCol="0" anchor="ctr"/>
+          <a:lstStyle/>
+          <a:p>
+            <a:pPr algn="ctr" indent="0" marL="0">
+              <a:buNone/>
+            </a:pPr>
+            <a:r>
+              <a:rPr lang="en-US" sz="1550" dirty="0">
+                <a:solidFill>
+                  <a:srgbClr val="666C7A"/>
+                </a:solidFill>
+                <a:latin typeface="Calibri" pitchFamily="34" charset="0"/>
+                <a:ea typeface="Calibri" pitchFamily="34" charset="-122"/>
+                <a:cs typeface="Calibri" pitchFamily="34" charset="-120"/>
+              </a:rPr>
+              <a:t>None of that is prompting. </a:t>
+            </a:r>
+            <a:pPr algn="ctr" indent="0" marL="0">
+              <a:buNone/>
+            </a:pPr>
+            <a:r>
+              <a:rPr lang="en-US" sz="1550" b="1" dirty="0">
+                <a:solidFill>
+                  <a:srgbClr val="4F46E5"/>
+                </a:solidFill>
+                <a:latin typeface="Calibri" pitchFamily="34" charset="0"/>
+                <a:ea typeface="Calibri" pitchFamily="34" charset="-122"/>
+                <a:cs typeface="Calibri" pitchFamily="34" charset="-120"/>
+              </a:rPr>
+              <a:t>All of it is engineering you already know how to do.</a:t>
+            </a:r>
+            <a:endParaRPr lang="en-US" sz="1550" dirty="0"/>
           </a:p>
         </p:txBody>
       </p:sp>
@@ -18444,23 +18826,42 @@
       </p:grpSpPr>
       <p:sp>
         <p:nvSpPr>
-          <p:cNvPr id="2" name="Shape 0"/>
-          <p:cNvSpPr/>
-          <p:nvPr/>
-        </p:nvSpPr>
-        <p:spPr>
-          <a:xfrm>
-            <a:off x="859536" y="621792"/>
-            <a:ext cx="182880" cy="182880"/>
-          </a:xfrm>
-          <a:prstGeom prst="ellipse">
-            <a:avLst/>
-          </a:prstGeom>
-          <a:solidFill>
-            <a:srgbClr val="4F46E5"/>
-          </a:solidFill>
-          <a:ln/>
-        </p:spPr>
+          <p:cNvPr id="2" name="Text 0"/>
+          <p:cNvSpPr/>
+          <p:nvPr/>
+        </p:nvSpPr>
+        <p:spPr>
+          <a:xfrm>
+            <a:off x="841248" y="566928"/>
+            <a:ext cx="9144000" cy="292608"/>
+          </a:xfrm>
+          <a:prstGeom prst="rect">
+            <a:avLst/>
+          </a:prstGeom>
+          <a:noFill/>
+          <a:ln/>
+        </p:spPr>
+        <p:txBody>
+          <a:bodyPr wrap="square" rtlCol="0" anchor="ctr"/>
+          <a:lstStyle/>
+          <a:p>
+            <a:pPr indent="0" marL="0">
+              <a:buNone/>
+            </a:pPr>
+            <a:r>
+              <a:rPr lang="en-US" sz="1100" b="1" spc="300" kern="0" dirty="0">
+                <a:solidFill>
+                  <a:srgbClr val="D97706"/>
+                </a:solidFill>
+                <a:latin typeface="Arial" pitchFamily="34" charset="0"/>
+                <a:ea typeface="Arial" pitchFamily="34" charset="-122"/>
+                <a:cs typeface="Arial" pitchFamily="34" charset="-120"/>
+              </a:rPr>
+              <a:t>THE REVEAL</a:t>
+            </a:r>
+            <a:endParaRPr lang="en-US" sz="1100" dirty="0"/>
+          </a:p>
+        </p:txBody>
       </p:sp>
       <p:sp>
         <p:nvSpPr>
@@ -18470,63 +18871,232 @@
         </p:nvSpPr>
         <p:spPr>
           <a:xfrm>
-            <a:off x="1207008" y="566928"/>
-            <a:ext cx="4572000" cy="292608"/>
-          </a:xfrm>
-          <a:prstGeom prst="rect">
-            <a:avLst/>
-          </a:prstGeom>
-          <a:noFill/>
-          <a:ln/>
-        </p:spPr>
-        <p:txBody>
-          <a:bodyPr wrap="square" rtlCol="0" anchor="ctr"/>
-          <a:lstStyle/>
-          <a:p>
-            <a:pPr indent="0" marL="0">
-              <a:buNone/>
-            </a:pPr>
-            <a:r>
-              <a:rPr lang="en-US" sz="1200" spc="400" kern="0" dirty="0">
+            <a:off x="841248" y="1463040"/>
+            <a:ext cx="7680960" cy="1828800"/>
+          </a:xfrm>
+          <a:prstGeom prst="rect">
+            <a:avLst/>
+          </a:prstGeom>
+          <a:noFill/>
+          <a:ln/>
+        </p:spPr>
+        <p:txBody>
+          <a:bodyPr wrap="square" rtlCol="0" anchor="ctr"/>
+          <a:lstStyle/>
+          <a:p>
+            <a:pPr indent="0" marL="0">
+              <a:lnSpc>
+                <a:spcPts val="5000"/>
+              </a:lnSpc>
+              <a:buNone/>
+            </a:pPr>
+            <a:r>
+              <a:rPr lang="en-US" sz="4000" b="1" dirty="0">
+                <a:solidFill>
+                  <a:srgbClr val="16181D"/>
+                </a:solidFill>
+                <a:latin typeface="Arial" pitchFamily="34" charset="0"/>
+                <a:ea typeface="Arial" pitchFamily="34" charset="-122"/>
+                <a:cs typeface="Arial" pitchFamily="34" charset="-120"/>
+              </a:rPr>
+              <a:t>You have been </a:t>
+            </a:r>
+            <a:pPr indent="0" marL="0">
+              <a:lnSpc>
+                <a:spcPts val="5000"/>
+              </a:lnSpc>
+              <a:buNone/>
+            </a:pPr>
+            <a:r>
+              <a:rPr lang="en-US" sz="4000" b="1" dirty="0">
                 <a:solidFill>
                   <a:srgbClr val="4F46E5"/>
+                </a:solidFill>
+                <a:latin typeface="Arial" pitchFamily="34" charset="0"/>
+                <a:ea typeface="Arial" pitchFamily="34" charset="-122"/>
+                <a:cs typeface="Arial" pitchFamily="34" charset="-120"/>
+              </a:rPr>
+              <a:t>employing them</a:t>
+            </a:r>
+            <a:pPr indent="0" marL="0">
+              <a:lnSpc>
+                <a:spcPts val="5000"/>
+              </a:lnSpc>
+              <a:buNone/>
+            </a:pPr>
+            <a:endParaRPr lang="en-US" sz="4000" dirty="0"/>
+          </a:p>
+          <a:p>
+            <a:pPr indent="0" marL="0">
+              <a:lnSpc>
+                <a:spcPts val="5000"/>
+              </a:lnSpc>
+              <a:buNone/>
+            </a:pPr>
+            <a:r>
+              <a:rPr lang="en-US" sz="4000" b="1" dirty="0">
+                <a:solidFill>
+                  <a:srgbClr val="16181D"/>
+                </a:solidFill>
+                <a:latin typeface="Arial" pitchFamily="34" charset="0"/>
+                <a:ea typeface="Arial" pitchFamily="34" charset="-122"/>
+                <a:cs typeface="Arial" pitchFamily="34" charset="-120"/>
+              </a:rPr>
+              <a:t>this whole time.</a:t>
+            </a:r>
+            <a:endParaRPr lang="en-US" sz="4000" dirty="0"/>
+          </a:p>
+        </p:txBody>
+      </p:sp>
+      <p:sp>
+        <p:nvSpPr>
+          <p:cNvPr id="4" name="Text 2"/>
+          <p:cNvSpPr/>
+          <p:nvPr/>
+        </p:nvSpPr>
+        <p:spPr>
+          <a:xfrm>
+            <a:off x="841248" y="3520440"/>
+            <a:ext cx="5943600" cy="1463040"/>
+          </a:xfrm>
+          <a:prstGeom prst="rect">
+            <a:avLst/>
+          </a:prstGeom>
+          <a:noFill/>
+          <a:ln/>
+        </p:spPr>
+        <p:txBody>
+          <a:bodyPr wrap="square" rtlCol="0" anchor="ctr"/>
+          <a:lstStyle/>
+          <a:p>
+            <a:pPr indent="0" marL="0">
+              <a:lnSpc>
+                <a:spcPts val="2700"/>
+              </a:lnSpc>
+              <a:buNone/>
+            </a:pPr>
+            <a:r>
+              <a:rPr lang="en-US" sz="1700" dirty="0">
+                <a:solidFill>
+                  <a:srgbClr val="666C7A"/>
+                </a:solidFill>
+                <a:latin typeface="Calibri" pitchFamily="34" charset="0"/>
+                <a:ea typeface="Calibri" pitchFamily="34" charset="-122"/>
+                <a:cs typeface="Calibri" pitchFamily="34" charset="-120"/>
+              </a:rPr>
+              <a:t>Every idea you sent went straight into the queue. While I was talking about prompts and levers and loops, seven agents on this laptop were quietly building a landing page for each one.</a:t>
+            </a:r>
+            <a:endParaRPr lang="en-US" sz="1700" dirty="0"/>
+          </a:p>
+        </p:txBody>
+      </p:sp>
+      <p:sp>
+        <p:nvSpPr>
+          <p:cNvPr id="5" name="Text 3"/>
+          <p:cNvSpPr/>
+          <p:nvPr/>
+        </p:nvSpPr>
+        <p:spPr>
+          <a:xfrm>
+            <a:off x="841248" y="5120640"/>
+            <a:ext cx="1828800" cy="685800"/>
+          </a:xfrm>
+          <a:prstGeom prst="rect">
+            <a:avLst/>
+          </a:prstGeom>
+          <a:noFill/>
+          <a:ln/>
+        </p:spPr>
+        <p:txBody>
+          <a:bodyPr wrap="square" rtlCol="0" anchor="ctr"/>
+          <a:lstStyle/>
+          <a:p>
+            <a:pPr indent="0" marL="0">
+              <a:buNone/>
+            </a:pPr>
+            <a:r>
+              <a:rPr lang="en-US" sz="3800" b="1" dirty="0">
+                <a:solidFill>
+                  <a:srgbClr val="4F46E5"/>
+                </a:solidFill>
+                <a:latin typeface="Arial" pitchFamily="34" charset="0"/>
+                <a:ea typeface="Arial" pitchFamily="34" charset="-122"/>
+                <a:cs typeface="Arial" pitchFamily="34" charset="-120"/>
+              </a:rPr>
+              <a:t>7</a:t>
+            </a:r>
+            <a:endParaRPr lang="en-US" sz="3800" dirty="0"/>
+          </a:p>
+        </p:txBody>
+      </p:sp>
+      <p:sp>
+        <p:nvSpPr>
+          <p:cNvPr id="6" name="Text 4"/>
+          <p:cNvSpPr/>
+          <p:nvPr/>
+        </p:nvSpPr>
+        <p:spPr>
+          <a:xfrm>
+            <a:off x="841248" y="5779008"/>
+            <a:ext cx="1920240" cy="548640"/>
+          </a:xfrm>
+          <a:prstGeom prst="rect">
+            <a:avLst/>
+          </a:prstGeom>
+          <a:noFill/>
+          <a:ln/>
+        </p:spPr>
+        <p:txBody>
+          <a:bodyPr wrap="square" rtlCol="0" anchor="ctr"/>
+          <a:lstStyle/>
+          <a:p>
+            <a:pPr indent="0" marL="0">
+              <a:lnSpc>
+                <a:spcPts val="1200"/>
+              </a:lnSpc>
+              <a:buNone/>
+            </a:pPr>
+            <a:r>
+              <a:rPr lang="en-US" sz="950" spc="150" kern="0" dirty="0">
+                <a:solidFill>
+                  <a:srgbClr val="666C7A"/>
                 </a:solidFill>
                 <a:latin typeface="Consolas" pitchFamily="34" charset="0"/>
                 <a:ea typeface="Consolas" pitchFamily="34" charset="-122"/>
                 <a:cs typeface="Consolas" pitchFamily="34" charset="-120"/>
               </a:rPr>
-              <a:t>THE WALL</a:t>
-            </a:r>
-            <a:endParaRPr lang="en-US" sz="1200" dirty="0"/>
-          </a:p>
-        </p:txBody>
-      </p:sp>
-      <p:sp>
-        <p:nvSpPr>
-          <p:cNvPr id="4" name="Text 2"/>
-          <p:cNvSpPr/>
-          <p:nvPr/>
-        </p:nvSpPr>
-        <p:spPr>
-          <a:xfrm>
-            <a:off x="0" y="1463040"/>
-            <a:ext cx="12191695" cy="1005840"/>
-          </a:xfrm>
-          <a:prstGeom prst="rect">
-            <a:avLst/>
-          </a:prstGeom>
-          <a:noFill/>
-          <a:ln/>
-        </p:spPr>
-        <p:txBody>
-          <a:bodyPr wrap="square" rtlCol="0" anchor="ctr"/>
-          <a:lstStyle/>
-          <a:p>
-            <a:pPr algn="ctr" indent="0" marL="0">
-              <a:buNone/>
-            </a:pPr>
-            <a:r>
-              <a:rPr lang="en-US" sz="4600" b="1" dirty="0">
+              <a:t>AGENTS PER IDEA</a:t>
+            </a:r>
+            <a:endParaRPr lang="en-US" sz="950" dirty="0"/>
+          </a:p>
+        </p:txBody>
+      </p:sp>
+      <p:sp>
+        <p:nvSpPr>
+          <p:cNvPr id="7" name="Text 5"/>
+          <p:cNvSpPr/>
+          <p:nvPr/>
+        </p:nvSpPr>
+        <p:spPr>
+          <a:xfrm>
+            <a:off x="2852928" y="5120640"/>
+            <a:ext cx="1828800" cy="685800"/>
+          </a:xfrm>
+          <a:prstGeom prst="rect">
+            <a:avLst/>
+          </a:prstGeom>
+          <a:noFill/>
+          <a:ln/>
+        </p:spPr>
+        <p:txBody>
+          <a:bodyPr wrap="square" rtlCol="0" anchor="ctr"/>
+          <a:lstStyle/>
+          <a:p>
+            <a:pPr indent="0" marL="0">
+              <a:buNone/>
+            </a:pPr>
+            <a:r>
+              <a:rPr lang="en-US" sz="3800" b="1" dirty="0">
                 <a:solidFill>
                   <a:srgbClr val="16181D"/>
                 </a:solidFill>
@@ -18534,87 +19104,157 @@
                 <a:ea typeface="Arial" pitchFamily="34" charset="-122"/>
                 <a:cs typeface="Arial" pitchFamily="34" charset="-120"/>
               </a:rPr>
-              <a:t>Everyone's, </a:t>
-            </a:r>
-            <a:pPr algn="ctr" indent="0" marL="0">
-              <a:buNone/>
-            </a:pPr>
-            <a:r>
-              <a:rPr lang="en-US" sz="4600" b="1" dirty="0">
-                <a:solidFill>
-                  <a:srgbClr val="4F46E5"/>
+              <a:t>0</a:t>
+            </a:r>
+            <a:endParaRPr lang="en-US" sz="3800" dirty="0"/>
+          </a:p>
+        </p:txBody>
+      </p:sp>
+      <p:sp>
+        <p:nvSpPr>
+          <p:cNvPr id="8" name="Text 6"/>
+          <p:cNvSpPr/>
+          <p:nvPr/>
+        </p:nvSpPr>
+        <p:spPr>
+          <a:xfrm>
+            <a:off x="2852928" y="5779008"/>
+            <a:ext cx="1920240" cy="548640"/>
+          </a:xfrm>
+          <a:prstGeom prst="rect">
+            <a:avLst/>
+          </a:prstGeom>
+          <a:noFill/>
+          <a:ln/>
+        </p:spPr>
+        <p:txBody>
+          <a:bodyPr wrap="square" rtlCol="0" anchor="ctr"/>
+          <a:lstStyle/>
+          <a:p>
+            <a:pPr indent="0" marL="0">
+              <a:lnSpc>
+                <a:spcPts val="1200"/>
+              </a:lnSpc>
+              <a:buNone/>
+            </a:pPr>
+            <a:r>
+              <a:rPr lang="en-US" sz="950" spc="150" kern="0" dirty="0">
+                <a:solidFill>
+                  <a:srgbClr val="666C7A"/>
+                </a:solidFill>
+                <a:latin typeface="Consolas" pitchFamily="34" charset="0"/>
+                <a:ea typeface="Consolas" pitchFamily="34" charset="-122"/>
+                <a:cs typeface="Consolas" pitchFamily="34" charset="-120"/>
+              </a:rPr>
+              <a:t>CLOUD CALLS</a:t>
+            </a:r>
+            <a:endParaRPr lang="en-US" sz="950" dirty="0"/>
+          </a:p>
+        </p:txBody>
+      </p:sp>
+      <p:sp>
+        <p:nvSpPr>
+          <p:cNvPr id="9" name="Text 7"/>
+          <p:cNvSpPr/>
+          <p:nvPr/>
+        </p:nvSpPr>
+        <p:spPr>
+          <a:xfrm>
+            <a:off x="4590288" y="5120640"/>
+            <a:ext cx="1828800" cy="685800"/>
+          </a:xfrm>
+          <a:prstGeom prst="rect">
+            <a:avLst/>
+          </a:prstGeom>
+          <a:noFill/>
+          <a:ln/>
+        </p:spPr>
+        <p:txBody>
+          <a:bodyPr wrap="square" rtlCol="0" anchor="ctr"/>
+          <a:lstStyle/>
+          <a:p>
+            <a:pPr indent="0" marL="0">
+              <a:buNone/>
+            </a:pPr>
+            <a:r>
+              <a:rPr lang="en-US" sz="3800" b="1" dirty="0">
+                <a:solidFill>
+                  <a:srgbClr val="16181D"/>
                 </a:solidFill>
                 <a:latin typeface="Arial" pitchFamily="34" charset="0"/>
                 <a:ea typeface="Arial" pitchFamily="34" charset="-122"/>
                 <a:cs typeface="Arial" pitchFamily="34" charset="-120"/>
               </a:rPr>
-              <a:t>all at once.</a:t>
-            </a:r>
-            <a:endParaRPr lang="en-US" sz="4600" dirty="0"/>
-          </a:p>
-        </p:txBody>
-      </p:sp>
-      <p:sp>
-        <p:nvSpPr>
-          <p:cNvPr id="5" name="Text 3"/>
-          <p:cNvSpPr/>
-          <p:nvPr/>
-        </p:nvSpPr>
-        <p:spPr>
-          <a:xfrm>
-            <a:off x="0" y="2606040"/>
-            <a:ext cx="12191695" cy="457200"/>
-          </a:xfrm>
-          <a:prstGeom prst="rect">
-            <a:avLst/>
-          </a:prstGeom>
-          <a:noFill/>
-          <a:ln/>
-        </p:spPr>
-        <p:txBody>
-          <a:bodyPr wrap="square" rtlCol="0" anchor="ctr"/>
-          <a:lstStyle/>
-          <a:p>
-            <a:pPr algn="ctr" indent="0" marL="0">
-              <a:buNone/>
-            </a:pPr>
-            <a:r>
-              <a:rPr lang="en-US" sz="1900" dirty="0">
+              <a:t>1</a:t>
+            </a:r>
+            <a:endParaRPr lang="en-US" sz="3800" dirty="0"/>
+          </a:p>
+        </p:txBody>
+      </p:sp>
+      <p:sp>
+        <p:nvSpPr>
+          <p:cNvPr id="10" name="Text 8"/>
+          <p:cNvSpPr/>
+          <p:nvPr/>
+        </p:nvSpPr>
+        <p:spPr>
+          <a:xfrm>
+            <a:off x="4590288" y="5779008"/>
+            <a:ext cx="1920240" cy="548640"/>
+          </a:xfrm>
+          <a:prstGeom prst="rect">
+            <a:avLst/>
+          </a:prstGeom>
+          <a:noFill/>
+          <a:ln/>
+        </p:spPr>
+        <p:txBody>
+          <a:bodyPr wrap="square" rtlCol="0" anchor="ctr"/>
+          <a:lstStyle/>
+          <a:p>
+            <a:pPr indent="0" marL="0">
+              <a:lnSpc>
+                <a:spcPts val="1200"/>
+              </a:lnSpc>
+              <a:buNone/>
+            </a:pPr>
+            <a:r>
+              <a:rPr lang="en-US" sz="950" spc="150" kern="0" dirty="0">
                 <a:solidFill>
                   <a:srgbClr val="666C7A"/>
                 </a:solidFill>
-                <a:latin typeface="Calibri" pitchFamily="34" charset="0"/>
-                <a:ea typeface="Calibri" pitchFamily="34" charset="-122"/>
-                <a:cs typeface="Calibri" pitchFamily="34" charset="-120"/>
-              </a:rPr>
-              <a:t>Find yours. Your name is on it.</a:t>
-            </a:r>
-            <a:endParaRPr lang="en-US" sz="1900" dirty="0"/>
-          </a:p>
-        </p:txBody>
-      </p:sp>
-      <p:sp>
-        <p:nvSpPr>
-          <p:cNvPr id="6" name="Shape 4"/>
-          <p:cNvSpPr/>
-          <p:nvPr/>
-        </p:nvSpPr>
-        <p:spPr>
-          <a:xfrm>
-            <a:off x="783184" y="3429000"/>
-            <a:ext cx="1920240" cy="1371600"/>
+                <a:latin typeface="Consolas" pitchFamily="34" charset="0"/>
+                <a:ea typeface="Consolas" pitchFamily="34" charset="-122"/>
+                <a:cs typeface="Consolas" pitchFamily="34" charset="-120"/>
+              </a:rPr>
+              <a:t>LAPTOP, STILL WARM</a:t>
+            </a:r>
+            <a:endParaRPr lang="en-US" sz="950" dirty="0"/>
+          </a:p>
+        </p:txBody>
+      </p:sp>
+      <p:sp>
+        <p:nvSpPr>
+          <p:cNvPr id="11" name="Shape 9"/>
+          <p:cNvSpPr/>
+          <p:nvPr/>
+        </p:nvSpPr>
+        <p:spPr>
+          <a:xfrm>
+            <a:off x="7680960" y="1737360"/>
+            <a:ext cx="3657600" cy="1051560"/>
           </a:xfrm>
           <a:prstGeom prst="roundRect">
             <a:avLst>
-              <a:gd name="adj" fmla="val 8000"/>
+              <a:gd name="adj" fmla="val 8696"/>
             </a:avLst>
           </a:prstGeom>
           <a:solidFill>
             <a:srgbClr val="F5F7FA"/>
           </a:solidFill>
-          <a:ln w="17780">
+          <a:ln w="12700">
             <a:solidFill>
-              <a:srgbClr val="4F46E5"/>
+              <a:srgbClr val="E1E5EC"/>
             </a:solidFill>
             <a:prstDash val="solid"/>
           </a:ln>
@@ -18629,30 +19269,81 @@
       </p:sp>
       <p:sp>
         <p:nvSpPr>
-          <p:cNvPr id="7" name="Text 5"/>
-          <p:cNvSpPr/>
-          <p:nvPr/>
-        </p:nvSpPr>
-        <p:spPr>
-          <a:xfrm>
-            <a:off x="783184" y="3429000"/>
-            <a:ext cx="1920240" cy="1371600"/>
-          </a:xfrm>
-          <a:prstGeom prst="rect">
-            <a:avLst/>
-          </a:prstGeom>
-          <a:noFill/>
-          <a:ln/>
-        </p:spPr>
-        <p:txBody>
-          <a:bodyPr wrap="square" rtlCol="0" anchor="ctr"/>
-          <a:lstStyle/>
-          <a:p>
-            <a:pPr algn="ctr" indent="0" marL="0">
-              <a:buNone/>
-            </a:pPr>
-            <a:r>
-              <a:rPr lang="en-US" sz="1500" b="1" dirty="0">
+          <p:cNvPr id="12" name="Shape 10"/>
+          <p:cNvSpPr/>
+          <p:nvPr/>
+        </p:nvSpPr>
+        <p:spPr>
+          <a:xfrm>
+            <a:off x="7973568" y="1988820"/>
+            <a:ext cx="548640" cy="548640"/>
+          </a:xfrm>
+          <a:prstGeom prst="ellipse">
+            <a:avLst/>
+          </a:prstGeom>
+          <a:solidFill>
+            <a:srgbClr val="4F46E5"/>
+          </a:solidFill>
+          <a:ln/>
+          <a:effectLst>
+            <a:outerShdw sx="100000" sy="100000" kx="0" ky="0" algn="bl" rotWithShape="0" blurRad="139700" dist="38100" dir="5400000">
+              <a:srgbClr val="9AA6BC">
+                <a:alpha val="28000"/>
+              </a:srgbClr>
+            </a:outerShdw>
+          </a:effectLst>
+        </p:spPr>
+      </p:sp>
+      <p:pic>
+        <p:nvPicPr>
+          <p:cNvPr id="13" name="Image 0" descr="preencoded.png">    </p:cNvPr>
+          <p:cNvPicPr>
+            <a:picLocks noChangeAspect="1"/>
+          </p:cNvPicPr>
+          <p:nvPr/>
+        </p:nvPicPr>
+        <p:blipFill>
+          <a:blip r:embed="rId1"/>
+          <a:stretch>
+            <a:fillRect/>
+          </a:stretch>
+        </p:blipFill>
+        <p:spPr>
+          <a:xfrm>
+            <a:off x="8105242" y="2120494"/>
+            <a:ext cx="285293" cy="285293"/>
+          </a:xfrm>
+          <a:prstGeom prst="rect">
+            <a:avLst/>
+          </a:prstGeom>
+        </p:spPr>
+      </p:pic>
+      <p:sp>
+        <p:nvSpPr>
+          <p:cNvPr id="14" name="Text 11"/>
+          <p:cNvSpPr/>
+          <p:nvPr/>
+        </p:nvSpPr>
+        <p:spPr>
+          <a:xfrm>
+            <a:off x="8732520" y="1737360"/>
+            <a:ext cx="2468880" cy="1051560"/>
+          </a:xfrm>
+          <a:prstGeom prst="rect">
+            <a:avLst/>
+          </a:prstGeom>
+          <a:noFill/>
+          <a:ln/>
+        </p:spPr>
+        <p:txBody>
+          <a:bodyPr wrap="square" rtlCol="0" anchor="ctr"/>
+          <a:lstStyle/>
+          <a:p>
+            <a:pPr indent="0" marL="0">
+              <a:buNone/>
+            </a:pPr>
+            <a:r>
+              <a:rPr lang="en-US" sz="1700" b="1" dirty="0">
                 <a:solidFill>
                   <a:srgbClr val="16181D"/>
                 </a:solidFill>
@@ -18660,34 +19351,58 @@
                 <a:ea typeface="Arial" pitchFamily="34" charset="-122"/>
                 <a:cs typeface="Arial" pitchFamily="34" charset="-120"/>
               </a:rPr>
-              <a:t>a name</a:t>
-            </a:r>
-            <a:endParaRPr lang="en-US" sz="1500" dirty="0"/>
-          </a:p>
-        </p:txBody>
-      </p:sp>
-      <p:sp>
-        <p:nvSpPr>
-          <p:cNvPr id="8" name="Shape 6"/>
-          <p:cNvSpPr/>
-          <p:nvPr/>
-        </p:nvSpPr>
-        <p:spPr>
-          <a:xfrm>
-            <a:off x="2959456" y="3429000"/>
-            <a:ext cx="1920240" cy="1371600"/>
+              <a:t>you sent it</a:t>
+            </a:r>
+            <a:endParaRPr lang="en-US" sz="1700" dirty="0"/>
+          </a:p>
+        </p:txBody>
+      </p:sp>
+      <p:sp>
+        <p:nvSpPr>
+          <p:cNvPr id="15" name="Shape 12"/>
+          <p:cNvSpPr/>
+          <p:nvPr/>
+        </p:nvSpPr>
+        <p:spPr>
+          <a:xfrm>
+            <a:off x="9509760" y="2788920"/>
+            <a:ext cx="0" cy="320040"/>
+          </a:xfrm>
+          <a:prstGeom prst="line">
+            <a:avLst/>
+          </a:prstGeom>
+          <a:noFill/>
+          <a:ln w="20320">
+            <a:solidFill>
+              <a:srgbClr val="9AA1B0"/>
+            </a:solidFill>
+            <a:prstDash val="solid"/>
+            <a:tailEnd type="triangle"/>
+          </a:ln>
+        </p:spPr>
+      </p:sp>
+      <p:sp>
+        <p:nvSpPr>
+          <p:cNvPr id="16" name="Shape 13"/>
+          <p:cNvSpPr/>
+          <p:nvPr/>
+        </p:nvSpPr>
+        <p:spPr>
+          <a:xfrm>
+            <a:off x="7680960" y="3108960"/>
+            <a:ext cx="3657600" cy="1051560"/>
           </a:xfrm>
           <a:prstGeom prst="roundRect">
             <a:avLst>
-              <a:gd name="adj" fmla="val 8000"/>
+              <a:gd name="adj" fmla="val 8696"/>
             </a:avLst>
           </a:prstGeom>
           <a:solidFill>
             <a:srgbClr val="F5F7FA"/>
           </a:solidFill>
-          <a:ln w="17780">
+          <a:ln w="12700">
             <a:solidFill>
-              <a:srgbClr val="7C3AED"/>
+              <a:srgbClr val="E1E5EC"/>
             </a:solidFill>
             <a:prstDash val="solid"/>
           </a:ln>
@@ -18702,30 +19417,81 @@
       </p:sp>
       <p:sp>
         <p:nvSpPr>
-          <p:cNvPr id="9" name="Text 7"/>
-          <p:cNvSpPr/>
-          <p:nvPr/>
-        </p:nvSpPr>
-        <p:spPr>
-          <a:xfrm>
-            <a:off x="2959456" y="3429000"/>
-            <a:ext cx="1920240" cy="1371600"/>
-          </a:xfrm>
-          <a:prstGeom prst="rect">
-            <a:avLst/>
-          </a:prstGeom>
-          <a:noFill/>
-          <a:ln/>
-        </p:spPr>
-        <p:txBody>
-          <a:bodyPr wrap="square" rtlCol="0" anchor="ctr"/>
-          <a:lstStyle/>
-          <a:p>
-            <a:pPr algn="ctr" indent="0" marL="0">
-              <a:buNone/>
-            </a:pPr>
-            <a:r>
-              <a:rPr lang="en-US" sz="1500" b="1" dirty="0">
+          <p:cNvPr id="17" name="Shape 14"/>
+          <p:cNvSpPr/>
+          <p:nvPr/>
+        </p:nvSpPr>
+        <p:spPr>
+          <a:xfrm>
+            <a:off x="7973568" y="3360420"/>
+            <a:ext cx="548640" cy="548640"/>
+          </a:xfrm>
+          <a:prstGeom prst="ellipse">
+            <a:avLst/>
+          </a:prstGeom>
+          <a:solidFill>
+            <a:srgbClr val="7C3AED"/>
+          </a:solidFill>
+          <a:ln/>
+          <a:effectLst>
+            <a:outerShdw sx="100000" sy="100000" kx="0" ky="0" algn="bl" rotWithShape="0" blurRad="139700" dist="38100" dir="5400000">
+              <a:srgbClr val="9AA6BC">
+                <a:alpha val="28000"/>
+              </a:srgbClr>
+            </a:outerShdw>
+          </a:effectLst>
+        </p:spPr>
+      </p:sp>
+      <p:pic>
+        <p:nvPicPr>
+          <p:cNvPr id="18" name="Image 1" descr="preencoded.png">    </p:cNvPr>
+          <p:cNvPicPr>
+            <a:picLocks noChangeAspect="1"/>
+          </p:cNvPicPr>
+          <p:nvPr/>
+        </p:nvPicPr>
+        <p:blipFill>
+          <a:blip r:embed="rId2"/>
+          <a:stretch>
+            <a:fillRect/>
+          </a:stretch>
+        </p:blipFill>
+        <p:spPr>
+          <a:xfrm>
+            <a:off x="8105242" y="3492094"/>
+            <a:ext cx="285293" cy="285293"/>
+          </a:xfrm>
+          <a:prstGeom prst="rect">
+            <a:avLst/>
+          </a:prstGeom>
+        </p:spPr>
+      </p:pic>
+      <p:sp>
+        <p:nvSpPr>
+          <p:cNvPr id="19" name="Text 15"/>
+          <p:cNvSpPr/>
+          <p:nvPr/>
+        </p:nvSpPr>
+        <p:spPr>
+          <a:xfrm>
+            <a:off x="8732520" y="3108960"/>
+            <a:ext cx="2468880" cy="1051560"/>
+          </a:xfrm>
+          <a:prstGeom prst="rect">
+            <a:avLst/>
+          </a:prstGeom>
+          <a:noFill/>
+          <a:ln/>
+        </p:spPr>
+        <p:txBody>
+          <a:bodyPr wrap="square" rtlCol="0" anchor="ctr"/>
+          <a:lstStyle/>
+          <a:p>
+            <a:pPr indent="0" marL="0">
+              <a:buNone/>
+            </a:pPr>
+            <a:r>
+              <a:rPr lang="en-US" sz="1700" b="1" dirty="0">
                 <a:solidFill>
                   <a:srgbClr val="16181D"/>
                 </a:solidFill>
@@ -18733,34 +19499,58 @@
                 <a:ea typeface="Arial" pitchFamily="34" charset="-122"/>
                 <a:cs typeface="Arial" pitchFamily="34" charset="-120"/>
               </a:rPr>
-              <a:t>artwork</a:t>
-            </a:r>
-            <a:endParaRPr lang="en-US" sz="1500" dirty="0"/>
-          </a:p>
-        </p:txBody>
-      </p:sp>
-      <p:sp>
-        <p:nvSpPr>
-          <p:cNvPr id="10" name="Shape 8"/>
-          <p:cNvSpPr/>
-          <p:nvPr/>
-        </p:nvSpPr>
-        <p:spPr>
-          <a:xfrm>
-            <a:off x="5135728" y="3429000"/>
-            <a:ext cx="1920240" cy="1371600"/>
+              <a:t>they built it</a:t>
+            </a:r>
+            <a:endParaRPr lang="en-US" sz="1700" dirty="0"/>
+          </a:p>
+        </p:txBody>
+      </p:sp>
+      <p:sp>
+        <p:nvSpPr>
+          <p:cNvPr id="20" name="Shape 16"/>
+          <p:cNvSpPr/>
+          <p:nvPr/>
+        </p:nvSpPr>
+        <p:spPr>
+          <a:xfrm>
+            <a:off x="9509760" y="4160520"/>
+            <a:ext cx="0" cy="320040"/>
+          </a:xfrm>
+          <a:prstGeom prst="line">
+            <a:avLst/>
+          </a:prstGeom>
+          <a:noFill/>
+          <a:ln w="20320">
+            <a:solidFill>
+              <a:srgbClr val="9AA1B0"/>
+            </a:solidFill>
+            <a:prstDash val="solid"/>
+            <a:tailEnd type="triangle"/>
+          </a:ln>
+        </p:spPr>
+      </p:sp>
+      <p:sp>
+        <p:nvSpPr>
+          <p:cNvPr id="21" name="Shape 17"/>
+          <p:cNvSpPr/>
+          <p:nvPr/>
+        </p:nvSpPr>
+        <p:spPr>
+          <a:xfrm>
+            <a:off x="7680960" y="4480560"/>
+            <a:ext cx="3657600" cy="1051560"/>
           </a:xfrm>
           <a:prstGeom prst="roundRect">
             <a:avLst>
-              <a:gd name="adj" fmla="val 8000"/>
+              <a:gd name="adj" fmla="val 8696"/>
             </a:avLst>
           </a:prstGeom>
           <a:solidFill>
             <a:srgbClr val="F5F7FA"/>
           </a:solidFill>
-          <a:ln w="17780">
+          <a:ln w="12700">
             <a:solidFill>
-              <a:srgbClr val="0F9E8E"/>
+              <a:srgbClr val="E1E5EC"/>
             </a:solidFill>
             <a:prstDash val="solid"/>
           </a:ln>
@@ -18775,68 +19565,22 @@
       </p:sp>
       <p:sp>
         <p:nvSpPr>
-          <p:cNvPr id="11" name="Text 9"/>
-          <p:cNvSpPr/>
-          <p:nvPr/>
-        </p:nvSpPr>
-        <p:spPr>
-          <a:xfrm>
-            <a:off x="5135728" y="3429000"/>
-            <a:ext cx="1920240" cy="1371600"/>
-          </a:xfrm>
-          <a:prstGeom prst="rect">
-            <a:avLst/>
-          </a:prstGeom>
-          <a:noFill/>
-          <a:ln/>
-        </p:spPr>
-        <p:txBody>
-          <a:bodyPr wrap="square" rtlCol="0" anchor="ctr"/>
-          <a:lstStyle/>
-          <a:p>
-            <a:pPr algn="ctr" indent="0" marL="0">
-              <a:buNone/>
-            </a:pPr>
-            <a:r>
-              <a:rPr lang="en-US" sz="1500" b="1" dirty="0">
-                <a:solidFill>
-                  <a:srgbClr val="16181D"/>
-                </a:solidFill>
-                <a:latin typeface="Arial" pitchFamily="34" charset="0"/>
-                <a:ea typeface="Arial" pitchFamily="34" charset="-122"/>
-                <a:cs typeface="Arial" pitchFamily="34" charset="-120"/>
-              </a:rPr>
-              <a:t>copy</a:t>
-            </a:r>
-            <a:endParaRPr lang="en-US" sz="1500" dirty="0"/>
-          </a:p>
-        </p:txBody>
-      </p:sp>
-      <p:sp>
-        <p:nvSpPr>
-          <p:cNvPr id="12" name="Shape 10"/>
-          <p:cNvSpPr/>
-          <p:nvPr/>
-        </p:nvSpPr>
-        <p:spPr>
-          <a:xfrm>
-            <a:off x="7312000" y="3429000"/>
-            <a:ext cx="1920240" cy="1371600"/>
-          </a:xfrm>
-          <a:prstGeom prst="roundRect">
-            <a:avLst>
-              <a:gd name="adj" fmla="val 8000"/>
-            </a:avLst>
+          <p:cNvPr id="22" name="Shape 18"/>
+          <p:cNvSpPr/>
+          <p:nvPr/>
+        </p:nvSpPr>
+        <p:spPr>
+          <a:xfrm>
+            <a:off x="7973568" y="4732020"/>
+            <a:ext cx="548640" cy="548640"/>
+          </a:xfrm>
+          <a:prstGeom prst="ellipse">
+            <a:avLst/>
           </a:prstGeom>
           <a:solidFill>
-            <a:srgbClr val="F5F7FA"/>
+            <a:srgbClr val="0F9E8E"/>
           </a:solidFill>
-          <a:ln w="17780">
-            <a:solidFill>
-              <a:srgbClr val="D97706"/>
-            </a:solidFill>
-            <a:prstDash val="solid"/>
-          </a:ln>
+          <a:ln/>
           <a:effectLst>
             <a:outerShdw sx="100000" sy="100000" kx="0" ky="0" algn="bl" rotWithShape="0" blurRad="139700" dist="38100" dir="5400000">
               <a:srgbClr val="9AA6BC">
@@ -18846,32 +19590,56 @@
           </a:effectLst>
         </p:spPr>
       </p:sp>
-      <p:sp>
-        <p:nvSpPr>
-          <p:cNvPr id="13" name="Text 11"/>
-          <p:cNvSpPr/>
-          <p:nvPr/>
-        </p:nvSpPr>
-        <p:spPr>
-          <a:xfrm>
-            <a:off x="7312000" y="3429000"/>
-            <a:ext cx="1920240" cy="1371600"/>
-          </a:xfrm>
-          <a:prstGeom prst="rect">
-            <a:avLst/>
-          </a:prstGeom>
-          <a:noFill/>
-          <a:ln/>
-        </p:spPr>
-        <p:txBody>
-          <a:bodyPr wrap="square" rtlCol="0" anchor="ctr"/>
-          <a:lstStyle/>
-          <a:p>
-            <a:pPr algn="ctr" indent="0" marL="0">
-              <a:buNone/>
-            </a:pPr>
-            <a:r>
-              <a:rPr lang="en-US" sz="1500" b="1" dirty="0">
+      <p:pic>
+        <p:nvPicPr>
+          <p:cNvPr id="23" name="Image 2" descr="preencoded.png">    </p:cNvPr>
+          <p:cNvPicPr>
+            <a:picLocks noChangeAspect="1"/>
+          </p:cNvPicPr>
+          <p:nvPr/>
+        </p:nvPicPr>
+        <p:blipFill>
+          <a:blip r:embed="rId3"/>
+          <a:stretch>
+            <a:fillRect/>
+          </a:stretch>
+        </p:blipFill>
+        <p:spPr>
+          <a:xfrm>
+            <a:off x="8105242" y="4863694"/>
+            <a:ext cx="285293" cy="285293"/>
+          </a:xfrm>
+          <a:prstGeom prst="rect">
+            <a:avLst/>
+          </a:prstGeom>
+        </p:spPr>
+      </p:pic>
+      <p:sp>
+        <p:nvSpPr>
+          <p:cNvPr id="24" name="Text 19"/>
+          <p:cNvSpPr/>
+          <p:nvPr/>
+        </p:nvSpPr>
+        <p:spPr>
+          <a:xfrm>
+            <a:off x="8732520" y="4480560"/>
+            <a:ext cx="2468880" cy="1051560"/>
+          </a:xfrm>
+          <a:prstGeom prst="rect">
+            <a:avLst/>
+          </a:prstGeom>
+          <a:noFill/>
+          <a:ln/>
+        </p:spPr>
+        <p:txBody>
+          <a:bodyPr wrap="square" rtlCol="0" anchor="ctr"/>
+          <a:lstStyle/>
+          <a:p>
+            <a:pPr indent="0" marL="0">
+              <a:buNone/>
+            </a:pPr>
+            <a:r>
+              <a:rPr lang="en-US" sz="1700" b="1" dirty="0">
                 <a:solidFill>
                   <a:srgbClr val="16181D"/>
                 </a:solidFill>
@@ -18879,160 +19647,9 @@
                 <a:ea typeface="Arial" pitchFamily="34" charset="-122"/>
                 <a:cs typeface="Arial" pitchFamily="34" charset="-120"/>
               </a:rPr>
-              <a:t>a palette</a:t>
-            </a:r>
-            <a:endParaRPr lang="en-US" sz="1500" dirty="0"/>
-          </a:p>
-        </p:txBody>
-      </p:sp>
-      <p:sp>
-        <p:nvSpPr>
-          <p:cNvPr id="14" name="Shape 12"/>
-          <p:cNvSpPr/>
-          <p:nvPr/>
-        </p:nvSpPr>
-        <p:spPr>
-          <a:xfrm>
-            <a:off x="9488272" y="3429000"/>
-            <a:ext cx="1920240" cy="1371600"/>
-          </a:xfrm>
-          <a:prstGeom prst="roundRect">
-            <a:avLst>
-              <a:gd name="adj" fmla="val 8000"/>
-            </a:avLst>
-          </a:prstGeom>
-          <a:solidFill>
-            <a:srgbClr val="F5F7FA"/>
-          </a:solidFill>
-          <a:ln w="17780">
-            <a:solidFill>
-              <a:srgbClr val="E11D48"/>
-            </a:solidFill>
-            <a:prstDash val="solid"/>
-          </a:ln>
-          <a:effectLst>
-            <a:outerShdw sx="100000" sy="100000" kx="0" ky="0" algn="bl" rotWithShape="0" blurRad="139700" dist="38100" dir="5400000">
-              <a:srgbClr val="9AA6BC">
-                <a:alpha val="28000"/>
-              </a:srgbClr>
-            </a:outerShdw>
-          </a:effectLst>
-        </p:spPr>
-      </p:sp>
-      <p:sp>
-        <p:nvSpPr>
-          <p:cNvPr id="15" name="Text 13"/>
-          <p:cNvSpPr/>
-          <p:nvPr/>
-        </p:nvSpPr>
-        <p:spPr>
-          <a:xfrm>
-            <a:off x="9488272" y="3429000"/>
-            <a:ext cx="1920240" cy="1371600"/>
-          </a:xfrm>
-          <a:prstGeom prst="rect">
-            <a:avLst/>
-          </a:prstGeom>
-          <a:noFill/>
-          <a:ln/>
-        </p:spPr>
-        <p:txBody>
-          <a:bodyPr wrap="square" rtlCol="0" anchor="ctr"/>
-          <a:lstStyle/>
-          <a:p>
-            <a:pPr algn="ctr" indent="0" marL="0">
-              <a:buNone/>
-            </a:pPr>
-            <a:r>
-              <a:rPr lang="en-US" sz="1500" b="1" dirty="0">
-                <a:solidFill>
-                  <a:srgbClr val="16181D"/>
-                </a:solidFill>
-                <a:latin typeface="Arial" pitchFamily="34" charset="0"/>
-                <a:ea typeface="Arial" pitchFamily="34" charset="-122"/>
-                <a:cs typeface="Arial" pitchFamily="34" charset="-120"/>
-              </a:rPr>
-              <a:t>a critique</a:t>
-            </a:r>
-            <a:endParaRPr lang="en-US" sz="1500" dirty="0"/>
-          </a:p>
-        </p:txBody>
-      </p:sp>
-      <p:sp>
-        <p:nvSpPr>
-          <p:cNvPr id="16" name="Text 14"/>
-          <p:cNvSpPr/>
-          <p:nvPr/>
-        </p:nvSpPr>
-        <p:spPr>
-          <a:xfrm>
-            <a:off x="1828800" y="5120640"/>
-            <a:ext cx="8534095" cy="457200"/>
-          </a:xfrm>
-          <a:prstGeom prst="rect">
-            <a:avLst/>
-          </a:prstGeom>
-          <a:noFill/>
-          <a:ln/>
-        </p:spPr>
-        <p:txBody>
-          <a:bodyPr wrap="square" rtlCol="0" anchor="ctr"/>
-          <a:lstStyle/>
-          <a:p>
-            <a:pPr algn="ctr" indent="0" marL="0">
-              <a:buNone/>
-            </a:pPr>
-            <a:r>
-              <a:rPr lang="en-US" sz="1200" dirty="0">
-                <a:solidFill>
-                  <a:srgbClr val="9AA1B0"/>
-                </a:solidFill>
-                <a:latin typeface="Consolas" pitchFamily="34" charset="0"/>
-                <a:ea typeface="Consolas" pitchFamily="34" charset="-122"/>
-                <a:cs typeface="Consolas" pitchFamily="34" charset="-120"/>
-              </a:rPr>
-              <a:t>every page invented from scratch, by a different run of the same seven agents</a:t>
-            </a:r>
-            <a:endParaRPr lang="en-US" sz="1200" dirty="0"/>
-          </a:p>
-        </p:txBody>
-      </p:sp>
-      <p:sp>
-        <p:nvSpPr>
-          <p:cNvPr id="17" name="Text 15"/>
-          <p:cNvSpPr/>
-          <p:nvPr/>
-        </p:nvSpPr>
-        <p:spPr>
-          <a:xfrm>
-            <a:off x="1828800" y="5852160"/>
-            <a:ext cx="8534095" cy="457200"/>
-          </a:xfrm>
-          <a:prstGeom prst="rect">
-            <a:avLst/>
-          </a:prstGeom>
-          <a:noFill/>
-          <a:ln/>
-        </p:spPr>
-        <p:txBody>
-          <a:bodyPr wrap="square" rtlCol="0" anchor="ctr"/>
-          <a:lstStyle/>
-          <a:p>
-            <a:pPr algn="ctr" indent="0" marL="0">
-              <a:buNone/>
-            </a:pPr>
-            <a:r>
-              <a:rPr lang="en-US" sz="1300" dirty="0">
-                <a:solidFill>
-                  <a:srgbClr val="4F46E5"/>
-                </a:solidFill>
-                <a:latin typeface="Consolas" pitchFamily="34" charset="0"/>
-                <a:ea typeface="Consolas" pitchFamily="34" charset="-122"/>
-                <a:cs typeface="Consolas" pitchFamily="34" charset="-120"/>
-              </a:rPr>
-              <a:t>open  /gallery  on the projector</a:t>
-            </a:r>
-            <a:endParaRPr lang="en-US" sz="1300" dirty="0"/>
+              <a:t>here it all is</a:t>
+            </a:r>
+            <a:endParaRPr lang="en-US" sz="1700" dirty="0"/>
           </a:p>
         </p:txBody>
       </p:sp>
@@ -19726,6 +20343,632 @@
 <file path=ppt/slides/slide30.xml><?xml version="1.0" encoding="utf-8"?>
 <p:sld xmlns:a="http://schemas.openxmlformats.org/drawingml/2006/main" xmlns:r="http://schemas.openxmlformats.org/officeDocument/2006/relationships" xmlns:p="http://schemas.openxmlformats.org/presentationml/2006/main">
   <p:cSld name="Slide 30">
+    <p:bg>
+      <p:bgPr>
+        <a:solidFill>
+          <a:srgbClr val="FFFFFF"/>
+        </a:solidFill>
+      </p:bgPr>
+    </p:bg>
+    <p:spTree>
+      <p:nvGrpSpPr>
+        <p:cNvPr id="1" name=""/>
+        <p:cNvGrpSpPr/>
+        <p:nvPr/>
+      </p:nvGrpSpPr>
+      <p:grpSpPr>
+        <a:xfrm>
+          <a:off x="0" y="0"/>
+          <a:ext cx="0" cy="0"/>
+          <a:chOff x="0" y="0"/>
+          <a:chExt cx="0" cy="0"/>
+        </a:xfrm>
+      </p:grpSpPr>
+      <p:sp>
+        <p:nvSpPr>
+          <p:cNvPr id="2" name="Shape 0"/>
+          <p:cNvSpPr/>
+          <p:nvPr/>
+        </p:nvSpPr>
+        <p:spPr>
+          <a:xfrm>
+            <a:off x="859536" y="621792"/>
+            <a:ext cx="182880" cy="182880"/>
+          </a:xfrm>
+          <a:prstGeom prst="ellipse">
+            <a:avLst/>
+          </a:prstGeom>
+          <a:solidFill>
+            <a:srgbClr val="4F46E5"/>
+          </a:solidFill>
+          <a:ln/>
+        </p:spPr>
+      </p:sp>
+      <p:sp>
+        <p:nvSpPr>
+          <p:cNvPr id="3" name="Text 1"/>
+          <p:cNvSpPr/>
+          <p:nvPr/>
+        </p:nvSpPr>
+        <p:spPr>
+          <a:xfrm>
+            <a:off x="1207008" y="566928"/>
+            <a:ext cx="4572000" cy="292608"/>
+          </a:xfrm>
+          <a:prstGeom prst="rect">
+            <a:avLst/>
+          </a:prstGeom>
+          <a:noFill/>
+          <a:ln/>
+        </p:spPr>
+        <p:txBody>
+          <a:bodyPr wrap="square" rtlCol="0" anchor="ctr"/>
+          <a:lstStyle/>
+          <a:p>
+            <a:pPr indent="0" marL="0">
+              <a:buNone/>
+            </a:pPr>
+            <a:r>
+              <a:rPr lang="en-US" sz="1200" spc="400" kern="0" dirty="0">
+                <a:solidFill>
+                  <a:srgbClr val="4F46E5"/>
+                </a:solidFill>
+                <a:latin typeface="Consolas" pitchFamily="34" charset="0"/>
+                <a:ea typeface="Consolas" pitchFamily="34" charset="-122"/>
+                <a:cs typeface="Consolas" pitchFamily="34" charset="-120"/>
+              </a:rPr>
+              <a:t>THE WALL</a:t>
+            </a:r>
+            <a:endParaRPr lang="en-US" sz="1200" dirty="0"/>
+          </a:p>
+        </p:txBody>
+      </p:sp>
+      <p:sp>
+        <p:nvSpPr>
+          <p:cNvPr id="4" name="Text 2"/>
+          <p:cNvSpPr/>
+          <p:nvPr/>
+        </p:nvSpPr>
+        <p:spPr>
+          <a:xfrm>
+            <a:off x="0" y="1463040"/>
+            <a:ext cx="12191695" cy="1005840"/>
+          </a:xfrm>
+          <a:prstGeom prst="rect">
+            <a:avLst/>
+          </a:prstGeom>
+          <a:noFill/>
+          <a:ln/>
+        </p:spPr>
+        <p:txBody>
+          <a:bodyPr wrap="square" rtlCol="0" anchor="ctr"/>
+          <a:lstStyle/>
+          <a:p>
+            <a:pPr algn="ctr" indent="0" marL="0">
+              <a:buNone/>
+            </a:pPr>
+            <a:r>
+              <a:rPr lang="en-US" sz="4600" b="1" dirty="0">
+                <a:solidFill>
+                  <a:srgbClr val="16181D"/>
+                </a:solidFill>
+                <a:latin typeface="Arial" pitchFamily="34" charset="0"/>
+                <a:ea typeface="Arial" pitchFamily="34" charset="-122"/>
+                <a:cs typeface="Arial" pitchFamily="34" charset="-120"/>
+              </a:rPr>
+              <a:t>Everyone's, </a:t>
+            </a:r>
+            <a:pPr algn="ctr" indent="0" marL="0">
+              <a:buNone/>
+            </a:pPr>
+            <a:r>
+              <a:rPr lang="en-US" sz="4600" b="1" dirty="0">
+                <a:solidFill>
+                  <a:srgbClr val="4F46E5"/>
+                </a:solidFill>
+                <a:latin typeface="Arial" pitchFamily="34" charset="0"/>
+                <a:ea typeface="Arial" pitchFamily="34" charset="-122"/>
+                <a:cs typeface="Arial" pitchFamily="34" charset="-120"/>
+              </a:rPr>
+              <a:t>all at once.</a:t>
+            </a:r>
+            <a:endParaRPr lang="en-US" sz="4600" dirty="0"/>
+          </a:p>
+        </p:txBody>
+      </p:sp>
+      <p:sp>
+        <p:nvSpPr>
+          <p:cNvPr id="5" name="Text 3"/>
+          <p:cNvSpPr/>
+          <p:nvPr/>
+        </p:nvSpPr>
+        <p:spPr>
+          <a:xfrm>
+            <a:off x="0" y="2606040"/>
+            <a:ext cx="12191695" cy="457200"/>
+          </a:xfrm>
+          <a:prstGeom prst="rect">
+            <a:avLst/>
+          </a:prstGeom>
+          <a:noFill/>
+          <a:ln/>
+        </p:spPr>
+        <p:txBody>
+          <a:bodyPr wrap="square" rtlCol="0" anchor="ctr"/>
+          <a:lstStyle/>
+          <a:p>
+            <a:pPr algn="ctr" indent="0" marL="0">
+              <a:buNone/>
+            </a:pPr>
+            <a:r>
+              <a:rPr lang="en-US" sz="1900" dirty="0">
+                <a:solidFill>
+                  <a:srgbClr val="666C7A"/>
+                </a:solidFill>
+                <a:latin typeface="Calibri" pitchFamily="34" charset="0"/>
+                <a:ea typeface="Calibri" pitchFamily="34" charset="-122"/>
+                <a:cs typeface="Calibri" pitchFamily="34" charset="-120"/>
+              </a:rPr>
+              <a:t>Find yours. Your name is on it.</a:t>
+            </a:r>
+            <a:endParaRPr lang="en-US" sz="1900" dirty="0"/>
+          </a:p>
+        </p:txBody>
+      </p:sp>
+      <p:sp>
+        <p:nvSpPr>
+          <p:cNvPr id="6" name="Shape 4"/>
+          <p:cNvSpPr/>
+          <p:nvPr/>
+        </p:nvSpPr>
+        <p:spPr>
+          <a:xfrm>
+            <a:off x="783184" y="3429000"/>
+            <a:ext cx="1920240" cy="1371600"/>
+          </a:xfrm>
+          <a:prstGeom prst="roundRect">
+            <a:avLst>
+              <a:gd name="adj" fmla="val 8000"/>
+            </a:avLst>
+          </a:prstGeom>
+          <a:solidFill>
+            <a:srgbClr val="F5F7FA"/>
+          </a:solidFill>
+          <a:ln w="17780">
+            <a:solidFill>
+              <a:srgbClr val="4F46E5"/>
+            </a:solidFill>
+            <a:prstDash val="solid"/>
+          </a:ln>
+          <a:effectLst>
+            <a:outerShdw sx="100000" sy="100000" kx="0" ky="0" algn="bl" rotWithShape="0" blurRad="139700" dist="38100" dir="5400000">
+              <a:srgbClr val="9AA6BC">
+                <a:alpha val="28000"/>
+              </a:srgbClr>
+            </a:outerShdw>
+          </a:effectLst>
+        </p:spPr>
+      </p:sp>
+      <p:sp>
+        <p:nvSpPr>
+          <p:cNvPr id="7" name="Text 5"/>
+          <p:cNvSpPr/>
+          <p:nvPr/>
+        </p:nvSpPr>
+        <p:spPr>
+          <a:xfrm>
+            <a:off x="783184" y="3429000"/>
+            <a:ext cx="1920240" cy="1371600"/>
+          </a:xfrm>
+          <a:prstGeom prst="rect">
+            <a:avLst/>
+          </a:prstGeom>
+          <a:noFill/>
+          <a:ln/>
+        </p:spPr>
+        <p:txBody>
+          <a:bodyPr wrap="square" rtlCol="0" anchor="ctr"/>
+          <a:lstStyle/>
+          <a:p>
+            <a:pPr algn="ctr" indent="0" marL="0">
+              <a:buNone/>
+            </a:pPr>
+            <a:r>
+              <a:rPr lang="en-US" sz="1500" b="1" dirty="0">
+                <a:solidFill>
+                  <a:srgbClr val="16181D"/>
+                </a:solidFill>
+                <a:latin typeface="Arial" pitchFamily="34" charset="0"/>
+                <a:ea typeface="Arial" pitchFamily="34" charset="-122"/>
+                <a:cs typeface="Arial" pitchFamily="34" charset="-120"/>
+              </a:rPr>
+              <a:t>a name</a:t>
+            </a:r>
+            <a:endParaRPr lang="en-US" sz="1500" dirty="0"/>
+          </a:p>
+        </p:txBody>
+      </p:sp>
+      <p:sp>
+        <p:nvSpPr>
+          <p:cNvPr id="8" name="Shape 6"/>
+          <p:cNvSpPr/>
+          <p:nvPr/>
+        </p:nvSpPr>
+        <p:spPr>
+          <a:xfrm>
+            <a:off x="2959456" y="3429000"/>
+            <a:ext cx="1920240" cy="1371600"/>
+          </a:xfrm>
+          <a:prstGeom prst="roundRect">
+            <a:avLst>
+              <a:gd name="adj" fmla="val 8000"/>
+            </a:avLst>
+          </a:prstGeom>
+          <a:solidFill>
+            <a:srgbClr val="F5F7FA"/>
+          </a:solidFill>
+          <a:ln w="17780">
+            <a:solidFill>
+              <a:srgbClr val="7C3AED"/>
+            </a:solidFill>
+            <a:prstDash val="solid"/>
+          </a:ln>
+          <a:effectLst>
+            <a:outerShdw sx="100000" sy="100000" kx="0" ky="0" algn="bl" rotWithShape="0" blurRad="139700" dist="38100" dir="5400000">
+              <a:srgbClr val="9AA6BC">
+                <a:alpha val="28000"/>
+              </a:srgbClr>
+            </a:outerShdw>
+          </a:effectLst>
+        </p:spPr>
+      </p:sp>
+      <p:sp>
+        <p:nvSpPr>
+          <p:cNvPr id="9" name="Text 7"/>
+          <p:cNvSpPr/>
+          <p:nvPr/>
+        </p:nvSpPr>
+        <p:spPr>
+          <a:xfrm>
+            <a:off x="2959456" y="3429000"/>
+            <a:ext cx="1920240" cy="1371600"/>
+          </a:xfrm>
+          <a:prstGeom prst="rect">
+            <a:avLst/>
+          </a:prstGeom>
+          <a:noFill/>
+          <a:ln/>
+        </p:spPr>
+        <p:txBody>
+          <a:bodyPr wrap="square" rtlCol="0" anchor="ctr"/>
+          <a:lstStyle/>
+          <a:p>
+            <a:pPr algn="ctr" indent="0" marL="0">
+              <a:buNone/>
+            </a:pPr>
+            <a:r>
+              <a:rPr lang="en-US" sz="1500" b="1" dirty="0">
+                <a:solidFill>
+                  <a:srgbClr val="16181D"/>
+                </a:solidFill>
+                <a:latin typeface="Arial" pitchFamily="34" charset="0"/>
+                <a:ea typeface="Arial" pitchFamily="34" charset="-122"/>
+                <a:cs typeface="Arial" pitchFamily="34" charset="-120"/>
+              </a:rPr>
+              <a:t>artwork</a:t>
+            </a:r>
+            <a:endParaRPr lang="en-US" sz="1500" dirty="0"/>
+          </a:p>
+        </p:txBody>
+      </p:sp>
+      <p:sp>
+        <p:nvSpPr>
+          <p:cNvPr id="10" name="Shape 8"/>
+          <p:cNvSpPr/>
+          <p:nvPr/>
+        </p:nvSpPr>
+        <p:spPr>
+          <a:xfrm>
+            <a:off x="5135728" y="3429000"/>
+            <a:ext cx="1920240" cy="1371600"/>
+          </a:xfrm>
+          <a:prstGeom prst="roundRect">
+            <a:avLst>
+              <a:gd name="adj" fmla="val 8000"/>
+            </a:avLst>
+          </a:prstGeom>
+          <a:solidFill>
+            <a:srgbClr val="F5F7FA"/>
+          </a:solidFill>
+          <a:ln w="17780">
+            <a:solidFill>
+              <a:srgbClr val="0F9E8E"/>
+            </a:solidFill>
+            <a:prstDash val="solid"/>
+          </a:ln>
+          <a:effectLst>
+            <a:outerShdw sx="100000" sy="100000" kx="0" ky="0" algn="bl" rotWithShape="0" blurRad="139700" dist="38100" dir="5400000">
+              <a:srgbClr val="9AA6BC">
+                <a:alpha val="28000"/>
+              </a:srgbClr>
+            </a:outerShdw>
+          </a:effectLst>
+        </p:spPr>
+      </p:sp>
+      <p:sp>
+        <p:nvSpPr>
+          <p:cNvPr id="11" name="Text 9"/>
+          <p:cNvSpPr/>
+          <p:nvPr/>
+        </p:nvSpPr>
+        <p:spPr>
+          <a:xfrm>
+            <a:off x="5135728" y="3429000"/>
+            <a:ext cx="1920240" cy="1371600"/>
+          </a:xfrm>
+          <a:prstGeom prst="rect">
+            <a:avLst/>
+          </a:prstGeom>
+          <a:noFill/>
+          <a:ln/>
+        </p:spPr>
+        <p:txBody>
+          <a:bodyPr wrap="square" rtlCol="0" anchor="ctr"/>
+          <a:lstStyle/>
+          <a:p>
+            <a:pPr algn="ctr" indent="0" marL="0">
+              <a:buNone/>
+            </a:pPr>
+            <a:r>
+              <a:rPr lang="en-US" sz="1500" b="1" dirty="0">
+                <a:solidFill>
+                  <a:srgbClr val="16181D"/>
+                </a:solidFill>
+                <a:latin typeface="Arial" pitchFamily="34" charset="0"/>
+                <a:ea typeface="Arial" pitchFamily="34" charset="-122"/>
+                <a:cs typeface="Arial" pitchFamily="34" charset="-120"/>
+              </a:rPr>
+              <a:t>copy</a:t>
+            </a:r>
+            <a:endParaRPr lang="en-US" sz="1500" dirty="0"/>
+          </a:p>
+        </p:txBody>
+      </p:sp>
+      <p:sp>
+        <p:nvSpPr>
+          <p:cNvPr id="12" name="Shape 10"/>
+          <p:cNvSpPr/>
+          <p:nvPr/>
+        </p:nvSpPr>
+        <p:spPr>
+          <a:xfrm>
+            <a:off x="7312000" y="3429000"/>
+            <a:ext cx="1920240" cy="1371600"/>
+          </a:xfrm>
+          <a:prstGeom prst="roundRect">
+            <a:avLst>
+              <a:gd name="adj" fmla="val 8000"/>
+            </a:avLst>
+          </a:prstGeom>
+          <a:solidFill>
+            <a:srgbClr val="F5F7FA"/>
+          </a:solidFill>
+          <a:ln w="17780">
+            <a:solidFill>
+              <a:srgbClr val="D97706"/>
+            </a:solidFill>
+            <a:prstDash val="solid"/>
+          </a:ln>
+          <a:effectLst>
+            <a:outerShdw sx="100000" sy="100000" kx="0" ky="0" algn="bl" rotWithShape="0" blurRad="139700" dist="38100" dir="5400000">
+              <a:srgbClr val="9AA6BC">
+                <a:alpha val="28000"/>
+              </a:srgbClr>
+            </a:outerShdw>
+          </a:effectLst>
+        </p:spPr>
+      </p:sp>
+      <p:sp>
+        <p:nvSpPr>
+          <p:cNvPr id="13" name="Text 11"/>
+          <p:cNvSpPr/>
+          <p:nvPr/>
+        </p:nvSpPr>
+        <p:spPr>
+          <a:xfrm>
+            <a:off x="7312000" y="3429000"/>
+            <a:ext cx="1920240" cy="1371600"/>
+          </a:xfrm>
+          <a:prstGeom prst="rect">
+            <a:avLst/>
+          </a:prstGeom>
+          <a:noFill/>
+          <a:ln/>
+        </p:spPr>
+        <p:txBody>
+          <a:bodyPr wrap="square" rtlCol="0" anchor="ctr"/>
+          <a:lstStyle/>
+          <a:p>
+            <a:pPr algn="ctr" indent="0" marL="0">
+              <a:buNone/>
+            </a:pPr>
+            <a:r>
+              <a:rPr lang="en-US" sz="1500" b="1" dirty="0">
+                <a:solidFill>
+                  <a:srgbClr val="16181D"/>
+                </a:solidFill>
+                <a:latin typeface="Arial" pitchFamily="34" charset="0"/>
+                <a:ea typeface="Arial" pitchFamily="34" charset="-122"/>
+                <a:cs typeface="Arial" pitchFamily="34" charset="-120"/>
+              </a:rPr>
+              <a:t>a palette</a:t>
+            </a:r>
+            <a:endParaRPr lang="en-US" sz="1500" dirty="0"/>
+          </a:p>
+        </p:txBody>
+      </p:sp>
+      <p:sp>
+        <p:nvSpPr>
+          <p:cNvPr id="14" name="Shape 12"/>
+          <p:cNvSpPr/>
+          <p:nvPr/>
+        </p:nvSpPr>
+        <p:spPr>
+          <a:xfrm>
+            <a:off x="9488272" y="3429000"/>
+            <a:ext cx="1920240" cy="1371600"/>
+          </a:xfrm>
+          <a:prstGeom prst="roundRect">
+            <a:avLst>
+              <a:gd name="adj" fmla="val 8000"/>
+            </a:avLst>
+          </a:prstGeom>
+          <a:solidFill>
+            <a:srgbClr val="F5F7FA"/>
+          </a:solidFill>
+          <a:ln w="17780">
+            <a:solidFill>
+              <a:srgbClr val="E11D48"/>
+            </a:solidFill>
+            <a:prstDash val="solid"/>
+          </a:ln>
+          <a:effectLst>
+            <a:outerShdw sx="100000" sy="100000" kx="0" ky="0" algn="bl" rotWithShape="0" blurRad="139700" dist="38100" dir="5400000">
+              <a:srgbClr val="9AA6BC">
+                <a:alpha val="28000"/>
+              </a:srgbClr>
+            </a:outerShdw>
+          </a:effectLst>
+        </p:spPr>
+      </p:sp>
+      <p:sp>
+        <p:nvSpPr>
+          <p:cNvPr id="15" name="Text 13"/>
+          <p:cNvSpPr/>
+          <p:nvPr/>
+        </p:nvSpPr>
+        <p:spPr>
+          <a:xfrm>
+            <a:off x="9488272" y="3429000"/>
+            <a:ext cx="1920240" cy="1371600"/>
+          </a:xfrm>
+          <a:prstGeom prst="rect">
+            <a:avLst/>
+          </a:prstGeom>
+          <a:noFill/>
+          <a:ln/>
+        </p:spPr>
+        <p:txBody>
+          <a:bodyPr wrap="square" rtlCol="0" anchor="ctr"/>
+          <a:lstStyle/>
+          <a:p>
+            <a:pPr algn="ctr" indent="0" marL="0">
+              <a:buNone/>
+            </a:pPr>
+            <a:r>
+              <a:rPr lang="en-US" sz="1500" b="1" dirty="0">
+                <a:solidFill>
+                  <a:srgbClr val="16181D"/>
+                </a:solidFill>
+                <a:latin typeface="Arial" pitchFamily="34" charset="0"/>
+                <a:ea typeface="Arial" pitchFamily="34" charset="-122"/>
+                <a:cs typeface="Arial" pitchFamily="34" charset="-120"/>
+              </a:rPr>
+              <a:t>a critique</a:t>
+            </a:r>
+            <a:endParaRPr lang="en-US" sz="1500" dirty="0"/>
+          </a:p>
+        </p:txBody>
+      </p:sp>
+      <p:sp>
+        <p:nvSpPr>
+          <p:cNvPr id="16" name="Text 14"/>
+          <p:cNvSpPr/>
+          <p:nvPr/>
+        </p:nvSpPr>
+        <p:spPr>
+          <a:xfrm>
+            <a:off x="1828800" y="5120640"/>
+            <a:ext cx="8534095" cy="457200"/>
+          </a:xfrm>
+          <a:prstGeom prst="rect">
+            <a:avLst/>
+          </a:prstGeom>
+          <a:noFill/>
+          <a:ln/>
+        </p:spPr>
+        <p:txBody>
+          <a:bodyPr wrap="square" rtlCol="0" anchor="ctr"/>
+          <a:lstStyle/>
+          <a:p>
+            <a:pPr algn="ctr" indent="0" marL="0">
+              <a:buNone/>
+            </a:pPr>
+            <a:r>
+              <a:rPr lang="en-US" sz="1200" dirty="0">
+                <a:solidFill>
+                  <a:srgbClr val="9AA1B0"/>
+                </a:solidFill>
+                <a:latin typeface="Consolas" pitchFamily="34" charset="0"/>
+                <a:ea typeface="Consolas" pitchFamily="34" charset="-122"/>
+                <a:cs typeface="Consolas" pitchFamily="34" charset="-120"/>
+              </a:rPr>
+              <a:t>every page invented from scratch, by a different run of the same seven agents</a:t>
+            </a:r>
+            <a:endParaRPr lang="en-US" sz="1200" dirty="0"/>
+          </a:p>
+        </p:txBody>
+      </p:sp>
+      <p:sp>
+        <p:nvSpPr>
+          <p:cNvPr id="17" name="Text 15"/>
+          <p:cNvSpPr/>
+          <p:nvPr/>
+        </p:nvSpPr>
+        <p:spPr>
+          <a:xfrm>
+            <a:off x="1828800" y="5852160"/>
+            <a:ext cx="8534095" cy="457200"/>
+          </a:xfrm>
+          <a:prstGeom prst="rect">
+            <a:avLst/>
+          </a:prstGeom>
+          <a:noFill/>
+          <a:ln/>
+        </p:spPr>
+        <p:txBody>
+          <a:bodyPr wrap="square" rtlCol="0" anchor="ctr"/>
+          <a:lstStyle/>
+          <a:p>
+            <a:pPr algn="ctr" indent="0" marL="0">
+              <a:buNone/>
+            </a:pPr>
+            <a:r>
+              <a:rPr lang="en-US" sz="1300" dirty="0">
+                <a:solidFill>
+                  <a:srgbClr val="4F46E5"/>
+                </a:solidFill>
+                <a:latin typeface="Consolas" pitchFamily="34" charset="0"/>
+                <a:ea typeface="Consolas" pitchFamily="34" charset="-122"/>
+                <a:cs typeface="Consolas" pitchFamily="34" charset="-120"/>
+              </a:rPr>
+              <a:t>open  /gallery  on the projector</a:t>
+            </a:r>
+            <a:endParaRPr lang="en-US" sz="1300" dirty="0"/>
+          </a:p>
+        </p:txBody>
+      </p:sp>
+    </p:spTree>
+  </p:cSld>
+  <p:clrMapOvr>
+    <a:masterClrMapping/>
+  </p:clrMapOvr>
+</p:sld>
+</file>
+
+<file path=ppt/slides/slide31.xml><?xml version="1.0" encoding="utf-8"?>
+<p:sld xmlns:a="http://schemas.openxmlformats.org/drawingml/2006/main" xmlns:r="http://schemas.openxmlformats.org/officeDocument/2006/relationships" xmlns:p="http://schemas.openxmlformats.org/presentationml/2006/main">
+  <p:cSld name="Slide 31">
     <p:bg>
       <p:bgPr>
         <a:solidFill>

--- a/slides/One-Prompt-Many-Workers-Light.pptx
+++ b/slides/One-Prompt-Many-Workers-Light.pptx
@@ -17467,7 +17467,7 @@
                 <a:ea typeface="Consolas" pitchFamily="34" charset="-122"/>
                 <a:cs typeface="Consolas" pitchFamily="34" charset="-120"/>
               </a:rPr>
-              <a:t>on your hotspot</a:t>
+              <a:t>on this laptop</a:t>
             </a:r>
             <a:endParaRPr lang="en-US" sz="900" dirty="0"/>
           </a:p>
@@ -18079,7 +18079,7 @@
                 <a:ea typeface="Calibri" pitchFamily="34" charset="-122"/>
                 <a:cs typeface="Calibri" pitchFamily="34" charset="-120"/>
               </a:rPr>
-              <a:t>Their phone talks to a laptop on your hotspot. The agents build the page. Every step streams to the projector. Nothing touches the internet.</a:t>
+              <a:t>Their phone reaches this laptop through a tunnel. The agents build the page here. Every step streams to the projector.</a:t>
             </a:r>
             <a:endParaRPr lang="en-US" sz="1500" dirty="0"/>
           </a:p>
@@ -21227,7 +21227,7 @@
                 <a:ea typeface="Calibri" pitchFamily="34" charset="-122"/>
                 <a:cs typeface="Calibri" pitchFamily="34" charset="-120"/>
               </a:rPr>
-              <a:t>Join the room's Wi-Fi hotspot</a:t>
+              <a:t>Scan the code with your phone</a:t>
             </a:r>
             <a:endParaRPr lang="en-US" sz="1650" dirty="0"/>
           </a:p>
@@ -21325,7 +21325,7 @@
                 <a:ea typeface="Calibri" pitchFamily="34" charset="-122"/>
                 <a:cs typeface="Calibri" pitchFamily="34" charset="-120"/>
               </a:rPr>
-              <a:t>Scan the code with your phone</a:t>
+              <a:t>Type one line, any product idea</a:t>
             </a:r>
             <a:endParaRPr lang="en-US" sz="1650" dirty="0"/>
           </a:p>
@@ -21423,7 +21423,7 @@
                 <a:ea typeface="Calibri" pitchFamily="34" charset="-122"/>
                 <a:cs typeface="Calibri" pitchFamily="34" charset="-120"/>
               </a:rPr>
-              <a:t>Send the crew a product idea</a:t>
+              <a:t>Watch the crew build it live</a:t>
             </a:r>
             <a:endParaRPr lang="en-US" sz="1650" dirty="0"/>
           </a:p>

--- a/slides/One-Prompt-Many-Workers-Light.pptx
+++ b/slides/One-Prompt-Many-Workers-Light.pptx
@@ -2474,7 +2474,7 @@
           <a:p>
             <a:r>
               <a:rPr lang="en-US" dirty="0"/>
-              <a:t>Put this up early and leave it up. This is the setup for the whole talk. 'Scan that, hop on the wifi, send my agents a product idea. Here is the thing: the moment you send it, a crew of agents on this laptop starts building a real landing page for it. They will keep working the entire time I am talking. At the end I will show you every single one.' Then carry on. The queue fills while you teach, and the payoff is waiting.</a:t>
+              <a:t>Put this up early and leave it up. This is the setup for the whole talk. 'Scan that, from wherever you are, no wifi to join, and send my agents a product idea. Here is the thing: the moment you send it, a crew of agents on this laptop starts building a real landing page for it. They will keep working the entire time I am talking. At the end I will show you every single one.' Then carry on. The queue fills while you teach, and the payoff is waiting.</a:t>
             </a:r>
             <a:endParaRPr lang="en-US" dirty="0"/>
           </a:p>
@@ -21521,7 +21521,7 @@
         </p:blipFill>
         <p:spPr>
           <a:xfrm>
-            <a:off x="8458200" y="1783080"/>
+            <a:off x="8458200" y="1737360"/>
             <a:ext cx="2194560" cy="2194560"/>
           </a:xfrm>
           <a:prstGeom prst="rect">
@@ -21537,7 +21537,7 @@
         </p:nvSpPr>
         <p:spPr>
           <a:xfrm>
-            <a:off x="9326880" y="4206240"/>
+            <a:off x="9326880" y="4069080"/>
             <a:ext cx="457200" cy="457200"/>
           </a:xfrm>
           <a:prstGeom prst="ellipse">
@@ -21572,7 +21572,7 @@
         </p:blipFill>
         <p:spPr>
           <a:xfrm>
-            <a:off x="9436608" y="4315968"/>
+            <a:off x="9436608" y="4178808"/>
             <a:ext cx="237744" cy="237744"/>
           </a:xfrm>
           <a:prstGeom prst="rect">
@@ -21588,8 +21588,8 @@
         </p:nvSpPr>
         <p:spPr>
           <a:xfrm>
-            <a:off x="7955280" y="4727448"/>
-            <a:ext cx="3200400" cy="320040"/>
+            <a:off x="7955280" y="4590288"/>
+            <a:ext cx="3200400" cy="292608"/>
           </a:xfrm>
           <a:prstGeom prst="rect">
             <a:avLst/>
@@ -21627,8 +21627,8 @@
         </p:nvSpPr>
         <p:spPr>
           <a:xfrm>
-            <a:off x="7955280" y="5029200"/>
-            <a:ext cx="3200400" cy="274320"/>
+            <a:off x="8065008" y="4910328"/>
+            <a:ext cx="2980944" cy="457200"/>
           </a:xfrm>
           <a:prstGeom prst="rect">
             <a:avLst/>
@@ -21641,20 +21641,23 @@
           <a:lstStyle/>
           <a:p>
             <a:pPr algn="ctr" indent="0" marL="0">
-              <a:buNone/>
-            </a:pPr>
-            <a:r>
-              <a:rPr lang="en-US" sz="1200" dirty="0">
-                <a:solidFill>
-                  <a:srgbClr val="666C7A"/>
-                </a:solidFill>
-                <a:latin typeface="Calibri" pitchFamily="34" charset="0"/>
-                <a:ea typeface="Calibri" pitchFamily="34" charset="-122"/>
-                <a:cs typeface="Calibri" pitchFamily="34" charset="-120"/>
-              </a:rPr>
-              <a:t>the crew is waiting</a:t>
-            </a:r>
-            <a:endParaRPr lang="en-US" sz="1200" dirty="0"/>
+              <a:lnSpc>
+                <a:spcPts val="1200"/>
+              </a:lnSpc>
+              <a:buNone/>
+            </a:pPr>
+            <a:r>
+              <a:rPr lang="en-US" sz="850" dirty="0">
+                <a:solidFill>
+                  <a:srgbClr val="4F46E5"/>
+                </a:solidFill>
+                <a:latin typeface="Consolas" pitchFamily="34" charset="0"/>
+                <a:ea typeface="Consolas" pitchFamily="34" charset="-122"/>
+                <a:cs typeface="Consolas" pitchFamily="34" charset="-120"/>
+              </a:rPr>
+              <a:t>makers-farming-rpg-alert.trycloudflare.com</a:t>
+            </a:r>
+            <a:endParaRPr lang="en-US" sz="850" dirty="0"/>
           </a:p>
         </p:txBody>
       </p:sp>

--- a/slides/One-Prompt-Many-Workers-Light.pptx
+++ b/slides/One-Prompt-Many-Workers-Light.pptx
@@ -21647,7 +21647,7 @@
               <a:buNone/>
             </a:pPr>
             <a:r>
-              <a:rPr lang="en-US" sz="850" dirty="0">
+              <a:rPr lang="en-US" sz="1000" dirty="0">
                 <a:solidFill>
                   <a:srgbClr val="4F46E5"/>
                 </a:solidFill>
@@ -21655,9 +21655,9 @@
                 <a:ea typeface="Consolas" pitchFamily="34" charset="-122"/>
                 <a:cs typeface="Consolas" pitchFamily="34" charset="-120"/>
               </a:rPr>
-              <a:t>makers-farming-rpg-alert.trycloudflare.com</a:t>
-            </a:r>
-            <a:endParaRPr lang="en-US" sz="850" dirty="0"/>
+              <a:t>live.floati.life</a:t>
+            </a:r>
+            <a:endParaRPr lang="en-US" sz="1000" dirty="0"/>
           </a:p>
         </p:txBody>
       </p:sp>

--- a/slides/One-Prompt-Many-Workers-Light.pptx
+++ b/slides/One-Prompt-Many-Workers-Light.pptx
@@ -978,7 +978,7 @@
           <a:p>
             <a:r>
               <a:rPr lang="en-US" dirty="0"/>
-              <a:t>The model runs entirely on this laptop. The client's data never leaves the building. No token bill that scales with success. Works on a plane. For a bank, it never leaves the building is the whole conversation.</a:t>
+              <a:t>Say which one you are running tonight before this slide. On the local model every token stays here. On a hosted model the crew still runs here and only the writing goes out. The point is that the harness does not care.  Original: The model runs entirely on this laptop. The client's data never leaves the building. No token bill that scales with success. Works on a plane. For a bank, it never leaves the building is the whole conversation.</a:t>
             </a:r>
             <a:endParaRPr lang="en-US" dirty="0"/>
           </a:p>
@@ -4318,7 +4318,7 @@
                 <a:ea typeface="Consolas" pitchFamily="34" charset="-122"/>
                 <a:cs typeface="Consolas" pitchFamily="34" charset="-120"/>
               </a:rPr>
-              <a:t>local model   ·   no cloud   ·   live code</a:t>
+              <a:t>real agents   ·   real code   ·   built live in the room</a:t>
             </a:r>
             <a:endParaRPr lang="en-US" sz="1250" dirty="0"/>
           </a:p>

--- a/slides/One-Prompt-Many-Workers-Light.pptx
+++ b/slides/One-Prompt-Many-Workers-Light.pptx
@@ -2122,7 +2122,7 @@
           <a:p>
             <a:r>
               <a:rPr lang="en-US" dirty="0"/>
-              <a:t>A worker in LangChain4j is an interface. No implementation. The annotations are the program. The system message makes it a specialist, role and task get slotted in. One interface backs every worker, that is the many workers line in code.</a:t>
+              <a:t>This is the real file, not a tidied up version. A worker is a Java interface and nothing else. I never wrote an implementation. The annotations are the program: the system message is the whole personality, and look at it, most of that prompt is me telling it what NOT to do. Never end in ly or Hub. That is a rule I added because the model kept handing me Choreify. The examples at the bottom are doing the real work.</a:t>
             </a:r>
             <a:endParaRPr lang="en-US" dirty="0"/>
           </a:p>
@@ -2210,7 +2210,7 @@
           <a:p>
             <a:r>
               <a:rPr lang="en-US" dirty="0"/>
-              <a:t>The orchestrator is the whole talk in fifteen lines. The planner turns one prompt into a crew, a typed Plan. We loop, each worker does its job, we collect notes, the synthesizer folds them into one answer. Fan out, fan in. Now, let's run it.</a:t>
+              <a:t>And this is the many workers bit, also verbatim. Four pool.submit calls, four agents running at the same time, each one line. No framework, just a Java executor. The namer finishes first because it has the smallest job, and the moment it does, three other agents unblock. That is the web you saw on the slide, in actual code. Now let us run it.</a:t>
             </a:r>
             <a:endParaRPr lang="en-US" dirty="0"/>
           </a:p>
@@ -18293,7 +18293,7 @@
                 <a:ea typeface="Consolas" pitchFamily="34" charset="-122"/>
                 <a:cs typeface="Consolas" pitchFamily="34" charset="-120"/>
               </a:rPr>
-              <a:t>// the Copywriter's return type
+              <a:t>// Model.java, verbatim
 </a:t>
             </a:r>
             <a:pPr indent="0" marL="0">
@@ -18346,6 +18346,41 @@
                 <a:cs typeface="Consolas" pitchFamily="34" charset="-120"/>
               </a:rPr>
               <a:t>(
+</a:t>
+            </a:r>
+            <a:pPr indent="0" marL="0">
+              <a:lnSpc>
+                <a:spcPts val="2500"/>
+              </a:lnSpc>
+              <a:buNone/>
+            </a:pPr>
+            <a:r>
+              <a:rPr lang="en-US" sz="1400" dirty="0">
+                <a:solidFill>
+                  <a:srgbClr val="7DD3FC"/>
+                </a:solidFill>
+                <a:latin typeface="Consolas" pitchFamily="34" charset="0"/>
+                <a:ea typeface="Consolas" pitchFamily="34" charset="-122"/>
+                <a:cs typeface="Consolas" pitchFamily="34" charset="-120"/>
+              </a:rPr>
+              <a:t>   String </a:t>
+            </a:r>
+            <a:pPr indent="0" marL="0">
+              <a:lnSpc>
+                <a:spcPts val="2500"/>
+              </a:lnSpc>
+              <a:buNone/>
+            </a:pPr>
+            <a:r>
+              <a:rPr lang="en-US" sz="1400" dirty="0">
+                <a:solidFill>
+                  <a:srgbClr val="E6E9F0"/>
+                </a:solidFill>
+                <a:latin typeface="Consolas" pitchFamily="34" charset="0"/>
+                <a:ea typeface="Consolas" pitchFamily="34" charset="-122"/>
+                <a:cs typeface="Consolas" pitchFamily="34" charset="-120"/>
+              </a:rPr>
+              <a:t>badge,
 </a:t>
             </a:r>
             <a:pPr indent="0" marL="0">
@@ -18847,7 +18882,7 @@
                 <a:ea typeface="Arial" pitchFamily="34" charset="-122"/>
                 <a:cs typeface="Arial" pitchFamily="34" charset="-120"/>
               </a:rPr>
-              <a:t>LIVE CODE  /  1 OF 2</a:t>
+              <a:t>LIVE CODE  /  1 OF 2  ·  AGENTS.JAVA</a:t>
             </a:r>
             <a:endParaRPr lang="en-US" sz="1100" dirty="0"/>
           </a:p>
@@ -18886,7 +18921,7 @@
                 <a:ea typeface="Arial" pitchFamily="34" charset="-122"/>
                 <a:cs typeface="Arial" pitchFamily="34" charset="-120"/>
               </a:rPr>
-              <a:t>One interface. </a:t>
+              <a:t>A worker is an </a:t>
             </a:r>
             <a:pPr indent="0" marL="0">
               <a:buNone/>
@@ -18900,7 +18935,7 @@
                 <a:ea typeface="Arial" pitchFamily="34" charset="-122"/>
                 <a:cs typeface="Arial" pitchFamily="34" charset="-120"/>
               </a:rPr>
-              <a:t>Every worker.</a:t>
+              <a:t>interface.</a:t>
             </a:r>
             <a:endParaRPr lang="en-US" sz="2700" dirty="0"/>
           </a:p>
@@ -18976,7 +19011,7 @@
                 <a:ea typeface="Consolas" pitchFamily="34" charset="-122"/>
                 <a:cs typeface="Consolas" pitchFamily="34" charset="-120"/>
               </a:rPr>
-              <a:t>// No implementation. The annotations are the program.</a:t>
+              <a:t>// Agents.java, verbatim. There is no implementation anywhere.</a:t>
             </a:r>
             <a:endParaRPr lang="en-US" sz="1550" dirty="0"/>
           </a:p>
@@ -18996,7 +19031,7 @@
                 <a:ea typeface="Consolas" pitchFamily="34" charset="-122"/>
                 <a:cs typeface="Consolas" pitchFamily="34" charset="-120"/>
               </a:rPr>
-              <a:t>interface </a:t>
+              <a:t>public interface </a:t>
             </a:r>
             <a:pPr indent="0" marL="0">
               <a:lnSpc>
@@ -19013,7 +19048,7 @@
                 <a:ea typeface="Consolas" pitchFamily="34" charset="-122"/>
                 <a:cs typeface="Consolas" pitchFamily="34" charset="-120"/>
               </a:rPr>
-              <a:t>Worker</a:t>
+              <a:t>Namer</a:t>
             </a:r>
             <a:pPr indent="0" marL="0">
               <a:lnSpc>
@@ -19041,9 +19076,17 @@
               </a:lnSpc>
               <a:buNone/>
             </a:pPr>
-            <a:endParaRPr lang="en-US" sz="1550" dirty="0"/>
-          </a:p>
-          <a:p>
+            <a:r>
+              <a:rPr lang="en-US" sz="1550" dirty="0">
+                <a:solidFill>
+                  <a:srgbClr val="FBBF24"/>
+                </a:solidFill>
+                <a:latin typeface="Consolas" pitchFamily="34" charset="0"/>
+                <a:ea typeface="Consolas" pitchFamily="34" charset="-122"/>
+                <a:cs typeface="Consolas" pitchFamily="34" charset="-120"/>
+              </a:rPr>
+              <a:t>  @SystemMessage</a:t>
+            </a:r>
             <a:pPr indent="0" marL="0">
               <a:lnSpc>
                 <a:spcPts val="3000"/>
@@ -19053,14 +19096,17 @@
             <a:r>
               <a:rPr lang="en-US" sz="1550" dirty="0">
                 <a:solidFill>
-                  <a:srgbClr val="FBBF24"/>
+                  <a:srgbClr val="E6E9F0"/>
                 </a:solidFill>
                 <a:latin typeface="Consolas" pitchFamily="34" charset="0"/>
                 <a:ea typeface="Consolas" pitchFamily="34" charset="-122"/>
                 <a:cs typeface="Consolas" pitchFamily="34" charset="-120"/>
               </a:rPr>
-              <a:t>  @SystemMessage</a:t>
-            </a:r>
+              <a:t>("""</a:t>
+            </a:r>
+            <a:endParaRPr lang="en-US" sz="1550" dirty="0"/>
+          </a:p>
+          <a:p>
             <a:pPr indent="0" marL="0">
               <a:lnSpc>
                 <a:spcPts val="3000"/>
@@ -19070,14 +19116,17 @@
             <a:r>
               <a:rPr lang="en-US" sz="1550" dirty="0">
                 <a:solidFill>
-                  <a:srgbClr val="E6E9F0"/>
+                  <a:srgbClr val="6EE7D8"/>
                 </a:solidFill>
                 <a:latin typeface="Consolas" pitchFamily="34" charset="0"/>
                 <a:ea typeface="Consolas" pitchFamily="34" charset="-122"/>
                 <a:cs typeface="Consolas" pitchFamily="34" charset="-120"/>
               </a:rPr>
-              <a:t>(</a:t>
-            </a:r>
+              <a:t>      You name products. Given an idea, give ONE name of 4 to 14</a:t>
+            </a:r>
+            <a:endParaRPr lang="en-US" sz="1550" dirty="0"/>
+          </a:p>
+          <a:p>
             <a:pPr indent="0" marL="0">
               <a:lnSpc>
                 <a:spcPts val="3000"/>
@@ -19093,14 +19142,28 @@
                 <a:ea typeface="Consolas" pitchFamily="34" charset="-122"/>
                 <a:cs typeface="Consolas" pitchFamily="34" charset="-120"/>
               </a:rPr>
-              <a:t>"You are a {{role}}.</a:t>
-            </a:r>
+              <a:t>      letters, easy to say out loud, one or two words.</a:t>
+            </a:r>
+            <a:endParaRPr lang="en-US" sz="1550" dirty="0"/>
+          </a:p>
+          <a:p>
             <a:pPr indent="0" marL="0">
               <a:lnSpc>
                 <a:spcPts val="3000"/>
               </a:lnSpc>
               <a:buNone/>
             </a:pPr>
+            <a:r>
+              <a:rPr lang="en-US" sz="1550" dirty="0">
+                <a:solidFill>
+                  <a:srgbClr val="6EE7D8"/>
+                </a:solidFill>
+                <a:latin typeface="Consolas" pitchFamily="34" charset="0"/>
+                <a:ea typeface="Consolas" pitchFamily="34" charset="-122"/>
+                <a:cs typeface="Consolas" pitchFamily="34" charset="-120"/>
+              </a:rPr>
+              <a:t>      Never end the name with ly, ify, io, Hub, Kit, Pro, App.</a:t>
+            </a:r>
             <a:endParaRPr lang="en-US" sz="1550" dirty="0"/>
           </a:p>
           <a:p>
@@ -19119,8 +19182,11 @@
                 <a:ea typeface="Consolas" pitchFamily="34" charset="-122"/>
                 <a:cs typeface="Consolas" pitchFamily="34" charset="-120"/>
               </a:rPr>
-              <a:t>                 Answer only from that view."</a:t>
-            </a:r>
+              <a:t>      Name it after the moment the product matters. A bin rota</a:t>
+            </a:r>
+            <a:endParaRPr lang="en-US" sz="1550" dirty="0"/>
+          </a:p>
+          <a:p>
             <a:pPr indent="0" marL="0">
               <a:lnSpc>
                 <a:spcPts val="3000"/>
@@ -19130,13 +19196,13 @@
             <a:r>
               <a:rPr lang="en-US" sz="1550" dirty="0">
                 <a:solidFill>
-                  <a:srgbClr val="E6E9F0"/>
+                  <a:srgbClr val="6EE7D8"/>
                 </a:solidFill>
                 <a:latin typeface="Consolas" pitchFamily="34" charset="0"/>
                 <a:ea typeface="Consolas" pitchFamily="34" charset="-122"/>
                 <a:cs typeface="Consolas" pitchFamily="34" charset="-120"/>
               </a:rPr>
-              <a:t>)</a:t>
+              <a:t>      is called Wednesday. A braai timer is called Coalfall.</a:t>
             </a:r>
             <a:endParaRPr lang="en-US" sz="1550" dirty="0"/>
           </a:p>
@@ -19150,13 +19216,13 @@
             <a:r>
               <a:rPr lang="en-US" sz="1550" dirty="0">
                 <a:solidFill>
-                  <a:srgbClr val="FBBF24"/>
+                  <a:srgbClr val="E6E9F0"/>
                 </a:solidFill>
                 <a:latin typeface="Consolas" pitchFamily="34" charset="0"/>
                 <a:ea typeface="Consolas" pitchFamily="34" charset="-122"/>
                 <a:cs typeface="Consolas" pitchFamily="34" charset="-120"/>
               </a:rPr>
-              <a:t>  @UserMessage</a:t>
+              <a:t>      """</a:t>
             </a:r>
             <a:pPr indent="0" marL="0">
               <a:lnSpc>
@@ -19173,8 +19239,11 @@
                 <a:ea typeface="Consolas" pitchFamily="34" charset="-122"/>
                 <a:cs typeface="Consolas" pitchFamily="34" charset="-120"/>
               </a:rPr>
-              <a:t>(</a:t>
-            </a:r>
+              <a:t>)</a:t>
+            </a:r>
+            <a:endParaRPr lang="en-US" sz="1550" dirty="0"/>
+          </a:p>
+          <a:p>
             <a:pPr indent="0" marL="0">
               <a:lnSpc>
                 <a:spcPts val="3000"/>
@@ -19184,13 +19253,13 @@
             <a:r>
               <a:rPr lang="en-US" sz="1550" dirty="0">
                 <a:solidFill>
-                  <a:srgbClr val="6EE7D8"/>
+                  <a:srgbClr val="FBBF24"/>
                 </a:solidFill>
                 <a:latin typeface="Consolas" pitchFamily="34" charset="0"/>
                 <a:ea typeface="Consolas" pitchFamily="34" charset="-122"/>
                 <a:cs typeface="Consolas" pitchFamily="34" charset="-120"/>
               </a:rPr>
-              <a:t>"{{task}}"</a:t>
+              <a:t>  @UserMessage</a:t>
             </a:r>
             <a:pPr indent="0" marL="0">
               <a:lnSpc>
@@ -19207,11 +19276,8 @@
                 <a:ea typeface="Consolas" pitchFamily="34" charset="-122"/>
                 <a:cs typeface="Consolas" pitchFamily="34" charset="-120"/>
               </a:rPr>
-              <a:t>)</a:t>
-            </a:r>
-            <a:endParaRPr lang="en-US" sz="1550" dirty="0"/>
-          </a:p>
-          <a:p>
+              <a:t>(</a:t>
+            </a:r>
             <a:pPr indent="0" marL="0">
               <a:lnSpc>
                 <a:spcPts val="3000"/>
@@ -19221,13 +19287,13 @@
             <a:r>
               <a:rPr lang="en-US" sz="1550" dirty="0">
                 <a:solidFill>
-                  <a:srgbClr val="7DD3FC"/>
+                  <a:srgbClr val="6EE7D8"/>
                 </a:solidFill>
                 <a:latin typeface="Consolas" pitchFamily="34" charset="0"/>
                 <a:ea typeface="Consolas" pitchFamily="34" charset="-122"/>
                 <a:cs typeface="Consolas" pitchFamily="34" charset="-120"/>
               </a:rPr>
-              <a:t>  String </a:t>
+              <a:t>"Product idea: {{it}}"</a:t>
             </a:r>
             <a:pPr indent="0" marL="0">
               <a:lnSpc>
@@ -19244,8 +19310,11 @@
                 <a:ea typeface="Consolas" pitchFamily="34" charset="-122"/>
                 <a:cs typeface="Consolas" pitchFamily="34" charset="-120"/>
               </a:rPr>
-              <a:t>work(</a:t>
-            </a:r>
+              <a:t>)</a:t>
+            </a:r>
+            <a:endParaRPr lang="en-US" sz="1550" dirty="0"/>
+          </a:p>
+          <a:p>
             <a:pPr indent="0" marL="0">
               <a:lnSpc>
                 <a:spcPts val="3000"/>
@@ -19255,13 +19324,13 @@
             <a:r>
               <a:rPr lang="en-US" sz="1550" dirty="0">
                 <a:solidFill>
-                  <a:srgbClr val="FBBF24"/>
+                  <a:srgbClr val="7DD3FC"/>
                 </a:solidFill>
                 <a:latin typeface="Consolas" pitchFamily="34" charset="0"/>
                 <a:ea typeface="Consolas" pitchFamily="34" charset="-122"/>
                 <a:cs typeface="Consolas" pitchFamily="34" charset="-120"/>
               </a:rPr>
-              <a:t>@V</a:t>
+              <a:t>  String </a:t>
             </a:r>
             <a:pPr indent="0" marL="0">
               <a:lnSpc>
@@ -19278,61 +19347,7 @@
                 <a:ea typeface="Consolas" pitchFamily="34" charset="-122"/>
                 <a:cs typeface="Consolas" pitchFamily="34" charset="-120"/>
               </a:rPr>
-              <a:t>("role") String role,</a:t>
-            </a:r>
-            <a:endParaRPr lang="en-US" sz="1550" dirty="0"/>
-          </a:p>
-          <a:p>
-            <a:pPr indent="0" marL="0">
-              <a:lnSpc>
-                <a:spcPts val="3000"/>
-              </a:lnSpc>
-              <a:buNone/>
-            </a:pPr>
-            <a:r>
-              <a:rPr lang="en-US" sz="1550" dirty="0">
-                <a:solidFill>
-                  <a:srgbClr val="E6E9F0"/>
-                </a:solidFill>
-                <a:latin typeface="Consolas" pitchFamily="34" charset="0"/>
-                <a:ea typeface="Consolas" pitchFamily="34" charset="-122"/>
-                <a:cs typeface="Consolas" pitchFamily="34" charset="-120"/>
-              </a:rPr>
-              <a:t>              </a:t>
-            </a:r>
-            <a:pPr indent="0" marL="0">
-              <a:lnSpc>
-                <a:spcPts val="3000"/>
-              </a:lnSpc>
-              <a:buNone/>
-            </a:pPr>
-            <a:r>
-              <a:rPr lang="en-US" sz="1550" dirty="0">
-                <a:solidFill>
-                  <a:srgbClr val="FBBF24"/>
-                </a:solidFill>
-                <a:latin typeface="Consolas" pitchFamily="34" charset="0"/>
-                <a:ea typeface="Consolas" pitchFamily="34" charset="-122"/>
-                <a:cs typeface="Consolas" pitchFamily="34" charset="-120"/>
-              </a:rPr>
-              <a:t>@V</a:t>
-            </a:r>
-            <a:pPr indent="0" marL="0">
-              <a:lnSpc>
-                <a:spcPts val="3000"/>
-              </a:lnSpc>
-              <a:buNone/>
-            </a:pPr>
-            <a:r>
-              <a:rPr lang="en-US" sz="1550" dirty="0">
-                <a:solidFill>
-                  <a:srgbClr val="E6E9F0"/>
-                </a:solidFill>
-                <a:latin typeface="Consolas" pitchFamily="34" charset="0"/>
-                <a:ea typeface="Consolas" pitchFamily="34" charset="-122"/>
-                <a:cs typeface="Consolas" pitchFamily="34" charset="-120"/>
-              </a:rPr>
-              <a:t>("task") String task);</a:t>
+              <a:t>name(String idea);</a:t>
             </a:r>
             <a:endParaRPr lang="en-US" sz="1550" dirty="0"/>
           </a:p>
@@ -19423,7 +19438,7 @@
                 <a:ea typeface="Arial" pitchFamily="34" charset="-122"/>
                 <a:cs typeface="Arial" pitchFamily="34" charset="-120"/>
               </a:rPr>
-              <a:t>LIVE CODE  /  2 OF 2</a:t>
+              <a:t>LIVE CODE  /  2 OF 2  ·  CREWSERVICE.JAVA</a:t>
             </a:r>
             <a:endParaRPr lang="en-US" sz="1100" dirty="0"/>
           </a:p>
@@ -19462,7 +19477,7 @@
                 <a:ea typeface="Arial" pitchFamily="34" charset="-122"/>
                 <a:cs typeface="Arial" pitchFamily="34" charset="-120"/>
               </a:rPr>
-              <a:t>Plan, dispatch, </a:t>
+              <a:t>Four workers, </a:t>
             </a:r>
             <a:pPr indent="0" marL="0">
               <a:buNone/>
@@ -19476,7 +19491,7 @@
                 <a:ea typeface="Arial" pitchFamily="34" charset="-122"/>
                 <a:cs typeface="Arial" pitchFamily="34" charset="-120"/>
               </a:rPr>
-              <a:t>synthesize.</a:t>
+              <a:t>one line each.</a:t>
             </a:r>
             <a:endParaRPr lang="en-US" sz="2700" dirty="0"/>
           </a:p>
@@ -19546,14 +19561,17 @@
             <a:r>
               <a:rPr lang="en-US" sz="1550" dirty="0">
                 <a:solidFill>
-                  <a:srgbClr val="7DD3FC"/>
+                  <a:srgbClr val="6B7280"/>
                 </a:solidFill>
                 <a:latin typeface="Consolas" pitchFamily="34" charset="0"/>
                 <a:ea typeface="Consolas" pitchFamily="34" charset="-122"/>
                 <a:cs typeface="Consolas" pitchFamily="34" charset="-120"/>
               </a:rPr>
-              <a:t>Plan</a:t>
-            </a:r>
+              <a:t>// CrewService.runCrew, verbatim. They all start at once.</a:t>
+            </a:r>
+            <a:endParaRPr lang="en-US" sz="1550" dirty="0"/>
+          </a:p>
+          <a:p>
             <a:pPr indent="0" marL="0">
               <a:lnSpc>
                 <a:spcPts val="3000"/>
@@ -19563,13 +19581,13 @@
             <a:r>
               <a:rPr lang="en-US" sz="1550" dirty="0">
                 <a:solidFill>
-                  <a:srgbClr val="E6E9F0"/>
+                  <a:srgbClr val="7DD3FC"/>
                 </a:solidFill>
                 <a:latin typeface="Consolas" pitchFamily="34" charset="0"/>
                 <a:ea typeface="Consolas" pitchFamily="34" charset="-122"/>
                 <a:cs typeface="Consolas" pitchFamily="34" charset="-120"/>
               </a:rPr>
-              <a:t> plan = planner.assemble(prompt);</a:t>
+              <a:t>Future&lt;String&gt; </a:t>
             </a:r>
             <a:pPr indent="0" marL="0">
               <a:lnSpc>
@@ -19580,13 +19598,13 @@
             <a:r>
               <a:rPr lang="en-US" sz="1550" dirty="0">
                 <a:solidFill>
-                  <a:srgbClr val="6B7280"/>
+                  <a:srgbClr val="E6E9F0"/>
                 </a:solidFill>
                 <a:latin typeface="Consolas" pitchFamily="34" charset="0"/>
                 <a:ea typeface="Consolas" pitchFamily="34" charset="-122"/>
                 <a:cs typeface="Consolas" pitchFamily="34" charset="-120"/>
               </a:rPr>
-              <a:t>   // 1 prompt -&gt; a crew</a:t>
+              <a:t>tensionF = pool.submit(() -&gt; safeInsight(stage(), idea.text));</a:t>
             </a:r>
             <a:endParaRPr lang="en-US" sz="1550" dirty="0"/>
           </a:p>
@@ -19597,9 +19615,17 @@
               </a:lnSpc>
               <a:buNone/>
             </a:pPr>
-            <a:endParaRPr lang="en-US" sz="1550" dirty="0"/>
-          </a:p>
-          <a:p>
+            <a:r>
+              <a:rPr lang="en-US" sz="1550" dirty="0">
+                <a:solidFill>
+                  <a:srgbClr val="7DD3FC"/>
+                </a:solidFill>
+                <a:latin typeface="Consolas" pitchFamily="34" charset="0"/>
+                <a:ea typeface="Consolas" pitchFamily="34" charset="-122"/>
+                <a:cs typeface="Consolas" pitchFamily="34" charset="-120"/>
+              </a:rPr>
+              <a:t>Future&lt;String&gt; </a:t>
+            </a:r>
             <a:pPr indent="0" marL="0">
               <a:lnSpc>
                 <a:spcPts val="3000"/>
@@ -19609,14 +19635,17 @@
             <a:r>
               <a:rPr lang="en-US" sz="1550" dirty="0">
                 <a:solidFill>
-                  <a:srgbClr val="C4B5FD"/>
+                  <a:srgbClr val="E6E9F0"/>
                 </a:solidFill>
                 <a:latin typeface="Consolas" pitchFamily="34" charset="0"/>
                 <a:ea typeface="Consolas" pitchFamily="34" charset="-122"/>
                 <a:cs typeface="Consolas" pitchFamily="34" charset="-120"/>
               </a:rPr>
-              <a:t>var</a:t>
-            </a:r>
+              <a:t>factsF   = pool.submit(() -&gt; safeFacts(stage(), idea.text));</a:t>
+            </a:r>
+            <a:endParaRPr lang="en-US" sz="1550" dirty="0"/>
+          </a:p>
+          <a:p>
             <a:pPr indent="0" marL="0">
               <a:lnSpc>
                 <a:spcPts val="3000"/>
@@ -19626,13 +19655,13 @@
             <a:r>
               <a:rPr lang="en-US" sz="1550" dirty="0">
                 <a:solidFill>
-                  <a:srgbClr val="E6E9F0"/>
+                  <a:srgbClr val="7DD3FC"/>
                 </a:solidFill>
                 <a:latin typeface="Consolas" pitchFamily="34" charset="0"/>
                 <a:ea typeface="Consolas" pitchFamily="34" charset="-122"/>
                 <a:cs typeface="Consolas" pitchFamily="34" charset="-120"/>
               </a:rPr>
-              <a:t> notes = </a:t>
+              <a:t>Future&lt;String&gt; </a:t>
             </a:r>
             <a:pPr indent="0" marL="0">
               <a:lnSpc>
@@ -19643,14 +19672,17 @@
             <a:r>
               <a:rPr lang="en-US" sz="1550" dirty="0">
                 <a:solidFill>
-                  <a:srgbClr val="C4B5FD"/>
+                  <a:srgbClr val="E6E9F0"/>
                 </a:solidFill>
                 <a:latin typeface="Consolas" pitchFamily="34" charset="0"/>
                 <a:ea typeface="Consolas" pitchFamily="34" charset="-122"/>
                 <a:cs typeface="Consolas" pitchFamily="34" charset="-120"/>
               </a:rPr>
-              <a:t>new</a:t>
-            </a:r>
+              <a:t>nameF    = pool.submit(() -&gt; safeName(stage(), idea.text));</a:t>
+            </a:r>
+            <a:endParaRPr lang="en-US" sz="1550" dirty="0"/>
+          </a:p>
+          <a:p>
             <a:pPr indent="0" marL="0">
               <a:lnSpc>
                 <a:spcPts val="3000"/>
@@ -19660,17 +19692,14 @@
             <a:r>
               <a:rPr lang="en-US" sz="1550" dirty="0">
                 <a:solidFill>
-                  <a:srgbClr val="E6E9F0"/>
+                  <a:srgbClr val="7DD3FC"/>
                 </a:solidFill>
                 <a:latin typeface="Consolas" pitchFamily="34" charset="0"/>
                 <a:ea typeface="Consolas" pitchFamily="34" charset="-122"/>
                 <a:cs typeface="Consolas" pitchFamily="34" charset="-120"/>
               </a:rPr>
-              <a:t> StringBuilder();</a:t>
-            </a:r>
-            <a:endParaRPr lang="en-US" sz="1550" dirty="0"/>
-          </a:p>
-          <a:p>
+              <a:t>Future&lt;Palette&gt; </a:t>
+            </a:r>
             <a:pPr indent="0" marL="0">
               <a:lnSpc>
                 <a:spcPts val="3000"/>
@@ -19680,31 +19709,46 @@
             <a:r>
               <a:rPr lang="en-US" sz="1550" dirty="0">
                 <a:solidFill>
-                  <a:srgbClr val="C4B5FD"/>
+                  <a:srgbClr val="E6E9F0"/>
                 </a:solidFill>
                 <a:latin typeface="Consolas" pitchFamily="34" charset="0"/>
                 <a:ea typeface="Consolas" pitchFamily="34" charset="-122"/>
                 <a:cs typeface="Consolas" pitchFamily="34" charset="-120"/>
               </a:rPr>
-              <a:t>for</a:t>
-            </a:r>
+              <a:t>paletteF = pool.submit(() -&gt; safePalette(stage(), idea.text));</a:t>
+            </a:r>
+            <a:endParaRPr lang="en-US" sz="1550" dirty="0"/>
+          </a:p>
+          <a:p>
             <a:pPr indent="0" marL="0">
               <a:lnSpc>
                 <a:spcPts val="3000"/>
               </a:lnSpc>
               <a:buNone/>
             </a:pPr>
+            <a:endParaRPr lang="en-US" sz="1550" dirty="0"/>
+          </a:p>
+          <a:p>
+            <a:pPr indent="0" marL="0">
+              <a:lnSpc>
+                <a:spcPts val="3000"/>
+              </a:lnSpc>
+              <a:buNone/>
+            </a:pPr>
             <a:r>
               <a:rPr lang="en-US" sz="1550" dirty="0">
                 <a:solidFill>
-                  <a:srgbClr val="E6E9F0"/>
+                  <a:srgbClr val="6B7280"/>
                 </a:solidFill>
                 <a:latin typeface="Consolas" pitchFamily="34" charset="0"/>
                 <a:ea typeface="Consolas" pitchFamily="34" charset="-122"/>
                 <a:cs typeface="Consolas" pitchFamily="34" charset="-120"/>
               </a:rPr>
-              <a:t> (</a:t>
-            </a:r>
+              <a:t>// the namer lands first, so its result unblocks three others</a:t>
+            </a:r>
+            <a:endParaRPr lang="en-US" sz="1550" dirty="0"/>
+          </a:p>
+          <a:p>
             <a:pPr indent="0" marL="0">
               <a:lnSpc>
                 <a:spcPts val="3000"/>
@@ -19714,13 +19758,13 @@
             <a:r>
               <a:rPr lang="en-US" sz="1550" dirty="0">
                 <a:solidFill>
-                  <a:srgbClr val="C4B5FD"/>
+                  <a:srgbClr val="7DD3FC"/>
                 </a:solidFill>
                 <a:latin typeface="Consolas" pitchFamily="34" charset="0"/>
                 <a:ea typeface="Consolas" pitchFamily="34" charset="-122"/>
                 <a:cs typeface="Consolas" pitchFamily="34" charset="-120"/>
               </a:rPr>
-              <a:t>var</a:t>
+              <a:t>String </a:t>
             </a:r>
             <a:pPr indent="0" marL="0">
               <a:lnSpc>
@@ -19737,8 +19781,11 @@
                 <a:ea typeface="Consolas" pitchFamily="34" charset="-122"/>
                 <a:cs typeface="Consolas" pitchFamily="34" charset="-120"/>
               </a:rPr>
-              <a:t> a : plan.crew()) {</a:t>
-            </a:r>
+              <a:t>productName = nameF.get();</a:t>
+            </a:r>
+            <a:endParaRPr lang="en-US" sz="1550" dirty="0"/>
+          </a:p>
+          <a:p>
             <a:pPr indent="0" marL="0">
               <a:lnSpc>
                 <a:spcPts val="3000"/>
@@ -19748,17 +19795,14 @@
             <a:r>
               <a:rPr lang="en-US" sz="1550" dirty="0">
                 <a:solidFill>
-                  <a:srgbClr val="6B7280"/>
+                  <a:srgbClr val="7DD3FC"/>
                 </a:solidFill>
                 <a:latin typeface="Consolas" pitchFamily="34" charset="0"/>
                 <a:ea typeface="Consolas" pitchFamily="34" charset="-122"/>
                 <a:cs typeface="Consolas" pitchFamily="34" charset="-120"/>
               </a:rPr>
-              <a:t>        // fan out</a:t>
-            </a:r>
-            <a:endParaRPr lang="en-US" sz="1550" dirty="0"/>
-          </a:p>
-          <a:p>
+              <a:t>Copy </a:t>
+            </a:r>
             <a:pPr indent="0" marL="0">
               <a:lnSpc>
                 <a:spcPts val="3000"/>
@@ -19774,11 +19818,8 @@
                 <a:ea typeface="Consolas" pitchFamily="34" charset="-122"/>
                 <a:cs typeface="Consolas" pitchFamily="34" charset="-120"/>
               </a:rPr>
-              <a:t>    String answer = worker.work(a.role(), a.task());</a:t>
-            </a:r>
-            <a:endParaRPr lang="en-US" sz="1550" dirty="0"/>
-          </a:p>
-          <a:p>
+              <a:t>copy = copyF.get();</a:t>
+            </a:r>
             <a:pPr indent="0" marL="0">
               <a:lnSpc>
                 <a:spcPts val="3000"/>
@@ -19788,96 +19829,13 @@
             <a:r>
               <a:rPr lang="en-US" sz="1550" dirty="0">
                 <a:solidFill>
-                  <a:srgbClr val="E6E9F0"/>
+                  <a:srgbClr val="6B7280"/>
                 </a:solidFill>
                 <a:latin typeface="Consolas" pitchFamily="34" charset="0"/>
                 <a:ea typeface="Consolas" pitchFamily="34" charset="-122"/>
                 <a:cs typeface="Consolas" pitchFamily="34" charset="-120"/>
               </a:rPr>
-              <a:t>    notes.append(a.role()).append(answer);</a:t>
-            </a:r>
-            <a:endParaRPr lang="en-US" sz="1550" dirty="0"/>
-          </a:p>
-          <a:p>
-            <a:pPr indent="0" marL="0">
-              <a:lnSpc>
-                <a:spcPts val="3000"/>
-              </a:lnSpc>
-              <a:buNone/>
-            </a:pPr>
-            <a:r>
-              <a:rPr lang="en-US" sz="1550" dirty="0">
-                <a:solidFill>
-                  <a:srgbClr val="E6E9F0"/>
-                </a:solidFill>
-                <a:latin typeface="Consolas" pitchFamily="34" charset="0"/>
-                <a:ea typeface="Consolas" pitchFamily="34" charset="-122"/>
-                <a:cs typeface="Consolas" pitchFamily="34" charset="-120"/>
-              </a:rPr>
-              <a:t>}</a:t>
-            </a:r>
-            <a:endParaRPr lang="en-US" sz="1550" dirty="0"/>
-          </a:p>
-          <a:p>
-            <a:pPr indent="0" marL="0">
-              <a:lnSpc>
-                <a:spcPts val="3000"/>
-              </a:lnSpc>
-              <a:buNone/>
-            </a:pPr>
-            <a:endParaRPr lang="en-US" sz="1550" dirty="0"/>
-          </a:p>
-          <a:p>
-            <a:pPr indent="0" marL="0">
-              <a:lnSpc>
-                <a:spcPts val="3000"/>
-              </a:lnSpc>
-              <a:buNone/>
-            </a:pPr>
-            <a:r>
-              <a:rPr lang="en-US" sz="1550" dirty="0">
-                <a:solidFill>
-                  <a:srgbClr val="7DD3FC"/>
-                </a:solidFill>
-                <a:latin typeface="Consolas" pitchFamily="34" charset="0"/>
-                <a:ea typeface="Consolas" pitchFamily="34" charset="-122"/>
-                <a:cs typeface="Consolas" pitchFamily="34" charset="-120"/>
-              </a:rPr>
-              <a:t>String</a:t>
-            </a:r>
-            <a:pPr indent="0" marL="0">
-              <a:lnSpc>
-                <a:spcPts val="3000"/>
-              </a:lnSpc>
-              <a:buNone/>
-            </a:pPr>
-            <a:r>
-              <a:rPr lang="en-US" sz="1550" dirty="0">
-                <a:solidFill>
-                  <a:srgbClr val="E6E9F0"/>
-                </a:solidFill>
-                <a:latin typeface="Consolas" pitchFamily="34" charset="0"/>
-                <a:ea typeface="Consolas" pitchFamily="34" charset="-122"/>
-                <a:cs typeface="Consolas" pitchFamily="34" charset="-120"/>
-              </a:rPr>
-              <a:t> result = synthesizer.synthesize(notes);</a:t>
-            </a:r>
-            <a:pPr indent="0" marL="0">
-              <a:lnSpc>
-                <a:spcPts val="3000"/>
-              </a:lnSpc>
-              <a:buNone/>
-            </a:pPr>
-            <a:r>
-              <a:rPr lang="en-US" sz="1550" dirty="0">
-                <a:solidFill>
-                  <a:srgbClr val="6B7280"/>
-                </a:solidFill>
-                <a:latin typeface="Consolas" pitchFamily="34" charset="0"/>
-                <a:ea typeface="Consolas" pitchFamily="34" charset="-122"/>
-                <a:cs typeface="Consolas" pitchFamily="34" charset="-120"/>
-              </a:rPr>
-              <a:t>  // fan in</a:t>
+              <a:t>     // written against the tension</a:t>
             </a:r>
             <a:endParaRPr lang="en-US" sz="1550" dirty="0"/>
           </a:p>
